--- a/slides/1_python_slides/9_Object-Oriented Programming - Session 10.pptx
+++ b/slides/1_python_slides/9_Object-Oriented Programming - Session 10.pptx
@@ -413,7 +413,7 @@
             <a:pPr indent="0" algn="r">
               <a:buNone/>
             </a:pPr>
-            <a:fld id="{C748F5AF-4DFF-4F8A-ACE5-9292E286DBC4}" type="slidenum">
+            <a:fld id="{DED2F391-5ED4-4F61-9AE2-8804A3070F65}" type="slidenum">
               <a:rPr lang="en-US" sz="1400" b="0" u="none" strike="noStrike">
                 <a:solidFill>
                   <a:srgbClr val="000000"/>
@@ -471,7 +471,7 @@
         <p:spPr>
           <a:xfrm>
             <a:off x="685800" y="1143000"/>
-            <a:ext cx="5485680" cy="3085560"/>
+            <a:ext cx="5485320" cy="3085200"/>
           </a:xfrm>
           <a:prstGeom prst="rect">
             <a:avLst/>
@@ -494,7 +494,7 @@
         <p:spPr>
           <a:xfrm>
             <a:off x="685800" y="4400640"/>
-            <a:ext cx="5485680" cy="3599640"/>
+            <a:ext cx="5485320" cy="3599280"/>
           </a:xfrm>
           <a:prstGeom prst="rect">
             <a:avLst/>
@@ -536,7 +536,7 @@
         <p:spPr>
           <a:xfrm>
             <a:off x="3884760" y="8685360"/>
-            <a:ext cx="2971080" cy="457920"/>
+            <a:ext cx="2970720" cy="457560"/>
           </a:xfrm>
           <a:prstGeom prst="rect">
             <a:avLst/>
@@ -580,7 +580,7 @@
                 <a:tab pos="0" algn="l"/>
               </a:tabLst>
             </a:pPr>
-            <a:fld id="{4CFC21BE-6D8D-47E3-B865-1FC4216CB751}" type="slidenum">
+            <a:fld id="{3DABF1EF-8966-497E-9551-882332B25E1F}" type="slidenum">
               <a:rPr lang="en-US" sz="1200" b="0" u="none" strike="noStrike">
                 <a:solidFill>
                   <a:schemeClr val="dk1"/>
@@ -638,7 +638,7 @@
         <p:spPr>
           <a:xfrm>
             <a:off x="685800" y="1143000"/>
-            <a:ext cx="5485680" cy="3085560"/>
+            <a:ext cx="5485320" cy="3085200"/>
           </a:xfrm>
           <a:prstGeom prst="rect">
             <a:avLst/>
@@ -661,7 +661,7 @@
         <p:spPr>
           <a:xfrm>
             <a:off x="685800" y="4400640"/>
-            <a:ext cx="5485680" cy="3599640"/>
+            <a:ext cx="5485320" cy="3599280"/>
           </a:xfrm>
           <a:prstGeom prst="rect">
             <a:avLst/>
@@ -703,7 +703,7 @@
         <p:spPr>
           <a:xfrm>
             <a:off x="3884760" y="8685360"/>
-            <a:ext cx="2971080" cy="457920"/>
+            <a:ext cx="2970720" cy="457560"/>
           </a:xfrm>
           <a:prstGeom prst="rect">
             <a:avLst/>
@@ -747,7 +747,7 @@
                 <a:tab pos="0" algn="l"/>
               </a:tabLst>
             </a:pPr>
-            <a:fld id="{64911AD5-2806-4B82-8616-07C59525ACAB}" type="slidenum">
+            <a:fld id="{AE1F9CA0-7B41-42A4-A874-6DDC638670C0}" type="slidenum">
               <a:rPr lang="en-US" sz="1200" b="0" u="none" strike="noStrike">
                 <a:solidFill>
                   <a:schemeClr val="dk1"/>
@@ -805,7 +805,7 @@
         <p:spPr>
           <a:xfrm>
             <a:off x="685800" y="1143000"/>
-            <a:ext cx="5485680" cy="3085560"/>
+            <a:ext cx="5485320" cy="3085200"/>
           </a:xfrm>
           <a:prstGeom prst="rect">
             <a:avLst/>
@@ -828,7 +828,7 @@
         <p:spPr>
           <a:xfrm>
             <a:off x="685800" y="4400640"/>
-            <a:ext cx="5485680" cy="3599640"/>
+            <a:ext cx="5485320" cy="3599280"/>
           </a:xfrm>
           <a:prstGeom prst="rect">
             <a:avLst/>
@@ -870,7 +870,7 @@
         <p:spPr>
           <a:xfrm>
             <a:off x="3884760" y="8685360"/>
-            <a:ext cx="2971080" cy="457920"/>
+            <a:ext cx="2970720" cy="457560"/>
           </a:xfrm>
           <a:prstGeom prst="rect">
             <a:avLst/>
@@ -914,7 +914,7 @@
                 <a:tab pos="0" algn="l"/>
               </a:tabLst>
             </a:pPr>
-            <a:fld id="{50E4D100-7193-40E1-B356-E7544635F9BD}" type="slidenum">
+            <a:fld id="{C971166E-3374-4514-A2EA-94D7C20E696F}" type="slidenum">
               <a:rPr lang="en-US" sz="1200" b="0" u="none" strike="noStrike">
                 <a:solidFill>
                   <a:schemeClr val="dk1"/>
@@ -972,7 +972,7 @@
         <p:spPr>
           <a:xfrm>
             <a:off x="685800" y="1143000"/>
-            <a:ext cx="5485680" cy="3085560"/>
+            <a:ext cx="5485320" cy="3085200"/>
           </a:xfrm>
           <a:prstGeom prst="rect">
             <a:avLst/>
@@ -995,7 +995,7 @@
         <p:spPr>
           <a:xfrm>
             <a:off x="685800" y="4400640"/>
-            <a:ext cx="5485680" cy="3599640"/>
+            <a:ext cx="5485320" cy="3599280"/>
           </a:xfrm>
           <a:prstGeom prst="rect">
             <a:avLst/>
@@ -1037,7 +1037,7 @@
         <p:spPr>
           <a:xfrm>
             <a:off x="3884760" y="8685360"/>
-            <a:ext cx="2971080" cy="457920"/>
+            <a:ext cx="2970720" cy="457560"/>
           </a:xfrm>
           <a:prstGeom prst="rect">
             <a:avLst/>
@@ -1081,7 +1081,7 @@
                 <a:tab pos="0" algn="l"/>
               </a:tabLst>
             </a:pPr>
-            <a:fld id="{698F21C0-2EF0-4541-89DA-32CF4354F6AB}" type="slidenum">
+            <a:fld id="{CA87C4E1-C77B-4277-AA10-9007B5594CE0}" type="slidenum">
               <a:rPr lang="en-US" sz="1200" b="0" u="none" strike="noStrike">
                 <a:solidFill>
                   <a:schemeClr val="dk1"/>
@@ -1139,7 +1139,7 @@
         <p:spPr>
           <a:xfrm>
             <a:off x="685800" y="1143000"/>
-            <a:ext cx="5485680" cy="3085560"/>
+            <a:ext cx="5485320" cy="3085200"/>
           </a:xfrm>
           <a:prstGeom prst="rect">
             <a:avLst/>
@@ -1162,7 +1162,7 @@
         <p:spPr>
           <a:xfrm>
             <a:off x="685800" y="4400640"/>
-            <a:ext cx="5485680" cy="3599640"/>
+            <a:ext cx="5485320" cy="3599280"/>
           </a:xfrm>
           <a:prstGeom prst="rect">
             <a:avLst/>
@@ -1204,7 +1204,7 @@
         <p:spPr>
           <a:xfrm>
             <a:off x="3884760" y="8685360"/>
-            <a:ext cx="2971080" cy="457920"/>
+            <a:ext cx="2970720" cy="457560"/>
           </a:xfrm>
           <a:prstGeom prst="rect">
             <a:avLst/>
@@ -1248,7 +1248,7 @@
                 <a:tab pos="0" algn="l"/>
               </a:tabLst>
             </a:pPr>
-            <a:fld id="{BBA7B513-E592-44B2-B6A0-26BC7146FC84}" type="slidenum">
+            <a:fld id="{D72858A2-D267-4375-9EA5-1263061316C8}" type="slidenum">
               <a:rPr lang="en-US" sz="1200" b="0" u="none" strike="noStrike">
                 <a:solidFill>
                   <a:schemeClr val="dk1"/>
@@ -1306,7 +1306,7 @@
         <p:spPr>
           <a:xfrm>
             <a:off x="685800" y="1143000"/>
-            <a:ext cx="5485680" cy="3085560"/>
+            <a:ext cx="5485320" cy="3085200"/>
           </a:xfrm>
           <a:prstGeom prst="rect">
             <a:avLst/>
@@ -1329,7 +1329,7 @@
         <p:spPr>
           <a:xfrm>
             <a:off x="685800" y="4400640"/>
-            <a:ext cx="5485680" cy="3599640"/>
+            <a:ext cx="5485320" cy="3599280"/>
           </a:xfrm>
           <a:prstGeom prst="rect">
             <a:avLst/>
@@ -1371,7 +1371,7 @@
         <p:spPr>
           <a:xfrm>
             <a:off x="3884760" y="8685360"/>
-            <a:ext cx="2971080" cy="457920"/>
+            <a:ext cx="2970720" cy="457560"/>
           </a:xfrm>
           <a:prstGeom prst="rect">
             <a:avLst/>
@@ -1415,7 +1415,7 @@
                 <a:tab pos="0" algn="l"/>
               </a:tabLst>
             </a:pPr>
-            <a:fld id="{461C9AD1-3094-4D26-8BB2-3296EA1D47EB}" type="slidenum">
+            <a:fld id="{0E9396A6-4F05-4ED3-A2B7-6FA64CC8703F}" type="slidenum">
               <a:rPr lang="en-US" sz="1200" b="0" u="none" strike="noStrike">
                 <a:solidFill>
                   <a:schemeClr val="dk1"/>
@@ -1473,7 +1473,7 @@
         <p:spPr>
           <a:xfrm>
             <a:off x="685800" y="1143000"/>
-            <a:ext cx="5485680" cy="3085560"/>
+            <a:ext cx="5485320" cy="3085200"/>
           </a:xfrm>
           <a:prstGeom prst="rect">
             <a:avLst/>
@@ -1496,7 +1496,7 @@
         <p:spPr>
           <a:xfrm>
             <a:off x="685800" y="4400640"/>
-            <a:ext cx="5485680" cy="3599640"/>
+            <a:ext cx="5485320" cy="3599280"/>
           </a:xfrm>
           <a:prstGeom prst="rect">
             <a:avLst/>
@@ -1538,7 +1538,7 @@
         <p:spPr>
           <a:xfrm>
             <a:off x="3884760" y="8685360"/>
-            <a:ext cx="2971080" cy="457920"/>
+            <a:ext cx="2970720" cy="457560"/>
           </a:xfrm>
           <a:prstGeom prst="rect">
             <a:avLst/>
@@ -1582,7 +1582,7 @@
                 <a:tab pos="0" algn="l"/>
               </a:tabLst>
             </a:pPr>
-            <a:fld id="{45EE6BBC-7489-447C-86BF-6AFED4A52A4E}" type="slidenum">
+            <a:fld id="{BEC1D821-1A0C-4C5D-8448-184A2282EA8A}" type="slidenum">
               <a:rPr lang="en-US" sz="1200" b="0" u="none" strike="noStrike">
                 <a:solidFill>
                   <a:schemeClr val="dk1"/>
@@ -1640,7 +1640,7 @@
         <p:spPr>
           <a:xfrm>
             <a:off x="685800" y="1143000"/>
-            <a:ext cx="5485680" cy="3085560"/>
+            <a:ext cx="5485320" cy="3085200"/>
           </a:xfrm>
           <a:prstGeom prst="rect">
             <a:avLst/>
@@ -1663,7 +1663,7 @@
         <p:spPr>
           <a:xfrm>
             <a:off x="685800" y="4400640"/>
-            <a:ext cx="5485680" cy="3599640"/>
+            <a:ext cx="5485320" cy="3599280"/>
           </a:xfrm>
           <a:prstGeom prst="rect">
             <a:avLst/>
@@ -1705,7 +1705,7 @@
         <p:spPr>
           <a:xfrm>
             <a:off x="3884760" y="8685360"/>
-            <a:ext cx="2971080" cy="457920"/>
+            <a:ext cx="2970720" cy="457560"/>
           </a:xfrm>
           <a:prstGeom prst="rect">
             <a:avLst/>
@@ -1749,7 +1749,7 @@
                 <a:tab pos="0" algn="l"/>
               </a:tabLst>
             </a:pPr>
-            <a:fld id="{151E3303-F144-4DBA-BC8D-6F675D058DAD}" type="slidenum">
+            <a:fld id="{B21048F1-E6FC-4933-95FE-58B96C8FEFC4}" type="slidenum">
               <a:rPr lang="en-US" sz="1200" b="0" u="none" strike="noStrike">
                 <a:solidFill>
                   <a:schemeClr val="dk1"/>
@@ -1807,7 +1807,7 @@
         <p:spPr>
           <a:xfrm>
             <a:off x="685800" y="1143000"/>
-            <a:ext cx="5485680" cy="3085560"/>
+            <a:ext cx="5485320" cy="3085200"/>
           </a:xfrm>
           <a:prstGeom prst="rect">
             <a:avLst/>
@@ -1830,7 +1830,7 @@
         <p:spPr>
           <a:xfrm>
             <a:off x="685800" y="4400640"/>
-            <a:ext cx="5485680" cy="3599640"/>
+            <a:ext cx="5485320" cy="3599280"/>
           </a:xfrm>
           <a:prstGeom prst="rect">
             <a:avLst/>
@@ -1872,7 +1872,7 @@
         <p:spPr>
           <a:xfrm>
             <a:off x="3884760" y="8685360"/>
-            <a:ext cx="2971080" cy="457920"/>
+            <a:ext cx="2970720" cy="457560"/>
           </a:xfrm>
           <a:prstGeom prst="rect">
             <a:avLst/>
@@ -1916,7 +1916,7 @@
                 <a:tab pos="0" algn="l"/>
               </a:tabLst>
             </a:pPr>
-            <a:fld id="{B1D60D75-0DEF-4289-8219-893ED85C90D0}" type="slidenum">
+            <a:fld id="{0D08BE86-DB4E-409B-AA2D-1A7DF02ACF11}" type="slidenum">
               <a:rPr lang="en-US" sz="1200" b="0" u="none" strike="noStrike">
                 <a:solidFill>
                   <a:schemeClr val="dk1"/>
@@ -1974,7 +1974,7 @@
         <p:spPr>
           <a:xfrm>
             <a:off x="685800" y="1143000"/>
-            <a:ext cx="5485680" cy="3085560"/>
+            <a:ext cx="5485320" cy="3085200"/>
           </a:xfrm>
           <a:prstGeom prst="rect">
             <a:avLst/>
@@ -1997,7 +1997,7 @@
         <p:spPr>
           <a:xfrm>
             <a:off x="685800" y="4400640"/>
-            <a:ext cx="5485680" cy="3599640"/>
+            <a:ext cx="5485320" cy="3599280"/>
           </a:xfrm>
           <a:prstGeom prst="rect">
             <a:avLst/>
@@ -2039,7 +2039,7 @@
         <p:spPr>
           <a:xfrm>
             <a:off x="3884760" y="8685360"/>
-            <a:ext cx="2971080" cy="457920"/>
+            <a:ext cx="2970720" cy="457560"/>
           </a:xfrm>
           <a:prstGeom prst="rect">
             <a:avLst/>
@@ -2083,7 +2083,7 @@
                 <a:tab pos="0" algn="l"/>
               </a:tabLst>
             </a:pPr>
-            <a:fld id="{29DB41C7-6300-4DB3-94B6-7BA3BD02E47B}" type="slidenum">
+            <a:fld id="{CF8289BC-5C35-4691-A006-9A24D375A9A2}" type="slidenum">
               <a:rPr lang="en-US" sz="1200" b="0" u="none" strike="noStrike">
                 <a:solidFill>
                   <a:schemeClr val="dk1"/>
@@ -2141,7 +2141,7 @@
         <p:spPr>
           <a:xfrm>
             <a:off x="685800" y="1143000"/>
-            <a:ext cx="5485680" cy="3085560"/>
+            <a:ext cx="5485320" cy="3085200"/>
           </a:xfrm>
           <a:prstGeom prst="rect">
             <a:avLst/>
@@ -2164,7 +2164,7 @@
         <p:spPr>
           <a:xfrm>
             <a:off x="685800" y="4400640"/>
-            <a:ext cx="5485680" cy="3599640"/>
+            <a:ext cx="5485320" cy="3599280"/>
           </a:xfrm>
           <a:prstGeom prst="rect">
             <a:avLst/>
@@ -2206,7 +2206,7 @@
         <p:spPr>
           <a:xfrm>
             <a:off x="3884760" y="8685360"/>
-            <a:ext cx="2971080" cy="457920"/>
+            <a:ext cx="2970720" cy="457560"/>
           </a:xfrm>
           <a:prstGeom prst="rect">
             <a:avLst/>
@@ -2250,7 +2250,7 @@
                 <a:tab pos="0" algn="l"/>
               </a:tabLst>
             </a:pPr>
-            <a:fld id="{C57695F9-0888-4489-A6BC-4B2F92AE04C5}" type="slidenum">
+            <a:fld id="{AE3FFA6A-BB86-4FBA-9BD1-D07A8E0F6638}" type="slidenum">
               <a:rPr lang="en-US" sz="1200" b="0" u="none" strike="noStrike">
                 <a:solidFill>
                   <a:schemeClr val="dk1"/>
@@ -2308,7 +2308,7 @@
         <p:spPr>
           <a:xfrm>
             <a:off x="685800" y="1143000"/>
-            <a:ext cx="5485680" cy="3085560"/>
+            <a:ext cx="5485320" cy="3085200"/>
           </a:xfrm>
           <a:prstGeom prst="rect">
             <a:avLst/>
@@ -2331,7 +2331,7 @@
         <p:spPr>
           <a:xfrm>
             <a:off x="685800" y="4400640"/>
-            <a:ext cx="5485680" cy="3599640"/>
+            <a:ext cx="5485320" cy="3599280"/>
           </a:xfrm>
           <a:prstGeom prst="rect">
             <a:avLst/>
@@ -2373,7 +2373,7 @@
         <p:spPr>
           <a:xfrm>
             <a:off x="3884760" y="8685360"/>
-            <a:ext cx="2971080" cy="457920"/>
+            <a:ext cx="2970720" cy="457560"/>
           </a:xfrm>
           <a:prstGeom prst="rect">
             <a:avLst/>
@@ -2417,7 +2417,7 @@
                 <a:tab pos="0" algn="l"/>
               </a:tabLst>
             </a:pPr>
-            <a:fld id="{7626EE04-A523-4E48-B195-1E4A48EF4CEB}" type="slidenum">
+            <a:fld id="{5104D941-602B-41EF-A96A-0A76B594E1A5}" type="slidenum">
               <a:rPr lang="en-US" sz="1200" b="0" u="none" strike="noStrike">
                 <a:solidFill>
                   <a:schemeClr val="dk1"/>
@@ -2475,7 +2475,7 @@
         <p:spPr>
           <a:xfrm>
             <a:off x="685800" y="1143000"/>
-            <a:ext cx="5485680" cy="3085560"/>
+            <a:ext cx="5485320" cy="3085200"/>
           </a:xfrm>
           <a:prstGeom prst="rect">
             <a:avLst/>
@@ -2498,7 +2498,7 @@
         <p:spPr>
           <a:xfrm>
             <a:off x="685800" y="4400640"/>
-            <a:ext cx="5485680" cy="3599640"/>
+            <a:ext cx="5485320" cy="3599280"/>
           </a:xfrm>
           <a:prstGeom prst="rect">
             <a:avLst/>
@@ -2540,7 +2540,7 @@
         <p:spPr>
           <a:xfrm>
             <a:off x="3884760" y="8685360"/>
-            <a:ext cx="2971080" cy="457920"/>
+            <a:ext cx="2970720" cy="457560"/>
           </a:xfrm>
           <a:prstGeom prst="rect">
             <a:avLst/>
@@ -2584,7 +2584,7 @@
                 <a:tab pos="0" algn="l"/>
               </a:tabLst>
             </a:pPr>
-            <a:fld id="{1D676FA5-FEE8-4BAA-B4B8-748EBEE59B70}" type="slidenum">
+            <a:fld id="{101BA04D-8FAD-4418-BC38-2E87B9461311}" type="slidenum">
               <a:rPr lang="en-US" sz="1200" b="0" u="none" strike="noStrike">
                 <a:solidFill>
                   <a:schemeClr val="dk1"/>
@@ -2642,7 +2642,7 @@
         <p:spPr>
           <a:xfrm>
             <a:off x="685800" y="1143000"/>
-            <a:ext cx="5485680" cy="3085560"/>
+            <a:ext cx="5485320" cy="3085200"/>
           </a:xfrm>
           <a:prstGeom prst="rect">
             <a:avLst/>
@@ -2665,7 +2665,7 @@
         <p:spPr>
           <a:xfrm>
             <a:off x="685800" y="4400640"/>
-            <a:ext cx="5485680" cy="3599640"/>
+            <a:ext cx="5485320" cy="3599280"/>
           </a:xfrm>
           <a:prstGeom prst="rect">
             <a:avLst/>
@@ -2707,7 +2707,7 @@
         <p:spPr>
           <a:xfrm>
             <a:off x="3884760" y="8685360"/>
-            <a:ext cx="2971080" cy="457920"/>
+            <a:ext cx="2970720" cy="457560"/>
           </a:xfrm>
           <a:prstGeom prst="rect">
             <a:avLst/>
@@ -2751,7 +2751,7 @@
                 <a:tab pos="0" algn="l"/>
               </a:tabLst>
             </a:pPr>
-            <a:fld id="{06BE5188-EC54-42D0-8600-DDA01FBCA8E4}" type="slidenum">
+            <a:fld id="{D9611681-DCDD-4AD4-87B2-D0673C78C53B}" type="slidenum">
               <a:rPr lang="en-US" sz="1200" b="0" u="none" strike="noStrike">
                 <a:solidFill>
                   <a:schemeClr val="dk1"/>
@@ -2809,7 +2809,7 @@
         <p:spPr>
           <a:xfrm>
             <a:off x="685800" y="1143000"/>
-            <a:ext cx="5485680" cy="3085560"/>
+            <a:ext cx="5485320" cy="3085200"/>
           </a:xfrm>
           <a:prstGeom prst="rect">
             <a:avLst/>
@@ -2832,7 +2832,7 @@
         <p:spPr>
           <a:xfrm>
             <a:off x="685800" y="4400640"/>
-            <a:ext cx="5485680" cy="3599640"/>
+            <a:ext cx="5485320" cy="3599280"/>
           </a:xfrm>
           <a:prstGeom prst="rect">
             <a:avLst/>
@@ -2874,7 +2874,7 @@
         <p:spPr>
           <a:xfrm>
             <a:off x="3884760" y="8685360"/>
-            <a:ext cx="2971080" cy="457920"/>
+            <a:ext cx="2970720" cy="457560"/>
           </a:xfrm>
           <a:prstGeom prst="rect">
             <a:avLst/>
@@ -2918,7 +2918,7 @@
                 <a:tab pos="0" algn="l"/>
               </a:tabLst>
             </a:pPr>
-            <a:fld id="{6B7A32C7-DF3A-455C-BF96-86CF2451D9BA}" type="slidenum">
+            <a:fld id="{D66358FD-8F2D-49DC-BFA4-56E9A10F1748}" type="slidenum">
               <a:rPr lang="en-US" sz="1200" b="0" u="none" strike="noStrike">
                 <a:solidFill>
                   <a:schemeClr val="dk1"/>
@@ -2976,7 +2976,7 @@
         <p:spPr>
           <a:xfrm>
             <a:off x="685800" y="1143000"/>
-            <a:ext cx="5485680" cy="3085560"/>
+            <a:ext cx="5485320" cy="3085200"/>
           </a:xfrm>
           <a:prstGeom prst="rect">
             <a:avLst/>
@@ -2999,7 +2999,7 @@
         <p:spPr>
           <a:xfrm>
             <a:off x="685800" y="4400640"/>
-            <a:ext cx="5485680" cy="3599640"/>
+            <a:ext cx="5485320" cy="3599280"/>
           </a:xfrm>
           <a:prstGeom prst="rect">
             <a:avLst/>
@@ -3041,7 +3041,7 @@
         <p:spPr>
           <a:xfrm>
             <a:off x="3884760" y="8685360"/>
-            <a:ext cx="2971080" cy="457920"/>
+            <a:ext cx="2970720" cy="457560"/>
           </a:xfrm>
           <a:prstGeom prst="rect">
             <a:avLst/>
@@ -3085,7 +3085,7 @@
                 <a:tab pos="0" algn="l"/>
               </a:tabLst>
             </a:pPr>
-            <a:fld id="{942B234F-A287-4338-9D58-E77AD23BBAE1}" type="slidenum">
+            <a:fld id="{70D28A31-565C-4F6C-8AB0-5115A52E9013}" type="slidenum">
               <a:rPr lang="en-US" sz="1200" b="0" u="none" strike="noStrike">
                 <a:solidFill>
                   <a:schemeClr val="dk1"/>
@@ -3143,7 +3143,7 @@
         <p:spPr>
           <a:xfrm>
             <a:off x="685800" y="1143000"/>
-            <a:ext cx="5485680" cy="3085560"/>
+            <a:ext cx="5485320" cy="3085200"/>
           </a:xfrm>
           <a:prstGeom prst="rect">
             <a:avLst/>
@@ -3166,7 +3166,7 @@
         <p:spPr>
           <a:xfrm>
             <a:off x="685800" y="4400640"/>
-            <a:ext cx="5485680" cy="3599640"/>
+            <a:ext cx="5485320" cy="3599280"/>
           </a:xfrm>
           <a:prstGeom prst="rect">
             <a:avLst/>
@@ -3208,7 +3208,7 @@
         <p:spPr>
           <a:xfrm>
             <a:off x="3884760" y="8685360"/>
-            <a:ext cx="2971080" cy="457920"/>
+            <a:ext cx="2970720" cy="457560"/>
           </a:xfrm>
           <a:prstGeom prst="rect">
             <a:avLst/>
@@ -3252,7 +3252,7 @@
                 <a:tab pos="0" algn="l"/>
               </a:tabLst>
             </a:pPr>
-            <a:fld id="{F9A774F9-8F03-4733-A5AC-F7B12A12E246}" type="slidenum">
+            <a:fld id="{417730B2-CA6E-4ADC-8AB0-2DC6DC124D76}" type="slidenum">
               <a:rPr lang="en-US" sz="1200" b="0" u="none" strike="noStrike">
                 <a:solidFill>
                   <a:schemeClr val="dk1"/>
@@ -3310,7 +3310,7 @@
         <p:spPr>
           <a:xfrm>
             <a:off x="685800" y="1143000"/>
-            <a:ext cx="5485680" cy="3085560"/>
+            <a:ext cx="5485320" cy="3085200"/>
           </a:xfrm>
           <a:prstGeom prst="rect">
             <a:avLst/>
@@ -3333,7 +3333,7 @@
         <p:spPr>
           <a:xfrm>
             <a:off x="685800" y="4400640"/>
-            <a:ext cx="5485680" cy="3599640"/>
+            <a:ext cx="5485320" cy="3599280"/>
           </a:xfrm>
           <a:prstGeom prst="rect">
             <a:avLst/>
@@ -3375,7 +3375,7 @@
         <p:spPr>
           <a:xfrm>
             <a:off x="3884760" y="8685360"/>
-            <a:ext cx="2971080" cy="457920"/>
+            <a:ext cx="2970720" cy="457560"/>
           </a:xfrm>
           <a:prstGeom prst="rect">
             <a:avLst/>
@@ -3419,7 +3419,7 @@
                 <a:tab pos="0" algn="l"/>
               </a:tabLst>
             </a:pPr>
-            <a:fld id="{A80CAD94-0B48-4FBC-8117-B29852C047DA}" type="slidenum">
+            <a:fld id="{1AA599F0-5B62-4324-A02F-310D96B3BB45}" type="slidenum">
               <a:rPr lang="en-US" sz="1200" b="0" u="none" strike="noStrike">
                 <a:solidFill>
                   <a:schemeClr val="dk1"/>
@@ -3477,7 +3477,7 @@
         <p:spPr>
           <a:xfrm>
             <a:off x="685800" y="1143000"/>
-            <a:ext cx="5485680" cy="3085560"/>
+            <a:ext cx="5485320" cy="3085200"/>
           </a:xfrm>
           <a:prstGeom prst="rect">
             <a:avLst/>
@@ -3500,7 +3500,7 @@
         <p:spPr>
           <a:xfrm>
             <a:off x="685800" y="4400640"/>
-            <a:ext cx="5485680" cy="3599640"/>
+            <a:ext cx="5485320" cy="3599280"/>
           </a:xfrm>
           <a:prstGeom prst="rect">
             <a:avLst/>
@@ -3542,7 +3542,7 @@
         <p:spPr>
           <a:xfrm>
             <a:off x="3884760" y="8685360"/>
-            <a:ext cx="2971080" cy="457920"/>
+            <a:ext cx="2970720" cy="457560"/>
           </a:xfrm>
           <a:prstGeom prst="rect">
             <a:avLst/>
@@ -3586,7 +3586,7 @@
                 <a:tab pos="0" algn="l"/>
               </a:tabLst>
             </a:pPr>
-            <a:fld id="{222A562A-138E-4162-B652-F21B172B361C}" type="slidenum">
+            <a:fld id="{F69F99D8-A1D3-40EA-8A72-A566A2A160FB}" type="slidenum">
               <a:rPr lang="en-US" sz="1200" b="0" u="none" strike="noStrike">
                 <a:solidFill>
                   <a:schemeClr val="dk1"/>
@@ -3644,7 +3644,7 @@
         <p:spPr>
           <a:xfrm>
             <a:off x="685800" y="1143000"/>
-            <a:ext cx="5485680" cy="3085560"/>
+            <a:ext cx="5485320" cy="3085200"/>
           </a:xfrm>
           <a:prstGeom prst="rect">
             <a:avLst/>
@@ -3667,7 +3667,7 @@
         <p:spPr>
           <a:xfrm>
             <a:off x="685800" y="4400640"/>
-            <a:ext cx="5485680" cy="3599640"/>
+            <a:ext cx="5485320" cy="3599280"/>
           </a:xfrm>
           <a:prstGeom prst="rect">
             <a:avLst/>
@@ -3709,7 +3709,7 @@
         <p:spPr>
           <a:xfrm>
             <a:off x="3884760" y="8685360"/>
-            <a:ext cx="2971080" cy="457920"/>
+            <a:ext cx="2970720" cy="457560"/>
           </a:xfrm>
           <a:prstGeom prst="rect">
             <a:avLst/>
@@ -3753,7 +3753,7 @@
                 <a:tab pos="0" algn="l"/>
               </a:tabLst>
             </a:pPr>
-            <a:fld id="{E6F3B885-948B-4EB8-9713-32231FAA40ED}" type="slidenum">
+            <a:fld id="{2308DA3B-7B87-4FBA-981A-3F752B958C06}" type="slidenum">
               <a:rPr lang="en-US" sz="1200" b="0" u="none" strike="noStrike">
                 <a:solidFill>
                   <a:schemeClr val="dk1"/>
@@ -3811,7 +3811,7 @@
         <p:spPr>
           <a:xfrm>
             <a:off x="685800" y="1143000"/>
-            <a:ext cx="5485680" cy="3085560"/>
+            <a:ext cx="5485320" cy="3085200"/>
           </a:xfrm>
           <a:prstGeom prst="rect">
             <a:avLst/>
@@ -3834,7 +3834,7 @@
         <p:spPr>
           <a:xfrm>
             <a:off x="685800" y="4400640"/>
-            <a:ext cx="5485680" cy="3599640"/>
+            <a:ext cx="5485320" cy="3599280"/>
           </a:xfrm>
           <a:prstGeom prst="rect">
             <a:avLst/>
@@ -3876,7 +3876,7 @@
         <p:spPr>
           <a:xfrm>
             <a:off x="3884760" y="8685360"/>
-            <a:ext cx="2971080" cy="457920"/>
+            <a:ext cx="2970720" cy="457560"/>
           </a:xfrm>
           <a:prstGeom prst="rect">
             <a:avLst/>
@@ -3920,7 +3920,7 @@
                 <a:tab pos="0" algn="l"/>
               </a:tabLst>
             </a:pPr>
-            <a:fld id="{3016E327-00C3-473B-B1DC-5533C3E24ED7}" type="slidenum">
+            <a:fld id="{4156BF92-B83A-4196-BFBA-B51F58A99EAA}" type="slidenum">
               <a:rPr lang="en-US" sz="1200" b="0" u="none" strike="noStrike">
                 <a:solidFill>
                   <a:schemeClr val="dk1"/>
@@ -3978,7 +3978,7 @@
         <p:spPr>
           <a:xfrm>
             <a:off x="685800" y="1143000"/>
-            <a:ext cx="5485680" cy="3085560"/>
+            <a:ext cx="5485320" cy="3085200"/>
           </a:xfrm>
           <a:prstGeom prst="rect">
             <a:avLst/>
@@ -4001,7 +4001,7 @@
         <p:spPr>
           <a:xfrm>
             <a:off x="685800" y="4400640"/>
-            <a:ext cx="5485680" cy="3599640"/>
+            <a:ext cx="5485320" cy="3599280"/>
           </a:xfrm>
           <a:prstGeom prst="rect">
             <a:avLst/>
@@ -4043,7 +4043,7 @@
         <p:spPr>
           <a:xfrm>
             <a:off x="3884760" y="8685360"/>
-            <a:ext cx="2971080" cy="457920"/>
+            <a:ext cx="2970720" cy="457560"/>
           </a:xfrm>
           <a:prstGeom prst="rect">
             <a:avLst/>
@@ -4087,7 +4087,7 @@
                 <a:tab pos="0" algn="l"/>
               </a:tabLst>
             </a:pPr>
-            <a:fld id="{CF5FF920-59B5-4A4D-9C88-5F1D4E809185}" type="slidenum">
+            <a:fld id="{5A31BD49-26F5-4579-8253-56D043DD4899}" type="slidenum">
               <a:rPr lang="en-US" sz="1200" b="0" u="none" strike="noStrike">
                 <a:solidFill>
                   <a:schemeClr val="dk1"/>
@@ -4145,7 +4145,7 @@
         <p:spPr>
           <a:xfrm>
             <a:off x="685800" y="1143000"/>
-            <a:ext cx="5485680" cy="3085560"/>
+            <a:ext cx="5485320" cy="3085200"/>
           </a:xfrm>
           <a:prstGeom prst="rect">
             <a:avLst/>
@@ -4168,7 +4168,7 @@
         <p:spPr>
           <a:xfrm>
             <a:off x="685800" y="4400640"/>
-            <a:ext cx="5485680" cy="3599640"/>
+            <a:ext cx="5485320" cy="3599280"/>
           </a:xfrm>
           <a:prstGeom prst="rect">
             <a:avLst/>
@@ -4210,7 +4210,7 @@
         <p:spPr>
           <a:xfrm>
             <a:off x="3884760" y="8685360"/>
-            <a:ext cx="2971080" cy="457920"/>
+            <a:ext cx="2970720" cy="457560"/>
           </a:xfrm>
           <a:prstGeom prst="rect">
             <a:avLst/>
@@ -4254,7 +4254,7 @@
                 <a:tab pos="0" algn="l"/>
               </a:tabLst>
             </a:pPr>
-            <a:fld id="{7DA608E3-B497-4649-99D5-86DCD7DA2390}" type="slidenum">
+            <a:fld id="{40CB92EA-8B7E-44C3-A92C-D08E7E8DFF14}" type="slidenum">
               <a:rPr lang="en-US" sz="1200" b="0" u="none" strike="noStrike">
                 <a:solidFill>
                   <a:schemeClr val="dk1"/>
@@ -4312,7 +4312,7 @@
         <p:spPr>
           <a:xfrm>
             <a:off x="685800" y="1143000"/>
-            <a:ext cx="5485680" cy="3085560"/>
+            <a:ext cx="5485320" cy="3085200"/>
           </a:xfrm>
           <a:prstGeom prst="rect">
             <a:avLst/>
@@ -4335,7 +4335,7 @@
         <p:spPr>
           <a:xfrm>
             <a:off x="685800" y="4400640"/>
-            <a:ext cx="5485680" cy="3599640"/>
+            <a:ext cx="5485320" cy="3599280"/>
           </a:xfrm>
           <a:prstGeom prst="rect">
             <a:avLst/>
@@ -4377,7 +4377,7 @@
         <p:spPr>
           <a:xfrm>
             <a:off x="3884760" y="8685360"/>
-            <a:ext cx="2971080" cy="457920"/>
+            <a:ext cx="2970720" cy="457560"/>
           </a:xfrm>
           <a:prstGeom prst="rect">
             <a:avLst/>
@@ -4421,7 +4421,7 @@
                 <a:tab pos="0" algn="l"/>
               </a:tabLst>
             </a:pPr>
-            <a:fld id="{552CB681-E34C-485D-B7EB-D75624BDB739}" type="slidenum">
+            <a:fld id="{BA78038B-CAF7-4186-A846-0780F97E3EC3}" type="slidenum">
               <a:rPr lang="en-US" sz="1200" b="0" u="none" strike="noStrike">
                 <a:solidFill>
                   <a:schemeClr val="dk1"/>
@@ -4479,7 +4479,7 @@
         <p:spPr>
           <a:xfrm>
             <a:off x="685800" y="1143000"/>
-            <a:ext cx="5485680" cy="3085560"/>
+            <a:ext cx="5485320" cy="3085200"/>
           </a:xfrm>
           <a:prstGeom prst="rect">
             <a:avLst/>
@@ -4502,7 +4502,7 @@
         <p:spPr>
           <a:xfrm>
             <a:off x="685800" y="4400640"/>
-            <a:ext cx="5485680" cy="3599640"/>
+            <a:ext cx="5485320" cy="3599280"/>
           </a:xfrm>
           <a:prstGeom prst="rect">
             <a:avLst/>
@@ -4544,7 +4544,7 @@
         <p:spPr>
           <a:xfrm>
             <a:off x="3884760" y="8685360"/>
-            <a:ext cx="2971080" cy="457920"/>
+            <a:ext cx="2970720" cy="457560"/>
           </a:xfrm>
           <a:prstGeom prst="rect">
             <a:avLst/>
@@ -4588,7 +4588,7 @@
                 <a:tab pos="0" algn="l"/>
               </a:tabLst>
             </a:pPr>
-            <a:fld id="{9EF30F5B-B252-4417-8A26-EB3800BBCD14}" type="slidenum">
+            <a:fld id="{9F22B259-C53C-4EB1-9438-335B74AF0B82}" type="slidenum">
               <a:rPr lang="en-US" sz="1200" b="0" u="none" strike="noStrike">
                 <a:solidFill>
                   <a:schemeClr val="dk1"/>
@@ -4646,7 +4646,7 @@
         <p:spPr>
           <a:xfrm>
             <a:off x="685800" y="1143000"/>
-            <a:ext cx="5485680" cy="3085560"/>
+            <a:ext cx="5485320" cy="3085200"/>
           </a:xfrm>
           <a:prstGeom prst="rect">
             <a:avLst/>
@@ -4669,7 +4669,7 @@
         <p:spPr>
           <a:xfrm>
             <a:off x="685800" y="4400640"/>
-            <a:ext cx="5485680" cy="3599640"/>
+            <a:ext cx="5485320" cy="3599280"/>
           </a:xfrm>
           <a:prstGeom prst="rect">
             <a:avLst/>
@@ -4711,7 +4711,7 @@
         <p:spPr>
           <a:xfrm>
             <a:off x="3884760" y="8685360"/>
-            <a:ext cx="2971080" cy="457920"/>
+            <a:ext cx="2970720" cy="457560"/>
           </a:xfrm>
           <a:prstGeom prst="rect">
             <a:avLst/>
@@ -4755,7 +4755,7 @@
                 <a:tab pos="0" algn="l"/>
               </a:tabLst>
             </a:pPr>
-            <a:fld id="{2CCD0A79-CD35-418F-BB87-343BCC973549}" type="slidenum">
+            <a:fld id="{98FD1A55-9CA3-4665-8FD8-35F8E0206607}" type="slidenum">
               <a:rPr lang="en-US" sz="1200" b="0" u="none" strike="noStrike">
                 <a:solidFill>
                   <a:schemeClr val="dk1"/>
@@ -4813,7 +4813,7 @@
         <p:spPr>
           <a:xfrm>
             <a:off x="685800" y="1143000"/>
-            <a:ext cx="5485680" cy="3085560"/>
+            <a:ext cx="5485320" cy="3085200"/>
           </a:xfrm>
           <a:prstGeom prst="rect">
             <a:avLst/>
@@ -4836,7 +4836,7 @@
         <p:spPr>
           <a:xfrm>
             <a:off x="685800" y="4400640"/>
-            <a:ext cx="5485680" cy="3599640"/>
+            <a:ext cx="5485320" cy="3599280"/>
           </a:xfrm>
           <a:prstGeom prst="rect">
             <a:avLst/>
@@ -4878,7 +4878,7 @@
         <p:spPr>
           <a:xfrm>
             <a:off x="3884760" y="8685360"/>
-            <a:ext cx="2971080" cy="457920"/>
+            <a:ext cx="2970720" cy="457560"/>
           </a:xfrm>
           <a:prstGeom prst="rect">
             <a:avLst/>
@@ -4922,7 +4922,7 @@
                 <a:tab pos="0" algn="l"/>
               </a:tabLst>
             </a:pPr>
-            <a:fld id="{EBEDD5E4-4436-44AF-9E60-3C285AC4C14C}" type="slidenum">
+            <a:fld id="{86133125-AB2E-41C5-ADCF-18A021E4AE21}" type="slidenum">
               <a:rPr lang="en-US" sz="1200" b="0" u="none" strike="noStrike">
                 <a:solidFill>
                   <a:schemeClr val="dk1"/>
@@ -4980,7 +4980,7 @@
         <p:spPr>
           <a:xfrm>
             <a:off x="685800" y="1143000"/>
-            <a:ext cx="5485680" cy="3085560"/>
+            <a:ext cx="5485320" cy="3085200"/>
           </a:xfrm>
           <a:prstGeom prst="rect">
             <a:avLst/>
@@ -5003,7 +5003,7 @@
         <p:spPr>
           <a:xfrm>
             <a:off x="685800" y="4400640"/>
-            <a:ext cx="5485680" cy="3599640"/>
+            <a:ext cx="5485320" cy="3599280"/>
           </a:xfrm>
           <a:prstGeom prst="rect">
             <a:avLst/>
@@ -5045,7 +5045,7 @@
         <p:spPr>
           <a:xfrm>
             <a:off x="3884760" y="8685360"/>
-            <a:ext cx="2971080" cy="457920"/>
+            <a:ext cx="2970720" cy="457560"/>
           </a:xfrm>
           <a:prstGeom prst="rect">
             <a:avLst/>
@@ -5089,7 +5089,7 @@
                 <a:tab pos="0" algn="l"/>
               </a:tabLst>
             </a:pPr>
-            <a:fld id="{5EB17B1D-D1A4-4510-91C1-1E4B871BF687}" type="slidenum">
+            <a:fld id="{726D424E-D23B-43AF-AF11-BB1E03526456}" type="slidenum">
               <a:rPr lang="en-US" sz="1200" b="0" u="none" strike="noStrike">
                 <a:solidFill>
                   <a:schemeClr val="dk1"/>
@@ -5147,7 +5147,7 @@
         <p:spPr>
           <a:xfrm>
             <a:off x="685800" y="1143000"/>
-            <a:ext cx="5485680" cy="3085560"/>
+            <a:ext cx="5485320" cy="3085200"/>
           </a:xfrm>
           <a:prstGeom prst="rect">
             <a:avLst/>
@@ -5170,7 +5170,7 @@
         <p:spPr>
           <a:xfrm>
             <a:off x="685800" y="4400640"/>
-            <a:ext cx="5485680" cy="3599640"/>
+            <a:ext cx="5485320" cy="3599280"/>
           </a:xfrm>
           <a:prstGeom prst="rect">
             <a:avLst/>
@@ -5212,7 +5212,7 @@
         <p:spPr>
           <a:xfrm>
             <a:off x="3884760" y="8685360"/>
-            <a:ext cx="2971080" cy="457920"/>
+            <a:ext cx="2970720" cy="457560"/>
           </a:xfrm>
           <a:prstGeom prst="rect">
             <a:avLst/>
@@ -5256,7 +5256,7 @@
                 <a:tab pos="0" algn="l"/>
               </a:tabLst>
             </a:pPr>
-            <a:fld id="{7A5D36D4-A69B-4708-8AED-394BC5F95B59}" type="slidenum">
+            <a:fld id="{72390AD2-5A5C-43E3-B62B-6B2F6987197D}" type="slidenum">
               <a:rPr lang="en-US" sz="1200" b="0" u="none" strike="noStrike">
                 <a:solidFill>
                   <a:schemeClr val="dk1"/>
@@ -5314,7 +5314,7 @@
         <p:spPr>
           <a:xfrm>
             <a:off x="685800" y="1143000"/>
-            <a:ext cx="5485680" cy="3085560"/>
+            <a:ext cx="5485320" cy="3085200"/>
           </a:xfrm>
           <a:prstGeom prst="rect">
             <a:avLst/>
@@ -5337,7 +5337,7 @@
         <p:spPr>
           <a:xfrm>
             <a:off x="685800" y="4400640"/>
-            <a:ext cx="5485680" cy="3599640"/>
+            <a:ext cx="5485320" cy="3599280"/>
           </a:xfrm>
           <a:prstGeom prst="rect">
             <a:avLst/>
@@ -5379,7 +5379,7 @@
         <p:spPr>
           <a:xfrm>
             <a:off x="3884760" y="8685360"/>
-            <a:ext cx="2971080" cy="457920"/>
+            <a:ext cx="2970720" cy="457560"/>
           </a:xfrm>
           <a:prstGeom prst="rect">
             <a:avLst/>
@@ -5423,7 +5423,7 @@
                 <a:tab pos="0" algn="l"/>
               </a:tabLst>
             </a:pPr>
-            <a:fld id="{A6E9D78A-88E6-4131-92BE-805626C21859}" type="slidenum">
+            <a:fld id="{DB793D5E-D651-4B74-9547-E2076545D825}" type="slidenum">
               <a:rPr lang="en-US" sz="1200" b="0" u="none" strike="noStrike">
                 <a:solidFill>
                   <a:schemeClr val="dk1"/>
@@ -5481,7 +5481,7 @@
         <p:spPr>
           <a:xfrm>
             <a:off x="685800" y="1143000"/>
-            <a:ext cx="5485680" cy="3085560"/>
+            <a:ext cx="5485320" cy="3085200"/>
           </a:xfrm>
           <a:prstGeom prst="rect">
             <a:avLst/>
@@ -5504,7 +5504,7 @@
         <p:spPr>
           <a:xfrm>
             <a:off x="685800" y="4400640"/>
-            <a:ext cx="5485680" cy="3599640"/>
+            <a:ext cx="5485320" cy="3599280"/>
           </a:xfrm>
           <a:prstGeom prst="rect">
             <a:avLst/>
@@ -5546,7 +5546,7 @@
         <p:spPr>
           <a:xfrm>
             <a:off x="3884760" y="8685360"/>
-            <a:ext cx="2971080" cy="457920"/>
+            <a:ext cx="2970720" cy="457560"/>
           </a:xfrm>
           <a:prstGeom prst="rect">
             <a:avLst/>
@@ -5590,7 +5590,7 @@
                 <a:tab pos="0" algn="l"/>
               </a:tabLst>
             </a:pPr>
-            <a:fld id="{5C8B8C53-4230-4BDD-8C7E-9B8EBABC59F4}" type="slidenum">
+            <a:fld id="{C928066B-0C22-4840-9083-FFFA552488CB}" type="slidenum">
               <a:rPr lang="en-US" sz="1200" b="0" u="none" strike="noStrike">
                 <a:solidFill>
                   <a:schemeClr val="dk1"/>
@@ -5648,7 +5648,7 @@
         <p:spPr>
           <a:xfrm>
             <a:off x="685800" y="1143000"/>
-            <a:ext cx="5485680" cy="3085560"/>
+            <a:ext cx="5485320" cy="3085200"/>
           </a:xfrm>
           <a:prstGeom prst="rect">
             <a:avLst/>
@@ -5671,7 +5671,7 @@
         <p:spPr>
           <a:xfrm>
             <a:off x="685800" y="4400640"/>
-            <a:ext cx="5485680" cy="3599640"/>
+            <a:ext cx="5485320" cy="3599280"/>
           </a:xfrm>
           <a:prstGeom prst="rect">
             <a:avLst/>
@@ -5713,7 +5713,7 @@
         <p:spPr>
           <a:xfrm>
             <a:off x="3884760" y="8685360"/>
-            <a:ext cx="2971080" cy="457920"/>
+            <a:ext cx="2970720" cy="457560"/>
           </a:xfrm>
           <a:prstGeom prst="rect">
             <a:avLst/>
@@ -5757,7 +5757,7 @@
                 <a:tab pos="0" algn="l"/>
               </a:tabLst>
             </a:pPr>
-            <a:fld id="{BF26BC58-EECB-4043-81F5-F5FABDE89537}" type="slidenum">
+            <a:fld id="{1ECBC352-5A02-47EC-B8E3-CCD2365390FB}" type="slidenum">
               <a:rPr lang="en-US" sz="1200" b="0" u="none" strike="noStrike">
                 <a:solidFill>
                   <a:schemeClr val="dk1"/>
@@ -5815,7 +5815,7 @@
         <p:spPr>
           <a:xfrm>
             <a:off x="685800" y="1143000"/>
-            <a:ext cx="5485680" cy="3085560"/>
+            <a:ext cx="5485320" cy="3085200"/>
           </a:xfrm>
           <a:prstGeom prst="rect">
             <a:avLst/>
@@ -5838,7 +5838,7 @@
         <p:spPr>
           <a:xfrm>
             <a:off x="685800" y="4400640"/>
-            <a:ext cx="5485680" cy="3599640"/>
+            <a:ext cx="5485320" cy="3599280"/>
           </a:xfrm>
           <a:prstGeom prst="rect">
             <a:avLst/>
@@ -5880,7 +5880,7 @@
         <p:spPr>
           <a:xfrm>
             <a:off x="3884760" y="8685360"/>
-            <a:ext cx="2971080" cy="457920"/>
+            <a:ext cx="2970720" cy="457560"/>
           </a:xfrm>
           <a:prstGeom prst="rect">
             <a:avLst/>
@@ -5924,7 +5924,7 @@
                 <a:tab pos="0" algn="l"/>
               </a:tabLst>
             </a:pPr>
-            <a:fld id="{00F400F2-E07D-474B-8F6A-ECC7873FA00C}" type="slidenum">
+            <a:fld id="{6B46C697-BBB4-47BB-8472-55263613D178}" type="slidenum">
               <a:rPr lang="en-US" sz="1200" b="0" u="none" strike="noStrike">
                 <a:solidFill>
                   <a:schemeClr val="dk1"/>
@@ -5982,7 +5982,7 @@
         <p:spPr>
           <a:xfrm>
             <a:off x="685800" y="1143000"/>
-            <a:ext cx="5485680" cy="3085560"/>
+            <a:ext cx="5485320" cy="3085200"/>
           </a:xfrm>
           <a:prstGeom prst="rect">
             <a:avLst/>
@@ -6005,7 +6005,7 @@
         <p:spPr>
           <a:xfrm>
             <a:off x="685800" y="4400640"/>
-            <a:ext cx="5485680" cy="3599640"/>
+            <a:ext cx="5485320" cy="3599280"/>
           </a:xfrm>
           <a:prstGeom prst="rect">
             <a:avLst/>
@@ -6047,7 +6047,7 @@
         <p:spPr>
           <a:xfrm>
             <a:off x="3884760" y="8685360"/>
-            <a:ext cx="2971080" cy="457920"/>
+            <a:ext cx="2970720" cy="457560"/>
           </a:xfrm>
           <a:prstGeom prst="rect">
             <a:avLst/>
@@ -6091,7 +6091,7 @@
                 <a:tab pos="0" algn="l"/>
               </a:tabLst>
             </a:pPr>
-            <a:fld id="{66C476C9-1891-4BE7-AAED-C0E7EB9A4473}" type="slidenum">
+            <a:fld id="{244794DC-4CFF-44F4-B064-D7BAB62EB39B}" type="slidenum">
               <a:rPr lang="en-US" sz="1200" b="0" u="none" strike="noStrike">
                 <a:solidFill>
                   <a:schemeClr val="dk1"/>
@@ -6149,7 +6149,7 @@
         <p:spPr>
           <a:xfrm>
             <a:off x="685800" y="1143000"/>
-            <a:ext cx="5485680" cy="3085560"/>
+            <a:ext cx="5485320" cy="3085200"/>
           </a:xfrm>
           <a:prstGeom prst="rect">
             <a:avLst/>
@@ -6172,7 +6172,7 @@
         <p:spPr>
           <a:xfrm>
             <a:off x="685800" y="4400640"/>
-            <a:ext cx="5485680" cy="3599640"/>
+            <a:ext cx="5485320" cy="3599280"/>
           </a:xfrm>
           <a:prstGeom prst="rect">
             <a:avLst/>
@@ -6214,7 +6214,7 @@
         <p:spPr>
           <a:xfrm>
             <a:off x="3884760" y="8685360"/>
-            <a:ext cx="2971080" cy="457920"/>
+            <a:ext cx="2970720" cy="457560"/>
           </a:xfrm>
           <a:prstGeom prst="rect">
             <a:avLst/>
@@ -6258,7 +6258,7 @@
                 <a:tab pos="0" algn="l"/>
               </a:tabLst>
             </a:pPr>
-            <a:fld id="{8A63CD8C-17F8-4692-A2C0-B181643A3547}" type="slidenum">
+            <a:fld id="{51F95B2F-06AC-403F-A88B-98592702B0FE}" type="slidenum">
               <a:rPr lang="en-US" sz="1200" b="0" u="none" strike="noStrike">
                 <a:solidFill>
                   <a:schemeClr val="dk1"/>
@@ -6316,7 +6316,7 @@
         <p:spPr>
           <a:xfrm>
             <a:off x="685800" y="1143000"/>
-            <a:ext cx="5485680" cy="3085560"/>
+            <a:ext cx="5485320" cy="3085200"/>
           </a:xfrm>
           <a:prstGeom prst="rect">
             <a:avLst/>
@@ -6339,7 +6339,7 @@
         <p:spPr>
           <a:xfrm>
             <a:off x="685800" y="4400640"/>
-            <a:ext cx="5485680" cy="3599640"/>
+            <a:ext cx="5485320" cy="3599280"/>
           </a:xfrm>
           <a:prstGeom prst="rect">
             <a:avLst/>
@@ -6381,7 +6381,7 @@
         <p:spPr>
           <a:xfrm>
             <a:off x="3884760" y="8685360"/>
-            <a:ext cx="2971080" cy="457920"/>
+            <a:ext cx="2970720" cy="457560"/>
           </a:xfrm>
           <a:prstGeom prst="rect">
             <a:avLst/>
@@ -6425,7 +6425,7 @@
                 <a:tab pos="0" algn="l"/>
               </a:tabLst>
             </a:pPr>
-            <a:fld id="{651B2D06-2178-4E22-94DC-F117418A6A44}" type="slidenum">
+            <a:fld id="{5A3DF423-758B-4696-B960-D0A479FF083C}" type="slidenum">
               <a:rPr lang="en-US" sz="1200" b="0" u="none" strike="noStrike">
                 <a:solidFill>
                   <a:schemeClr val="dk1"/>
@@ -6483,7 +6483,7 @@
         <p:spPr>
           <a:xfrm>
             <a:off x="685800" y="1143000"/>
-            <a:ext cx="5485680" cy="3085560"/>
+            <a:ext cx="5485320" cy="3085200"/>
           </a:xfrm>
           <a:prstGeom prst="rect">
             <a:avLst/>
@@ -6506,7 +6506,7 @@
         <p:spPr>
           <a:xfrm>
             <a:off x="685800" y="4400640"/>
-            <a:ext cx="5485680" cy="3599640"/>
+            <a:ext cx="5485320" cy="3599280"/>
           </a:xfrm>
           <a:prstGeom prst="rect">
             <a:avLst/>
@@ -6548,7 +6548,7 @@
         <p:spPr>
           <a:xfrm>
             <a:off x="3884760" y="8685360"/>
-            <a:ext cx="2971080" cy="457920"/>
+            <a:ext cx="2970720" cy="457560"/>
           </a:xfrm>
           <a:prstGeom prst="rect">
             <a:avLst/>
@@ -6592,7 +6592,7 @@
                 <a:tab pos="0" algn="l"/>
               </a:tabLst>
             </a:pPr>
-            <a:fld id="{BBF77FB9-670E-42F9-B629-CD7E335EC8E8}" type="slidenum">
+            <a:fld id="{03B770C0-6983-4845-B3FF-CE8EC9572DE9}" type="slidenum">
               <a:rPr lang="en-US" sz="1200" b="0" u="none" strike="noStrike">
                 <a:solidFill>
                   <a:schemeClr val="dk1"/>
@@ -6650,7 +6650,7 @@
         <p:spPr>
           <a:xfrm>
             <a:off x="685800" y="1143000"/>
-            <a:ext cx="5485680" cy="3085560"/>
+            <a:ext cx="5485320" cy="3085200"/>
           </a:xfrm>
           <a:prstGeom prst="rect">
             <a:avLst/>
@@ -6673,7 +6673,7 @@
         <p:spPr>
           <a:xfrm>
             <a:off x="685800" y="4400640"/>
-            <a:ext cx="5485680" cy="3599640"/>
+            <a:ext cx="5485320" cy="3599280"/>
           </a:xfrm>
           <a:prstGeom prst="rect">
             <a:avLst/>
@@ -6715,7 +6715,7 @@
         <p:spPr>
           <a:xfrm>
             <a:off x="3884760" y="8685360"/>
-            <a:ext cx="2971080" cy="457920"/>
+            <a:ext cx="2970720" cy="457560"/>
           </a:xfrm>
           <a:prstGeom prst="rect">
             <a:avLst/>
@@ -6759,7 +6759,7 @@
                 <a:tab pos="0" algn="l"/>
               </a:tabLst>
             </a:pPr>
-            <a:fld id="{37CB2F3E-554D-4A94-B469-3919FE54D846}" type="slidenum">
+            <a:fld id="{F1C7F952-20B8-4387-B1F1-65D51170FF82}" type="slidenum">
               <a:rPr lang="en-US" sz="1200" b="0" u="none" strike="noStrike">
                 <a:solidFill>
                   <a:schemeClr val="dk1"/>
@@ -6817,7 +6817,7 @@
         <p:spPr>
           <a:xfrm>
             <a:off x="685800" y="1143000"/>
-            <a:ext cx="5485680" cy="3085560"/>
+            <a:ext cx="5485320" cy="3085200"/>
           </a:xfrm>
           <a:prstGeom prst="rect">
             <a:avLst/>
@@ -6840,7 +6840,7 @@
         <p:spPr>
           <a:xfrm>
             <a:off x="685800" y="4400640"/>
-            <a:ext cx="5485680" cy="3599640"/>
+            <a:ext cx="5485320" cy="3599280"/>
           </a:xfrm>
           <a:prstGeom prst="rect">
             <a:avLst/>
@@ -6882,7 +6882,7 @@
         <p:spPr>
           <a:xfrm>
             <a:off x="3884760" y="8685360"/>
-            <a:ext cx="2971080" cy="457920"/>
+            <a:ext cx="2970720" cy="457560"/>
           </a:xfrm>
           <a:prstGeom prst="rect">
             <a:avLst/>
@@ -6926,7 +6926,7 @@
                 <a:tab pos="0" algn="l"/>
               </a:tabLst>
             </a:pPr>
-            <a:fld id="{D23D0D07-7C4C-44CE-8B07-E1C073106E25}" type="slidenum">
+            <a:fld id="{261357F1-069C-4C9A-BD9C-8F8D140AF493}" type="slidenum">
               <a:rPr lang="en-US" sz="1200" b="0" u="none" strike="noStrike">
                 <a:solidFill>
                   <a:schemeClr val="dk1"/>
@@ -6984,7 +6984,7 @@
         <p:spPr>
           <a:xfrm>
             <a:off x="685800" y="1143000"/>
-            <a:ext cx="5485680" cy="3085560"/>
+            <a:ext cx="5485320" cy="3085200"/>
           </a:xfrm>
           <a:prstGeom prst="rect">
             <a:avLst/>
@@ -7007,7 +7007,7 @@
         <p:spPr>
           <a:xfrm>
             <a:off x="685800" y="4400640"/>
-            <a:ext cx="5485680" cy="3599640"/>
+            <a:ext cx="5485320" cy="3599280"/>
           </a:xfrm>
           <a:prstGeom prst="rect">
             <a:avLst/>
@@ -7049,7 +7049,7 @@
         <p:spPr>
           <a:xfrm>
             <a:off x="3884760" y="8685360"/>
-            <a:ext cx="2971080" cy="457920"/>
+            <a:ext cx="2970720" cy="457560"/>
           </a:xfrm>
           <a:prstGeom prst="rect">
             <a:avLst/>
@@ -7093,7 +7093,7 @@
                 <a:tab pos="0" algn="l"/>
               </a:tabLst>
             </a:pPr>
-            <a:fld id="{8D7EBA72-945E-4B69-BC9B-8813E6FAB8A4}" type="slidenum">
+            <a:fld id="{40965D58-B521-4FBC-87C9-FECF7FBB4C29}" type="slidenum">
               <a:rPr lang="en-US" sz="1200" b="0" u="none" strike="noStrike">
                 <a:solidFill>
                   <a:schemeClr val="dk1"/>
@@ -7151,7 +7151,7 @@
         <p:spPr>
           <a:xfrm>
             <a:off x="685800" y="1143000"/>
-            <a:ext cx="5485680" cy="3085560"/>
+            <a:ext cx="5485320" cy="3085200"/>
           </a:xfrm>
           <a:prstGeom prst="rect">
             <a:avLst/>
@@ -7174,7 +7174,7 @@
         <p:spPr>
           <a:xfrm>
             <a:off x="685800" y="4400640"/>
-            <a:ext cx="5485680" cy="3599640"/>
+            <a:ext cx="5485320" cy="3599280"/>
           </a:xfrm>
           <a:prstGeom prst="rect">
             <a:avLst/>
@@ -7216,7 +7216,7 @@
         <p:spPr>
           <a:xfrm>
             <a:off x="3884760" y="8685360"/>
-            <a:ext cx="2971080" cy="457920"/>
+            <a:ext cx="2970720" cy="457560"/>
           </a:xfrm>
           <a:prstGeom prst="rect">
             <a:avLst/>
@@ -7260,7 +7260,7 @@
                 <a:tab pos="0" algn="l"/>
               </a:tabLst>
             </a:pPr>
-            <a:fld id="{93E408AC-2BCD-492B-9FCD-27BC418A821B}" type="slidenum">
+            <a:fld id="{2686F39A-8D8D-42B8-B31D-1031A7A8E46E}" type="slidenum">
               <a:rPr lang="en-US" sz="1200" b="0" u="none" strike="noStrike">
                 <a:solidFill>
                   <a:schemeClr val="dk1"/>
@@ -7318,7 +7318,7 @@
         <p:spPr>
           <a:xfrm>
             <a:off x="685800" y="1143000"/>
-            <a:ext cx="5485680" cy="3085560"/>
+            <a:ext cx="5485320" cy="3085200"/>
           </a:xfrm>
           <a:prstGeom prst="rect">
             <a:avLst/>
@@ -7341,7 +7341,7 @@
         <p:spPr>
           <a:xfrm>
             <a:off x="685800" y="4400640"/>
-            <a:ext cx="5485680" cy="3599640"/>
+            <a:ext cx="5485320" cy="3599280"/>
           </a:xfrm>
           <a:prstGeom prst="rect">
             <a:avLst/>
@@ -7383,7 +7383,7 @@
         <p:spPr>
           <a:xfrm>
             <a:off x="3884760" y="8685360"/>
-            <a:ext cx="2971080" cy="457920"/>
+            <a:ext cx="2970720" cy="457560"/>
           </a:xfrm>
           <a:prstGeom prst="rect">
             <a:avLst/>
@@ -7427,7 +7427,7 @@
                 <a:tab pos="0" algn="l"/>
               </a:tabLst>
             </a:pPr>
-            <a:fld id="{7E934CF5-9B2C-4987-9B97-9C0E9D931568}" type="slidenum">
+            <a:fld id="{BB00F576-4004-454E-8814-61DFED049F12}" type="slidenum">
               <a:rPr lang="en-US" sz="1200" b="0" u="none" strike="noStrike">
                 <a:solidFill>
                   <a:schemeClr val="dk1"/>
@@ -7485,7 +7485,7 @@
         <p:spPr>
           <a:xfrm>
             <a:off x="685800" y="1143000"/>
-            <a:ext cx="5485680" cy="3085560"/>
+            <a:ext cx="5485320" cy="3085200"/>
           </a:xfrm>
           <a:prstGeom prst="rect">
             <a:avLst/>
@@ -7508,7 +7508,7 @@
         <p:spPr>
           <a:xfrm>
             <a:off x="685800" y="4400640"/>
-            <a:ext cx="5485680" cy="3599640"/>
+            <a:ext cx="5485320" cy="3599280"/>
           </a:xfrm>
           <a:prstGeom prst="rect">
             <a:avLst/>
@@ -7550,7 +7550,7 @@
         <p:spPr>
           <a:xfrm>
             <a:off x="3884760" y="8685360"/>
-            <a:ext cx="2971080" cy="457920"/>
+            <a:ext cx="2970720" cy="457560"/>
           </a:xfrm>
           <a:prstGeom prst="rect">
             <a:avLst/>
@@ -7594,7 +7594,7 @@
                 <a:tab pos="0" algn="l"/>
               </a:tabLst>
             </a:pPr>
-            <a:fld id="{E8167DB6-EDA4-4EFD-9ACD-4E14C8E3F949}" type="slidenum">
+            <a:fld id="{6F4658A1-C90B-43C3-8314-88790C5CA844}" type="slidenum">
               <a:rPr lang="en-US" sz="1200" b="0" u="none" strike="noStrike">
                 <a:solidFill>
                   <a:schemeClr val="dk1"/>
@@ -7652,7 +7652,7 @@
         <p:spPr>
           <a:xfrm>
             <a:off x="685800" y="1143000"/>
-            <a:ext cx="5485680" cy="3085560"/>
+            <a:ext cx="5485320" cy="3085200"/>
           </a:xfrm>
           <a:prstGeom prst="rect">
             <a:avLst/>
@@ -7675,7 +7675,7 @@
         <p:spPr>
           <a:xfrm>
             <a:off x="685800" y="4400640"/>
-            <a:ext cx="5485680" cy="3599640"/>
+            <a:ext cx="5485320" cy="3599280"/>
           </a:xfrm>
           <a:prstGeom prst="rect">
             <a:avLst/>
@@ -7717,7 +7717,7 @@
         <p:spPr>
           <a:xfrm>
             <a:off x="3884760" y="8685360"/>
-            <a:ext cx="2971080" cy="457920"/>
+            <a:ext cx="2970720" cy="457560"/>
           </a:xfrm>
           <a:prstGeom prst="rect">
             <a:avLst/>
@@ -7761,7 +7761,7 @@
                 <a:tab pos="0" algn="l"/>
               </a:tabLst>
             </a:pPr>
-            <a:fld id="{61AD5230-B613-4B79-B455-C01B7F16AD0D}" type="slidenum">
+            <a:fld id="{A27331DD-7540-46CA-8772-5A6E501E413B}" type="slidenum">
               <a:rPr lang="en-US" sz="1200" b="0" u="none" strike="noStrike">
                 <a:solidFill>
                   <a:schemeClr val="dk1"/>
@@ -7819,7 +7819,7 @@
         <p:spPr>
           <a:xfrm>
             <a:off x="685800" y="1143000"/>
-            <a:ext cx="5485680" cy="3085560"/>
+            <a:ext cx="5485320" cy="3085200"/>
           </a:xfrm>
           <a:prstGeom prst="rect">
             <a:avLst/>
@@ -7842,7 +7842,7 @@
         <p:spPr>
           <a:xfrm>
             <a:off x="685800" y="4400640"/>
-            <a:ext cx="5485680" cy="3599640"/>
+            <a:ext cx="5485320" cy="3599280"/>
           </a:xfrm>
           <a:prstGeom prst="rect">
             <a:avLst/>
@@ -7884,7 +7884,7 @@
         <p:spPr>
           <a:xfrm>
             <a:off x="3884760" y="8685360"/>
-            <a:ext cx="2971080" cy="457920"/>
+            <a:ext cx="2970720" cy="457560"/>
           </a:xfrm>
           <a:prstGeom prst="rect">
             <a:avLst/>
@@ -7928,7 +7928,7 @@
                 <a:tab pos="0" algn="l"/>
               </a:tabLst>
             </a:pPr>
-            <a:fld id="{1C5C93F8-EFD4-4B44-BAF6-A9A2A3F6FC10}" type="slidenum">
+            <a:fld id="{2A734E1B-F9A1-4C9D-8A3E-290894279BF4}" type="slidenum">
               <a:rPr lang="en-US" sz="1200" b="0" u="none" strike="noStrike">
                 <a:solidFill>
                   <a:schemeClr val="dk1"/>
@@ -7986,7 +7986,7 @@
         <p:spPr>
           <a:xfrm>
             <a:off x="685800" y="1143000"/>
-            <a:ext cx="5485680" cy="3085560"/>
+            <a:ext cx="5485320" cy="3085200"/>
           </a:xfrm>
           <a:prstGeom prst="rect">
             <a:avLst/>
@@ -8009,7 +8009,7 @@
         <p:spPr>
           <a:xfrm>
             <a:off x="685800" y="4400640"/>
-            <a:ext cx="5485680" cy="3599640"/>
+            <a:ext cx="5485320" cy="3599280"/>
           </a:xfrm>
           <a:prstGeom prst="rect">
             <a:avLst/>
@@ -8051,7 +8051,7 @@
         <p:spPr>
           <a:xfrm>
             <a:off x="3884760" y="8685360"/>
-            <a:ext cx="2971080" cy="457920"/>
+            <a:ext cx="2970720" cy="457560"/>
           </a:xfrm>
           <a:prstGeom prst="rect">
             <a:avLst/>
@@ -8095,7 +8095,7 @@
                 <a:tab pos="0" algn="l"/>
               </a:tabLst>
             </a:pPr>
-            <a:fld id="{7C1B868C-AF11-42B0-8658-3C133B8FF265}" type="slidenum">
+            <a:fld id="{57431534-6CF0-4D1D-8693-33E39FDBEC4D}" type="slidenum">
               <a:rPr lang="en-US" sz="1200" b="0" u="none" strike="noStrike">
                 <a:solidFill>
                   <a:schemeClr val="dk1"/>
@@ -8105,7 +8105,7 @@
                 <a:latin typeface="+mn-lt"/>
                 <a:ea typeface="+mn-ea"/>
               </a:rPr>
-              <a:t>&lt;number&gt;</a:t>
+              <a:t>1</a:t>
             </a:fld>
             <a:endParaRPr lang="en-US" sz="1200" b="0" u="none" strike="noStrike">
               <a:solidFill>
@@ -8153,7 +8153,7 @@
         <p:spPr>
           <a:xfrm>
             <a:off x="685800" y="1143000"/>
-            <a:ext cx="5485680" cy="3085560"/>
+            <a:ext cx="5485320" cy="3085200"/>
           </a:xfrm>
           <a:prstGeom prst="rect">
             <a:avLst/>
@@ -8176,7 +8176,7 @@
         <p:spPr>
           <a:xfrm>
             <a:off x="685800" y="4400640"/>
-            <a:ext cx="5485680" cy="3599640"/>
+            <a:ext cx="5485320" cy="3599280"/>
           </a:xfrm>
           <a:prstGeom prst="rect">
             <a:avLst/>
@@ -8218,7 +8218,7 @@
         <p:spPr>
           <a:xfrm>
             <a:off x="3884760" y="8685360"/>
-            <a:ext cx="2971080" cy="457920"/>
+            <a:ext cx="2970720" cy="457560"/>
           </a:xfrm>
           <a:prstGeom prst="rect">
             <a:avLst/>
@@ -8262,7 +8262,7 @@
                 <a:tab pos="0" algn="l"/>
               </a:tabLst>
             </a:pPr>
-            <a:fld id="{11AB7FA3-EB36-482A-9055-169AA9BAFBAE}" type="slidenum">
+            <a:fld id="{9601E04F-F7B6-4E01-8B96-8F1E027E0B09}" type="slidenum">
               <a:rPr lang="en-US" sz="1200" b="0" u="none" strike="noStrike">
                 <a:solidFill>
                   <a:schemeClr val="dk1"/>
@@ -8320,7 +8320,7 @@
         <p:spPr>
           <a:xfrm>
             <a:off x="685800" y="1143000"/>
-            <a:ext cx="5485680" cy="3085560"/>
+            <a:ext cx="5485320" cy="3085200"/>
           </a:xfrm>
           <a:prstGeom prst="rect">
             <a:avLst/>
@@ -8343,7 +8343,7 @@
         <p:spPr>
           <a:xfrm>
             <a:off x="685800" y="4400640"/>
-            <a:ext cx="5485680" cy="3599640"/>
+            <a:ext cx="5485320" cy="3599280"/>
           </a:xfrm>
           <a:prstGeom prst="rect">
             <a:avLst/>
@@ -8385,7 +8385,7 @@
         <p:spPr>
           <a:xfrm>
             <a:off x="3884760" y="8685360"/>
-            <a:ext cx="2971080" cy="457920"/>
+            <a:ext cx="2970720" cy="457560"/>
           </a:xfrm>
           <a:prstGeom prst="rect">
             <a:avLst/>
@@ -8429,7 +8429,7 @@
                 <a:tab pos="0" algn="l"/>
               </a:tabLst>
             </a:pPr>
-            <a:fld id="{17B2D8BD-273B-4B3C-8510-C87CDB80A99F}" type="slidenum">
+            <a:fld id="{6071B972-73B2-4283-8E4F-C867AC53C271}" type="slidenum">
               <a:rPr lang="en-US" sz="1200" b="0" u="none" strike="noStrike">
                 <a:solidFill>
                   <a:schemeClr val="dk1"/>
@@ -8487,7 +8487,7 @@
         <p:spPr>
           <a:xfrm>
             <a:off x="685800" y="1143000"/>
-            <a:ext cx="5485680" cy="3085560"/>
+            <a:ext cx="5485320" cy="3085200"/>
           </a:xfrm>
           <a:prstGeom prst="rect">
             <a:avLst/>
@@ -8510,7 +8510,7 @@
         <p:spPr>
           <a:xfrm>
             <a:off x="685800" y="4400640"/>
-            <a:ext cx="5485680" cy="3599640"/>
+            <a:ext cx="5485320" cy="3599280"/>
           </a:xfrm>
           <a:prstGeom prst="rect">
             <a:avLst/>
@@ -8552,7 +8552,7 @@
         <p:spPr>
           <a:xfrm>
             <a:off x="3884760" y="8685360"/>
-            <a:ext cx="2971080" cy="457920"/>
+            <a:ext cx="2970720" cy="457560"/>
           </a:xfrm>
           <a:prstGeom prst="rect">
             <a:avLst/>
@@ -8596,7 +8596,7 @@
                 <a:tab pos="0" algn="l"/>
               </a:tabLst>
             </a:pPr>
-            <a:fld id="{24F82810-F964-4797-8880-466F627E129D}" type="slidenum">
+            <a:fld id="{833209AA-C6A7-49DB-A447-4B752BC8F6F7}" type="slidenum">
               <a:rPr lang="en-US" sz="1200" b="0" u="none" strike="noStrike">
                 <a:solidFill>
                   <a:schemeClr val="dk1"/>
@@ -8654,7 +8654,7 @@
         <p:spPr>
           <a:xfrm>
             <a:off x="685800" y="1143000"/>
-            <a:ext cx="5485680" cy="3085560"/>
+            <a:ext cx="5485320" cy="3085200"/>
           </a:xfrm>
           <a:prstGeom prst="rect">
             <a:avLst/>
@@ -8677,7 +8677,7 @@
         <p:spPr>
           <a:xfrm>
             <a:off x="685800" y="4400640"/>
-            <a:ext cx="5485680" cy="3599640"/>
+            <a:ext cx="5485320" cy="3599280"/>
           </a:xfrm>
           <a:prstGeom prst="rect">
             <a:avLst/>
@@ -8719,7 +8719,7 @@
         <p:spPr>
           <a:xfrm>
             <a:off x="3884760" y="8685360"/>
-            <a:ext cx="2971080" cy="457920"/>
+            <a:ext cx="2970720" cy="457560"/>
           </a:xfrm>
           <a:prstGeom prst="rect">
             <a:avLst/>
@@ -8763,7 +8763,7 @@
                 <a:tab pos="0" algn="l"/>
               </a:tabLst>
             </a:pPr>
-            <a:fld id="{E4D32182-679E-453B-B688-C171B4AB52F8}" type="slidenum">
+            <a:fld id="{D6E2C49C-B4CA-455D-BD17-CDFA18E22F8C}" type="slidenum">
               <a:rPr lang="en-US" sz="1200" b="0" u="none" strike="noStrike">
                 <a:solidFill>
                   <a:schemeClr val="dk1"/>
@@ -9339,7 +9339,7 @@
         <p:spPr>
           <a:xfrm>
             <a:off x="-2286000" y="3657600"/>
-            <a:ext cx="6400080" cy="6400080"/>
+            <a:ext cx="6399720" cy="6399720"/>
           </a:xfrm>
           <a:prstGeom prst="ellipse">
             <a:avLst/>
@@ -9382,7 +9382,7 @@
         <p:spPr>
           <a:xfrm>
             <a:off x="8229600" y="-2743200"/>
-            <a:ext cx="6400080" cy="6400080"/>
+            <a:ext cx="6399720" cy="6399720"/>
           </a:xfrm>
           <a:prstGeom prst="ellipse">
             <a:avLst/>
@@ -9425,7 +9425,7 @@
         <p:spPr>
           <a:xfrm>
             <a:off x="5501520" y="1417320"/>
-            <a:ext cx="1188000" cy="1188000"/>
+            <a:ext cx="1187640" cy="1187640"/>
           </a:xfrm>
           <a:prstGeom prst="ellipse">
             <a:avLst/>
@@ -9472,7 +9472,7 @@
         <p:spPr>
           <a:xfrm>
             <a:off x="5803200" y="1710000"/>
-            <a:ext cx="584640" cy="584640"/>
+            <a:ext cx="584280" cy="584280"/>
           </a:xfrm>
           <a:prstGeom prst="rect">
             <a:avLst/>
@@ -9492,7 +9492,7 @@
         <p:spPr>
           <a:xfrm>
             <a:off x="914400" y="2880360"/>
-            <a:ext cx="10362240" cy="913680"/>
+            <a:ext cx="10361880" cy="913320"/>
           </a:xfrm>
           <a:prstGeom prst="rect">
             <a:avLst/>
@@ -9531,7 +9531,43 @@
                 <a:latin typeface="Cambria"/>
                 <a:ea typeface="Cambria"/>
               </a:rPr>
-              <a:t>Object-Oriented Programming</a:t>
+              <a:t>Object-</a:t>
+            </a:r>
+            <a:r>
+              <a:rPr lang="en-US" sz="4000" b="1" u="none" strike="noStrike">
+                <a:solidFill>
+                  <a:srgbClr val="FFFFFF"/>
+                </a:solidFill>
+                <a:effectLst/>
+                <a:uFillTx/>
+                <a:latin typeface="Cambria"/>
+                <a:ea typeface="Cambria"/>
+              </a:rPr>
+              <a:t>Oriented </a:t>
+            </a:r>
+            <a:r>
+              <a:rPr lang="en-US" sz="4000" b="1" u="none" strike="noStrike">
+                <a:solidFill>
+                  <a:srgbClr val="FFFFFF"/>
+                </a:solidFill>
+                <a:effectLst/>
+                <a:uFillTx/>
+                <a:latin typeface="Cambria"/>
+                <a:ea typeface="Cambria"/>
+              </a:rPr>
+              <a:t>Program</a:t>
+            </a:r>
+            <a:r>
+              <a:rPr lang="en-US" sz="4000" b="1" u="none" strike="noStrike">
+                <a:solidFill>
+                  <a:srgbClr val="FFFFFF"/>
+                </a:solidFill>
+                <a:effectLst/>
+                <a:uFillTx/>
+                <a:latin typeface="Cambria"/>
+                <a:ea typeface="Cambria"/>
+              </a:rPr>
+              <a:t>ming</a:t>
             </a:r>
             <a:endParaRPr lang="en-US" sz="4000" b="0" u="none" strike="noStrike">
               <a:solidFill>
@@ -9553,7 +9589,7 @@
         <p:spPr>
           <a:xfrm>
             <a:off x="1554480" y="3794760"/>
-            <a:ext cx="9082080" cy="639360"/>
+            <a:ext cx="9081720" cy="639000"/>
           </a:xfrm>
           <a:prstGeom prst="rect">
             <a:avLst/>
@@ -9614,7 +9650,7 @@
         <p:spPr>
           <a:xfrm>
             <a:off x="914400" y="4480560"/>
-            <a:ext cx="10362240" cy="365040"/>
+            <a:ext cx="10361880" cy="364680"/>
           </a:xfrm>
           <a:prstGeom prst="rect">
             <a:avLst/>
@@ -9653,7 +9689,19 @@
                 <a:latin typeface="Calibri"/>
                 <a:ea typeface="Calibri"/>
               </a:rPr>
-              <a:t>Session 10</a:t>
+              <a:t>Session </a:t>
+            </a:r>
+            <a:r>
+              <a:rPr lang="en-US" sz="1200" b="0" u="none" strike="noStrike">
+                <a:solidFill>
+                  <a:srgbClr val="A9B0A7"/>
+                </a:solidFill>
+                <a:effectLst/>
+                <a:uFillTx/>
+                <a:latin typeface="Calibri"/>
+                <a:ea typeface="Calibri"/>
+              </a:rPr>
+              <a:t>10</a:t>
             </a:r>
             <a:endParaRPr lang="en-US" sz="1200" b="0" u="none" strike="noStrike">
               <a:solidFill>
@@ -9675,7 +9723,7 @@
         <p:spPr>
           <a:xfrm>
             <a:off x="11094480" y="6492240"/>
-            <a:ext cx="547920" cy="273600"/>
+            <a:ext cx="547560" cy="273240"/>
           </a:xfrm>
           <a:prstGeom prst="rect">
             <a:avLst/>
@@ -9773,7 +9821,7 @@
         <p:spPr>
           <a:xfrm>
             <a:off x="548640" y="457200"/>
-            <a:ext cx="383400" cy="383400"/>
+            <a:ext cx="383040" cy="383040"/>
           </a:xfrm>
           <a:prstGeom prst="roundRect">
             <a:avLst>
@@ -9822,7 +9870,7 @@
         <p:spPr>
           <a:xfrm>
             <a:off x="631080" y="539640"/>
-            <a:ext cx="218880" cy="218880"/>
+            <a:ext cx="218520" cy="218520"/>
           </a:xfrm>
           <a:prstGeom prst="rect">
             <a:avLst/>
@@ -9842,7 +9890,7 @@
         <p:spPr>
           <a:xfrm>
             <a:off x="1097280" y="420480"/>
-            <a:ext cx="10545120" cy="456480"/>
+            <a:ext cx="10544760" cy="456120"/>
           </a:xfrm>
           <a:prstGeom prst="rect">
             <a:avLst/>
@@ -9903,7 +9951,7 @@
         <p:spPr>
           <a:xfrm>
             <a:off x="548640" y="1234440"/>
-            <a:ext cx="11093760" cy="1197000"/>
+            <a:ext cx="11093400" cy="1196640"/>
           </a:xfrm>
           <a:prstGeom prst="rect">
             <a:avLst/>
@@ -10039,7 +10087,7 @@
         <p:spPr>
           <a:xfrm>
             <a:off x="548640" y="2569320"/>
-            <a:ext cx="11093760" cy="3785040"/>
+            <a:ext cx="11093400" cy="3784680"/>
           </a:xfrm>
           <a:prstGeom prst="roundRect">
             <a:avLst>
@@ -10084,7 +10132,7 @@
         <p:spPr>
           <a:xfrm>
             <a:off x="868680" y="2752200"/>
-            <a:ext cx="10453680" cy="3419280"/>
+            <a:ext cx="10453320" cy="3418920"/>
           </a:xfrm>
           <a:prstGeom prst="rect">
             <a:avLst/>
@@ -10114,7 +10162,7 @@
               </a:tabLst>
             </a:pPr>
             <a:r>
-              <a:rPr lang="en-US" sz="1350" b="0" u="none" strike="noStrike">
+              <a:rPr lang="en-US" sz="2100" b="0" u="none" strike="noStrike">
                 <a:solidFill>
                   <a:srgbClr val="E8F0EC"/>
                 </a:solidFill>
@@ -10125,7 +10173,7 @@
               </a:rPr>
               <a:t>class Dog:</a:t>
             </a:r>
-            <a:endParaRPr lang="en-US" sz="1350" b="0" u="none" strike="noStrike">
+            <a:endParaRPr lang="en-US" sz="2100" b="0" u="none" strike="noStrike">
               <a:solidFill>
                 <a:srgbClr val="000000"/>
               </a:solidFill>
@@ -10144,7 +10192,7 @@
               </a:tabLst>
             </a:pPr>
             <a:r>
-              <a:rPr lang="en-US" sz="1350" b="0" u="none" strike="noStrike">
+              <a:rPr lang="en-US" sz="2100" b="0" u="none" strike="noStrike">
                 <a:solidFill>
                   <a:srgbClr val="E8F0EC"/>
                 </a:solidFill>
@@ -10155,7 +10203,7 @@
               </a:rPr>
               <a:t>    def __init__(self, name, breed):</a:t>
             </a:r>
-            <a:endParaRPr lang="en-US" sz="1350" b="0" u="none" strike="noStrike">
+            <a:endParaRPr lang="en-US" sz="2100" b="0" u="none" strike="noStrike">
               <a:solidFill>
                 <a:srgbClr val="000000"/>
               </a:solidFill>
@@ -10174,7 +10222,7 @@
               </a:tabLst>
             </a:pPr>
             <a:r>
-              <a:rPr lang="en-US" sz="1350" b="0" u="none" strike="noStrike">
+              <a:rPr lang="en-US" sz="2100" b="0" u="none" strike="noStrike">
                 <a:solidFill>
                   <a:srgbClr val="E8F0EC"/>
                 </a:solidFill>
@@ -10185,7 +10233,7 @@
               </a:rPr>
               <a:t>        self.name = name</a:t>
             </a:r>
-            <a:endParaRPr lang="en-US" sz="1350" b="0" u="none" strike="noStrike">
+            <a:endParaRPr lang="en-US" sz="2100" b="0" u="none" strike="noStrike">
               <a:solidFill>
                 <a:srgbClr val="000000"/>
               </a:solidFill>
@@ -10204,7 +10252,7 @@
               </a:tabLst>
             </a:pPr>
             <a:r>
-              <a:rPr lang="en-US" sz="1350" b="0" u="none" strike="noStrike">
+              <a:rPr lang="en-US" sz="2100" b="0" u="none" strike="noStrike">
                 <a:solidFill>
                   <a:srgbClr val="E8F0EC"/>
                 </a:solidFill>
@@ -10215,7 +10263,7 @@
               </a:rPr>
               <a:t>        self.breed = breed</a:t>
             </a:r>
-            <a:endParaRPr lang="en-US" sz="1350" b="0" u="none" strike="noStrike">
+            <a:endParaRPr lang="en-US" sz="2100" b="0" u="none" strike="noStrike">
               <a:solidFill>
                 <a:srgbClr val="000000"/>
               </a:solidFill>
@@ -10234,7 +10282,7 @@
               </a:tabLst>
             </a:pPr>
             <a:r>
-              <a:rPr lang="en-US" sz="1350" b="0" u="none" strike="noStrike">
+              <a:rPr lang="en-US" sz="2100" b="0" u="none" strike="noStrike">
                 <a:solidFill>
                   <a:srgbClr val="E8F0EC"/>
                 </a:solidFill>
@@ -10245,7 +10293,7 @@
               </a:rPr>
               <a:t> </a:t>
             </a:r>
-            <a:endParaRPr lang="en-US" sz="1350" b="0" u="none" strike="noStrike">
+            <a:endParaRPr lang="en-US" sz="2100" b="0" u="none" strike="noStrike">
               <a:solidFill>
                 <a:srgbClr val="000000"/>
               </a:solidFill>
@@ -10264,7 +10312,7 @@
               </a:tabLst>
             </a:pPr>
             <a:r>
-              <a:rPr lang="en-US" sz="1350" b="0" u="none" strike="noStrike">
+              <a:rPr lang="en-US" sz="2100" b="0" u="none" strike="noStrike">
                 <a:solidFill>
                   <a:srgbClr val="E8F0EC"/>
                 </a:solidFill>
@@ -10275,7 +10323,7 @@
               </a:rPr>
               <a:t>rex = Dog("Rex", "Labrador")</a:t>
             </a:r>
-            <a:endParaRPr lang="en-US" sz="1350" b="0" u="none" strike="noStrike">
+            <a:endParaRPr lang="en-US" sz="2100" b="0" u="none" strike="noStrike">
               <a:solidFill>
                 <a:srgbClr val="000000"/>
               </a:solidFill>
@@ -10294,7 +10342,7 @@
               </a:tabLst>
             </a:pPr>
             <a:r>
-              <a:rPr lang="en-US" sz="1350" b="0" u="none" strike="noStrike">
+              <a:rPr lang="en-US" sz="2100" b="0" u="none" strike="noStrike">
                 <a:solidFill>
                   <a:srgbClr val="E8F0EC"/>
                 </a:solidFill>
@@ -10305,7 +10353,7 @@
               </a:rPr>
               <a:t>print(rex.name)     # Rex</a:t>
             </a:r>
-            <a:endParaRPr lang="en-US" sz="1350" b="0" u="none" strike="noStrike">
+            <a:endParaRPr lang="en-US" sz="2100" b="0" u="none" strike="noStrike">
               <a:solidFill>
                 <a:srgbClr val="000000"/>
               </a:solidFill>
@@ -10324,7 +10372,7 @@
               </a:tabLst>
             </a:pPr>
             <a:r>
-              <a:rPr lang="en-US" sz="1350" b="0" u="none" strike="noStrike">
+              <a:rPr lang="en-US" sz="2100" b="0" u="none" strike="noStrike">
                 <a:solidFill>
                   <a:srgbClr val="E8F0EC"/>
                 </a:solidFill>
@@ -10335,7 +10383,7 @@
               </a:rPr>
               <a:t>print(rex.breed)    # Labrador</a:t>
             </a:r>
-            <a:endParaRPr lang="en-US" sz="1350" b="0" u="none" strike="noStrike">
+            <a:endParaRPr lang="en-US" sz="2100" b="0" u="none" strike="noStrike">
               <a:solidFill>
                 <a:srgbClr val="000000"/>
               </a:solidFill>
@@ -10355,7 +10403,7 @@
         <p:spPr>
           <a:xfrm>
             <a:off x="548640" y="6510600"/>
-            <a:ext cx="5485680" cy="273600"/>
+            <a:ext cx="5485320" cy="273240"/>
           </a:xfrm>
           <a:prstGeom prst="rect">
             <a:avLst/>
@@ -10416,7 +10464,7 @@
         <p:spPr>
           <a:xfrm>
             <a:off x="11094480" y="6510600"/>
-            <a:ext cx="547920" cy="273600"/>
+            <a:ext cx="547560" cy="273240"/>
           </a:xfrm>
           <a:prstGeom prst="rect">
             <a:avLst/>
@@ -10514,7 +10562,7 @@
         <p:spPr>
           <a:xfrm>
             <a:off x="548640" y="457200"/>
-            <a:ext cx="383400" cy="383400"/>
+            <a:ext cx="383040" cy="383040"/>
           </a:xfrm>
           <a:prstGeom prst="roundRect">
             <a:avLst>
@@ -10563,7 +10611,7 @@
         <p:spPr>
           <a:xfrm>
             <a:off x="631080" y="539640"/>
-            <a:ext cx="218880" cy="218880"/>
+            <a:ext cx="218520" cy="218520"/>
           </a:xfrm>
           <a:prstGeom prst="rect">
             <a:avLst/>
@@ -10583,7 +10631,7 @@
         <p:spPr>
           <a:xfrm>
             <a:off x="1097280" y="420480"/>
-            <a:ext cx="10545120" cy="456480"/>
+            <a:ext cx="10544760" cy="456120"/>
           </a:xfrm>
           <a:prstGeom prst="rect">
             <a:avLst/>
@@ -10644,7 +10692,7 @@
         <p:spPr>
           <a:xfrm>
             <a:off x="548640" y="1234440"/>
-            <a:ext cx="11093760" cy="1489680"/>
+            <a:ext cx="11093400" cy="1489320"/>
           </a:xfrm>
           <a:prstGeom prst="rect">
             <a:avLst/>
@@ -10815,7 +10863,7 @@
         <p:spPr>
           <a:xfrm>
             <a:off x="548640" y="2862000"/>
-            <a:ext cx="11093760" cy="3492360"/>
+            <a:ext cx="11093400" cy="3492000"/>
           </a:xfrm>
           <a:prstGeom prst="roundRect">
             <a:avLst>
@@ -10860,7 +10908,7 @@
         <p:spPr>
           <a:xfrm>
             <a:off x="868680" y="3044880"/>
-            <a:ext cx="10453680" cy="3126600"/>
+            <a:ext cx="10453320" cy="3126240"/>
           </a:xfrm>
           <a:prstGeom prst="rect">
             <a:avLst/>
@@ -11191,7 +11239,7 @@
         <p:spPr>
           <a:xfrm>
             <a:off x="548640" y="6510600"/>
-            <a:ext cx="5485680" cy="273600"/>
+            <a:ext cx="5485320" cy="273240"/>
           </a:xfrm>
           <a:prstGeom prst="rect">
             <a:avLst/>
@@ -11252,7 +11300,7 @@
         <p:spPr>
           <a:xfrm>
             <a:off x="11094480" y="6510600"/>
-            <a:ext cx="547920" cy="273600"/>
+            <a:ext cx="547560" cy="273240"/>
           </a:xfrm>
           <a:prstGeom prst="rect">
             <a:avLst/>
@@ -11350,7 +11398,7 @@
         <p:spPr>
           <a:xfrm>
             <a:off x="548640" y="457200"/>
-            <a:ext cx="383400" cy="383400"/>
+            <a:ext cx="383040" cy="383040"/>
           </a:xfrm>
           <a:prstGeom prst="roundRect">
             <a:avLst>
@@ -11399,7 +11447,7 @@
         <p:spPr>
           <a:xfrm>
             <a:off x="631080" y="539640"/>
-            <a:ext cx="218880" cy="218880"/>
+            <a:ext cx="218520" cy="218520"/>
           </a:xfrm>
           <a:prstGeom prst="rect">
             <a:avLst/>
@@ -11419,7 +11467,7 @@
         <p:spPr>
           <a:xfrm>
             <a:off x="1097280" y="420480"/>
-            <a:ext cx="10545120" cy="456480"/>
+            <a:ext cx="10544760" cy="456120"/>
           </a:xfrm>
           <a:prstGeom prst="rect">
             <a:avLst/>
@@ -11480,7 +11528,7 @@
         <p:spPr>
           <a:xfrm>
             <a:off x="548640" y="1691640"/>
-            <a:ext cx="2925360" cy="2925360"/>
+            <a:ext cx="2925000" cy="2925000"/>
           </a:xfrm>
           <a:prstGeom prst="roundRect">
             <a:avLst>
@@ -11529,7 +11577,7 @@
         <p:spPr>
           <a:xfrm>
             <a:off x="777240" y="1874520"/>
-            <a:ext cx="2468160" cy="319320"/>
+            <a:ext cx="2467800" cy="318960"/>
           </a:xfrm>
           <a:prstGeom prst="rect">
             <a:avLst/>
@@ -11590,7 +11638,7 @@
         <p:spPr>
           <a:xfrm>
             <a:off x="777240" y="2286000"/>
-            <a:ext cx="2468160" cy="2102400"/>
+            <a:ext cx="2467800" cy="2102040"/>
           </a:xfrm>
           <a:prstGeom prst="rect">
             <a:avLst/>
@@ -11801,7 +11849,7 @@
         <p:spPr>
           <a:xfrm>
             <a:off x="548640" y="4727520"/>
-            <a:ext cx="2925360" cy="273600"/>
+            <a:ext cx="2925000" cy="273240"/>
           </a:xfrm>
           <a:prstGeom prst="rect">
             <a:avLst/>
@@ -11905,7 +11953,7 @@
         <p:spPr>
           <a:xfrm>
             <a:off x="4389120" y="1636920"/>
-            <a:ext cx="7253280" cy="840600"/>
+            <a:ext cx="7252920" cy="840240"/>
           </a:xfrm>
           <a:prstGeom prst="roundRect">
             <a:avLst>
@@ -11950,7 +11998,7 @@
         <p:spPr>
           <a:xfrm>
             <a:off x="4553640" y="1865520"/>
-            <a:ext cx="383400" cy="383400"/>
+            <a:ext cx="383040" cy="383040"/>
           </a:xfrm>
           <a:prstGeom prst="ellipse">
             <a:avLst/>
@@ -11997,7 +12045,7 @@
         <p:spPr>
           <a:xfrm>
             <a:off x="4636080" y="1947600"/>
-            <a:ext cx="218880" cy="218880"/>
+            <a:ext cx="218520" cy="218520"/>
           </a:xfrm>
           <a:prstGeom prst="rect">
             <a:avLst/>
@@ -12017,7 +12065,7 @@
         <p:spPr>
           <a:xfrm>
             <a:off x="5120640" y="1710000"/>
-            <a:ext cx="6338880" cy="291960"/>
+            <a:ext cx="6338520" cy="291600"/>
           </a:xfrm>
           <a:prstGeom prst="rect">
             <a:avLst/>
@@ -12078,7 +12126,7 @@
         <p:spPr>
           <a:xfrm>
             <a:off x="5120640" y="2020680"/>
-            <a:ext cx="6338880" cy="365040"/>
+            <a:ext cx="6338520" cy="364680"/>
           </a:xfrm>
           <a:prstGeom prst="rect">
             <a:avLst/>
@@ -12182,7 +12230,7 @@
         <p:spPr>
           <a:xfrm>
             <a:off x="4389120" y="2734200"/>
-            <a:ext cx="7253280" cy="840600"/>
+            <a:ext cx="7252920" cy="840240"/>
           </a:xfrm>
           <a:prstGeom prst="roundRect">
             <a:avLst>
@@ -12227,7 +12275,7 @@
         <p:spPr>
           <a:xfrm>
             <a:off x="4553640" y="2962800"/>
-            <a:ext cx="383400" cy="383400"/>
+            <a:ext cx="383040" cy="383040"/>
           </a:xfrm>
           <a:prstGeom prst="ellipse">
             <a:avLst/>
@@ -12274,7 +12322,7 @@
         <p:spPr>
           <a:xfrm>
             <a:off x="4636080" y="3044880"/>
-            <a:ext cx="218880" cy="218880"/>
+            <a:ext cx="218520" cy="218520"/>
           </a:xfrm>
           <a:prstGeom prst="rect">
             <a:avLst/>
@@ -12294,7 +12342,7 @@
         <p:spPr>
           <a:xfrm>
             <a:off x="5120640" y="2807280"/>
-            <a:ext cx="6338880" cy="291960"/>
+            <a:ext cx="6338520" cy="291600"/>
           </a:xfrm>
           <a:prstGeom prst="rect">
             <a:avLst/>
@@ -12355,7 +12403,7 @@
         <p:spPr>
           <a:xfrm>
             <a:off x="5120640" y="3117960"/>
-            <a:ext cx="6338880" cy="365040"/>
+            <a:ext cx="6338520" cy="364680"/>
           </a:xfrm>
           <a:prstGeom prst="rect">
             <a:avLst/>
@@ -12459,7 +12507,7 @@
         <p:spPr>
           <a:xfrm>
             <a:off x="4389120" y="3831480"/>
-            <a:ext cx="7253280" cy="840600"/>
+            <a:ext cx="7252920" cy="840240"/>
           </a:xfrm>
           <a:prstGeom prst="roundRect">
             <a:avLst>
@@ -12504,7 +12552,7 @@
         <p:spPr>
           <a:xfrm>
             <a:off x="4553640" y="4060080"/>
-            <a:ext cx="383400" cy="383400"/>
+            <a:ext cx="383040" cy="383040"/>
           </a:xfrm>
           <a:prstGeom prst="ellipse">
             <a:avLst/>
@@ -12551,7 +12599,7 @@
         <p:spPr>
           <a:xfrm>
             <a:off x="4636080" y="4142160"/>
-            <a:ext cx="218880" cy="218880"/>
+            <a:ext cx="218520" cy="218520"/>
           </a:xfrm>
           <a:prstGeom prst="rect">
             <a:avLst/>
@@ -12571,7 +12619,7 @@
         <p:spPr>
           <a:xfrm>
             <a:off x="5120640" y="3904560"/>
-            <a:ext cx="6338880" cy="291960"/>
+            <a:ext cx="6338520" cy="291600"/>
           </a:xfrm>
           <a:prstGeom prst="rect">
             <a:avLst/>
@@ -12632,7 +12680,7 @@
         <p:spPr>
           <a:xfrm>
             <a:off x="5120640" y="4215240"/>
-            <a:ext cx="6338880" cy="365040"/>
+            <a:ext cx="6338520" cy="364680"/>
           </a:xfrm>
           <a:prstGeom prst="rect">
             <a:avLst/>
@@ -12693,7 +12741,7 @@
         <p:spPr>
           <a:xfrm>
             <a:off x="548640" y="5897880"/>
-            <a:ext cx="11093760" cy="365040"/>
+            <a:ext cx="11093400" cy="364680"/>
           </a:xfrm>
           <a:prstGeom prst="rect">
             <a:avLst/>
@@ -12754,7 +12802,7 @@
         <p:spPr>
           <a:xfrm>
             <a:off x="548640" y="6510600"/>
-            <a:ext cx="5485680" cy="273600"/>
+            <a:ext cx="5485320" cy="273240"/>
           </a:xfrm>
           <a:prstGeom prst="rect">
             <a:avLst/>
@@ -12815,7 +12863,7 @@
         <p:spPr>
           <a:xfrm>
             <a:off x="11094480" y="6510600"/>
-            <a:ext cx="547920" cy="273600"/>
+            <a:ext cx="547560" cy="273240"/>
           </a:xfrm>
           <a:prstGeom prst="rect">
             <a:avLst/>
@@ -12913,7 +12961,7 @@
         <p:spPr>
           <a:xfrm>
             <a:off x="548640" y="457200"/>
-            <a:ext cx="383400" cy="383400"/>
+            <a:ext cx="383040" cy="383040"/>
           </a:xfrm>
           <a:prstGeom prst="roundRect">
             <a:avLst>
@@ -12962,7 +13010,7 @@
         <p:spPr>
           <a:xfrm>
             <a:off x="631080" y="539640"/>
-            <a:ext cx="218880" cy="218880"/>
+            <a:ext cx="218520" cy="218520"/>
           </a:xfrm>
           <a:prstGeom prst="rect">
             <a:avLst/>
@@ -12982,7 +13030,7 @@
         <p:spPr>
           <a:xfrm>
             <a:off x="1097280" y="420480"/>
-            <a:ext cx="10545120" cy="456480"/>
+            <a:ext cx="10544760" cy="456120"/>
           </a:xfrm>
           <a:prstGeom prst="rect">
             <a:avLst/>
@@ -13043,7 +13091,7 @@
         <p:spPr>
           <a:xfrm>
             <a:off x="548640" y="1234440"/>
-            <a:ext cx="5363640" cy="5119920"/>
+            <a:ext cx="5363280" cy="5119560"/>
           </a:xfrm>
           <a:prstGeom prst="roundRect">
             <a:avLst>
@@ -13088,7 +13136,7 @@
         <p:spPr>
           <a:xfrm>
             <a:off x="822960" y="1508760"/>
-            <a:ext cx="456480" cy="456480"/>
+            <a:ext cx="456120" cy="456120"/>
           </a:xfrm>
           <a:prstGeom prst="ellipse">
             <a:avLst/>
@@ -13135,7 +13183,7 @@
         <p:spPr>
           <a:xfrm>
             <a:off x="923400" y="1609200"/>
-            <a:ext cx="255240" cy="255240"/>
+            <a:ext cx="254880" cy="254880"/>
           </a:xfrm>
           <a:prstGeom prst="rect">
             <a:avLst/>
@@ -13155,7 +13203,7 @@
         <p:spPr>
           <a:xfrm>
             <a:off x="1444680" y="1508760"/>
-            <a:ext cx="4284720" cy="456480"/>
+            <a:ext cx="4284360" cy="456120"/>
           </a:xfrm>
           <a:prstGeom prst="rect">
             <a:avLst/>
@@ -13185,7 +13233,7 @@
               </a:tabLst>
             </a:pPr>
             <a:r>
-              <a:rPr lang="en-US" sz="1600" b="1" u="none" strike="noStrike">
+              <a:rPr lang="en-US" sz="2200" b="1" u="none" strike="noStrike">
                 <a:solidFill>
                   <a:srgbClr val="13312F"/>
                 </a:solidFill>
@@ -13196,7 +13244,7 @@
               </a:rPr>
               <a:t>Instance Attributes</a:t>
             </a:r>
-            <a:endParaRPr lang="en-US" sz="1600" b="0" u="none" strike="noStrike">
+            <a:endParaRPr lang="en-US" sz="2200" b="0" u="none" strike="noStrike">
               <a:solidFill>
                 <a:srgbClr val="000000"/>
               </a:solidFill>
@@ -13216,7 +13264,7 @@
         <p:spPr>
           <a:xfrm>
             <a:off x="841320" y="2194560"/>
-            <a:ext cx="4778280" cy="3931200"/>
+            <a:ext cx="4777920" cy="3930840"/>
           </a:xfrm>
           <a:prstGeom prst="rect">
             <a:avLst/>
@@ -13251,7 +13299,7 @@
               <a:buChar char="▪"/>
             </a:pPr>
             <a:r>
-              <a:rPr lang="en-US" sz="1250" b="0" u="none" strike="noStrike">
+              <a:rPr lang="en-US" sz="2000" b="0" u="none" strike="noStrike">
                 <a:solidFill>
                   <a:srgbClr val="3F4A45"/>
                 </a:solidFill>
@@ -13262,7 +13310,7 @@
               </a:rPr>
               <a:t>Set inside __init__ using self.name = ...</a:t>
             </a:r>
-            <a:endParaRPr lang="en-US" sz="1250" b="0" u="none" strike="noStrike">
+            <a:endParaRPr lang="en-US" sz="2000" b="0" u="none" strike="noStrike">
               <a:solidFill>
                 <a:srgbClr val="000000"/>
               </a:solidFill>
@@ -13286,7 +13334,7 @@
               <a:buChar char="▪"/>
             </a:pPr>
             <a:r>
-              <a:rPr lang="en-US" sz="1250" b="0" u="none" strike="noStrike">
+              <a:rPr lang="en-US" sz="2000" b="0" u="none" strike="noStrike">
                 <a:solidFill>
                   <a:srgbClr val="3F4A45"/>
                 </a:solidFill>
@@ -13297,7 +13345,7 @@
               </a:rPr>
               <a:t>Belong to one specific object — each object has its own separate copy</a:t>
             </a:r>
-            <a:endParaRPr lang="en-US" sz="1250" b="0" u="none" strike="noStrike">
+            <a:endParaRPr lang="en-US" sz="2000" b="0" u="none" strike="noStrike">
               <a:solidFill>
                 <a:srgbClr val="000000"/>
               </a:solidFill>
@@ -13321,7 +13369,7 @@
               <a:buChar char="▪"/>
             </a:pPr>
             <a:r>
-              <a:rPr lang="en-US" sz="1250" b="0" u="none" strike="noStrike">
+              <a:rPr lang="en-US" sz="2000" b="0" u="none" strike="noStrike">
                 <a:solidFill>
                   <a:srgbClr val="3F4A45"/>
                 </a:solidFill>
@@ -13332,7 +13380,7 @@
               </a:rPr>
               <a:t>This is what you’ll use for almost all object data — name, balance, position</a:t>
             </a:r>
-            <a:endParaRPr lang="en-US" sz="1250" b="0" u="none" strike="noStrike">
+            <a:endParaRPr lang="en-US" sz="2000" b="0" u="none" strike="noStrike">
               <a:solidFill>
                 <a:srgbClr val="000000"/>
               </a:solidFill>
@@ -13352,7 +13400,7 @@
         <p:spPr>
           <a:xfrm>
             <a:off x="6278760" y="1234440"/>
-            <a:ext cx="5363640" cy="5119920"/>
+            <a:ext cx="5363280" cy="5119560"/>
           </a:xfrm>
           <a:prstGeom prst="roundRect">
             <a:avLst>
@@ -13397,7 +13445,7 @@
         <p:spPr>
           <a:xfrm>
             <a:off x="6553080" y="1508760"/>
-            <a:ext cx="456480" cy="456480"/>
+            <a:ext cx="456120" cy="456120"/>
           </a:xfrm>
           <a:prstGeom prst="ellipse">
             <a:avLst/>
@@ -13444,7 +13492,7 @@
         <p:spPr>
           <a:xfrm>
             <a:off x="6653520" y="1609200"/>
-            <a:ext cx="255240" cy="255240"/>
+            <a:ext cx="254880" cy="254880"/>
           </a:xfrm>
           <a:prstGeom prst="rect">
             <a:avLst/>
@@ -13464,7 +13512,7 @@
         <p:spPr>
           <a:xfrm>
             <a:off x="7174800" y="1508760"/>
-            <a:ext cx="4284720" cy="456480"/>
+            <a:ext cx="4284360" cy="456120"/>
           </a:xfrm>
           <a:prstGeom prst="rect">
             <a:avLst/>
@@ -13494,7 +13542,7 @@
               </a:tabLst>
             </a:pPr>
             <a:r>
-              <a:rPr lang="en-US" sz="1600" b="1" u="none" strike="noStrike">
+              <a:rPr lang="en-US" sz="2200" b="1" u="none" strike="noStrike">
                 <a:solidFill>
                   <a:srgbClr val="13312F"/>
                 </a:solidFill>
@@ -13505,7 +13553,7 @@
               </a:rPr>
               <a:t>Class Attributes</a:t>
             </a:r>
-            <a:endParaRPr lang="en-US" sz="1600" b="0" u="none" strike="noStrike">
+            <a:endParaRPr lang="en-US" sz="2200" b="0" u="none" strike="noStrike">
               <a:solidFill>
                 <a:srgbClr val="000000"/>
               </a:solidFill>
@@ -13525,7 +13573,7 @@
         <p:spPr>
           <a:xfrm>
             <a:off x="6571440" y="2194560"/>
-            <a:ext cx="4778280" cy="3931200"/>
+            <a:ext cx="4777920" cy="3930840"/>
           </a:xfrm>
           <a:prstGeom prst="rect">
             <a:avLst/>
@@ -13560,7 +13608,7 @@
               <a:buChar char="▪"/>
             </a:pPr>
             <a:r>
-              <a:rPr lang="en-US" sz="1250" b="0" u="none" strike="noStrike">
+              <a:rPr lang="en-US" sz="2000" b="0" u="none" strike="noStrike">
                 <a:solidFill>
                   <a:srgbClr val="3F4A45"/>
                 </a:solidFill>
@@ -13571,7 +13619,7 @@
               </a:rPr>
               <a:t>Defined directly inside the class body, outside any method</a:t>
             </a:r>
-            <a:endParaRPr lang="en-US" sz="1250" b="0" u="none" strike="noStrike">
+            <a:endParaRPr lang="en-US" sz="2000" b="0" u="none" strike="noStrike">
               <a:solidFill>
                 <a:srgbClr val="000000"/>
               </a:solidFill>
@@ -13595,7 +13643,7 @@
               <a:buChar char="▪"/>
             </a:pPr>
             <a:r>
-              <a:rPr lang="en-US" sz="1250" b="0" u="none" strike="noStrike">
+              <a:rPr lang="en-US" sz="2000" b="0" u="none" strike="noStrike">
                 <a:solidFill>
                   <a:srgbClr val="3F4A45"/>
                 </a:solidFill>
@@ -13606,7 +13654,7 @@
               </a:rPr>
               <a:t>Shared by every object built from that class — one copy, not one per object</a:t>
             </a:r>
-            <a:endParaRPr lang="en-US" sz="1250" b="0" u="none" strike="noStrike">
+            <a:endParaRPr lang="en-US" sz="2000" b="0" u="none" strike="noStrike">
               <a:solidFill>
                 <a:srgbClr val="000000"/>
               </a:solidFill>
@@ -13630,7 +13678,7 @@
               <a:buChar char="▪"/>
             </a:pPr>
             <a:r>
-              <a:rPr lang="en-US" sz="1250" b="0" u="none" strike="noStrike">
+              <a:rPr lang="en-US" sz="2000" b="0" u="none" strike="noStrike">
                 <a:solidFill>
                   <a:srgbClr val="3F4A45"/>
                 </a:solidFill>
@@ -13641,7 +13689,7 @@
               </a:rPr>
               <a:t>Good for constants or defaults every instance should share, like species = "Canine"</a:t>
             </a:r>
-            <a:endParaRPr lang="en-US" sz="1250" b="0" u="none" strike="noStrike">
+            <a:endParaRPr lang="en-US" sz="2000" b="0" u="none" strike="noStrike">
               <a:solidFill>
                 <a:srgbClr val="000000"/>
               </a:solidFill>
@@ -13661,7 +13709,7 @@
         <p:spPr>
           <a:xfrm>
             <a:off x="548640" y="6510600"/>
-            <a:ext cx="5485680" cy="273600"/>
+            <a:ext cx="5485320" cy="273240"/>
           </a:xfrm>
           <a:prstGeom prst="rect">
             <a:avLst/>
@@ -13722,7 +13770,7 @@
         <p:spPr>
           <a:xfrm>
             <a:off x="11094480" y="6510600"/>
-            <a:ext cx="547920" cy="273600"/>
+            <a:ext cx="547560" cy="273240"/>
           </a:xfrm>
           <a:prstGeom prst="rect">
             <a:avLst/>
@@ -13820,7 +13868,7 @@
         <p:spPr>
           <a:xfrm>
             <a:off x="548640" y="457200"/>
-            <a:ext cx="383400" cy="383400"/>
+            <a:ext cx="383040" cy="383040"/>
           </a:xfrm>
           <a:prstGeom prst="roundRect">
             <a:avLst>
@@ -13869,7 +13917,7 @@
         <p:spPr>
           <a:xfrm>
             <a:off x="631080" y="539640"/>
-            <a:ext cx="218880" cy="218880"/>
+            <a:ext cx="218520" cy="218520"/>
           </a:xfrm>
           <a:prstGeom prst="rect">
             <a:avLst/>
@@ -13889,7 +13937,7 @@
         <p:spPr>
           <a:xfrm>
             <a:off x="1097280" y="420480"/>
-            <a:ext cx="10545120" cy="456480"/>
+            <a:ext cx="10544760" cy="456120"/>
           </a:xfrm>
           <a:prstGeom prst="rect">
             <a:avLst/>
@@ -13950,7 +13998,7 @@
         <p:spPr>
           <a:xfrm>
             <a:off x="548640" y="1234440"/>
-            <a:ext cx="11093760" cy="5119920"/>
+            <a:ext cx="11093400" cy="5119560"/>
           </a:xfrm>
           <a:prstGeom prst="roundRect">
             <a:avLst>
@@ -13995,7 +14043,7 @@
         <p:spPr>
           <a:xfrm>
             <a:off x="868680" y="1435680"/>
-            <a:ext cx="10453680" cy="365040"/>
+            <a:ext cx="10453320" cy="364680"/>
           </a:xfrm>
           <a:prstGeom prst="rect">
             <a:avLst/>
@@ -14056,7 +14104,7 @@
         <p:spPr>
           <a:xfrm>
             <a:off x="868680" y="2296440"/>
-            <a:ext cx="310320" cy="310320"/>
+            <a:ext cx="309960" cy="309960"/>
           </a:xfrm>
           <a:prstGeom prst="ellipse">
             <a:avLst/>
@@ -14099,7 +14147,7 @@
         <p:spPr>
           <a:xfrm>
             <a:off x="868680" y="2296440"/>
-            <a:ext cx="310320" cy="310320"/>
+            <a:ext cx="309960" cy="309960"/>
           </a:xfrm>
           <a:prstGeom prst="rect">
             <a:avLst/>
@@ -14160,7 +14208,7 @@
         <p:spPr>
           <a:xfrm>
             <a:off x="1408320" y="1920240"/>
-            <a:ext cx="9914040" cy="1062360"/>
+            <a:ext cx="9913680" cy="1062000"/>
           </a:xfrm>
           <a:prstGeom prst="rect">
             <a:avLst/>
@@ -14221,7 +14269,7 @@
         <p:spPr>
           <a:xfrm>
             <a:off x="868680" y="3359160"/>
-            <a:ext cx="310320" cy="310320"/>
+            <a:ext cx="309960" cy="309960"/>
           </a:xfrm>
           <a:prstGeom prst="ellipse">
             <a:avLst/>
@@ -14264,7 +14312,7 @@
         <p:spPr>
           <a:xfrm>
             <a:off x="868680" y="3359160"/>
-            <a:ext cx="310320" cy="310320"/>
+            <a:ext cx="309960" cy="309960"/>
           </a:xfrm>
           <a:prstGeom prst="rect">
             <a:avLst/>
@@ -14325,7 +14373,7 @@
         <p:spPr>
           <a:xfrm>
             <a:off x="1408320" y="2983320"/>
-            <a:ext cx="9914040" cy="1062360"/>
+            <a:ext cx="9913680" cy="1062000"/>
           </a:xfrm>
           <a:prstGeom prst="rect">
             <a:avLst/>
@@ -14386,7 +14434,7 @@
         <p:spPr>
           <a:xfrm>
             <a:off x="868680" y="4422240"/>
-            <a:ext cx="310320" cy="310320"/>
+            <a:ext cx="309960" cy="309960"/>
           </a:xfrm>
           <a:prstGeom prst="ellipse">
             <a:avLst/>
@@ -14429,7 +14477,7 @@
         <p:spPr>
           <a:xfrm>
             <a:off x="868680" y="4422240"/>
-            <a:ext cx="310320" cy="310320"/>
+            <a:ext cx="309960" cy="309960"/>
           </a:xfrm>
           <a:prstGeom prst="rect">
             <a:avLst/>
@@ -14490,7 +14538,7 @@
         <p:spPr>
           <a:xfrm>
             <a:off x="1408320" y="4046400"/>
-            <a:ext cx="9914040" cy="1062360"/>
+            <a:ext cx="9913680" cy="1062000"/>
           </a:xfrm>
           <a:prstGeom prst="rect">
             <a:avLst/>
@@ -14551,7 +14599,7 @@
         <p:spPr>
           <a:xfrm>
             <a:off x="868680" y="5485320"/>
-            <a:ext cx="310320" cy="310320"/>
+            <a:ext cx="309960" cy="309960"/>
           </a:xfrm>
           <a:prstGeom prst="ellipse">
             <a:avLst/>
@@ -14594,7 +14642,7 @@
         <p:spPr>
           <a:xfrm>
             <a:off x="868680" y="5485320"/>
-            <a:ext cx="310320" cy="310320"/>
+            <a:ext cx="309960" cy="309960"/>
           </a:xfrm>
           <a:prstGeom prst="rect">
             <a:avLst/>
@@ -14655,7 +14703,7 @@
         <p:spPr>
           <a:xfrm>
             <a:off x="1408320" y="5109120"/>
-            <a:ext cx="9914040" cy="1062360"/>
+            <a:ext cx="9913680" cy="1062000"/>
           </a:xfrm>
           <a:prstGeom prst="rect">
             <a:avLst/>
@@ -14716,7 +14764,7 @@
         <p:spPr>
           <a:xfrm>
             <a:off x="548640" y="6510600"/>
-            <a:ext cx="5485680" cy="273600"/>
+            <a:ext cx="5485320" cy="273240"/>
           </a:xfrm>
           <a:prstGeom prst="rect">
             <a:avLst/>
@@ -14777,7 +14825,7 @@
         <p:spPr>
           <a:xfrm>
             <a:off x="11094480" y="6510600"/>
-            <a:ext cx="547920" cy="273600"/>
+            <a:ext cx="547560" cy="273240"/>
           </a:xfrm>
           <a:prstGeom prst="rect">
             <a:avLst/>
@@ -14875,7 +14923,7 @@
         <p:spPr>
           <a:xfrm>
             <a:off x="-2286000" y="3657600"/>
-            <a:ext cx="6400080" cy="6400080"/>
+            <a:ext cx="6399720" cy="6399720"/>
           </a:xfrm>
           <a:prstGeom prst="ellipse">
             <a:avLst/>
@@ -14918,7 +14966,7 @@
         <p:spPr>
           <a:xfrm>
             <a:off x="8229600" y="-2743200"/>
-            <a:ext cx="6400080" cy="6400080"/>
+            <a:ext cx="6399720" cy="6399720"/>
           </a:xfrm>
           <a:prstGeom prst="ellipse">
             <a:avLst/>
@@ -14961,7 +15009,7 @@
         <p:spPr>
           <a:xfrm>
             <a:off x="5638680" y="868680"/>
-            <a:ext cx="913680" cy="913680"/>
+            <a:ext cx="913320" cy="913320"/>
           </a:xfrm>
           <a:prstGeom prst="ellipse">
             <a:avLst/>
@@ -15008,7 +15056,7 @@
         <p:spPr>
           <a:xfrm>
             <a:off x="5876280" y="1097280"/>
-            <a:ext cx="438120" cy="438120"/>
+            <a:ext cx="437760" cy="437760"/>
           </a:xfrm>
           <a:prstGeom prst="rect">
             <a:avLst/>
@@ -15028,7 +15076,7 @@
         <p:spPr>
           <a:xfrm>
             <a:off x="914400" y="2057400"/>
-            <a:ext cx="10362240" cy="291960"/>
+            <a:ext cx="10361880" cy="291600"/>
           </a:xfrm>
           <a:prstGeom prst="rect">
             <a:avLst/>
@@ -15089,7 +15137,7 @@
         <p:spPr>
           <a:xfrm>
             <a:off x="1188720" y="2441520"/>
-            <a:ext cx="9813600" cy="1005120"/>
+            <a:ext cx="9813240" cy="1004760"/>
           </a:xfrm>
           <a:prstGeom prst="rect">
             <a:avLst/>
@@ -15150,7 +15198,7 @@
         <p:spPr>
           <a:xfrm>
             <a:off x="1920240" y="3630240"/>
-            <a:ext cx="8350560" cy="822240"/>
+            <a:ext cx="8350200" cy="821880"/>
           </a:xfrm>
           <a:prstGeom prst="rect">
             <a:avLst/>
@@ -15211,7 +15259,7 @@
         <p:spPr>
           <a:xfrm>
             <a:off x="11094480" y="6492240"/>
-            <a:ext cx="547920" cy="273600"/>
+            <a:ext cx="547560" cy="273240"/>
           </a:xfrm>
           <a:prstGeom prst="rect">
             <a:avLst/>
@@ -15309,7 +15357,7 @@
         <p:spPr>
           <a:xfrm>
             <a:off x="548640" y="457200"/>
-            <a:ext cx="383400" cy="383400"/>
+            <a:ext cx="383040" cy="383040"/>
           </a:xfrm>
           <a:prstGeom prst="roundRect">
             <a:avLst>
@@ -15358,7 +15406,7 @@
         <p:spPr>
           <a:xfrm>
             <a:off x="631080" y="539640"/>
-            <a:ext cx="218880" cy="218880"/>
+            <a:ext cx="218520" cy="218520"/>
           </a:xfrm>
           <a:prstGeom prst="rect">
             <a:avLst/>
@@ -15378,7 +15426,7 @@
         <p:spPr>
           <a:xfrm>
             <a:off x="1097280" y="420480"/>
-            <a:ext cx="10545120" cy="456480"/>
+            <a:ext cx="10544760" cy="456120"/>
           </a:xfrm>
           <a:prstGeom prst="rect">
             <a:avLst/>
@@ -15439,7 +15487,7 @@
         <p:spPr>
           <a:xfrm>
             <a:off x="548640" y="1234440"/>
-            <a:ext cx="2532960" cy="5119920"/>
+            <a:ext cx="2532600" cy="5119560"/>
           </a:xfrm>
           <a:prstGeom prst="roundRect">
             <a:avLst>
@@ -15484,7 +15532,7 @@
         <p:spPr>
           <a:xfrm>
             <a:off x="1426680" y="1600200"/>
-            <a:ext cx="776520" cy="776520"/>
+            <a:ext cx="776160" cy="776160"/>
           </a:xfrm>
           <a:prstGeom prst="ellipse">
             <a:avLst/>
@@ -15531,7 +15579,7 @@
         <p:spPr>
           <a:xfrm>
             <a:off x="1623240" y="1792080"/>
-            <a:ext cx="383400" cy="383400"/>
+            <a:ext cx="383040" cy="383040"/>
           </a:xfrm>
           <a:prstGeom prst="rect">
             <a:avLst/>
@@ -15551,7 +15599,7 @@
         <p:spPr>
           <a:xfrm>
             <a:off x="731520" y="2560320"/>
-            <a:ext cx="2167200" cy="365040"/>
+            <a:ext cx="2166840" cy="364680"/>
           </a:xfrm>
           <a:prstGeom prst="rect">
             <a:avLst/>
@@ -15612,7 +15660,7 @@
         <p:spPr>
           <a:xfrm>
             <a:off x="777240" y="2971800"/>
-            <a:ext cx="2075760" cy="3199680"/>
+            <a:ext cx="2075400" cy="3199320"/>
           </a:xfrm>
           <a:prstGeom prst="rect">
             <a:avLst/>
@@ -15673,7 +15721,7 @@
         <p:spPr>
           <a:xfrm>
             <a:off x="3402360" y="1234440"/>
-            <a:ext cx="2532960" cy="5119920"/>
+            <a:ext cx="2532600" cy="5119560"/>
           </a:xfrm>
           <a:prstGeom prst="roundRect">
             <a:avLst>
@@ -15718,7 +15766,7 @@
         <p:spPr>
           <a:xfrm>
             <a:off x="4280400" y="1600200"/>
-            <a:ext cx="776520" cy="776520"/>
+            <a:ext cx="776160" cy="776160"/>
           </a:xfrm>
           <a:prstGeom prst="ellipse">
             <a:avLst/>
@@ -15765,7 +15813,7 @@
         <p:spPr>
           <a:xfrm>
             <a:off x="4476960" y="1792080"/>
-            <a:ext cx="383400" cy="383400"/>
+            <a:ext cx="383040" cy="383040"/>
           </a:xfrm>
           <a:prstGeom prst="rect">
             <a:avLst/>
@@ -15785,7 +15833,7 @@
         <p:spPr>
           <a:xfrm>
             <a:off x="3585240" y="2560320"/>
-            <a:ext cx="2167200" cy="365040"/>
+            <a:ext cx="2166840" cy="364680"/>
           </a:xfrm>
           <a:prstGeom prst="rect">
             <a:avLst/>
@@ -15846,7 +15894,7 @@
         <p:spPr>
           <a:xfrm>
             <a:off x="3630960" y="2971800"/>
-            <a:ext cx="2075760" cy="3199680"/>
+            <a:ext cx="2075400" cy="3199320"/>
           </a:xfrm>
           <a:prstGeom prst="rect">
             <a:avLst/>
@@ -15907,7 +15955,7 @@
         <p:spPr>
           <a:xfrm>
             <a:off x="6255720" y="1234440"/>
-            <a:ext cx="2532960" cy="5119920"/>
+            <a:ext cx="2532600" cy="5119560"/>
           </a:xfrm>
           <a:prstGeom prst="roundRect">
             <a:avLst>
@@ -15952,7 +16000,7 @@
         <p:spPr>
           <a:xfrm>
             <a:off x="7134120" y="1600200"/>
-            <a:ext cx="776520" cy="776520"/>
+            <a:ext cx="776160" cy="776160"/>
           </a:xfrm>
           <a:prstGeom prst="ellipse">
             <a:avLst/>
@@ -15999,7 +16047,7 @@
         <p:spPr>
           <a:xfrm>
             <a:off x="7330680" y="1792080"/>
-            <a:ext cx="383400" cy="383400"/>
+            <a:ext cx="383040" cy="383040"/>
           </a:xfrm>
           <a:prstGeom prst="rect">
             <a:avLst/>
@@ -16019,7 +16067,7 @@
         <p:spPr>
           <a:xfrm>
             <a:off x="6438600" y="2560320"/>
-            <a:ext cx="2167200" cy="365040"/>
+            <a:ext cx="2166840" cy="364680"/>
           </a:xfrm>
           <a:prstGeom prst="rect">
             <a:avLst/>
@@ -16080,7 +16128,7 @@
         <p:spPr>
           <a:xfrm>
             <a:off x="6484320" y="2971800"/>
-            <a:ext cx="2075760" cy="3199680"/>
+            <a:ext cx="2075400" cy="3199320"/>
           </a:xfrm>
           <a:prstGeom prst="rect">
             <a:avLst/>
@@ -16141,7 +16189,7 @@
         <p:spPr>
           <a:xfrm>
             <a:off x="9109440" y="1234440"/>
-            <a:ext cx="2532960" cy="5119920"/>
+            <a:ext cx="2532600" cy="5119560"/>
           </a:xfrm>
           <a:prstGeom prst="roundRect">
             <a:avLst>
@@ -16186,7 +16234,7 @@
         <p:spPr>
           <a:xfrm>
             <a:off x="9987480" y="1600200"/>
-            <a:ext cx="776520" cy="776520"/>
+            <a:ext cx="776160" cy="776160"/>
           </a:xfrm>
           <a:prstGeom prst="ellipse">
             <a:avLst/>
@@ -16233,7 +16281,7 @@
         <p:spPr>
           <a:xfrm>
             <a:off x="10184400" y="1792080"/>
-            <a:ext cx="383400" cy="383400"/>
+            <a:ext cx="383040" cy="383040"/>
           </a:xfrm>
           <a:prstGeom prst="rect">
             <a:avLst/>
@@ -16253,7 +16301,7 @@
         <p:spPr>
           <a:xfrm>
             <a:off x="9292320" y="2560320"/>
-            <a:ext cx="2167200" cy="365040"/>
+            <a:ext cx="2166840" cy="364680"/>
           </a:xfrm>
           <a:prstGeom prst="rect">
             <a:avLst/>
@@ -16314,7 +16362,7 @@
         <p:spPr>
           <a:xfrm>
             <a:off x="9338040" y="2971800"/>
-            <a:ext cx="2075760" cy="3199680"/>
+            <a:ext cx="2075400" cy="3199320"/>
           </a:xfrm>
           <a:prstGeom prst="rect">
             <a:avLst/>
@@ -16375,7 +16423,7 @@
         <p:spPr>
           <a:xfrm>
             <a:off x="548640" y="6510600"/>
-            <a:ext cx="5485680" cy="273600"/>
+            <a:ext cx="5485320" cy="273240"/>
           </a:xfrm>
           <a:prstGeom prst="rect">
             <a:avLst/>
@@ -16436,7 +16484,7 @@
         <p:spPr>
           <a:xfrm>
             <a:off x="11094480" y="6510600"/>
-            <a:ext cx="547920" cy="273600"/>
+            <a:ext cx="547560" cy="273240"/>
           </a:xfrm>
           <a:prstGeom prst="rect">
             <a:avLst/>
@@ -16534,7 +16582,7 @@
         <p:spPr>
           <a:xfrm>
             <a:off x="548640" y="457200"/>
-            <a:ext cx="383400" cy="383400"/>
+            <a:ext cx="383040" cy="383040"/>
           </a:xfrm>
           <a:prstGeom prst="roundRect">
             <a:avLst>
@@ -16583,7 +16631,7 @@
         <p:spPr>
           <a:xfrm>
             <a:off x="631080" y="539640"/>
-            <a:ext cx="218880" cy="218880"/>
+            <a:ext cx="218520" cy="218520"/>
           </a:xfrm>
           <a:prstGeom prst="rect">
             <a:avLst/>
@@ -16603,7 +16651,7 @@
         <p:spPr>
           <a:xfrm>
             <a:off x="1097280" y="420480"/>
-            <a:ext cx="10545120" cy="456480"/>
+            <a:ext cx="10544760" cy="456120"/>
           </a:xfrm>
           <a:prstGeom prst="rect">
             <a:avLst/>
@@ -16664,7 +16712,7 @@
         <p:spPr>
           <a:xfrm>
             <a:off x="548640" y="1234440"/>
-            <a:ext cx="3245400" cy="5119920"/>
+            <a:ext cx="3245040" cy="5119560"/>
           </a:xfrm>
           <a:prstGeom prst="roundRect">
             <a:avLst>
@@ -16709,7 +16757,7 @@
         <p:spPr>
           <a:xfrm>
             <a:off x="1645920" y="1737360"/>
-            <a:ext cx="1050840" cy="1050840"/>
+            <a:ext cx="1050480" cy="1050480"/>
           </a:xfrm>
           <a:prstGeom prst="ellipse">
             <a:avLst/>
@@ -16756,7 +16804,7 @@
         <p:spPr>
           <a:xfrm>
             <a:off x="1906560" y="2002680"/>
-            <a:ext cx="529560" cy="529560"/>
+            <a:ext cx="529200" cy="529200"/>
           </a:xfrm>
           <a:prstGeom prst="rect">
             <a:avLst/>
@@ -16776,7 +16824,7 @@
         <p:spPr>
           <a:xfrm>
             <a:off x="731520" y="3017520"/>
-            <a:ext cx="2879640" cy="3062520"/>
+            <a:ext cx="2879280" cy="3062160"/>
           </a:xfrm>
           <a:prstGeom prst="rect">
             <a:avLst/>
@@ -16897,7 +16945,7 @@
         <p:spPr>
           <a:xfrm>
             <a:off x="4206240" y="1280160"/>
-            <a:ext cx="7436160" cy="5028480"/>
+            <a:ext cx="7435800" cy="5028120"/>
           </a:xfrm>
           <a:prstGeom prst="rect">
             <a:avLst/>
@@ -17068,7 +17116,7 @@
         <p:spPr>
           <a:xfrm>
             <a:off x="548640" y="6510600"/>
-            <a:ext cx="5485680" cy="273600"/>
+            <a:ext cx="5485320" cy="273240"/>
           </a:xfrm>
           <a:prstGeom prst="rect">
             <a:avLst/>
@@ -17129,7 +17177,7 @@
         <p:spPr>
           <a:xfrm>
             <a:off x="11094480" y="6510600"/>
-            <a:ext cx="547920" cy="273600"/>
+            <a:ext cx="547560" cy="273240"/>
           </a:xfrm>
           <a:prstGeom prst="rect">
             <a:avLst/>
@@ -17227,7 +17275,7 @@
         <p:spPr>
           <a:xfrm>
             <a:off x="548640" y="457200"/>
-            <a:ext cx="383400" cy="383400"/>
+            <a:ext cx="383040" cy="383040"/>
           </a:xfrm>
           <a:prstGeom prst="roundRect">
             <a:avLst>
@@ -17276,7 +17324,7 @@
         <p:spPr>
           <a:xfrm>
             <a:off x="631080" y="539640"/>
-            <a:ext cx="218880" cy="218880"/>
+            <a:ext cx="218520" cy="218520"/>
           </a:xfrm>
           <a:prstGeom prst="rect">
             <a:avLst/>
@@ -17296,7 +17344,7 @@
         <p:spPr>
           <a:xfrm>
             <a:off x="1097280" y="420480"/>
-            <a:ext cx="10545120" cy="456480"/>
+            <a:ext cx="10544760" cy="456120"/>
           </a:xfrm>
           <a:prstGeom prst="rect">
             <a:avLst/>
@@ -17357,7 +17405,7 @@
         <p:spPr>
           <a:xfrm>
             <a:off x="548640" y="1234440"/>
-            <a:ext cx="11093760" cy="1197000"/>
+            <a:ext cx="11093400" cy="1196640"/>
           </a:xfrm>
           <a:prstGeom prst="rect">
             <a:avLst/>
@@ -17493,7 +17541,7 @@
         <p:spPr>
           <a:xfrm>
             <a:off x="548640" y="2569320"/>
-            <a:ext cx="11093760" cy="3785040"/>
+            <a:ext cx="11093400" cy="3784680"/>
           </a:xfrm>
           <a:prstGeom prst="roundRect">
             <a:avLst>
@@ -17538,7 +17586,7 @@
         <p:spPr>
           <a:xfrm>
             <a:off x="868680" y="2752200"/>
-            <a:ext cx="10453680" cy="3419280"/>
+            <a:ext cx="10453320" cy="3418920"/>
           </a:xfrm>
           <a:prstGeom prst="rect">
             <a:avLst/>
@@ -17869,7 +17917,7 @@
         <p:spPr>
           <a:xfrm>
             <a:off x="548640" y="6510600"/>
-            <a:ext cx="5485680" cy="273600"/>
+            <a:ext cx="5485320" cy="273240"/>
           </a:xfrm>
           <a:prstGeom prst="rect">
             <a:avLst/>
@@ -17930,7 +17978,7 @@
         <p:spPr>
           <a:xfrm>
             <a:off x="11094480" y="6510600"/>
-            <a:ext cx="547920" cy="273600"/>
+            <a:ext cx="547560" cy="273240"/>
           </a:xfrm>
           <a:prstGeom prst="rect">
             <a:avLst/>
@@ -18028,7 +18076,7 @@
         <p:spPr>
           <a:xfrm>
             <a:off x="548640" y="457200"/>
-            <a:ext cx="383400" cy="383400"/>
+            <a:ext cx="383040" cy="383040"/>
           </a:xfrm>
           <a:prstGeom prst="roundRect">
             <a:avLst>
@@ -18077,7 +18125,7 @@
         <p:spPr>
           <a:xfrm>
             <a:off x="631080" y="539640"/>
-            <a:ext cx="218880" cy="218880"/>
+            <a:ext cx="218520" cy="218520"/>
           </a:xfrm>
           <a:prstGeom prst="rect">
             <a:avLst/>
@@ -18097,7 +18145,7 @@
         <p:spPr>
           <a:xfrm>
             <a:off x="1097280" y="420480"/>
-            <a:ext cx="10545120" cy="456480"/>
+            <a:ext cx="10544760" cy="456120"/>
           </a:xfrm>
           <a:prstGeom prst="rect">
             <a:avLst/>
@@ -18158,7 +18206,7 @@
         <p:spPr>
           <a:xfrm>
             <a:off x="548640" y="1234440"/>
-            <a:ext cx="11093760" cy="1197000"/>
+            <a:ext cx="11093400" cy="1196640"/>
           </a:xfrm>
           <a:prstGeom prst="rect">
             <a:avLst/>
@@ -18294,7 +18342,7 @@
         <p:spPr>
           <a:xfrm>
             <a:off x="548640" y="2569320"/>
-            <a:ext cx="11093760" cy="3785040"/>
+            <a:ext cx="11093400" cy="3784680"/>
           </a:xfrm>
           <a:prstGeom prst="roundRect">
             <a:avLst>
@@ -18339,7 +18387,7 @@
         <p:spPr>
           <a:xfrm>
             <a:off x="868680" y="2752200"/>
-            <a:ext cx="10453680" cy="3419280"/>
+            <a:ext cx="10453320" cy="3418920"/>
           </a:xfrm>
           <a:prstGeom prst="rect">
             <a:avLst/>
@@ -18880,7 +18928,7 @@
         <p:spPr>
           <a:xfrm>
             <a:off x="548640" y="6510600"/>
-            <a:ext cx="5485680" cy="273600"/>
+            <a:ext cx="5485320" cy="273240"/>
           </a:xfrm>
           <a:prstGeom prst="rect">
             <a:avLst/>
@@ -18941,7 +18989,7 @@
         <p:spPr>
           <a:xfrm>
             <a:off x="11094480" y="6510600"/>
-            <a:ext cx="547920" cy="273600"/>
+            <a:ext cx="547560" cy="273240"/>
           </a:xfrm>
           <a:prstGeom prst="rect">
             <a:avLst/>
@@ -19039,7 +19087,7 @@
         <p:spPr>
           <a:xfrm>
             <a:off x="548640" y="457200"/>
-            <a:ext cx="383400" cy="383400"/>
+            <a:ext cx="383040" cy="383040"/>
           </a:xfrm>
           <a:prstGeom prst="roundRect">
             <a:avLst>
@@ -19088,7 +19136,7 @@
         <p:spPr>
           <a:xfrm>
             <a:off x="631080" y="539640"/>
-            <a:ext cx="218880" cy="218880"/>
+            <a:ext cx="218520" cy="218520"/>
           </a:xfrm>
           <a:prstGeom prst="rect">
             <a:avLst/>
@@ -19108,7 +19156,7 @@
         <p:spPr>
           <a:xfrm>
             <a:off x="1097280" y="420480"/>
-            <a:ext cx="10545120" cy="456480"/>
+            <a:ext cx="10544760" cy="456120"/>
           </a:xfrm>
           <a:prstGeom prst="rect">
             <a:avLst/>
@@ -19169,7 +19217,7 @@
         <p:spPr>
           <a:xfrm>
             <a:off x="548640" y="1396080"/>
-            <a:ext cx="310320" cy="310320"/>
+            <a:ext cx="309960" cy="309960"/>
           </a:xfrm>
           <a:prstGeom prst="ellipse">
             <a:avLst/>
@@ -19216,7 +19264,7 @@
         <p:spPr>
           <a:xfrm>
             <a:off x="617040" y="1464480"/>
-            <a:ext cx="173520" cy="173520"/>
+            <a:ext cx="173160" cy="173160"/>
           </a:xfrm>
           <a:prstGeom prst="rect">
             <a:avLst/>
@@ -19236,7 +19284,7 @@
         <p:spPr>
           <a:xfrm>
             <a:off x="1060560" y="1234440"/>
-            <a:ext cx="10581480" cy="633600"/>
+            <a:ext cx="10581120" cy="633240"/>
           </a:xfrm>
           <a:prstGeom prst="rect">
             <a:avLst/>
@@ -19297,7 +19345,7 @@
         <p:spPr>
           <a:xfrm>
             <a:off x="548640" y="2030400"/>
-            <a:ext cx="310320" cy="310320"/>
+            <a:ext cx="309960" cy="309960"/>
           </a:xfrm>
           <a:prstGeom prst="ellipse">
             <a:avLst/>
@@ -19344,7 +19392,7 @@
         <p:spPr>
           <a:xfrm>
             <a:off x="617040" y="2098800"/>
-            <a:ext cx="173520" cy="173520"/>
+            <a:ext cx="173160" cy="173160"/>
           </a:xfrm>
           <a:prstGeom prst="rect">
             <a:avLst/>
@@ -19364,7 +19412,7 @@
         <p:spPr>
           <a:xfrm>
             <a:off x="1060560" y="1868760"/>
-            <a:ext cx="10581480" cy="633600"/>
+            <a:ext cx="10581120" cy="633240"/>
           </a:xfrm>
           <a:prstGeom prst="rect">
             <a:avLst/>
@@ -19425,7 +19473,7 @@
         <p:spPr>
           <a:xfrm>
             <a:off x="548640" y="2665080"/>
-            <a:ext cx="310320" cy="310320"/>
+            <a:ext cx="309960" cy="309960"/>
           </a:xfrm>
           <a:prstGeom prst="ellipse">
             <a:avLst/>
@@ -19472,7 +19520,7 @@
         <p:spPr>
           <a:xfrm>
             <a:off x="617040" y="2733480"/>
-            <a:ext cx="173520" cy="173520"/>
+            <a:ext cx="173160" cy="173160"/>
           </a:xfrm>
           <a:prstGeom prst="rect">
             <a:avLst/>
@@ -19492,7 +19540,7 @@
         <p:spPr>
           <a:xfrm>
             <a:off x="1060560" y="2503080"/>
-            <a:ext cx="10581480" cy="633600"/>
+            <a:ext cx="10581120" cy="633240"/>
           </a:xfrm>
           <a:prstGeom prst="rect">
             <a:avLst/>
@@ -19553,7 +19601,7 @@
         <p:spPr>
           <a:xfrm>
             <a:off x="548640" y="3299400"/>
-            <a:ext cx="310320" cy="310320"/>
+            <a:ext cx="309960" cy="309960"/>
           </a:xfrm>
           <a:prstGeom prst="ellipse">
             <a:avLst/>
@@ -19600,7 +19648,7 @@
         <p:spPr>
           <a:xfrm>
             <a:off x="617040" y="3367800"/>
-            <a:ext cx="173520" cy="173520"/>
+            <a:ext cx="173160" cy="173160"/>
           </a:xfrm>
           <a:prstGeom prst="rect">
             <a:avLst/>
@@ -19620,7 +19668,7 @@
         <p:spPr>
           <a:xfrm>
             <a:off x="1060560" y="3137400"/>
-            <a:ext cx="10581480" cy="633600"/>
+            <a:ext cx="10581120" cy="633240"/>
           </a:xfrm>
           <a:prstGeom prst="rect">
             <a:avLst/>
@@ -19681,7 +19729,7 @@
         <p:spPr>
           <a:xfrm>
             <a:off x="548640" y="3933720"/>
-            <a:ext cx="310320" cy="310320"/>
+            <a:ext cx="309960" cy="309960"/>
           </a:xfrm>
           <a:prstGeom prst="ellipse">
             <a:avLst/>
@@ -19728,7 +19776,7 @@
         <p:spPr>
           <a:xfrm>
             <a:off x="617040" y="4002120"/>
-            <a:ext cx="173520" cy="173520"/>
+            <a:ext cx="173160" cy="173160"/>
           </a:xfrm>
           <a:prstGeom prst="rect">
             <a:avLst/>
@@ -19748,7 +19796,7 @@
         <p:spPr>
           <a:xfrm>
             <a:off x="1060560" y="3772080"/>
-            <a:ext cx="10581480" cy="633600"/>
+            <a:ext cx="10581120" cy="633240"/>
           </a:xfrm>
           <a:prstGeom prst="rect">
             <a:avLst/>
@@ -19809,7 +19857,7 @@
         <p:spPr>
           <a:xfrm>
             <a:off x="548640" y="4568040"/>
-            <a:ext cx="310320" cy="310320"/>
+            <a:ext cx="309960" cy="309960"/>
           </a:xfrm>
           <a:prstGeom prst="ellipse">
             <a:avLst/>
@@ -19856,7 +19904,7 @@
         <p:spPr>
           <a:xfrm>
             <a:off x="617040" y="4636440"/>
-            <a:ext cx="173520" cy="173520"/>
+            <a:ext cx="173160" cy="173160"/>
           </a:xfrm>
           <a:prstGeom prst="rect">
             <a:avLst/>
@@ -19876,7 +19924,7 @@
         <p:spPr>
           <a:xfrm>
             <a:off x="1060560" y="4406400"/>
-            <a:ext cx="10581480" cy="633600"/>
+            <a:ext cx="10581120" cy="633240"/>
           </a:xfrm>
           <a:prstGeom prst="rect">
             <a:avLst/>
@@ -19937,7 +19985,7 @@
         <p:spPr>
           <a:xfrm>
             <a:off x="548640" y="5202360"/>
-            <a:ext cx="310320" cy="310320"/>
+            <a:ext cx="309960" cy="309960"/>
           </a:xfrm>
           <a:prstGeom prst="ellipse">
             <a:avLst/>
@@ -19984,7 +20032,7 @@
         <p:spPr>
           <a:xfrm>
             <a:off x="617040" y="5270760"/>
-            <a:ext cx="173520" cy="173520"/>
+            <a:ext cx="173160" cy="173160"/>
           </a:xfrm>
           <a:prstGeom prst="rect">
             <a:avLst/>
@@ -20004,7 +20052,7 @@
         <p:spPr>
           <a:xfrm>
             <a:off x="1060560" y="5040720"/>
-            <a:ext cx="10581480" cy="633600"/>
+            <a:ext cx="10581120" cy="633240"/>
           </a:xfrm>
           <a:prstGeom prst="rect">
             <a:avLst/>
@@ -20065,7 +20113,7 @@
         <p:spPr>
           <a:xfrm>
             <a:off x="548640" y="5836680"/>
-            <a:ext cx="310320" cy="310320"/>
+            <a:ext cx="309960" cy="309960"/>
           </a:xfrm>
           <a:prstGeom prst="ellipse">
             <a:avLst/>
@@ -20112,7 +20160,7 @@
         <p:spPr>
           <a:xfrm>
             <a:off x="617040" y="5905080"/>
-            <a:ext cx="173520" cy="173520"/>
+            <a:ext cx="173160" cy="173160"/>
           </a:xfrm>
           <a:prstGeom prst="rect">
             <a:avLst/>
@@ -20132,7 +20180,7 @@
         <p:spPr>
           <a:xfrm>
             <a:off x="1060560" y="5675040"/>
-            <a:ext cx="10581480" cy="633600"/>
+            <a:ext cx="10581120" cy="633240"/>
           </a:xfrm>
           <a:prstGeom prst="rect">
             <a:avLst/>
@@ -20193,7 +20241,7 @@
         <p:spPr>
           <a:xfrm>
             <a:off x="548640" y="6510600"/>
-            <a:ext cx="5485680" cy="273600"/>
+            <a:ext cx="5485320" cy="273240"/>
           </a:xfrm>
           <a:prstGeom prst="rect">
             <a:avLst/>
@@ -20254,7 +20302,7 @@
         <p:spPr>
           <a:xfrm>
             <a:off x="11094480" y="6510600"/>
-            <a:ext cx="547920" cy="273600"/>
+            <a:ext cx="547560" cy="273240"/>
           </a:xfrm>
           <a:prstGeom prst="rect">
             <a:avLst/>
@@ -20352,7 +20400,7 @@
         <p:spPr>
           <a:xfrm>
             <a:off x="548640" y="457200"/>
-            <a:ext cx="383400" cy="383400"/>
+            <a:ext cx="383040" cy="383040"/>
           </a:xfrm>
           <a:prstGeom prst="roundRect">
             <a:avLst>
@@ -20401,7 +20449,7 @@
         <p:spPr>
           <a:xfrm>
             <a:off x="631080" y="539640"/>
-            <a:ext cx="218880" cy="218880"/>
+            <a:ext cx="218520" cy="218520"/>
           </a:xfrm>
           <a:prstGeom prst="rect">
             <a:avLst/>
@@ -20421,7 +20469,7 @@
         <p:spPr>
           <a:xfrm>
             <a:off x="1097280" y="420480"/>
-            <a:ext cx="10545120" cy="456480"/>
+            <a:ext cx="10544760" cy="456120"/>
           </a:xfrm>
           <a:prstGeom prst="rect">
             <a:avLst/>
@@ -20482,7 +20530,7 @@
         <p:spPr>
           <a:xfrm>
             <a:off x="548640" y="1234440"/>
-            <a:ext cx="11093760" cy="5119920"/>
+            <a:ext cx="11093400" cy="5119560"/>
           </a:xfrm>
           <a:prstGeom prst="roundRect">
             <a:avLst>
@@ -20527,7 +20575,7 @@
         <p:spPr>
           <a:xfrm>
             <a:off x="868680" y="1435680"/>
-            <a:ext cx="10453680" cy="365040"/>
+            <a:ext cx="10453320" cy="364680"/>
           </a:xfrm>
           <a:prstGeom prst="rect">
             <a:avLst/>
@@ -20588,7 +20636,7 @@
         <p:spPr>
           <a:xfrm>
             <a:off x="868680" y="2473560"/>
-            <a:ext cx="310320" cy="310320"/>
+            <a:ext cx="309960" cy="309960"/>
           </a:xfrm>
           <a:prstGeom prst="ellipse">
             <a:avLst/>
@@ -20631,7 +20679,7 @@
         <p:spPr>
           <a:xfrm>
             <a:off x="868680" y="2473560"/>
-            <a:ext cx="310320" cy="310320"/>
+            <a:ext cx="309960" cy="309960"/>
           </a:xfrm>
           <a:prstGeom prst="rect">
             <a:avLst/>
@@ -20692,7 +20740,7 @@
         <p:spPr>
           <a:xfrm>
             <a:off x="1408320" y="1920240"/>
-            <a:ext cx="9914040" cy="1416600"/>
+            <a:ext cx="9913680" cy="1416240"/>
           </a:xfrm>
           <a:prstGeom prst="rect">
             <a:avLst/>
@@ -20753,7 +20801,7 @@
         <p:spPr>
           <a:xfrm>
             <a:off x="868680" y="3890880"/>
-            <a:ext cx="310320" cy="310320"/>
+            <a:ext cx="309960" cy="309960"/>
           </a:xfrm>
           <a:prstGeom prst="ellipse">
             <a:avLst/>
@@ -20796,7 +20844,7 @@
         <p:spPr>
           <a:xfrm>
             <a:off x="868680" y="3890880"/>
-            <a:ext cx="310320" cy="310320"/>
+            <a:ext cx="309960" cy="309960"/>
           </a:xfrm>
           <a:prstGeom prst="rect">
             <a:avLst/>
@@ -20857,7 +20905,7 @@
         <p:spPr>
           <a:xfrm>
             <a:off x="1408320" y="3337560"/>
-            <a:ext cx="9914040" cy="1416600"/>
+            <a:ext cx="9913680" cy="1416240"/>
           </a:xfrm>
           <a:prstGeom prst="rect">
             <a:avLst/>
@@ -20918,7 +20966,7 @@
         <p:spPr>
           <a:xfrm>
             <a:off x="868680" y="5308200"/>
-            <a:ext cx="310320" cy="310320"/>
+            <a:ext cx="309960" cy="309960"/>
           </a:xfrm>
           <a:prstGeom prst="ellipse">
             <a:avLst/>
@@ -20961,7 +21009,7 @@
         <p:spPr>
           <a:xfrm>
             <a:off x="868680" y="5308200"/>
-            <a:ext cx="310320" cy="310320"/>
+            <a:ext cx="309960" cy="309960"/>
           </a:xfrm>
           <a:prstGeom prst="rect">
             <a:avLst/>
@@ -21022,7 +21070,7 @@
         <p:spPr>
           <a:xfrm>
             <a:off x="1408320" y="4754880"/>
-            <a:ext cx="9914040" cy="1416600"/>
+            <a:ext cx="9913680" cy="1416240"/>
           </a:xfrm>
           <a:prstGeom prst="rect">
             <a:avLst/>
@@ -21083,7 +21131,7 @@
         <p:spPr>
           <a:xfrm>
             <a:off x="548640" y="6510600"/>
-            <a:ext cx="5485680" cy="273600"/>
+            <a:ext cx="5485320" cy="273240"/>
           </a:xfrm>
           <a:prstGeom prst="rect">
             <a:avLst/>
@@ -21144,7 +21192,7 @@
         <p:spPr>
           <a:xfrm>
             <a:off x="11094480" y="6510600"/>
-            <a:ext cx="547920" cy="273600"/>
+            <a:ext cx="547560" cy="273240"/>
           </a:xfrm>
           <a:prstGeom prst="rect">
             <a:avLst/>
@@ -21242,7 +21290,7 @@
         <p:spPr>
           <a:xfrm>
             <a:off x="548640" y="457200"/>
-            <a:ext cx="383400" cy="383400"/>
+            <a:ext cx="383040" cy="383040"/>
           </a:xfrm>
           <a:prstGeom prst="roundRect">
             <a:avLst>
@@ -21291,7 +21339,7 @@
         <p:spPr>
           <a:xfrm>
             <a:off x="631080" y="539640"/>
-            <a:ext cx="218880" cy="218880"/>
+            <a:ext cx="218520" cy="218520"/>
           </a:xfrm>
           <a:prstGeom prst="rect">
             <a:avLst/>
@@ -21311,7 +21359,7 @@
         <p:spPr>
           <a:xfrm>
             <a:off x="1097280" y="420480"/>
-            <a:ext cx="10545120" cy="456480"/>
+            <a:ext cx="10544760" cy="456120"/>
           </a:xfrm>
           <a:prstGeom prst="rect">
             <a:avLst/>
@@ -21372,7 +21420,7 @@
         <p:spPr>
           <a:xfrm>
             <a:off x="548640" y="1234440"/>
-            <a:ext cx="3245400" cy="5119920"/>
+            <a:ext cx="3245040" cy="5119560"/>
           </a:xfrm>
           <a:prstGeom prst="roundRect">
             <a:avLst>
@@ -21417,7 +21465,7 @@
         <p:spPr>
           <a:xfrm>
             <a:off x="1645920" y="1737360"/>
-            <a:ext cx="1050840" cy="1050840"/>
+            <a:ext cx="1050480" cy="1050480"/>
           </a:xfrm>
           <a:prstGeom prst="ellipse">
             <a:avLst/>
@@ -21464,7 +21512,7 @@
         <p:spPr>
           <a:xfrm>
             <a:off x="1906560" y="2002680"/>
-            <a:ext cx="529560" cy="529560"/>
+            <a:ext cx="529200" cy="529200"/>
           </a:xfrm>
           <a:prstGeom prst="rect">
             <a:avLst/>
@@ -21484,7 +21532,7 @@
         <p:spPr>
           <a:xfrm>
             <a:off x="731520" y="3017520"/>
-            <a:ext cx="2879640" cy="3062520"/>
+            <a:ext cx="2879280" cy="3062160"/>
           </a:xfrm>
           <a:prstGeom prst="rect">
             <a:avLst/>
@@ -21605,7 +21653,7 @@
         <p:spPr>
           <a:xfrm>
             <a:off x="4206240" y="1280160"/>
-            <a:ext cx="7436160" cy="5028480"/>
+            <a:ext cx="7435800" cy="5028120"/>
           </a:xfrm>
           <a:prstGeom prst="rect">
             <a:avLst/>
@@ -21776,7 +21824,7 @@
         <p:spPr>
           <a:xfrm>
             <a:off x="548640" y="6510600"/>
-            <a:ext cx="5485680" cy="273600"/>
+            <a:ext cx="5485320" cy="273240"/>
           </a:xfrm>
           <a:prstGeom prst="rect">
             <a:avLst/>
@@ -21837,7 +21885,7 @@
         <p:spPr>
           <a:xfrm>
             <a:off x="11094480" y="6510600"/>
-            <a:ext cx="547920" cy="273600"/>
+            <a:ext cx="547560" cy="273240"/>
           </a:xfrm>
           <a:prstGeom prst="rect">
             <a:avLst/>
@@ -21935,7 +21983,7 @@
         <p:spPr>
           <a:xfrm>
             <a:off x="548640" y="457200"/>
-            <a:ext cx="383400" cy="383400"/>
+            <a:ext cx="383040" cy="383040"/>
           </a:xfrm>
           <a:prstGeom prst="roundRect">
             <a:avLst>
@@ -21984,7 +22032,7 @@
         <p:spPr>
           <a:xfrm>
             <a:off x="631080" y="539640"/>
-            <a:ext cx="218880" cy="218880"/>
+            <a:ext cx="218520" cy="218520"/>
           </a:xfrm>
           <a:prstGeom prst="rect">
             <a:avLst/>
@@ -22004,7 +22052,7 @@
         <p:spPr>
           <a:xfrm>
             <a:off x="1097280" y="420480"/>
-            <a:ext cx="10545120" cy="456480"/>
+            <a:ext cx="10544760" cy="456120"/>
           </a:xfrm>
           <a:prstGeom prst="rect">
             <a:avLst/>
@@ -22065,7 +22113,7 @@
         <p:spPr>
           <a:xfrm>
             <a:off x="548640" y="1234440"/>
-            <a:ext cx="11093760" cy="1197000"/>
+            <a:ext cx="11093400" cy="1196640"/>
           </a:xfrm>
           <a:prstGeom prst="rect">
             <a:avLst/>
@@ -22201,7 +22249,7 @@
         <p:spPr>
           <a:xfrm>
             <a:off x="548640" y="2569320"/>
-            <a:ext cx="11093760" cy="3785040"/>
+            <a:ext cx="11093400" cy="3784680"/>
           </a:xfrm>
           <a:prstGeom prst="roundRect">
             <a:avLst>
@@ -22246,7 +22294,7 @@
         <p:spPr>
           <a:xfrm>
             <a:off x="868680" y="2752200"/>
-            <a:ext cx="10453680" cy="3419280"/>
+            <a:ext cx="10453320" cy="3418920"/>
           </a:xfrm>
           <a:prstGeom prst="rect">
             <a:avLst/>
@@ -22757,7 +22805,7 @@
         <p:spPr>
           <a:xfrm>
             <a:off x="548640" y="6510600"/>
-            <a:ext cx="5485680" cy="273600"/>
+            <a:ext cx="5485320" cy="273240"/>
           </a:xfrm>
           <a:prstGeom prst="rect">
             <a:avLst/>
@@ -22818,7 +22866,7 @@
         <p:spPr>
           <a:xfrm>
             <a:off x="11094480" y="6510600"/>
-            <a:ext cx="547920" cy="273600"/>
+            <a:ext cx="547560" cy="273240"/>
           </a:xfrm>
           <a:prstGeom prst="rect">
             <a:avLst/>
@@ -22916,7 +22964,7 @@
         <p:spPr>
           <a:xfrm>
             <a:off x="548640" y="457200"/>
-            <a:ext cx="383400" cy="383400"/>
+            <a:ext cx="383040" cy="383040"/>
           </a:xfrm>
           <a:prstGeom prst="roundRect">
             <a:avLst>
@@ -22965,7 +23013,7 @@
         <p:spPr>
           <a:xfrm>
             <a:off x="631080" y="539640"/>
-            <a:ext cx="218880" cy="218880"/>
+            <a:ext cx="218520" cy="218520"/>
           </a:xfrm>
           <a:prstGeom prst="rect">
             <a:avLst/>
@@ -22985,7 +23033,7 @@
         <p:spPr>
           <a:xfrm>
             <a:off x="1097280" y="420480"/>
-            <a:ext cx="10545120" cy="456480"/>
+            <a:ext cx="10544760" cy="456120"/>
           </a:xfrm>
           <a:prstGeom prst="rect">
             <a:avLst/>
@@ -23046,7 +23094,7 @@
         <p:spPr>
           <a:xfrm>
             <a:off x="548640" y="1234440"/>
-            <a:ext cx="11093760" cy="5119920"/>
+            <a:ext cx="11093400" cy="5119560"/>
           </a:xfrm>
           <a:prstGeom prst="roundRect">
             <a:avLst>
@@ -23091,7 +23139,7 @@
         <p:spPr>
           <a:xfrm>
             <a:off x="868680" y="1435680"/>
-            <a:ext cx="10453680" cy="365040"/>
+            <a:ext cx="10453320" cy="364680"/>
           </a:xfrm>
           <a:prstGeom prst="rect">
             <a:avLst/>
@@ -23152,7 +23200,7 @@
         <p:spPr>
           <a:xfrm>
             <a:off x="868680" y="2473560"/>
-            <a:ext cx="310320" cy="310320"/>
+            <a:ext cx="309960" cy="309960"/>
           </a:xfrm>
           <a:prstGeom prst="ellipse">
             <a:avLst/>
@@ -23195,7 +23243,7 @@
         <p:spPr>
           <a:xfrm>
             <a:off x="868680" y="2473560"/>
-            <a:ext cx="310320" cy="310320"/>
+            <a:ext cx="309960" cy="309960"/>
           </a:xfrm>
           <a:prstGeom prst="rect">
             <a:avLst/>
@@ -23256,7 +23304,7 @@
         <p:spPr>
           <a:xfrm>
             <a:off x="1408320" y="1920240"/>
-            <a:ext cx="9914040" cy="1416600"/>
+            <a:ext cx="9913680" cy="1416240"/>
           </a:xfrm>
           <a:prstGeom prst="rect">
             <a:avLst/>
@@ -23317,7 +23365,7 @@
         <p:spPr>
           <a:xfrm>
             <a:off x="868680" y="3890880"/>
-            <a:ext cx="310320" cy="310320"/>
+            <a:ext cx="309960" cy="309960"/>
           </a:xfrm>
           <a:prstGeom prst="ellipse">
             <a:avLst/>
@@ -23360,7 +23408,7 @@
         <p:spPr>
           <a:xfrm>
             <a:off x="868680" y="3890880"/>
-            <a:ext cx="310320" cy="310320"/>
+            <a:ext cx="309960" cy="309960"/>
           </a:xfrm>
           <a:prstGeom prst="rect">
             <a:avLst/>
@@ -23421,7 +23469,7 @@
         <p:spPr>
           <a:xfrm>
             <a:off x="1408320" y="3337560"/>
-            <a:ext cx="9914040" cy="1416600"/>
+            <a:ext cx="9913680" cy="1416240"/>
           </a:xfrm>
           <a:prstGeom prst="rect">
             <a:avLst/>
@@ -23482,7 +23530,7 @@
         <p:spPr>
           <a:xfrm>
             <a:off x="868680" y="5308200"/>
-            <a:ext cx="310320" cy="310320"/>
+            <a:ext cx="309960" cy="309960"/>
           </a:xfrm>
           <a:prstGeom prst="ellipse">
             <a:avLst/>
@@ -23525,7 +23573,7 @@
         <p:spPr>
           <a:xfrm>
             <a:off x="868680" y="5308200"/>
-            <a:ext cx="310320" cy="310320"/>
+            <a:ext cx="309960" cy="309960"/>
           </a:xfrm>
           <a:prstGeom prst="rect">
             <a:avLst/>
@@ -23586,7 +23634,7 @@
         <p:spPr>
           <a:xfrm>
             <a:off x="1408320" y="4754880"/>
-            <a:ext cx="9914040" cy="1416600"/>
+            <a:ext cx="9913680" cy="1416240"/>
           </a:xfrm>
           <a:prstGeom prst="rect">
             <a:avLst/>
@@ -23647,7 +23695,7 @@
         <p:spPr>
           <a:xfrm>
             <a:off x="548640" y="6510600"/>
-            <a:ext cx="5485680" cy="273600"/>
+            <a:ext cx="5485320" cy="273240"/>
           </a:xfrm>
           <a:prstGeom prst="rect">
             <a:avLst/>
@@ -23708,7 +23756,7 @@
         <p:spPr>
           <a:xfrm>
             <a:off x="11094480" y="6510600"/>
-            <a:ext cx="547920" cy="273600"/>
+            <a:ext cx="547560" cy="273240"/>
           </a:xfrm>
           <a:prstGeom prst="rect">
             <a:avLst/>
@@ -23806,7 +23854,7 @@
         <p:spPr>
           <a:xfrm>
             <a:off x="548640" y="457200"/>
-            <a:ext cx="383400" cy="383400"/>
+            <a:ext cx="383040" cy="383040"/>
           </a:xfrm>
           <a:prstGeom prst="roundRect">
             <a:avLst>
@@ -23855,7 +23903,7 @@
         <p:spPr>
           <a:xfrm>
             <a:off x="631080" y="539640"/>
-            <a:ext cx="218880" cy="218880"/>
+            <a:ext cx="218520" cy="218520"/>
           </a:xfrm>
           <a:prstGeom prst="rect">
             <a:avLst/>
@@ -23875,7 +23923,7 @@
         <p:spPr>
           <a:xfrm>
             <a:off x="1097280" y="420480"/>
-            <a:ext cx="10545120" cy="456480"/>
+            <a:ext cx="10544760" cy="456120"/>
           </a:xfrm>
           <a:prstGeom prst="rect">
             <a:avLst/>
@@ -23936,7 +23984,7 @@
         <p:spPr>
           <a:xfrm>
             <a:off x="548640" y="1234440"/>
-            <a:ext cx="3245400" cy="5119920"/>
+            <a:ext cx="3245040" cy="5119560"/>
           </a:xfrm>
           <a:prstGeom prst="roundRect">
             <a:avLst>
@@ -23981,7 +24029,7 @@
         <p:spPr>
           <a:xfrm>
             <a:off x="1645920" y="1737360"/>
-            <a:ext cx="1050840" cy="1050840"/>
+            <a:ext cx="1050480" cy="1050480"/>
           </a:xfrm>
           <a:prstGeom prst="ellipse">
             <a:avLst/>
@@ -24028,7 +24076,7 @@
         <p:spPr>
           <a:xfrm>
             <a:off x="1906560" y="2002680"/>
-            <a:ext cx="529560" cy="529560"/>
+            <a:ext cx="529200" cy="529200"/>
           </a:xfrm>
           <a:prstGeom prst="rect">
             <a:avLst/>
@@ -24048,7 +24096,7 @@
         <p:spPr>
           <a:xfrm>
             <a:off x="731520" y="3017520"/>
-            <a:ext cx="2879640" cy="3062520"/>
+            <a:ext cx="2879280" cy="3062160"/>
           </a:xfrm>
           <a:prstGeom prst="rect">
             <a:avLst/>
@@ -24169,7 +24217,7 @@
         <p:spPr>
           <a:xfrm>
             <a:off x="4206240" y="1280160"/>
-            <a:ext cx="7436160" cy="5028480"/>
+            <a:ext cx="7435800" cy="5028120"/>
           </a:xfrm>
           <a:prstGeom prst="rect">
             <a:avLst/>
@@ -24340,7 +24388,7 @@
         <p:spPr>
           <a:xfrm>
             <a:off x="548640" y="6510600"/>
-            <a:ext cx="5485680" cy="273600"/>
+            <a:ext cx="5485320" cy="273240"/>
           </a:xfrm>
           <a:prstGeom prst="rect">
             <a:avLst/>
@@ -24401,7 +24449,7 @@
         <p:spPr>
           <a:xfrm>
             <a:off x="11094480" y="6510600"/>
-            <a:ext cx="547920" cy="273600"/>
+            <a:ext cx="547560" cy="273240"/>
           </a:xfrm>
           <a:prstGeom prst="rect">
             <a:avLst/>
@@ -24499,7 +24547,7 @@
         <p:spPr>
           <a:xfrm>
             <a:off x="548640" y="457200"/>
-            <a:ext cx="383400" cy="383400"/>
+            <a:ext cx="383040" cy="383040"/>
           </a:xfrm>
           <a:prstGeom prst="roundRect">
             <a:avLst>
@@ -24548,7 +24596,7 @@
         <p:spPr>
           <a:xfrm>
             <a:off x="631080" y="539640"/>
-            <a:ext cx="218880" cy="218880"/>
+            <a:ext cx="218520" cy="218520"/>
           </a:xfrm>
           <a:prstGeom prst="rect">
             <a:avLst/>
@@ -24568,7 +24616,7 @@
         <p:spPr>
           <a:xfrm>
             <a:off x="1097280" y="420480"/>
-            <a:ext cx="10545120" cy="456480"/>
+            <a:ext cx="10544760" cy="456120"/>
           </a:xfrm>
           <a:prstGeom prst="rect">
             <a:avLst/>
@@ -24629,7 +24677,7 @@
         <p:spPr>
           <a:xfrm>
             <a:off x="548640" y="1234440"/>
-            <a:ext cx="11093760" cy="1197000"/>
+            <a:ext cx="11093400" cy="1196640"/>
           </a:xfrm>
           <a:prstGeom prst="rect">
             <a:avLst/>
@@ -24765,7 +24813,7 @@
         <p:spPr>
           <a:xfrm>
             <a:off x="548640" y="2569320"/>
-            <a:ext cx="11093760" cy="3785040"/>
+            <a:ext cx="11093400" cy="3784680"/>
           </a:xfrm>
           <a:prstGeom prst="roundRect">
             <a:avLst>
@@ -24810,7 +24858,7 @@
         <p:spPr>
           <a:xfrm>
             <a:off x="868680" y="2752200"/>
-            <a:ext cx="10453680" cy="3419280"/>
+            <a:ext cx="10453320" cy="3418920"/>
           </a:xfrm>
           <a:prstGeom prst="rect">
             <a:avLst/>
@@ -25231,7 +25279,7 @@
         <p:spPr>
           <a:xfrm>
             <a:off x="548640" y="6510600"/>
-            <a:ext cx="5485680" cy="273600"/>
+            <a:ext cx="5485320" cy="273240"/>
           </a:xfrm>
           <a:prstGeom prst="rect">
             <a:avLst/>
@@ -25292,7 +25340,7 @@
         <p:spPr>
           <a:xfrm>
             <a:off x="11094480" y="6510600"/>
-            <a:ext cx="547920" cy="273600"/>
+            <a:ext cx="547560" cy="273240"/>
           </a:xfrm>
           <a:prstGeom prst="rect">
             <a:avLst/>
@@ -25390,7 +25438,7 @@
         <p:spPr>
           <a:xfrm>
             <a:off x="548640" y="457200"/>
-            <a:ext cx="383400" cy="383400"/>
+            <a:ext cx="383040" cy="383040"/>
           </a:xfrm>
           <a:prstGeom prst="roundRect">
             <a:avLst>
@@ -25439,7 +25487,7 @@
         <p:spPr>
           <a:xfrm>
             <a:off x="631080" y="539640"/>
-            <a:ext cx="218880" cy="218880"/>
+            <a:ext cx="218520" cy="218520"/>
           </a:xfrm>
           <a:prstGeom prst="rect">
             <a:avLst/>
@@ -25459,7 +25507,7 @@
         <p:spPr>
           <a:xfrm>
             <a:off x="1097280" y="420480"/>
-            <a:ext cx="10545120" cy="456480"/>
+            <a:ext cx="10544760" cy="456120"/>
           </a:xfrm>
           <a:prstGeom prst="rect">
             <a:avLst/>
@@ -25520,7 +25568,7 @@
         <p:spPr>
           <a:xfrm>
             <a:off x="548640" y="1234440"/>
-            <a:ext cx="11093760" cy="1197000"/>
+            <a:ext cx="11093400" cy="1196640"/>
           </a:xfrm>
           <a:prstGeom prst="rect">
             <a:avLst/>
@@ -25656,7 +25704,7 @@
         <p:spPr>
           <a:xfrm>
             <a:off x="548640" y="2569320"/>
-            <a:ext cx="11093760" cy="3785040"/>
+            <a:ext cx="11093400" cy="3784680"/>
           </a:xfrm>
           <a:prstGeom prst="roundRect">
             <a:avLst>
@@ -25701,7 +25749,7 @@
         <p:spPr>
           <a:xfrm>
             <a:off x="868680" y="2752200"/>
-            <a:ext cx="10453680" cy="3419280"/>
+            <a:ext cx="10453320" cy="3418920"/>
           </a:xfrm>
           <a:prstGeom prst="rect">
             <a:avLst/>
@@ -26092,7 +26140,7 @@
         <p:spPr>
           <a:xfrm>
             <a:off x="548640" y="6510600"/>
-            <a:ext cx="5485680" cy="273600"/>
+            <a:ext cx="5485320" cy="273240"/>
           </a:xfrm>
           <a:prstGeom prst="rect">
             <a:avLst/>
@@ -26153,7 +26201,7 @@
         <p:spPr>
           <a:xfrm>
             <a:off x="11094480" y="6510600"/>
-            <a:ext cx="547920" cy="273600"/>
+            <a:ext cx="547560" cy="273240"/>
           </a:xfrm>
           <a:prstGeom prst="rect">
             <a:avLst/>
@@ -26251,7 +26299,7 @@
         <p:spPr>
           <a:xfrm>
             <a:off x="548640" y="457200"/>
-            <a:ext cx="383400" cy="383400"/>
+            <a:ext cx="383040" cy="383040"/>
           </a:xfrm>
           <a:prstGeom prst="roundRect">
             <a:avLst>
@@ -26300,7 +26348,7 @@
         <p:spPr>
           <a:xfrm>
             <a:off x="631080" y="539640"/>
-            <a:ext cx="218880" cy="218880"/>
+            <a:ext cx="218520" cy="218520"/>
           </a:xfrm>
           <a:prstGeom prst="rect">
             <a:avLst/>
@@ -26320,7 +26368,7 @@
         <p:spPr>
           <a:xfrm>
             <a:off x="1097280" y="420480"/>
-            <a:ext cx="10545120" cy="456480"/>
+            <a:ext cx="10544760" cy="456120"/>
           </a:xfrm>
           <a:prstGeom prst="rect">
             <a:avLst/>
@@ -26381,7 +26429,7 @@
         <p:spPr>
           <a:xfrm>
             <a:off x="548640" y="1234440"/>
-            <a:ext cx="11093760" cy="1197000"/>
+            <a:ext cx="11093400" cy="1196640"/>
           </a:xfrm>
           <a:prstGeom prst="rect">
             <a:avLst/>
@@ -26517,7 +26565,7 @@
         <p:spPr>
           <a:xfrm>
             <a:off x="548640" y="2569320"/>
-            <a:ext cx="11093760" cy="3785040"/>
+            <a:ext cx="11093400" cy="3784680"/>
           </a:xfrm>
           <a:prstGeom prst="roundRect">
             <a:avLst>
@@ -26562,7 +26610,7 @@
         <p:spPr>
           <a:xfrm>
             <a:off x="868680" y="2752200"/>
-            <a:ext cx="10453680" cy="3419280"/>
+            <a:ext cx="10453320" cy="3418920"/>
           </a:xfrm>
           <a:prstGeom prst="rect">
             <a:avLst/>
@@ -26893,7 +26941,7 @@
         <p:spPr>
           <a:xfrm>
             <a:off x="548640" y="6510600"/>
-            <a:ext cx="5485680" cy="273600"/>
+            <a:ext cx="5485320" cy="273240"/>
           </a:xfrm>
           <a:prstGeom prst="rect">
             <a:avLst/>
@@ -26954,7 +27002,7 @@
         <p:spPr>
           <a:xfrm>
             <a:off x="11094480" y="6510600"/>
-            <a:ext cx="547920" cy="273600"/>
+            <a:ext cx="547560" cy="273240"/>
           </a:xfrm>
           <a:prstGeom prst="rect">
             <a:avLst/>
@@ -27052,7 +27100,7 @@
         <p:spPr>
           <a:xfrm>
             <a:off x="548640" y="457200"/>
-            <a:ext cx="383400" cy="383400"/>
+            <a:ext cx="383040" cy="383040"/>
           </a:xfrm>
           <a:prstGeom prst="roundRect">
             <a:avLst>
@@ -27101,7 +27149,7 @@
         <p:spPr>
           <a:xfrm>
             <a:off x="631080" y="539640"/>
-            <a:ext cx="218880" cy="218880"/>
+            <a:ext cx="218520" cy="218520"/>
           </a:xfrm>
           <a:prstGeom prst="rect">
             <a:avLst/>
@@ -27121,7 +27169,7 @@
         <p:spPr>
           <a:xfrm>
             <a:off x="1097280" y="420480"/>
-            <a:ext cx="10545120" cy="456480"/>
+            <a:ext cx="10544760" cy="456120"/>
           </a:xfrm>
           <a:prstGeom prst="rect">
             <a:avLst/>
@@ -27354,7 +27402,7 @@
         <p:spPr>
           <a:xfrm>
             <a:off x="5044320" y="1554480"/>
-            <a:ext cx="2102400" cy="685080"/>
+            <a:ext cx="2102040" cy="684720"/>
           </a:xfrm>
           <a:prstGeom prst="roundRect">
             <a:avLst>
@@ -27399,7 +27447,7 @@
         <p:spPr>
           <a:xfrm>
             <a:off x="5044320" y="1627560"/>
-            <a:ext cx="2102400" cy="319320"/>
+            <a:ext cx="2102040" cy="318960"/>
           </a:xfrm>
           <a:prstGeom prst="rect">
             <a:avLst/>
@@ -27460,7 +27508,7 @@
         <p:spPr>
           <a:xfrm>
             <a:off x="5044320" y="1938600"/>
-            <a:ext cx="2102400" cy="255240"/>
+            <a:ext cx="2102040" cy="254880"/>
           </a:xfrm>
           <a:prstGeom prst="rect">
             <a:avLst/>
@@ -27521,7 +27569,7 @@
         <p:spPr>
           <a:xfrm>
             <a:off x="4843080" y="1353240"/>
-            <a:ext cx="310320" cy="310320"/>
+            <a:ext cx="309960" cy="309960"/>
           </a:xfrm>
           <a:prstGeom prst="ellipse">
             <a:avLst/>
@@ -27564,7 +27612,7 @@
         <p:spPr>
           <a:xfrm>
             <a:off x="4843080" y="1353240"/>
-            <a:ext cx="310320" cy="310320"/>
+            <a:ext cx="309960" cy="309960"/>
           </a:xfrm>
           <a:prstGeom prst="rect">
             <a:avLst/>
@@ -27625,7 +27673,7 @@
         <p:spPr>
           <a:xfrm>
             <a:off x="3169800" y="2788920"/>
-            <a:ext cx="2102400" cy="685080"/>
+            <a:ext cx="2102040" cy="684720"/>
           </a:xfrm>
           <a:prstGeom prst="roundRect">
             <a:avLst>
@@ -27670,7 +27718,7 @@
         <p:spPr>
           <a:xfrm>
             <a:off x="3169800" y="2862000"/>
-            <a:ext cx="2102400" cy="319320"/>
+            <a:ext cx="2102040" cy="318960"/>
           </a:xfrm>
           <a:prstGeom prst="rect">
             <a:avLst/>
@@ -27731,7 +27779,7 @@
         <p:spPr>
           <a:xfrm>
             <a:off x="3169800" y="3173040"/>
-            <a:ext cx="2102400" cy="255240"/>
+            <a:ext cx="2102040" cy="254880"/>
           </a:xfrm>
           <a:prstGeom prst="rect">
             <a:avLst/>
@@ -27792,7 +27840,7 @@
         <p:spPr>
           <a:xfrm>
             <a:off x="2968560" y="2587680"/>
-            <a:ext cx="310320" cy="310320"/>
+            <a:ext cx="309960" cy="309960"/>
           </a:xfrm>
           <a:prstGeom prst="ellipse">
             <a:avLst/>
@@ -27835,7 +27883,7 @@
         <p:spPr>
           <a:xfrm>
             <a:off x="2968560" y="2587680"/>
-            <a:ext cx="310320" cy="310320"/>
+            <a:ext cx="309960" cy="309960"/>
           </a:xfrm>
           <a:prstGeom prst="rect">
             <a:avLst/>
@@ -27896,7 +27944,7 @@
         <p:spPr>
           <a:xfrm>
             <a:off x="6918840" y="2788920"/>
-            <a:ext cx="2102400" cy="685080"/>
+            <a:ext cx="2102040" cy="684720"/>
           </a:xfrm>
           <a:prstGeom prst="roundRect">
             <a:avLst>
@@ -27941,7 +27989,7 @@
         <p:spPr>
           <a:xfrm>
             <a:off x="6918840" y="2862000"/>
-            <a:ext cx="2102400" cy="319320"/>
+            <a:ext cx="2102040" cy="318960"/>
           </a:xfrm>
           <a:prstGeom prst="rect">
             <a:avLst/>
@@ -28002,7 +28050,7 @@
         <p:spPr>
           <a:xfrm>
             <a:off x="6918840" y="3173040"/>
-            <a:ext cx="2102400" cy="255240"/>
+            <a:ext cx="2102040" cy="254880"/>
           </a:xfrm>
           <a:prstGeom prst="rect">
             <a:avLst/>
@@ -28063,7 +28111,7 @@
         <p:spPr>
           <a:xfrm>
             <a:off x="6717600" y="2587680"/>
-            <a:ext cx="310320" cy="310320"/>
+            <a:ext cx="309960" cy="309960"/>
           </a:xfrm>
           <a:prstGeom prst="ellipse">
             <a:avLst/>
@@ -28106,7 +28154,7 @@
         <p:spPr>
           <a:xfrm>
             <a:off x="6717600" y="2587680"/>
-            <a:ext cx="310320" cy="310320"/>
+            <a:ext cx="309960" cy="309960"/>
           </a:xfrm>
           <a:prstGeom prst="rect">
             <a:avLst/>
@@ -28167,7 +28215,7 @@
         <p:spPr>
           <a:xfrm>
             <a:off x="5044320" y="4023360"/>
-            <a:ext cx="2102400" cy="685080"/>
+            <a:ext cx="2102040" cy="684720"/>
           </a:xfrm>
           <a:prstGeom prst="roundRect">
             <a:avLst>
@@ -28212,7 +28260,7 @@
         <p:spPr>
           <a:xfrm>
             <a:off x="5044320" y="4096440"/>
-            <a:ext cx="2102400" cy="319320"/>
+            <a:ext cx="2102040" cy="318960"/>
           </a:xfrm>
           <a:prstGeom prst="rect">
             <a:avLst/>
@@ -28273,7 +28321,7 @@
         <p:spPr>
           <a:xfrm>
             <a:off x="5044320" y="4407480"/>
-            <a:ext cx="2102400" cy="255240"/>
+            <a:ext cx="2102040" cy="254880"/>
           </a:xfrm>
           <a:prstGeom prst="rect">
             <a:avLst/>
@@ -28334,7 +28382,7 @@
         <p:spPr>
           <a:xfrm>
             <a:off x="4843080" y="3822120"/>
-            <a:ext cx="310320" cy="310320"/>
+            <a:ext cx="309960" cy="309960"/>
           </a:xfrm>
           <a:prstGeom prst="ellipse">
             <a:avLst/>
@@ -28377,7 +28425,7 @@
         <p:spPr>
           <a:xfrm>
             <a:off x="4843080" y="3822120"/>
-            <a:ext cx="310320" cy="310320"/>
+            <a:ext cx="309960" cy="309960"/>
           </a:xfrm>
           <a:prstGeom prst="rect">
             <a:avLst/>
@@ -28438,7 +28486,7 @@
         <p:spPr>
           <a:xfrm>
             <a:off x="548640" y="1554480"/>
-            <a:ext cx="2651040" cy="3153960"/>
+            <a:ext cx="2650680" cy="3153600"/>
           </a:xfrm>
           <a:prstGeom prst="roundRect">
             <a:avLst>
@@ -28483,7 +28531,7 @@
         <p:spPr>
           <a:xfrm>
             <a:off x="749880" y="1737360"/>
-            <a:ext cx="2248560" cy="319320"/>
+            <a:ext cx="2248200" cy="318960"/>
           </a:xfrm>
           <a:prstGeom prst="rect">
             <a:avLst/>
@@ -28544,7 +28592,7 @@
         <p:spPr>
           <a:xfrm>
             <a:off x="749880" y="2103120"/>
-            <a:ext cx="2248560" cy="1370880"/>
+            <a:ext cx="2248200" cy="1370520"/>
           </a:xfrm>
           <a:prstGeom prst="rect">
             <a:avLst/>
@@ -28695,7 +28743,7 @@
         <p:spPr>
           <a:xfrm>
             <a:off x="749880" y="3566160"/>
-            <a:ext cx="2248560" cy="1005120"/>
+            <a:ext cx="2248200" cy="1004760"/>
           </a:xfrm>
           <a:prstGeom prst="rect">
             <a:avLst/>
@@ -28756,7 +28804,7 @@
         <p:spPr>
           <a:xfrm>
             <a:off x="548640" y="6510600"/>
-            <a:ext cx="5485680" cy="273600"/>
+            <a:ext cx="5485320" cy="273240"/>
           </a:xfrm>
           <a:prstGeom prst="rect">
             <a:avLst/>
@@ -28817,7 +28865,7 @@
         <p:spPr>
           <a:xfrm>
             <a:off x="11094480" y="6510600"/>
-            <a:ext cx="547920" cy="273600"/>
+            <a:ext cx="547560" cy="273240"/>
           </a:xfrm>
           <a:prstGeom prst="rect">
             <a:avLst/>
@@ -28915,7 +28963,7 @@
         <p:spPr>
           <a:xfrm>
             <a:off x="548640" y="457200"/>
-            <a:ext cx="383400" cy="383400"/>
+            <a:ext cx="383040" cy="383040"/>
           </a:xfrm>
           <a:prstGeom prst="roundRect">
             <a:avLst>
@@ -28964,7 +29012,7 @@
         <p:spPr>
           <a:xfrm>
             <a:off x="631080" y="539640"/>
-            <a:ext cx="218880" cy="218880"/>
+            <a:ext cx="218520" cy="218520"/>
           </a:xfrm>
           <a:prstGeom prst="rect">
             <a:avLst/>
@@ -28984,7 +29032,7 @@
         <p:spPr>
           <a:xfrm>
             <a:off x="1097280" y="420480"/>
-            <a:ext cx="10545120" cy="456480"/>
+            <a:ext cx="10544760" cy="456120"/>
           </a:xfrm>
           <a:prstGeom prst="rect">
             <a:avLst/>
@@ -29045,7 +29093,7 @@
         <p:spPr>
           <a:xfrm>
             <a:off x="548640" y="1234440"/>
-            <a:ext cx="11093760" cy="1197000"/>
+            <a:ext cx="11093400" cy="1196640"/>
           </a:xfrm>
           <a:prstGeom prst="rect">
             <a:avLst/>
@@ -29181,7 +29229,7 @@
         <p:spPr>
           <a:xfrm>
             <a:off x="548640" y="2569320"/>
-            <a:ext cx="11093760" cy="3785040"/>
+            <a:ext cx="11093400" cy="3784680"/>
           </a:xfrm>
           <a:prstGeom prst="roundRect">
             <a:avLst>
@@ -29226,7 +29274,7 @@
         <p:spPr>
           <a:xfrm>
             <a:off x="868680" y="2752200"/>
-            <a:ext cx="10453680" cy="3419280"/>
+            <a:ext cx="10453320" cy="3418920"/>
           </a:xfrm>
           <a:prstGeom prst="rect">
             <a:avLst/>
@@ -29647,7 +29695,7 @@
         <p:spPr>
           <a:xfrm>
             <a:off x="548640" y="6510600"/>
-            <a:ext cx="5485680" cy="273600"/>
+            <a:ext cx="5485320" cy="273240"/>
           </a:xfrm>
           <a:prstGeom prst="rect">
             <a:avLst/>
@@ -29708,7 +29756,7 @@
         <p:spPr>
           <a:xfrm>
             <a:off x="11094480" y="6510600"/>
-            <a:ext cx="547920" cy="273600"/>
+            <a:ext cx="547560" cy="273240"/>
           </a:xfrm>
           <a:prstGeom prst="rect">
             <a:avLst/>
@@ -29806,7 +29854,7 @@
         <p:spPr>
           <a:xfrm>
             <a:off x="-2286000" y="3657600"/>
-            <a:ext cx="6400080" cy="6400080"/>
+            <a:ext cx="6399720" cy="6399720"/>
           </a:xfrm>
           <a:prstGeom prst="ellipse">
             <a:avLst/>
@@ -29849,7 +29897,7 @@
         <p:spPr>
           <a:xfrm>
             <a:off x="8229600" y="-2743200"/>
-            <a:ext cx="6400080" cy="6400080"/>
+            <a:ext cx="6399720" cy="6399720"/>
           </a:xfrm>
           <a:prstGeom prst="ellipse">
             <a:avLst/>
@@ -29892,7 +29940,7 @@
         <p:spPr>
           <a:xfrm>
             <a:off x="5638680" y="868680"/>
-            <a:ext cx="913680" cy="913680"/>
+            <a:ext cx="913320" cy="913320"/>
           </a:xfrm>
           <a:prstGeom prst="ellipse">
             <a:avLst/>
@@ -29939,7 +29987,7 @@
         <p:spPr>
           <a:xfrm>
             <a:off x="5876280" y="1097280"/>
-            <a:ext cx="438120" cy="438120"/>
+            <a:ext cx="437760" cy="437760"/>
           </a:xfrm>
           <a:prstGeom prst="rect">
             <a:avLst/>
@@ -29959,7 +30007,7 @@
         <p:spPr>
           <a:xfrm>
             <a:off x="914400" y="2057400"/>
-            <a:ext cx="10362240" cy="291960"/>
+            <a:ext cx="10361880" cy="291600"/>
           </a:xfrm>
           <a:prstGeom prst="rect">
             <a:avLst/>
@@ -30020,7 +30068,7 @@
         <p:spPr>
           <a:xfrm>
             <a:off x="1188720" y="2441520"/>
-            <a:ext cx="9813600" cy="1005120"/>
+            <a:ext cx="9813240" cy="1004760"/>
           </a:xfrm>
           <a:prstGeom prst="rect">
             <a:avLst/>
@@ -30081,7 +30129,7 @@
         <p:spPr>
           <a:xfrm>
             <a:off x="1920240" y="3630240"/>
-            <a:ext cx="8350560" cy="822240"/>
+            <a:ext cx="8350200" cy="821880"/>
           </a:xfrm>
           <a:prstGeom prst="rect">
             <a:avLst/>
@@ -30142,7 +30190,7 @@
         <p:spPr>
           <a:xfrm>
             <a:off x="11094480" y="6492240"/>
-            <a:ext cx="547920" cy="273600"/>
+            <a:ext cx="547560" cy="273240"/>
           </a:xfrm>
           <a:prstGeom prst="rect">
             <a:avLst/>
@@ -30240,7 +30288,7 @@
         <p:spPr>
           <a:xfrm>
             <a:off x="548640" y="457200"/>
-            <a:ext cx="383400" cy="383400"/>
+            <a:ext cx="383040" cy="383040"/>
           </a:xfrm>
           <a:prstGeom prst="roundRect">
             <a:avLst>
@@ -30289,7 +30337,7 @@
         <p:spPr>
           <a:xfrm>
             <a:off x="631080" y="539640"/>
-            <a:ext cx="218880" cy="218880"/>
+            <a:ext cx="218520" cy="218520"/>
           </a:xfrm>
           <a:prstGeom prst="rect">
             <a:avLst/>
@@ -30309,7 +30357,7 @@
         <p:spPr>
           <a:xfrm>
             <a:off x="1097280" y="420480"/>
-            <a:ext cx="10545120" cy="456480"/>
+            <a:ext cx="10544760" cy="456120"/>
           </a:xfrm>
           <a:prstGeom prst="rect">
             <a:avLst/>
@@ -30370,7 +30418,7 @@
         <p:spPr>
           <a:xfrm>
             <a:off x="548640" y="1234440"/>
-            <a:ext cx="11093760" cy="5119920"/>
+            <a:ext cx="11093400" cy="5119560"/>
           </a:xfrm>
           <a:prstGeom prst="roundRect">
             <a:avLst>
@@ -30415,7 +30463,7 @@
         <p:spPr>
           <a:xfrm>
             <a:off x="868680" y="1435680"/>
-            <a:ext cx="10453680" cy="365040"/>
+            <a:ext cx="10453320" cy="364680"/>
           </a:xfrm>
           <a:prstGeom prst="rect">
             <a:avLst/>
@@ -30476,7 +30524,7 @@
         <p:spPr>
           <a:xfrm>
             <a:off x="868680" y="2296440"/>
-            <a:ext cx="310320" cy="310320"/>
+            <a:ext cx="309960" cy="309960"/>
           </a:xfrm>
           <a:prstGeom prst="ellipse">
             <a:avLst/>
@@ -30519,7 +30567,7 @@
         <p:spPr>
           <a:xfrm>
             <a:off x="868680" y="2296440"/>
-            <a:ext cx="310320" cy="310320"/>
+            <a:ext cx="309960" cy="309960"/>
           </a:xfrm>
           <a:prstGeom prst="rect">
             <a:avLst/>
@@ -30580,7 +30628,7 @@
         <p:spPr>
           <a:xfrm>
             <a:off x="1408320" y="1920240"/>
-            <a:ext cx="9914040" cy="1062360"/>
+            <a:ext cx="9913680" cy="1062000"/>
           </a:xfrm>
           <a:prstGeom prst="rect">
             <a:avLst/>
@@ -30641,7 +30689,7 @@
         <p:spPr>
           <a:xfrm>
             <a:off x="868680" y="3359160"/>
-            <a:ext cx="310320" cy="310320"/>
+            <a:ext cx="309960" cy="309960"/>
           </a:xfrm>
           <a:prstGeom prst="ellipse">
             <a:avLst/>
@@ -30684,7 +30732,7 @@
         <p:spPr>
           <a:xfrm>
             <a:off x="868680" y="3359160"/>
-            <a:ext cx="310320" cy="310320"/>
+            <a:ext cx="309960" cy="309960"/>
           </a:xfrm>
           <a:prstGeom prst="rect">
             <a:avLst/>
@@ -30745,7 +30793,7 @@
         <p:spPr>
           <a:xfrm>
             <a:off x="1408320" y="2983320"/>
-            <a:ext cx="9914040" cy="1062360"/>
+            <a:ext cx="9913680" cy="1062000"/>
           </a:xfrm>
           <a:prstGeom prst="rect">
             <a:avLst/>
@@ -30806,7 +30854,7 @@
         <p:spPr>
           <a:xfrm>
             <a:off x="868680" y="4422240"/>
-            <a:ext cx="310320" cy="310320"/>
+            <a:ext cx="309960" cy="309960"/>
           </a:xfrm>
           <a:prstGeom prst="ellipse">
             <a:avLst/>
@@ -30849,7 +30897,7 @@
         <p:spPr>
           <a:xfrm>
             <a:off x="868680" y="4422240"/>
-            <a:ext cx="310320" cy="310320"/>
+            <a:ext cx="309960" cy="309960"/>
           </a:xfrm>
           <a:prstGeom prst="rect">
             <a:avLst/>
@@ -30910,7 +30958,7 @@
         <p:spPr>
           <a:xfrm>
             <a:off x="1408320" y="4046400"/>
-            <a:ext cx="9914040" cy="1062360"/>
+            <a:ext cx="9913680" cy="1062000"/>
           </a:xfrm>
           <a:prstGeom prst="rect">
             <a:avLst/>
@@ -30971,7 +31019,7 @@
         <p:spPr>
           <a:xfrm>
             <a:off x="868680" y="5485320"/>
-            <a:ext cx="310320" cy="310320"/>
+            <a:ext cx="309960" cy="309960"/>
           </a:xfrm>
           <a:prstGeom prst="ellipse">
             <a:avLst/>
@@ -31014,7 +31062,7 @@
         <p:spPr>
           <a:xfrm>
             <a:off x="868680" y="5485320"/>
-            <a:ext cx="310320" cy="310320"/>
+            <a:ext cx="309960" cy="309960"/>
           </a:xfrm>
           <a:prstGeom prst="rect">
             <a:avLst/>
@@ -31075,7 +31123,7 @@
         <p:spPr>
           <a:xfrm>
             <a:off x="1408320" y="5109120"/>
-            <a:ext cx="9914040" cy="1062360"/>
+            <a:ext cx="9913680" cy="1062000"/>
           </a:xfrm>
           <a:prstGeom prst="rect">
             <a:avLst/>
@@ -31114,67 +31162,79 @@
                 <a:latin typeface="Calibri"/>
                 <a:ea typeface="Calibri"/>
               </a:rPr>
-              <a:t>Print MyClass.__mro__ for a class with two parents, and explain the order out loud before checking</a:t>
-            </a:r>
-            <a:endParaRPr lang="en-US" sz="1300" b="0" u="none" strike="noStrike">
-              <a:solidFill>
-                <a:srgbClr val="000000"/>
-              </a:solidFill>
-              <a:effectLst/>
-              <a:uFillTx/>
-              <a:latin typeface="Arial"/>
-            </a:endParaRPr>
-          </a:p>
-        </p:txBody>
-      </p:sp>
-      <p:sp>
-        <p:nvSpPr>
-          <p:cNvPr id="405" name="Text 16"/>
-          <p:cNvSpPr/>
-          <p:nvPr/>
-        </p:nvSpPr>
-        <p:spPr>
-          <a:xfrm>
-            <a:off x="548640" y="6510600"/>
-            <a:ext cx="5485680" cy="273600"/>
-          </a:xfrm>
-          <a:prstGeom prst="rect">
-            <a:avLst/>
-          </a:prstGeom>
-          <a:noFill/>
-          <a:ln w="0">
-            <a:noFill/>
-          </a:ln>
-        </p:spPr>
-        <p:style>
-          <a:lnRef idx="0"/>
-          <a:fillRef idx="0"/>
-          <a:effectRef idx="0"/>
-          <a:fontRef idx="minor"/>
-        </p:style>
-        <p:txBody>
-          <a:bodyPr lIns="0" tIns="0" rIns="0" bIns="0" anchor="ctr">
-            <a:noAutofit/>
-          </a:bodyPr>
-          <a:p>
-            <a:pPr defTabSz="914400">
-              <a:lnSpc>
-                <a:spcPct val="100000"/>
-              </a:lnSpc>
-              <a:tabLst>
-                <a:tab pos="0" algn="l"/>
-              </a:tabLst>
-            </a:pPr>
-            <a:r>
-              <a:rPr lang="en-US" sz="800" b="0" u="none" strike="noStrike">
-                <a:solidFill>
-                  <a:srgbClr val="7C8A80"/>
+              <a:t>Print MyClass.__mro__ for a class with two parents, and explain </a:t>
+            </a:r>
+            <a:r>
+              <a:rPr lang="en-US" sz="1300" b="0" u="none" strike="noStrike">
+                <a:solidFill>
+                  <a:srgbClr val="13312F"/>
                 </a:solidFill>
                 <a:effectLst/>
                 <a:uFillTx/>
                 <a:latin typeface="Calibri"/>
                 <a:ea typeface="Calibri"/>
               </a:rPr>
+              <a:t>the order out loud before checking</a:t>
+            </a:r>
+            <a:endParaRPr lang="en-US" sz="1300" b="0" u="none" strike="noStrike">
+              <a:solidFill>
+                <a:srgbClr val="000000"/>
+              </a:solidFill>
+              <a:effectLst/>
+              <a:uFillTx/>
+              <a:latin typeface="Arial"/>
+            </a:endParaRPr>
+          </a:p>
+        </p:txBody>
+      </p:sp>
+      <p:sp>
+        <p:nvSpPr>
+          <p:cNvPr id="405" name="Text 16"/>
+          <p:cNvSpPr/>
+          <p:nvPr/>
+        </p:nvSpPr>
+        <p:spPr>
+          <a:xfrm>
+            <a:off x="548640" y="6510600"/>
+            <a:ext cx="5485320" cy="273240"/>
+          </a:xfrm>
+          <a:prstGeom prst="rect">
+            <a:avLst/>
+          </a:prstGeom>
+          <a:noFill/>
+          <a:ln w="0">
+            <a:noFill/>
+          </a:ln>
+        </p:spPr>
+        <p:style>
+          <a:lnRef idx="0"/>
+          <a:fillRef idx="0"/>
+          <a:effectRef idx="0"/>
+          <a:fontRef idx="minor"/>
+        </p:style>
+        <p:txBody>
+          <a:bodyPr lIns="0" tIns="0" rIns="0" bIns="0" anchor="ctr">
+            <a:noAutofit/>
+          </a:bodyPr>
+          <a:p>
+            <a:pPr defTabSz="914400">
+              <a:lnSpc>
+                <a:spcPct val="100000"/>
+              </a:lnSpc>
+              <a:tabLst>
+                <a:tab pos="0" algn="l"/>
+              </a:tabLst>
+            </a:pPr>
+            <a:r>
+              <a:rPr lang="en-US" sz="800" b="0" u="none" strike="noStrike">
+                <a:solidFill>
+                  <a:srgbClr val="7C8A80"/>
+                </a:solidFill>
+                <a:effectLst/>
+                <a:uFillTx/>
+                <a:latin typeface="Calibri"/>
+                <a:ea typeface="Calibri"/>
+              </a:rPr>
               <a:t>Object-Oriented Programming  ·  Session 10</a:t>
             </a:r>
             <a:endParaRPr lang="en-US" sz="800" b="0" u="none" strike="noStrike">
@@ -31197,7 +31257,7 @@
         <p:spPr>
           <a:xfrm>
             <a:off x="11094480" y="6510600"/>
-            <a:ext cx="547920" cy="273600"/>
+            <a:ext cx="547560" cy="273240"/>
           </a:xfrm>
           <a:prstGeom prst="rect">
             <a:avLst/>
@@ -31295,7 +31355,7 @@
         <p:spPr>
           <a:xfrm>
             <a:off x="548640" y="457200"/>
-            <a:ext cx="383400" cy="383400"/>
+            <a:ext cx="383040" cy="383040"/>
           </a:xfrm>
           <a:prstGeom prst="roundRect">
             <a:avLst>
@@ -31344,7 +31404,7 @@
         <p:spPr>
           <a:xfrm>
             <a:off x="631080" y="539640"/>
-            <a:ext cx="218880" cy="218880"/>
+            <a:ext cx="218520" cy="218520"/>
           </a:xfrm>
           <a:prstGeom prst="rect">
             <a:avLst/>
@@ -31364,7 +31424,7 @@
         <p:spPr>
           <a:xfrm>
             <a:off x="1097280" y="420480"/>
-            <a:ext cx="10545120" cy="456480"/>
+            <a:ext cx="10544760" cy="456120"/>
           </a:xfrm>
           <a:prstGeom prst="rect">
             <a:avLst/>
@@ -31425,7 +31485,7 @@
         <p:spPr>
           <a:xfrm>
             <a:off x="548640" y="1234440"/>
-            <a:ext cx="3245400" cy="5119920"/>
+            <a:ext cx="3245040" cy="5119560"/>
           </a:xfrm>
           <a:prstGeom prst="roundRect">
             <a:avLst>
@@ -31470,7 +31530,7 @@
         <p:spPr>
           <a:xfrm>
             <a:off x="1645920" y="1737360"/>
-            <a:ext cx="1050840" cy="1050840"/>
+            <a:ext cx="1050480" cy="1050480"/>
           </a:xfrm>
           <a:prstGeom prst="ellipse">
             <a:avLst/>
@@ -31517,7 +31577,7 @@
         <p:spPr>
           <a:xfrm>
             <a:off x="1906560" y="2002680"/>
-            <a:ext cx="529560" cy="529560"/>
+            <a:ext cx="529200" cy="529200"/>
           </a:xfrm>
           <a:prstGeom prst="rect">
             <a:avLst/>
@@ -31537,7 +31597,7 @@
         <p:spPr>
           <a:xfrm>
             <a:off x="731520" y="3017520"/>
-            <a:ext cx="2879640" cy="3062520"/>
+            <a:ext cx="2879280" cy="3062160"/>
           </a:xfrm>
           <a:prstGeom prst="rect">
             <a:avLst/>
@@ -31658,7 +31718,7 @@
         <p:spPr>
           <a:xfrm>
             <a:off x="4206240" y="1280160"/>
-            <a:ext cx="7436160" cy="5028480"/>
+            <a:ext cx="7435800" cy="5028120"/>
           </a:xfrm>
           <a:prstGeom prst="rect">
             <a:avLst/>
@@ -31829,7 +31889,7 @@
         <p:spPr>
           <a:xfrm>
             <a:off x="548640" y="6510600"/>
-            <a:ext cx="5485680" cy="273600"/>
+            <a:ext cx="5485320" cy="273240"/>
           </a:xfrm>
           <a:prstGeom prst="rect">
             <a:avLst/>
@@ -31890,7 +31950,7 @@
         <p:spPr>
           <a:xfrm>
             <a:off x="11094480" y="6510600"/>
-            <a:ext cx="547920" cy="273600"/>
+            <a:ext cx="547560" cy="273240"/>
           </a:xfrm>
           <a:prstGeom prst="rect">
             <a:avLst/>
@@ -31988,7 +32048,7 @@
         <p:spPr>
           <a:xfrm>
             <a:off x="548640" y="457200"/>
-            <a:ext cx="383400" cy="383400"/>
+            <a:ext cx="383040" cy="383040"/>
           </a:xfrm>
           <a:prstGeom prst="roundRect">
             <a:avLst>
@@ -32037,7 +32097,7 @@
         <p:spPr>
           <a:xfrm>
             <a:off x="631080" y="539640"/>
-            <a:ext cx="218880" cy="218880"/>
+            <a:ext cx="218520" cy="218520"/>
           </a:xfrm>
           <a:prstGeom prst="rect">
             <a:avLst/>
@@ -32057,7 +32117,7 @@
         <p:spPr>
           <a:xfrm>
             <a:off x="1097280" y="420480"/>
-            <a:ext cx="10545120" cy="456480"/>
+            <a:ext cx="10544760" cy="456120"/>
           </a:xfrm>
           <a:prstGeom prst="rect">
             <a:avLst/>
@@ -32118,7 +32178,7 @@
         <p:spPr>
           <a:xfrm>
             <a:off x="548640" y="1234440"/>
-            <a:ext cx="11093760" cy="1197000"/>
+            <a:ext cx="11093400" cy="1196640"/>
           </a:xfrm>
           <a:prstGeom prst="rect">
             <a:avLst/>
@@ -32254,7 +32314,7 @@
         <p:spPr>
           <a:xfrm>
             <a:off x="548640" y="2569320"/>
-            <a:ext cx="11093760" cy="3785040"/>
+            <a:ext cx="11093400" cy="3784680"/>
           </a:xfrm>
           <a:prstGeom prst="roundRect">
             <a:avLst>
@@ -32299,7 +32359,7 @@
         <p:spPr>
           <a:xfrm>
             <a:off x="868680" y="2752200"/>
-            <a:ext cx="10453680" cy="3419280"/>
+            <a:ext cx="10453320" cy="3418920"/>
           </a:xfrm>
           <a:prstGeom prst="rect">
             <a:avLst/>
@@ -32720,7 +32780,7 @@
         <p:spPr>
           <a:xfrm>
             <a:off x="548640" y="6510600"/>
-            <a:ext cx="5485680" cy="273600"/>
+            <a:ext cx="5485320" cy="273240"/>
           </a:xfrm>
           <a:prstGeom prst="rect">
             <a:avLst/>
@@ -32781,7 +32841,7 @@
         <p:spPr>
           <a:xfrm>
             <a:off x="11094480" y="6510600"/>
-            <a:ext cx="547920" cy="273600"/>
+            <a:ext cx="547560" cy="273240"/>
           </a:xfrm>
           <a:prstGeom prst="rect">
             <a:avLst/>
@@ -32879,7 +32939,7 @@
         <p:spPr>
           <a:xfrm>
             <a:off x="548640" y="457200"/>
-            <a:ext cx="383400" cy="383400"/>
+            <a:ext cx="383040" cy="383040"/>
           </a:xfrm>
           <a:prstGeom prst="roundRect">
             <a:avLst>
@@ -32928,7 +32988,7 @@
         <p:spPr>
           <a:xfrm>
             <a:off x="631080" y="539640"/>
-            <a:ext cx="218880" cy="218880"/>
+            <a:ext cx="218520" cy="218520"/>
           </a:xfrm>
           <a:prstGeom prst="rect">
             <a:avLst/>
@@ -32948,7 +33008,7 @@
         <p:spPr>
           <a:xfrm>
             <a:off x="1097280" y="420480"/>
-            <a:ext cx="10545120" cy="456480"/>
+            <a:ext cx="10544760" cy="456120"/>
           </a:xfrm>
           <a:prstGeom prst="rect">
             <a:avLst/>
@@ -33009,7 +33069,7 @@
         <p:spPr>
           <a:xfrm>
             <a:off x="548640" y="1234440"/>
-            <a:ext cx="11093760" cy="1197000"/>
+            <a:ext cx="11093400" cy="1196640"/>
           </a:xfrm>
           <a:prstGeom prst="rect">
             <a:avLst/>
@@ -33145,7 +33205,7 @@
         <p:spPr>
           <a:xfrm>
             <a:off x="548640" y="2569320"/>
-            <a:ext cx="11093760" cy="3785040"/>
+            <a:ext cx="11093400" cy="3784680"/>
           </a:xfrm>
           <a:prstGeom prst="roundRect">
             <a:avLst>
@@ -33190,7 +33250,7 @@
         <p:spPr>
           <a:xfrm>
             <a:off x="868680" y="2752200"/>
-            <a:ext cx="10453680" cy="3419280"/>
+            <a:ext cx="10453320" cy="3418920"/>
           </a:xfrm>
           <a:prstGeom prst="rect">
             <a:avLst/>
@@ -33551,7 +33611,7 @@
         <p:spPr>
           <a:xfrm>
             <a:off x="548640" y="6510600"/>
-            <a:ext cx="5485680" cy="273600"/>
+            <a:ext cx="5485320" cy="273240"/>
           </a:xfrm>
           <a:prstGeom prst="rect">
             <a:avLst/>
@@ -33612,7 +33672,7 @@
         <p:spPr>
           <a:xfrm>
             <a:off x="11094480" y="6510600"/>
-            <a:ext cx="547920" cy="273600"/>
+            <a:ext cx="547560" cy="273240"/>
           </a:xfrm>
           <a:prstGeom prst="rect">
             <a:avLst/>
@@ -33710,7 +33770,7 @@
         <p:spPr>
           <a:xfrm>
             <a:off x="548640" y="457200"/>
-            <a:ext cx="383400" cy="383400"/>
+            <a:ext cx="383040" cy="383040"/>
           </a:xfrm>
           <a:prstGeom prst="roundRect">
             <a:avLst>
@@ -33759,7 +33819,7 @@
         <p:spPr>
           <a:xfrm>
             <a:off x="631080" y="539640"/>
-            <a:ext cx="218880" cy="218880"/>
+            <a:ext cx="218520" cy="218520"/>
           </a:xfrm>
           <a:prstGeom prst="rect">
             <a:avLst/>
@@ -33779,7 +33839,7 @@
         <p:spPr>
           <a:xfrm>
             <a:off x="1097280" y="420480"/>
-            <a:ext cx="10545120" cy="456480"/>
+            <a:ext cx="10544760" cy="456120"/>
           </a:xfrm>
           <a:prstGeom prst="rect">
             <a:avLst/>
@@ -33840,7 +33900,7 @@
         <p:spPr>
           <a:xfrm>
             <a:off x="548640" y="1234440"/>
-            <a:ext cx="11093760" cy="5119920"/>
+            <a:ext cx="11093400" cy="5119560"/>
           </a:xfrm>
           <a:prstGeom prst="roundRect">
             <a:avLst>
@@ -33885,7 +33945,7 @@
         <p:spPr>
           <a:xfrm>
             <a:off x="868680" y="1435680"/>
-            <a:ext cx="10453680" cy="365040"/>
+            <a:ext cx="10453320" cy="364680"/>
           </a:xfrm>
           <a:prstGeom prst="rect">
             <a:avLst/>
@@ -33946,7 +34006,7 @@
         <p:spPr>
           <a:xfrm>
             <a:off x="868680" y="2473560"/>
-            <a:ext cx="310320" cy="310320"/>
+            <a:ext cx="309960" cy="309960"/>
           </a:xfrm>
           <a:prstGeom prst="ellipse">
             <a:avLst/>
@@ -33989,7 +34049,7 @@
         <p:spPr>
           <a:xfrm>
             <a:off x="868680" y="2473560"/>
-            <a:ext cx="310320" cy="310320"/>
+            <a:ext cx="309960" cy="309960"/>
           </a:xfrm>
           <a:prstGeom prst="rect">
             <a:avLst/>
@@ -34050,7 +34110,7 @@
         <p:spPr>
           <a:xfrm>
             <a:off x="1408320" y="1920240"/>
-            <a:ext cx="9914040" cy="1416600"/>
+            <a:ext cx="9913680" cy="1416240"/>
           </a:xfrm>
           <a:prstGeom prst="rect">
             <a:avLst/>
@@ -34111,7 +34171,7 @@
         <p:spPr>
           <a:xfrm>
             <a:off x="868680" y="3890880"/>
-            <a:ext cx="310320" cy="310320"/>
+            <a:ext cx="309960" cy="309960"/>
           </a:xfrm>
           <a:prstGeom prst="ellipse">
             <a:avLst/>
@@ -34154,7 +34214,7 @@
         <p:spPr>
           <a:xfrm>
             <a:off x="868680" y="3890880"/>
-            <a:ext cx="310320" cy="310320"/>
+            <a:ext cx="309960" cy="309960"/>
           </a:xfrm>
           <a:prstGeom prst="rect">
             <a:avLst/>
@@ -34215,7 +34275,7 @@
         <p:spPr>
           <a:xfrm>
             <a:off x="1408320" y="3337560"/>
-            <a:ext cx="9914040" cy="1416600"/>
+            <a:ext cx="9913680" cy="1416240"/>
           </a:xfrm>
           <a:prstGeom prst="rect">
             <a:avLst/>
@@ -34276,7 +34336,7 @@
         <p:spPr>
           <a:xfrm>
             <a:off x="868680" y="5308200"/>
-            <a:ext cx="310320" cy="310320"/>
+            <a:ext cx="309960" cy="309960"/>
           </a:xfrm>
           <a:prstGeom prst="ellipse">
             <a:avLst/>
@@ -34319,7 +34379,7 @@
         <p:spPr>
           <a:xfrm>
             <a:off x="868680" y="5308200"/>
-            <a:ext cx="310320" cy="310320"/>
+            <a:ext cx="309960" cy="309960"/>
           </a:xfrm>
           <a:prstGeom prst="rect">
             <a:avLst/>
@@ -34380,7 +34440,7 @@
         <p:spPr>
           <a:xfrm>
             <a:off x="1408320" y="4754880"/>
-            <a:ext cx="9914040" cy="1416600"/>
+            <a:ext cx="9913680" cy="1416240"/>
           </a:xfrm>
           <a:prstGeom prst="rect">
             <a:avLst/>
@@ -34441,7 +34501,7 @@
         <p:spPr>
           <a:xfrm>
             <a:off x="548640" y="6510600"/>
-            <a:ext cx="5485680" cy="273600"/>
+            <a:ext cx="5485320" cy="273240"/>
           </a:xfrm>
           <a:prstGeom prst="rect">
             <a:avLst/>
@@ -34502,7 +34562,7 @@
         <p:spPr>
           <a:xfrm>
             <a:off x="11094480" y="6510600"/>
-            <a:ext cx="547920" cy="273600"/>
+            <a:ext cx="547560" cy="273240"/>
           </a:xfrm>
           <a:prstGeom prst="rect">
             <a:avLst/>
@@ -34600,7 +34660,7 @@
         <p:spPr>
           <a:xfrm>
             <a:off x="-2286000" y="3657600"/>
-            <a:ext cx="6400080" cy="6400080"/>
+            <a:ext cx="6399720" cy="6399720"/>
           </a:xfrm>
           <a:prstGeom prst="ellipse">
             <a:avLst/>
@@ -34643,7 +34703,7 @@
         <p:spPr>
           <a:xfrm>
             <a:off x="8229600" y="-2743200"/>
-            <a:ext cx="6400080" cy="6400080"/>
+            <a:ext cx="6399720" cy="6399720"/>
           </a:xfrm>
           <a:prstGeom prst="ellipse">
             <a:avLst/>
@@ -34686,7 +34746,7 @@
         <p:spPr>
           <a:xfrm>
             <a:off x="5638680" y="868680"/>
-            <a:ext cx="913680" cy="913680"/>
+            <a:ext cx="913320" cy="913320"/>
           </a:xfrm>
           <a:prstGeom prst="ellipse">
             <a:avLst/>
@@ -34733,7 +34793,7 @@
         <p:spPr>
           <a:xfrm>
             <a:off x="5876280" y="1097280"/>
-            <a:ext cx="438120" cy="438120"/>
+            <a:ext cx="437760" cy="437760"/>
           </a:xfrm>
           <a:prstGeom prst="rect">
             <a:avLst/>
@@ -34753,7 +34813,7 @@
         <p:spPr>
           <a:xfrm>
             <a:off x="914400" y="2057400"/>
-            <a:ext cx="10362240" cy="291960"/>
+            <a:ext cx="10361880" cy="291600"/>
           </a:xfrm>
           <a:prstGeom prst="rect">
             <a:avLst/>
@@ -34814,7 +34874,7 @@
         <p:spPr>
           <a:xfrm>
             <a:off x="1188720" y="2441520"/>
-            <a:ext cx="9813600" cy="1005120"/>
+            <a:ext cx="9813240" cy="1004760"/>
           </a:xfrm>
           <a:prstGeom prst="rect">
             <a:avLst/>
@@ -34875,7 +34935,7 @@
         <p:spPr>
           <a:xfrm>
             <a:off x="1920240" y="3630240"/>
-            <a:ext cx="8350560" cy="822240"/>
+            <a:ext cx="8350200" cy="821880"/>
           </a:xfrm>
           <a:prstGeom prst="rect">
             <a:avLst/>
@@ -34936,7 +34996,7 @@
         <p:spPr>
           <a:xfrm>
             <a:off x="11094480" y="6492240"/>
-            <a:ext cx="547920" cy="273600"/>
+            <a:ext cx="547560" cy="273240"/>
           </a:xfrm>
           <a:prstGeom prst="rect">
             <a:avLst/>
@@ -35034,7 +35094,7 @@
         <p:spPr>
           <a:xfrm>
             <a:off x="548640" y="457200"/>
-            <a:ext cx="383400" cy="383400"/>
+            <a:ext cx="383040" cy="383040"/>
           </a:xfrm>
           <a:prstGeom prst="roundRect">
             <a:avLst>
@@ -35083,7 +35143,7 @@
         <p:spPr>
           <a:xfrm>
             <a:off x="631080" y="539640"/>
-            <a:ext cx="218880" cy="218880"/>
+            <a:ext cx="218520" cy="218520"/>
           </a:xfrm>
           <a:prstGeom prst="rect">
             <a:avLst/>
@@ -35103,7 +35163,7 @@
         <p:spPr>
           <a:xfrm>
             <a:off x="1097280" y="420480"/>
-            <a:ext cx="10545120" cy="456480"/>
+            <a:ext cx="10544760" cy="456120"/>
           </a:xfrm>
           <a:prstGeom prst="rect">
             <a:avLst/>
@@ -35164,7 +35224,7 @@
         <p:spPr>
           <a:xfrm>
             <a:off x="548640" y="1234440"/>
-            <a:ext cx="11093760" cy="1197000"/>
+            <a:ext cx="11093400" cy="1196640"/>
           </a:xfrm>
           <a:prstGeom prst="rect">
             <a:avLst/>
@@ -35300,7 +35360,7 @@
         <p:spPr>
           <a:xfrm>
             <a:off x="548640" y="2569320"/>
-            <a:ext cx="11093760" cy="3785040"/>
+            <a:ext cx="11093400" cy="3784680"/>
           </a:xfrm>
           <a:prstGeom prst="roundRect">
             <a:avLst>
@@ -35345,7 +35405,7 @@
         <p:spPr>
           <a:xfrm>
             <a:off x="868680" y="2752200"/>
-            <a:ext cx="10453680" cy="3419280"/>
+            <a:ext cx="10453320" cy="3418920"/>
           </a:xfrm>
           <a:prstGeom prst="rect">
             <a:avLst/>
@@ -35766,7 +35826,7 @@
         <p:spPr>
           <a:xfrm>
             <a:off x="548640" y="6510600"/>
-            <a:ext cx="5485680" cy="273600"/>
+            <a:ext cx="5485320" cy="273240"/>
           </a:xfrm>
           <a:prstGeom prst="rect">
             <a:avLst/>
@@ -35827,7 +35887,7 @@
         <p:spPr>
           <a:xfrm>
             <a:off x="11094480" y="6510600"/>
-            <a:ext cx="547920" cy="273600"/>
+            <a:ext cx="547560" cy="273240"/>
           </a:xfrm>
           <a:prstGeom prst="rect">
             <a:avLst/>
@@ -35925,7 +35985,7 @@
         <p:spPr>
           <a:xfrm>
             <a:off x="548640" y="457200"/>
-            <a:ext cx="383400" cy="383400"/>
+            <a:ext cx="383040" cy="383040"/>
           </a:xfrm>
           <a:prstGeom prst="roundRect">
             <a:avLst>
@@ -35974,7 +36034,7 @@
         <p:spPr>
           <a:xfrm>
             <a:off x="631080" y="539640"/>
-            <a:ext cx="218880" cy="218880"/>
+            <a:ext cx="218520" cy="218520"/>
           </a:xfrm>
           <a:prstGeom prst="rect">
             <a:avLst/>
@@ -35994,7 +36054,7 @@
         <p:spPr>
           <a:xfrm>
             <a:off x="1097280" y="420480"/>
-            <a:ext cx="10545120" cy="456480"/>
+            <a:ext cx="10544760" cy="456120"/>
           </a:xfrm>
           <a:prstGeom prst="rect">
             <a:avLst/>
@@ -36055,7 +36115,7 @@
         <p:spPr>
           <a:xfrm>
             <a:off x="548640" y="1234440"/>
-            <a:ext cx="11093760" cy="1197000"/>
+            <a:ext cx="11093400" cy="1196640"/>
           </a:xfrm>
           <a:prstGeom prst="rect">
             <a:avLst/>
@@ -36191,7 +36251,7 @@
         <p:spPr>
           <a:xfrm>
             <a:off x="548640" y="2569320"/>
-            <a:ext cx="11093760" cy="3785040"/>
+            <a:ext cx="11093400" cy="3784680"/>
           </a:xfrm>
           <a:prstGeom prst="roundRect">
             <a:avLst>
@@ -36236,7 +36296,7 @@
         <p:spPr>
           <a:xfrm>
             <a:off x="868680" y="2752200"/>
-            <a:ext cx="10453680" cy="3419280"/>
+            <a:ext cx="10453320" cy="3418920"/>
           </a:xfrm>
           <a:prstGeom prst="rect">
             <a:avLst/>
@@ -36717,7 +36777,7 @@
         <p:spPr>
           <a:xfrm>
             <a:off x="548640" y="6510600"/>
-            <a:ext cx="5485680" cy="273600"/>
+            <a:ext cx="5485320" cy="273240"/>
           </a:xfrm>
           <a:prstGeom prst="rect">
             <a:avLst/>
@@ -36778,7 +36838,7 @@
         <p:spPr>
           <a:xfrm>
             <a:off x="11094480" y="6510600"/>
-            <a:ext cx="547920" cy="273600"/>
+            <a:ext cx="547560" cy="273240"/>
           </a:xfrm>
           <a:prstGeom prst="rect">
             <a:avLst/>
@@ -36876,7 +36936,7 @@
         <p:spPr>
           <a:xfrm>
             <a:off x="548640" y="457200"/>
-            <a:ext cx="383400" cy="383400"/>
+            <a:ext cx="383040" cy="383040"/>
           </a:xfrm>
           <a:prstGeom prst="roundRect">
             <a:avLst>
@@ -36925,7 +36985,7 @@
         <p:spPr>
           <a:xfrm>
             <a:off x="631080" y="539640"/>
-            <a:ext cx="218880" cy="218880"/>
+            <a:ext cx="218520" cy="218520"/>
           </a:xfrm>
           <a:prstGeom prst="rect">
             <a:avLst/>
@@ -36945,7 +37005,7 @@
         <p:spPr>
           <a:xfrm>
             <a:off x="1097280" y="420480"/>
-            <a:ext cx="10545120" cy="456480"/>
+            <a:ext cx="10544760" cy="456120"/>
           </a:xfrm>
           <a:prstGeom prst="rect">
             <a:avLst/>
@@ -37006,7 +37066,7 @@
         <p:spPr>
           <a:xfrm>
             <a:off x="548640" y="1234440"/>
-            <a:ext cx="5363640" cy="5119920"/>
+            <a:ext cx="5363280" cy="5119560"/>
           </a:xfrm>
           <a:prstGeom prst="roundRect">
             <a:avLst>
@@ -37051,7 +37111,7 @@
         <p:spPr>
           <a:xfrm>
             <a:off x="822960" y="1508760"/>
-            <a:ext cx="456480" cy="456480"/>
+            <a:ext cx="456120" cy="456120"/>
           </a:xfrm>
           <a:prstGeom prst="ellipse">
             <a:avLst/>
@@ -37098,7 +37158,7 @@
         <p:spPr>
           <a:xfrm>
             <a:off x="923400" y="1609200"/>
-            <a:ext cx="255240" cy="255240"/>
+            <a:ext cx="254880" cy="254880"/>
           </a:xfrm>
           <a:prstGeom prst="rect">
             <a:avLst/>
@@ -37118,7 +37178,7 @@
         <p:spPr>
           <a:xfrm>
             <a:off x="1444680" y="1508760"/>
-            <a:ext cx="4284720" cy="456480"/>
+            <a:ext cx="4284360" cy="456120"/>
           </a:xfrm>
           <a:prstGeom prst="rect">
             <a:avLst/>
@@ -37179,7 +37239,7 @@
         <p:spPr>
           <a:xfrm>
             <a:off x="841320" y="2194560"/>
-            <a:ext cx="4778280" cy="3931200"/>
+            <a:ext cx="4777920" cy="3930840"/>
           </a:xfrm>
           <a:prstGeom prst="rect">
             <a:avLst/>
@@ -37315,7 +37375,7 @@
         <p:spPr>
           <a:xfrm>
             <a:off x="6278760" y="1234440"/>
-            <a:ext cx="5363640" cy="5119920"/>
+            <a:ext cx="5363280" cy="5119560"/>
           </a:xfrm>
           <a:prstGeom prst="roundRect">
             <a:avLst>
@@ -37360,7 +37420,7 @@
         <p:spPr>
           <a:xfrm>
             <a:off x="6553080" y="1508760"/>
-            <a:ext cx="456480" cy="456480"/>
+            <a:ext cx="456120" cy="456120"/>
           </a:xfrm>
           <a:prstGeom prst="ellipse">
             <a:avLst/>
@@ -37407,7 +37467,7 @@
         <p:spPr>
           <a:xfrm>
             <a:off x="6653520" y="1609200"/>
-            <a:ext cx="255240" cy="255240"/>
+            <a:ext cx="254880" cy="254880"/>
           </a:xfrm>
           <a:prstGeom prst="rect">
             <a:avLst/>
@@ -37427,7 +37487,7 @@
         <p:spPr>
           <a:xfrm>
             <a:off x="7174800" y="1508760"/>
-            <a:ext cx="4284720" cy="456480"/>
+            <a:ext cx="4284360" cy="456120"/>
           </a:xfrm>
           <a:prstGeom prst="rect">
             <a:avLst/>
@@ -37488,7 +37548,7 @@
         <p:spPr>
           <a:xfrm>
             <a:off x="6571440" y="2194560"/>
-            <a:ext cx="4778280" cy="3931200"/>
+            <a:ext cx="4777920" cy="3930840"/>
           </a:xfrm>
           <a:prstGeom prst="rect">
             <a:avLst/>
@@ -37624,7 +37684,7 @@
         <p:spPr>
           <a:xfrm>
             <a:off x="548640" y="6510600"/>
-            <a:ext cx="5485680" cy="273600"/>
+            <a:ext cx="5485320" cy="273240"/>
           </a:xfrm>
           <a:prstGeom prst="rect">
             <a:avLst/>
@@ -37685,7 +37745,7 @@
         <p:spPr>
           <a:xfrm>
             <a:off x="11094480" y="6510600"/>
-            <a:ext cx="547920" cy="273600"/>
+            <a:ext cx="547560" cy="273240"/>
           </a:xfrm>
           <a:prstGeom prst="rect">
             <a:avLst/>
@@ -37783,7 +37843,7 @@
         <p:spPr>
           <a:xfrm>
             <a:off x="548640" y="457200"/>
-            <a:ext cx="383400" cy="383400"/>
+            <a:ext cx="383040" cy="383040"/>
           </a:xfrm>
           <a:prstGeom prst="roundRect">
             <a:avLst>
@@ -37832,7 +37892,7 @@
         <p:spPr>
           <a:xfrm>
             <a:off x="631080" y="539640"/>
-            <a:ext cx="218880" cy="218880"/>
+            <a:ext cx="218520" cy="218520"/>
           </a:xfrm>
           <a:prstGeom prst="rect">
             <a:avLst/>
@@ -37852,7 +37912,7 @@
         <p:spPr>
           <a:xfrm>
             <a:off x="1097280" y="420480"/>
-            <a:ext cx="10545120" cy="456480"/>
+            <a:ext cx="10544760" cy="456120"/>
           </a:xfrm>
           <a:prstGeom prst="rect">
             <a:avLst/>
@@ -37913,7 +37973,7 @@
         <p:spPr>
           <a:xfrm>
             <a:off x="548640" y="1234440"/>
-            <a:ext cx="11093760" cy="1197000"/>
+            <a:ext cx="11093400" cy="1196640"/>
           </a:xfrm>
           <a:prstGeom prst="rect">
             <a:avLst/>
@@ -38049,7 +38109,7 @@
         <p:spPr>
           <a:xfrm>
             <a:off x="548640" y="2569320"/>
-            <a:ext cx="11093760" cy="3785040"/>
+            <a:ext cx="11093400" cy="3784680"/>
           </a:xfrm>
           <a:prstGeom prst="roundRect">
             <a:avLst>
@@ -38094,7 +38154,7 @@
         <p:spPr>
           <a:xfrm>
             <a:off x="868680" y="2752200"/>
-            <a:ext cx="10453680" cy="3419280"/>
+            <a:ext cx="10453320" cy="3418920"/>
           </a:xfrm>
           <a:prstGeom prst="rect">
             <a:avLst/>
@@ -38485,7 +38545,7 @@
         <p:spPr>
           <a:xfrm>
             <a:off x="548640" y="6510600"/>
-            <a:ext cx="5485680" cy="273600"/>
+            <a:ext cx="5485320" cy="273240"/>
           </a:xfrm>
           <a:prstGeom prst="rect">
             <a:avLst/>
@@ -38546,7 +38606,7 @@
         <p:spPr>
           <a:xfrm>
             <a:off x="11094480" y="6510600"/>
-            <a:ext cx="547920" cy="273600"/>
+            <a:ext cx="547560" cy="273240"/>
           </a:xfrm>
           <a:prstGeom prst="rect">
             <a:avLst/>
@@ -38644,7 +38704,7 @@
         <p:spPr>
           <a:xfrm>
             <a:off x="548640" y="457200"/>
-            <a:ext cx="383400" cy="383400"/>
+            <a:ext cx="383040" cy="383040"/>
           </a:xfrm>
           <a:prstGeom prst="roundRect">
             <a:avLst>
@@ -38693,7 +38753,7 @@
         <p:spPr>
           <a:xfrm>
             <a:off x="631080" y="539640"/>
-            <a:ext cx="218880" cy="218880"/>
+            <a:ext cx="218520" cy="218520"/>
           </a:xfrm>
           <a:prstGeom prst="rect">
             <a:avLst/>
@@ -38713,7 +38773,7 @@
         <p:spPr>
           <a:xfrm>
             <a:off x="1097280" y="420480"/>
-            <a:ext cx="10545120" cy="456480"/>
+            <a:ext cx="10544760" cy="456120"/>
           </a:xfrm>
           <a:prstGeom prst="rect">
             <a:avLst/>
@@ -38774,7 +38834,7 @@
         <p:spPr>
           <a:xfrm>
             <a:off x="548640" y="1234440"/>
-            <a:ext cx="3245400" cy="5119920"/>
+            <a:ext cx="3245040" cy="5119560"/>
           </a:xfrm>
           <a:prstGeom prst="roundRect">
             <a:avLst>
@@ -38819,7 +38879,7 @@
         <p:spPr>
           <a:xfrm>
             <a:off x="1645920" y="1737360"/>
-            <a:ext cx="1050840" cy="1050840"/>
+            <a:ext cx="1050480" cy="1050480"/>
           </a:xfrm>
           <a:prstGeom prst="ellipse">
             <a:avLst/>
@@ -38866,7 +38926,7 @@
         <p:spPr>
           <a:xfrm>
             <a:off x="1906560" y="2002680"/>
-            <a:ext cx="529560" cy="529560"/>
+            <a:ext cx="529200" cy="529200"/>
           </a:xfrm>
           <a:prstGeom prst="rect">
             <a:avLst/>
@@ -38886,7 +38946,7 @@
         <p:spPr>
           <a:xfrm>
             <a:off x="731520" y="3017520"/>
-            <a:ext cx="2879640" cy="3062520"/>
+            <a:ext cx="2879280" cy="3062160"/>
           </a:xfrm>
           <a:prstGeom prst="rect">
             <a:avLst/>
@@ -39007,7 +39067,7 @@
         <p:spPr>
           <a:xfrm>
             <a:off x="4206240" y="1280160"/>
-            <a:ext cx="7436160" cy="5028480"/>
+            <a:ext cx="7435800" cy="5028120"/>
           </a:xfrm>
           <a:prstGeom prst="rect">
             <a:avLst/>
@@ -39178,7 +39238,7 @@
         <p:spPr>
           <a:xfrm>
             <a:off x="548640" y="6510600"/>
-            <a:ext cx="5485680" cy="273600"/>
+            <a:ext cx="5485320" cy="273240"/>
           </a:xfrm>
           <a:prstGeom prst="rect">
             <a:avLst/>
@@ -39239,7 +39299,7 @@
         <p:spPr>
           <a:xfrm>
             <a:off x="11094480" y="6510600"/>
-            <a:ext cx="547920" cy="273600"/>
+            <a:ext cx="547560" cy="273240"/>
           </a:xfrm>
           <a:prstGeom prst="rect">
             <a:avLst/>
@@ -39337,7 +39397,7 @@
         <p:spPr>
           <a:xfrm>
             <a:off x="548640" y="457200"/>
-            <a:ext cx="383400" cy="383400"/>
+            <a:ext cx="383040" cy="383040"/>
           </a:xfrm>
           <a:prstGeom prst="roundRect">
             <a:avLst>
@@ -39386,7 +39446,7 @@
         <p:spPr>
           <a:xfrm>
             <a:off x="631080" y="539640"/>
-            <a:ext cx="218880" cy="218880"/>
+            <a:ext cx="218520" cy="218520"/>
           </a:xfrm>
           <a:prstGeom prst="rect">
             <a:avLst/>
@@ -39406,7 +39466,7 @@
         <p:spPr>
           <a:xfrm>
             <a:off x="1097280" y="420480"/>
-            <a:ext cx="10545120" cy="456480"/>
+            <a:ext cx="10544760" cy="456120"/>
           </a:xfrm>
           <a:prstGeom prst="rect">
             <a:avLst/>
@@ -39467,7 +39527,7 @@
         <p:spPr>
           <a:xfrm>
             <a:off x="548640" y="1234440"/>
-            <a:ext cx="3245400" cy="5119920"/>
+            <a:ext cx="3245040" cy="5119560"/>
           </a:xfrm>
           <a:prstGeom prst="roundRect">
             <a:avLst>
@@ -39512,7 +39572,7 @@
         <p:spPr>
           <a:xfrm>
             <a:off x="1645920" y="1737360"/>
-            <a:ext cx="1050840" cy="1050840"/>
+            <a:ext cx="1050480" cy="1050480"/>
           </a:xfrm>
           <a:prstGeom prst="ellipse">
             <a:avLst/>
@@ -39559,7 +39619,7 @@
         <p:spPr>
           <a:xfrm>
             <a:off x="1906560" y="2002680"/>
-            <a:ext cx="529560" cy="529560"/>
+            <a:ext cx="529200" cy="529200"/>
           </a:xfrm>
           <a:prstGeom prst="rect">
             <a:avLst/>
@@ -39579,7 +39639,7 @@
         <p:spPr>
           <a:xfrm>
             <a:off x="731520" y="3017520"/>
-            <a:ext cx="2879640" cy="3062520"/>
+            <a:ext cx="2879280" cy="3062160"/>
           </a:xfrm>
           <a:prstGeom prst="rect">
             <a:avLst/>
@@ -39700,7 +39760,7 @@
         <p:spPr>
           <a:xfrm>
             <a:off x="4206240" y="1280160"/>
-            <a:ext cx="7436160" cy="5028480"/>
+            <a:ext cx="7435800" cy="5028120"/>
           </a:xfrm>
           <a:prstGeom prst="rect">
             <a:avLst/>
@@ -39871,7 +39931,7 @@
         <p:spPr>
           <a:xfrm>
             <a:off x="548640" y="6510600"/>
-            <a:ext cx="5485680" cy="273600"/>
+            <a:ext cx="5485320" cy="273240"/>
           </a:xfrm>
           <a:prstGeom prst="rect">
             <a:avLst/>
@@ -39932,7 +39992,7 @@
         <p:spPr>
           <a:xfrm>
             <a:off x="11094480" y="6510600"/>
-            <a:ext cx="547920" cy="273600"/>
+            <a:ext cx="547560" cy="273240"/>
           </a:xfrm>
           <a:prstGeom prst="rect">
             <a:avLst/>
@@ -40030,7 +40090,7 @@
         <p:spPr>
           <a:xfrm>
             <a:off x="548640" y="457200"/>
-            <a:ext cx="383400" cy="383400"/>
+            <a:ext cx="383040" cy="383040"/>
           </a:xfrm>
           <a:prstGeom prst="roundRect">
             <a:avLst>
@@ -40079,7 +40139,7 @@
         <p:spPr>
           <a:xfrm>
             <a:off x="631080" y="539640"/>
-            <a:ext cx="218880" cy="218880"/>
+            <a:ext cx="218520" cy="218520"/>
           </a:xfrm>
           <a:prstGeom prst="rect">
             <a:avLst/>
@@ -40099,7 +40159,7 @@
         <p:spPr>
           <a:xfrm>
             <a:off x="1097280" y="420480"/>
-            <a:ext cx="10545120" cy="456480"/>
+            <a:ext cx="10544760" cy="456120"/>
           </a:xfrm>
           <a:prstGeom prst="rect">
             <a:avLst/>
@@ -40160,7 +40220,7 @@
         <p:spPr>
           <a:xfrm>
             <a:off x="548640" y="1234440"/>
-            <a:ext cx="11093760" cy="1197000"/>
+            <a:ext cx="11093400" cy="1196640"/>
           </a:xfrm>
           <a:prstGeom prst="rect">
             <a:avLst/>
@@ -40296,7 +40356,7 @@
         <p:spPr>
           <a:xfrm>
             <a:off x="548640" y="2569320"/>
-            <a:ext cx="11093760" cy="3785040"/>
+            <a:ext cx="11093400" cy="3784680"/>
           </a:xfrm>
           <a:prstGeom prst="roundRect">
             <a:avLst>
@@ -40341,7 +40401,7 @@
         <p:spPr>
           <a:xfrm>
             <a:off x="868680" y="2752200"/>
-            <a:ext cx="10453680" cy="3419280"/>
+            <a:ext cx="10453320" cy="3418920"/>
           </a:xfrm>
           <a:prstGeom prst="rect">
             <a:avLst/>
@@ -40792,7 +40852,7 @@
         <p:spPr>
           <a:xfrm>
             <a:off x="548640" y="6510600"/>
-            <a:ext cx="5485680" cy="273600"/>
+            <a:ext cx="5485320" cy="273240"/>
           </a:xfrm>
           <a:prstGeom prst="rect">
             <a:avLst/>
@@ -40853,7 +40913,7 @@
         <p:spPr>
           <a:xfrm>
             <a:off x="11094480" y="6510600"/>
-            <a:ext cx="547920" cy="273600"/>
+            <a:ext cx="547560" cy="273240"/>
           </a:xfrm>
           <a:prstGeom prst="rect">
             <a:avLst/>
@@ -40951,7 +41011,7 @@
         <p:spPr>
           <a:xfrm>
             <a:off x="548640" y="457200"/>
-            <a:ext cx="383400" cy="383400"/>
+            <a:ext cx="383040" cy="383040"/>
           </a:xfrm>
           <a:prstGeom prst="roundRect">
             <a:avLst>
@@ -41000,7 +41060,7 @@
         <p:spPr>
           <a:xfrm>
             <a:off x="631080" y="539640"/>
-            <a:ext cx="218880" cy="218880"/>
+            <a:ext cx="218520" cy="218520"/>
           </a:xfrm>
           <a:prstGeom prst="rect">
             <a:avLst/>
@@ -41020,7 +41080,7 @@
         <p:spPr>
           <a:xfrm>
             <a:off x="1097280" y="420480"/>
-            <a:ext cx="10545120" cy="456480"/>
+            <a:ext cx="10544760" cy="456120"/>
           </a:xfrm>
           <a:prstGeom prst="rect">
             <a:avLst/>
@@ -41081,7 +41141,7 @@
         <p:spPr>
           <a:xfrm>
             <a:off x="548640" y="1234440"/>
-            <a:ext cx="11093760" cy="5119920"/>
+            <a:ext cx="11093400" cy="5119560"/>
           </a:xfrm>
           <a:prstGeom prst="roundRect">
             <a:avLst>
@@ -41126,7 +41186,7 @@
         <p:spPr>
           <a:xfrm>
             <a:off x="868680" y="1435680"/>
-            <a:ext cx="10453680" cy="365040"/>
+            <a:ext cx="10453320" cy="364680"/>
           </a:xfrm>
           <a:prstGeom prst="rect">
             <a:avLst/>
@@ -41187,7 +41247,7 @@
         <p:spPr>
           <a:xfrm>
             <a:off x="868680" y="2473560"/>
-            <a:ext cx="310320" cy="310320"/>
+            <a:ext cx="309960" cy="309960"/>
           </a:xfrm>
           <a:prstGeom prst="ellipse">
             <a:avLst/>
@@ -41230,7 +41290,7 @@
         <p:spPr>
           <a:xfrm>
             <a:off x="868680" y="2473560"/>
-            <a:ext cx="310320" cy="310320"/>
+            <a:ext cx="309960" cy="309960"/>
           </a:xfrm>
           <a:prstGeom prst="rect">
             <a:avLst/>
@@ -41291,7 +41351,7 @@
         <p:spPr>
           <a:xfrm>
             <a:off x="1408320" y="1920240"/>
-            <a:ext cx="9914040" cy="1416600"/>
+            <a:ext cx="9913680" cy="1416240"/>
           </a:xfrm>
           <a:prstGeom prst="rect">
             <a:avLst/>
@@ -41352,7 +41412,7 @@
         <p:spPr>
           <a:xfrm>
             <a:off x="868680" y="3890880"/>
-            <a:ext cx="310320" cy="310320"/>
+            <a:ext cx="309960" cy="309960"/>
           </a:xfrm>
           <a:prstGeom prst="ellipse">
             <a:avLst/>
@@ -41395,7 +41455,7 @@
         <p:spPr>
           <a:xfrm>
             <a:off x="868680" y="3890880"/>
-            <a:ext cx="310320" cy="310320"/>
+            <a:ext cx="309960" cy="309960"/>
           </a:xfrm>
           <a:prstGeom prst="rect">
             <a:avLst/>
@@ -41456,7 +41516,7 @@
         <p:spPr>
           <a:xfrm>
             <a:off x="1408320" y="3337560"/>
-            <a:ext cx="9914040" cy="1416600"/>
+            <a:ext cx="9913680" cy="1416240"/>
           </a:xfrm>
           <a:prstGeom prst="rect">
             <a:avLst/>
@@ -41517,7 +41577,7 @@
         <p:spPr>
           <a:xfrm>
             <a:off x="868680" y="5308200"/>
-            <a:ext cx="310320" cy="310320"/>
+            <a:ext cx="309960" cy="309960"/>
           </a:xfrm>
           <a:prstGeom prst="ellipse">
             <a:avLst/>
@@ -41560,7 +41620,7 @@
         <p:spPr>
           <a:xfrm>
             <a:off x="868680" y="5308200"/>
-            <a:ext cx="310320" cy="310320"/>
+            <a:ext cx="309960" cy="309960"/>
           </a:xfrm>
           <a:prstGeom prst="rect">
             <a:avLst/>
@@ -41621,7 +41681,7 @@
         <p:spPr>
           <a:xfrm>
             <a:off x="1408320" y="4754880"/>
-            <a:ext cx="9914040" cy="1416600"/>
+            <a:ext cx="9913680" cy="1416240"/>
           </a:xfrm>
           <a:prstGeom prst="rect">
             <a:avLst/>
@@ -41682,7 +41742,7 @@
         <p:spPr>
           <a:xfrm>
             <a:off x="548640" y="6510600"/>
-            <a:ext cx="5485680" cy="273600"/>
+            <a:ext cx="5485320" cy="273240"/>
           </a:xfrm>
           <a:prstGeom prst="rect">
             <a:avLst/>
@@ -41743,7 +41803,7 @@
         <p:spPr>
           <a:xfrm>
             <a:off x="11094480" y="6510600"/>
-            <a:ext cx="547920" cy="273600"/>
+            <a:ext cx="547560" cy="273240"/>
           </a:xfrm>
           <a:prstGeom prst="rect">
             <a:avLst/>
@@ -41841,7 +41901,7 @@
         <p:spPr>
           <a:xfrm>
             <a:off x="-2286000" y="3657600"/>
-            <a:ext cx="6400080" cy="6400080"/>
+            <a:ext cx="6399720" cy="6399720"/>
           </a:xfrm>
           <a:prstGeom prst="ellipse">
             <a:avLst/>
@@ -41884,7 +41944,7 @@
         <p:spPr>
           <a:xfrm>
             <a:off x="8229600" y="-2743200"/>
-            <a:ext cx="6400080" cy="6400080"/>
+            <a:ext cx="6399720" cy="6399720"/>
           </a:xfrm>
           <a:prstGeom prst="ellipse">
             <a:avLst/>
@@ -41927,7 +41987,7 @@
         <p:spPr>
           <a:xfrm>
             <a:off x="5638680" y="868680"/>
-            <a:ext cx="913680" cy="913680"/>
+            <a:ext cx="913320" cy="913320"/>
           </a:xfrm>
           <a:prstGeom prst="ellipse">
             <a:avLst/>
@@ -41974,7 +42034,7 @@
         <p:spPr>
           <a:xfrm>
             <a:off x="5876280" y="1097280"/>
-            <a:ext cx="438120" cy="438120"/>
+            <a:ext cx="437760" cy="437760"/>
           </a:xfrm>
           <a:prstGeom prst="rect">
             <a:avLst/>
@@ -41994,7 +42054,7 @@
         <p:spPr>
           <a:xfrm>
             <a:off x="914400" y="2057400"/>
-            <a:ext cx="10362240" cy="291960"/>
+            <a:ext cx="10361880" cy="291600"/>
           </a:xfrm>
           <a:prstGeom prst="rect">
             <a:avLst/>
@@ -42055,7 +42115,7 @@
         <p:spPr>
           <a:xfrm>
             <a:off x="1188720" y="2441520"/>
-            <a:ext cx="9813600" cy="1370880"/>
+            <a:ext cx="9813240" cy="1370520"/>
           </a:xfrm>
           <a:prstGeom prst="rect">
             <a:avLst/>
@@ -42116,7 +42176,7 @@
         <p:spPr>
           <a:xfrm>
             <a:off x="1920240" y="3996000"/>
-            <a:ext cx="8350560" cy="822240"/>
+            <a:ext cx="8350200" cy="821880"/>
           </a:xfrm>
           <a:prstGeom prst="rect">
             <a:avLst/>
@@ -42177,7 +42237,7 @@
         <p:spPr>
           <a:xfrm>
             <a:off x="11094480" y="6492240"/>
-            <a:ext cx="547920" cy="273600"/>
+            <a:ext cx="547560" cy="273240"/>
           </a:xfrm>
           <a:prstGeom prst="rect">
             <a:avLst/>
@@ -42275,7 +42335,7 @@
         <p:spPr>
           <a:xfrm>
             <a:off x="548640" y="457200"/>
-            <a:ext cx="383400" cy="383400"/>
+            <a:ext cx="383040" cy="383040"/>
           </a:xfrm>
           <a:prstGeom prst="roundRect">
             <a:avLst>
@@ -42324,7 +42384,7 @@
         <p:spPr>
           <a:xfrm>
             <a:off x="631080" y="539640"/>
-            <a:ext cx="218880" cy="218880"/>
+            <a:ext cx="218520" cy="218520"/>
           </a:xfrm>
           <a:prstGeom prst="rect">
             <a:avLst/>
@@ -42344,7 +42404,7 @@
         <p:spPr>
           <a:xfrm>
             <a:off x="1097280" y="420480"/>
-            <a:ext cx="10545120" cy="456480"/>
+            <a:ext cx="10544760" cy="456120"/>
           </a:xfrm>
           <a:prstGeom prst="rect">
             <a:avLst/>
@@ -42405,7 +42465,7 @@
         <p:spPr>
           <a:xfrm>
             <a:off x="548640" y="1234440"/>
-            <a:ext cx="11093760" cy="319320"/>
+            <a:ext cx="11093400" cy="318960"/>
           </a:xfrm>
           <a:prstGeom prst="rect">
             <a:avLst/>
@@ -42466,7 +42526,7 @@
         <p:spPr>
           <a:xfrm>
             <a:off x="548640" y="1682640"/>
-            <a:ext cx="11093760" cy="1459440"/>
+            <a:ext cx="11093400" cy="1459080"/>
           </a:xfrm>
           <a:prstGeom prst="roundRect">
             <a:avLst>
@@ -42511,7 +42571,7 @@
         <p:spPr>
           <a:xfrm>
             <a:off x="804600" y="2302920"/>
-            <a:ext cx="291960" cy="291960"/>
+            <a:ext cx="291600" cy="291600"/>
           </a:xfrm>
           <a:prstGeom prst="ellipse">
             <a:avLst/>
@@ -42558,7 +42618,7 @@
         <p:spPr>
           <a:xfrm>
             <a:off x="859680" y="2357640"/>
-            <a:ext cx="182160" cy="182160"/>
+            <a:ext cx="181800" cy="181800"/>
           </a:xfrm>
           <a:prstGeom prst="rect">
             <a:avLst/>
@@ -42578,7 +42638,7 @@
         <p:spPr>
           <a:xfrm>
             <a:off x="1325880" y="1719000"/>
-            <a:ext cx="10042200" cy="1349640"/>
+            <a:ext cx="10041840" cy="1349280"/>
           </a:xfrm>
           <a:prstGeom prst="rect">
             <a:avLst/>
@@ -42639,7 +42699,7 @@
         <p:spPr>
           <a:xfrm>
             <a:off x="548640" y="3252240"/>
-            <a:ext cx="11093760" cy="1459440"/>
+            <a:ext cx="11093400" cy="1459080"/>
           </a:xfrm>
           <a:prstGeom prst="roundRect">
             <a:avLst>
@@ -42684,7 +42744,7 @@
         <p:spPr>
           <a:xfrm>
             <a:off x="804600" y="3872520"/>
-            <a:ext cx="291960" cy="291960"/>
+            <a:ext cx="291600" cy="291600"/>
           </a:xfrm>
           <a:prstGeom prst="ellipse">
             <a:avLst/>
@@ -42731,7 +42791,7 @@
         <p:spPr>
           <a:xfrm>
             <a:off x="859680" y="3927240"/>
-            <a:ext cx="182160" cy="182160"/>
+            <a:ext cx="181800" cy="181800"/>
           </a:xfrm>
           <a:prstGeom prst="rect">
             <a:avLst/>
@@ -42751,7 +42811,7 @@
         <p:spPr>
           <a:xfrm>
             <a:off x="1325880" y="3288960"/>
-            <a:ext cx="10042200" cy="1349640"/>
+            <a:ext cx="10041840" cy="1349280"/>
           </a:xfrm>
           <a:prstGeom prst="rect">
             <a:avLst/>
@@ -42812,7 +42872,7 @@
         <p:spPr>
           <a:xfrm>
             <a:off x="548640" y="4821840"/>
-            <a:ext cx="11093760" cy="1459440"/>
+            <a:ext cx="11093400" cy="1459080"/>
           </a:xfrm>
           <a:prstGeom prst="roundRect">
             <a:avLst>
@@ -42857,7 +42917,7 @@
         <p:spPr>
           <a:xfrm>
             <a:off x="804600" y="5442120"/>
-            <a:ext cx="291960" cy="291960"/>
+            <a:ext cx="291600" cy="291600"/>
           </a:xfrm>
           <a:prstGeom prst="ellipse">
             <a:avLst/>
@@ -42904,7 +42964,7 @@
         <p:spPr>
           <a:xfrm>
             <a:off x="859680" y="5497200"/>
-            <a:ext cx="182160" cy="182160"/>
+            <a:ext cx="181800" cy="181800"/>
           </a:xfrm>
           <a:prstGeom prst="rect">
             <a:avLst/>
@@ -42924,7 +42984,7 @@
         <p:spPr>
           <a:xfrm>
             <a:off x="1325880" y="4858560"/>
-            <a:ext cx="10042200" cy="1349640"/>
+            <a:ext cx="10041840" cy="1349280"/>
           </a:xfrm>
           <a:prstGeom prst="rect">
             <a:avLst/>
@@ -42985,7 +43045,7 @@
         <p:spPr>
           <a:xfrm>
             <a:off x="548640" y="6510600"/>
-            <a:ext cx="5485680" cy="273600"/>
+            <a:ext cx="5485320" cy="273240"/>
           </a:xfrm>
           <a:prstGeom prst="rect">
             <a:avLst/>
@@ -43046,7 +43106,7 @@
         <p:spPr>
           <a:xfrm>
             <a:off x="11094480" y="6510600"/>
-            <a:ext cx="547920" cy="273600"/>
+            <a:ext cx="547560" cy="273240"/>
           </a:xfrm>
           <a:prstGeom prst="rect">
             <a:avLst/>
@@ -43144,7 +43204,7 @@
         <p:spPr>
           <a:xfrm>
             <a:off x="548640" y="457200"/>
-            <a:ext cx="383400" cy="383400"/>
+            <a:ext cx="383040" cy="383040"/>
           </a:xfrm>
           <a:prstGeom prst="roundRect">
             <a:avLst>
@@ -43193,7 +43253,7 @@
         <p:spPr>
           <a:xfrm>
             <a:off x="631080" y="539640"/>
-            <a:ext cx="218880" cy="218880"/>
+            <a:ext cx="218520" cy="218520"/>
           </a:xfrm>
           <a:prstGeom prst="rect">
             <a:avLst/>
@@ -43213,7 +43273,7 @@
         <p:spPr>
           <a:xfrm>
             <a:off x="1097280" y="420480"/>
-            <a:ext cx="10545120" cy="456480"/>
+            <a:ext cx="10544760" cy="456120"/>
           </a:xfrm>
           <a:prstGeom prst="rect">
             <a:avLst/>
@@ -43274,7 +43334,7 @@
         <p:spPr>
           <a:xfrm>
             <a:off x="548640" y="1234440"/>
-            <a:ext cx="11093760" cy="319320"/>
+            <a:ext cx="11093400" cy="318960"/>
           </a:xfrm>
           <a:prstGeom prst="rect">
             <a:avLst/>
@@ -43335,7 +43395,7 @@
         <p:spPr>
           <a:xfrm>
             <a:off x="548640" y="1682640"/>
-            <a:ext cx="11093760" cy="1459440"/>
+            <a:ext cx="11093400" cy="1459080"/>
           </a:xfrm>
           <a:prstGeom prst="roundRect">
             <a:avLst>
@@ -43380,7 +43440,7 @@
         <p:spPr>
           <a:xfrm>
             <a:off x="804600" y="2302920"/>
-            <a:ext cx="291960" cy="291960"/>
+            <a:ext cx="291600" cy="291600"/>
           </a:xfrm>
           <a:prstGeom prst="ellipse">
             <a:avLst/>
@@ -43427,7 +43487,7 @@
         <p:spPr>
           <a:xfrm>
             <a:off x="859680" y="2357640"/>
-            <a:ext cx="182160" cy="182160"/>
+            <a:ext cx="181800" cy="181800"/>
           </a:xfrm>
           <a:prstGeom prst="rect">
             <a:avLst/>
@@ -43447,7 +43507,7 @@
         <p:spPr>
           <a:xfrm>
             <a:off x="1325880" y="1719000"/>
-            <a:ext cx="10042200" cy="1349640"/>
+            <a:ext cx="10041840" cy="1349280"/>
           </a:xfrm>
           <a:prstGeom prst="rect">
             <a:avLst/>
@@ -43508,7 +43568,7 @@
         <p:spPr>
           <a:xfrm>
             <a:off x="548640" y="3252240"/>
-            <a:ext cx="11093760" cy="1459440"/>
+            <a:ext cx="11093400" cy="1459080"/>
           </a:xfrm>
           <a:prstGeom prst="roundRect">
             <a:avLst>
@@ -43553,7 +43613,7 @@
         <p:spPr>
           <a:xfrm>
             <a:off x="804600" y="3872520"/>
-            <a:ext cx="291960" cy="291960"/>
+            <a:ext cx="291600" cy="291600"/>
           </a:xfrm>
           <a:prstGeom prst="ellipse">
             <a:avLst/>
@@ -43600,7 +43660,7 @@
         <p:spPr>
           <a:xfrm>
             <a:off x="859680" y="3927240"/>
-            <a:ext cx="182160" cy="182160"/>
+            <a:ext cx="181800" cy="181800"/>
           </a:xfrm>
           <a:prstGeom prst="rect">
             <a:avLst/>
@@ -43620,7 +43680,7 @@
         <p:spPr>
           <a:xfrm>
             <a:off x="1325880" y="3288960"/>
-            <a:ext cx="10042200" cy="1349640"/>
+            <a:ext cx="10041840" cy="1349280"/>
           </a:xfrm>
           <a:prstGeom prst="rect">
             <a:avLst/>
@@ -43681,7 +43741,7 @@
         <p:spPr>
           <a:xfrm>
             <a:off x="548640" y="4821840"/>
-            <a:ext cx="11093760" cy="1459440"/>
+            <a:ext cx="11093400" cy="1459080"/>
           </a:xfrm>
           <a:prstGeom prst="roundRect">
             <a:avLst>
@@ -43726,7 +43786,7 @@
         <p:spPr>
           <a:xfrm>
             <a:off x="804600" y="5442120"/>
-            <a:ext cx="291960" cy="291960"/>
+            <a:ext cx="291600" cy="291600"/>
           </a:xfrm>
           <a:prstGeom prst="ellipse">
             <a:avLst/>
@@ -43773,7 +43833,7 @@
         <p:spPr>
           <a:xfrm>
             <a:off x="859680" y="5497200"/>
-            <a:ext cx="182160" cy="182160"/>
+            <a:ext cx="181800" cy="181800"/>
           </a:xfrm>
           <a:prstGeom prst="rect">
             <a:avLst/>
@@ -43793,7 +43853,7 @@
         <p:spPr>
           <a:xfrm>
             <a:off x="1325880" y="4858560"/>
-            <a:ext cx="10042200" cy="1349640"/>
+            <a:ext cx="10041840" cy="1349280"/>
           </a:xfrm>
           <a:prstGeom prst="rect">
             <a:avLst/>
@@ -43854,7 +43914,7 @@
         <p:spPr>
           <a:xfrm>
             <a:off x="548640" y="6510600"/>
-            <a:ext cx="5485680" cy="273600"/>
+            <a:ext cx="5485320" cy="273240"/>
           </a:xfrm>
           <a:prstGeom prst="rect">
             <a:avLst/>
@@ -43915,7 +43975,7 @@
         <p:spPr>
           <a:xfrm>
             <a:off x="11094480" y="6510600"/>
-            <a:ext cx="547920" cy="273600"/>
+            <a:ext cx="547560" cy="273240"/>
           </a:xfrm>
           <a:prstGeom prst="rect">
             <a:avLst/>
@@ -44013,7 +44073,7 @@
         <p:spPr>
           <a:xfrm>
             <a:off x="548640" y="457200"/>
-            <a:ext cx="383400" cy="383400"/>
+            <a:ext cx="383040" cy="383040"/>
           </a:xfrm>
           <a:prstGeom prst="roundRect">
             <a:avLst>
@@ -44062,7 +44122,7 @@
         <p:spPr>
           <a:xfrm>
             <a:off x="631080" y="539640"/>
-            <a:ext cx="218880" cy="218880"/>
+            <a:ext cx="218520" cy="218520"/>
           </a:xfrm>
           <a:prstGeom prst="rect">
             <a:avLst/>
@@ -44082,7 +44142,7 @@
         <p:spPr>
           <a:xfrm>
             <a:off x="1097280" y="420480"/>
-            <a:ext cx="10545120" cy="456480"/>
+            <a:ext cx="10544760" cy="456120"/>
           </a:xfrm>
           <a:prstGeom prst="rect">
             <a:avLst/>
@@ -44143,7 +44203,7 @@
         <p:spPr>
           <a:xfrm>
             <a:off x="548640" y="1234440"/>
-            <a:ext cx="11093760" cy="319320"/>
+            <a:ext cx="11093400" cy="318960"/>
           </a:xfrm>
           <a:prstGeom prst="rect">
             <a:avLst/>
@@ -44204,7 +44264,7 @@
         <p:spPr>
           <a:xfrm>
             <a:off x="548640" y="1682640"/>
-            <a:ext cx="11093760" cy="1459440"/>
+            <a:ext cx="11093400" cy="1459080"/>
           </a:xfrm>
           <a:prstGeom prst="roundRect">
             <a:avLst>
@@ -44249,7 +44309,7 @@
         <p:spPr>
           <a:xfrm>
             <a:off x="804600" y="2302920"/>
-            <a:ext cx="291960" cy="291960"/>
+            <a:ext cx="291600" cy="291600"/>
           </a:xfrm>
           <a:prstGeom prst="ellipse">
             <a:avLst/>
@@ -44296,7 +44356,7 @@
         <p:spPr>
           <a:xfrm>
             <a:off x="859680" y="2357640"/>
-            <a:ext cx="182160" cy="182160"/>
+            <a:ext cx="181800" cy="181800"/>
           </a:xfrm>
           <a:prstGeom prst="rect">
             <a:avLst/>
@@ -44316,7 +44376,7 @@
         <p:spPr>
           <a:xfrm>
             <a:off x="1325880" y="1719000"/>
-            <a:ext cx="10042200" cy="1349640"/>
+            <a:ext cx="10041840" cy="1349280"/>
           </a:xfrm>
           <a:prstGeom prst="rect">
             <a:avLst/>
@@ -44377,7 +44437,7 @@
         <p:spPr>
           <a:xfrm>
             <a:off x="548640" y="3252240"/>
-            <a:ext cx="11093760" cy="1459440"/>
+            <a:ext cx="11093400" cy="1459080"/>
           </a:xfrm>
           <a:prstGeom prst="roundRect">
             <a:avLst>
@@ -44422,7 +44482,7 @@
         <p:spPr>
           <a:xfrm>
             <a:off x="804600" y="3872520"/>
-            <a:ext cx="291960" cy="291960"/>
+            <a:ext cx="291600" cy="291600"/>
           </a:xfrm>
           <a:prstGeom prst="ellipse">
             <a:avLst/>
@@ -44469,7 +44529,7 @@
         <p:spPr>
           <a:xfrm>
             <a:off x="859680" y="3927240"/>
-            <a:ext cx="182160" cy="182160"/>
+            <a:ext cx="181800" cy="181800"/>
           </a:xfrm>
           <a:prstGeom prst="rect">
             <a:avLst/>
@@ -44489,7 +44549,7 @@
         <p:spPr>
           <a:xfrm>
             <a:off x="1325880" y="3288960"/>
-            <a:ext cx="10042200" cy="1349640"/>
+            <a:ext cx="10041840" cy="1349280"/>
           </a:xfrm>
           <a:prstGeom prst="rect">
             <a:avLst/>
@@ -44550,7 +44610,7 @@
         <p:spPr>
           <a:xfrm>
             <a:off x="548640" y="4821840"/>
-            <a:ext cx="11093760" cy="1459440"/>
+            <a:ext cx="11093400" cy="1459080"/>
           </a:xfrm>
           <a:prstGeom prst="roundRect">
             <a:avLst>
@@ -44595,7 +44655,7 @@
         <p:spPr>
           <a:xfrm>
             <a:off x="804600" y="5442120"/>
-            <a:ext cx="291960" cy="291960"/>
+            <a:ext cx="291600" cy="291600"/>
           </a:xfrm>
           <a:prstGeom prst="ellipse">
             <a:avLst/>
@@ -44642,7 +44702,7 @@
         <p:spPr>
           <a:xfrm>
             <a:off x="859680" y="5497200"/>
-            <a:ext cx="182160" cy="182160"/>
+            <a:ext cx="181800" cy="181800"/>
           </a:xfrm>
           <a:prstGeom prst="rect">
             <a:avLst/>
@@ -44662,7 +44722,7 @@
         <p:spPr>
           <a:xfrm>
             <a:off x="1325880" y="4858560"/>
-            <a:ext cx="10042200" cy="1349640"/>
+            <a:ext cx="10041840" cy="1349280"/>
           </a:xfrm>
           <a:prstGeom prst="rect">
             <a:avLst/>
@@ -44723,7 +44783,7 @@
         <p:spPr>
           <a:xfrm>
             <a:off x="548640" y="6510600"/>
-            <a:ext cx="5485680" cy="273600"/>
+            <a:ext cx="5485320" cy="273240"/>
           </a:xfrm>
           <a:prstGeom prst="rect">
             <a:avLst/>
@@ -44784,7 +44844,7 @@
         <p:spPr>
           <a:xfrm>
             <a:off x="11094480" y="6510600"/>
-            <a:ext cx="547920" cy="273600"/>
+            <a:ext cx="547560" cy="273240"/>
           </a:xfrm>
           <a:prstGeom prst="rect">
             <a:avLst/>
@@ -44882,7 +44942,7 @@
         <p:spPr>
           <a:xfrm>
             <a:off x="-2286000" y="3657600"/>
-            <a:ext cx="6400080" cy="6400080"/>
+            <a:ext cx="6399720" cy="6399720"/>
           </a:xfrm>
           <a:prstGeom prst="ellipse">
             <a:avLst/>
@@ -44925,7 +44985,7 @@
         <p:spPr>
           <a:xfrm>
             <a:off x="8229600" y="-2743200"/>
-            <a:ext cx="6400080" cy="6400080"/>
+            <a:ext cx="6399720" cy="6399720"/>
           </a:xfrm>
           <a:prstGeom prst="ellipse">
             <a:avLst/>
@@ -44968,7 +45028,7 @@
         <p:spPr>
           <a:xfrm>
             <a:off x="5638680" y="868680"/>
-            <a:ext cx="913680" cy="913680"/>
+            <a:ext cx="913320" cy="913320"/>
           </a:xfrm>
           <a:prstGeom prst="ellipse">
             <a:avLst/>
@@ -45015,7 +45075,7 @@
         <p:spPr>
           <a:xfrm>
             <a:off x="5876280" y="1097280"/>
-            <a:ext cx="438120" cy="438120"/>
+            <a:ext cx="437760" cy="437760"/>
           </a:xfrm>
           <a:prstGeom prst="rect">
             <a:avLst/>
@@ -45035,7 +45095,7 @@
         <p:spPr>
           <a:xfrm>
             <a:off x="914400" y="2057400"/>
-            <a:ext cx="10362240" cy="291960"/>
+            <a:ext cx="10361880" cy="291600"/>
           </a:xfrm>
           <a:prstGeom prst="rect">
             <a:avLst/>
@@ -45096,7 +45156,7 @@
         <p:spPr>
           <a:xfrm>
             <a:off x="1188720" y="2441520"/>
-            <a:ext cx="9813600" cy="1005120"/>
+            <a:ext cx="9813240" cy="1004760"/>
           </a:xfrm>
           <a:prstGeom prst="rect">
             <a:avLst/>
@@ -45157,7 +45217,7 @@
         <p:spPr>
           <a:xfrm>
             <a:off x="1920240" y="3630240"/>
-            <a:ext cx="8350560" cy="822240"/>
+            <a:ext cx="8350200" cy="821880"/>
           </a:xfrm>
           <a:prstGeom prst="rect">
             <a:avLst/>
@@ -45218,7 +45278,7 @@
         <p:spPr>
           <a:xfrm>
             <a:off x="11094480" y="6492240"/>
-            <a:ext cx="547920" cy="273600"/>
+            <a:ext cx="547560" cy="273240"/>
           </a:xfrm>
           <a:prstGeom prst="rect">
             <a:avLst/>
@@ -45316,7 +45376,7 @@
         <p:spPr>
           <a:xfrm>
             <a:off x="548640" y="457200"/>
-            <a:ext cx="383400" cy="383400"/>
+            <a:ext cx="383040" cy="383040"/>
           </a:xfrm>
           <a:prstGeom prst="roundRect">
             <a:avLst>
@@ -45365,7 +45425,7 @@
         <p:spPr>
           <a:xfrm>
             <a:off x="631080" y="539640"/>
-            <a:ext cx="218880" cy="218880"/>
+            <a:ext cx="218520" cy="218520"/>
           </a:xfrm>
           <a:prstGeom prst="rect">
             <a:avLst/>
@@ -45385,7 +45445,7 @@
         <p:spPr>
           <a:xfrm>
             <a:off x="1097280" y="420480"/>
-            <a:ext cx="10545120" cy="456480"/>
+            <a:ext cx="10544760" cy="456120"/>
           </a:xfrm>
           <a:prstGeom prst="rect">
             <a:avLst/>
@@ -45446,7 +45506,7 @@
         <p:spPr>
           <a:xfrm>
             <a:off x="548640" y="1234440"/>
-            <a:ext cx="3245400" cy="5119920"/>
+            <a:ext cx="3245040" cy="5119560"/>
           </a:xfrm>
           <a:prstGeom prst="roundRect">
             <a:avLst>
@@ -45491,7 +45551,7 @@
         <p:spPr>
           <a:xfrm>
             <a:off x="1645920" y="1737360"/>
-            <a:ext cx="1050840" cy="1050840"/>
+            <a:ext cx="1050480" cy="1050480"/>
           </a:xfrm>
           <a:prstGeom prst="ellipse">
             <a:avLst/>
@@ -45538,7 +45598,7 @@
         <p:spPr>
           <a:xfrm>
             <a:off x="1906560" y="2002680"/>
-            <a:ext cx="529560" cy="529560"/>
+            <a:ext cx="529200" cy="529200"/>
           </a:xfrm>
           <a:prstGeom prst="rect">
             <a:avLst/>
@@ -45558,7 +45618,7 @@
         <p:spPr>
           <a:xfrm>
             <a:off x="731520" y="3017520"/>
-            <a:ext cx="2879640" cy="3062520"/>
+            <a:ext cx="2879280" cy="3062160"/>
           </a:xfrm>
           <a:prstGeom prst="rect">
             <a:avLst/>
@@ -45679,7 +45739,7 @@
         <p:spPr>
           <a:xfrm>
             <a:off x="4206240" y="1280160"/>
-            <a:ext cx="7436160" cy="5028480"/>
+            <a:ext cx="7435800" cy="5028120"/>
           </a:xfrm>
           <a:prstGeom prst="rect">
             <a:avLst/>
@@ -45850,7 +45910,7 @@
         <p:spPr>
           <a:xfrm>
             <a:off x="548640" y="6510600"/>
-            <a:ext cx="5485680" cy="273600"/>
+            <a:ext cx="5485320" cy="273240"/>
           </a:xfrm>
           <a:prstGeom prst="rect">
             <a:avLst/>
@@ -45911,7 +45971,7 @@
         <p:spPr>
           <a:xfrm>
             <a:off x="11094480" y="6510600"/>
-            <a:ext cx="547920" cy="273600"/>
+            <a:ext cx="547560" cy="273240"/>
           </a:xfrm>
           <a:prstGeom prst="rect">
             <a:avLst/>
@@ -46009,7 +46069,7 @@
         <p:spPr>
           <a:xfrm>
             <a:off x="548640" y="457200"/>
-            <a:ext cx="383400" cy="383400"/>
+            <a:ext cx="383040" cy="383040"/>
           </a:xfrm>
           <a:prstGeom prst="roundRect">
             <a:avLst>
@@ -46058,7 +46118,7 @@
         <p:spPr>
           <a:xfrm>
             <a:off x="631080" y="539640"/>
-            <a:ext cx="218880" cy="218880"/>
+            <a:ext cx="218520" cy="218520"/>
           </a:xfrm>
           <a:prstGeom prst="rect">
             <a:avLst/>
@@ -46078,7 +46138,7 @@
         <p:spPr>
           <a:xfrm>
             <a:off x="1097280" y="420480"/>
-            <a:ext cx="10545120" cy="456480"/>
+            <a:ext cx="10544760" cy="456120"/>
           </a:xfrm>
           <a:prstGeom prst="rect">
             <a:avLst/>
@@ -46139,7 +46199,7 @@
         <p:spPr>
           <a:xfrm>
             <a:off x="548640" y="1234440"/>
-            <a:ext cx="3245400" cy="5119920"/>
+            <a:ext cx="3245040" cy="5119560"/>
           </a:xfrm>
           <a:prstGeom prst="roundRect">
             <a:avLst>
@@ -46184,7 +46244,7 @@
         <p:spPr>
           <a:xfrm>
             <a:off x="1645920" y="1737360"/>
-            <a:ext cx="1050840" cy="1050840"/>
+            <a:ext cx="1050480" cy="1050480"/>
           </a:xfrm>
           <a:prstGeom prst="ellipse">
             <a:avLst/>
@@ -46231,7 +46291,7 @@
         <p:spPr>
           <a:xfrm>
             <a:off x="1906560" y="2002680"/>
-            <a:ext cx="529560" cy="529560"/>
+            <a:ext cx="529200" cy="529200"/>
           </a:xfrm>
           <a:prstGeom prst="rect">
             <a:avLst/>
@@ -46251,7 +46311,7 @@
         <p:spPr>
           <a:xfrm>
             <a:off x="731520" y="3017520"/>
-            <a:ext cx="2879640" cy="3062520"/>
+            <a:ext cx="2879280" cy="3062160"/>
           </a:xfrm>
           <a:prstGeom prst="rect">
             <a:avLst/>
@@ -46372,7 +46432,7 @@
         <p:spPr>
           <a:xfrm>
             <a:off x="4206240" y="1280160"/>
-            <a:ext cx="7436160" cy="5028480"/>
+            <a:ext cx="7435800" cy="5028120"/>
           </a:xfrm>
           <a:prstGeom prst="rect">
             <a:avLst/>
@@ -46543,7 +46603,7 @@
         <p:spPr>
           <a:xfrm>
             <a:off x="548640" y="6510600"/>
-            <a:ext cx="5485680" cy="273600"/>
+            <a:ext cx="5485320" cy="273240"/>
           </a:xfrm>
           <a:prstGeom prst="rect">
             <a:avLst/>
@@ -46604,7 +46664,7 @@
         <p:spPr>
           <a:xfrm>
             <a:off x="11094480" y="6510600"/>
-            <a:ext cx="547920" cy="273600"/>
+            <a:ext cx="547560" cy="273240"/>
           </a:xfrm>
           <a:prstGeom prst="rect">
             <a:avLst/>
@@ -46702,7 +46762,7 @@
         <p:spPr>
           <a:xfrm>
             <a:off x="548640" y="457200"/>
-            <a:ext cx="383400" cy="383400"/>
+            <a:ext cx="383040" cy="383040"/>
           </a:xfrm>
           <a:prstGeom prst="roundRect">
             <a:avLst>
@@ -46751,7 +46811,7 @@
         <p:spPr>
           <a:xfrm>
             <a:off x="631080" y="539640"/>
-            <a:ext cx="218880" cy="218880"/>
+            <a:ext cx="218520" cy="218520"/>
           </a:xfrm>
           <a:prstGeom prst="rect">
             <a:avLst/>
@@ -46771,7 +46831,7 @@
         <p:spPr>
           <a:xfrm>
             <a:off x="1097280" y="420480"/>
-            <a:ext cx="10545120" cy="456480"/>
+            <a:ext cx="10544760" cy="456120"/>
           </a:xfrm>
           <a:prstGeom prst="rect">
             <a:avLst/>
@@ -46832,7 +46892,7 @@
         <p:spPr>
           <a:xfrm>
             <a:off x="548640" y="1234440"/>
-            <a:ext cx="5363640" cy="5119920"/>
+            <a:ext cx="5363280" cy="5119560"/>
           </a:xfrm>
           <a:prstGeom prst="roundRect">
             <a:avLst>
@@ -46877,7 +46937,7 @@
         <p:spPr>
           <a:xfrm>
             <a:off x="822960" y="1508760"/>
-            <a:ext cx="456480" cy="456480"/>
+            <a:ext cx="456120" cy="456120"/>
           </a:xfrm>
           <a:prstGeom prst="ellipse">
             <a:avLst/>
@@ -46924,7 +46984,7 @@
         <p:spPr>
           <a:xfrm>
             <a:off x="923400" y="1609200"/>
-            <a:ext cx="255240" cy="255240"/>
+            <a:ext cx="254880" cy="254880"/>
           </a:xfrm>
           <a:prstGeom prst="rect">
             <a:avLst/>
@@ -46944,7 +47004,7 @@
         <p:spPr>
           <a:xfrm>
             <a:off x="1444680" y="1508760"/>
-            <a:ext cx="4284720" cy="456480"/>
+            <a:ext cx="4284360" cy="456120"/>
           </a:xfrm>
           <a:prstGeom prst="rect">
             <a:avLst/>
@@ -47005,7 +47065,7 @@
         <p:spPr>
           <a:xfrm>
             <a:off x="841320" y="2194560"/>
-            <a:ext cx="4778280" cy="3931200"/>
+            <a:ext cx="4777920" cy="3930840"/>
           </a:xfrm>
           <a:prstGeom prst="rect">
             <a:avLst/>
@@ -47040,7 +47100,7 @@
               <a:buChar char="▪"/>
             </a:pPr>
             <a:r>
-              <a:rPr lang="en-US" sz="1250" b="0" u="none" strike="noStrike">
+              <a:rPr lang="en-US" sz="1800" b="0" u="none" strike="noStrike">
                 <a:solidFill>
                   <a:srgbClr val="3F4A45"/>
                 </a:solidFill>
@@ -47051,7 +47111,7 @@
               </a:rPr>
               <a:t>A dictionary holds the data: dog = {"name": "Rex", "energy": 100}</a:t>
             </a:r>
-            <a:endParaRPr lang="en-US" sz="1250" b="0" u="none" strike="noStrike">
+            <a:endParaRPr lang="en-US" sz="1800" b="0" u="none" strike="noStrike">
               <a:solidFill>
                 <a:srgbClr val="000000"/>
               </a:solidFill>
@@ -47075,7 +47135,7 @@
               <a:buChar char="▪"/>
             </a:pPr>
             <a:r>
-              <a:rPr lang="en-US" sz="1250" b="0" u="none" strike="noStrike">
+              <a:rPr lang="en-US" sz="1800" b="0" u="none" strike="noStrike">
                 <a:solidFill>
                   <a:srgbClr val="3F4A45"/>
                 </a:solidFill>
@@ -47086,7 +47146,7 @@
               </a:rPr>
               <a:t>A separate function operates on it: def bark(dog): ...</a:t>
             </a:r>
-            <a:endParaRPr lang="en-US" sz="1250" b="0" u="none" strike="noStrike">
+            <a:endParaRPr lang="en-US" sz="1800" b="0" u="none" strike="noStrike">
               <a:solidFill>
                 <a:srgbClr val="000000"/>
               </a:solidFill>
@@ -47110,7 +47170,7 @@
               <a:buChar char="▪"/>
             </a:pPr>
             <a:r>
-              <a:rPr lang="en-US" sz="1250" b="0" u="none" strike="noStrike">
+              <a:rPr lang="en-US" sz="1800" b="0" u="none" strike="noStrike">
                 <a:solidFill>
                   <a:srgbClr val="3F4A45"/>
                 </a:solidFill>
@@ -47121,7 +47181,7 @@
               </a:rPr>
               <a:t>Nothing stops another part of the code from passing the wrong dictionary into bark()</a:t>
             </a:r>
-            <a:endParaRPr lang="en-US" sz="1250" b="0" u="none" strike="noStrike">
+            <a:endParaRPr lang="en-US" sz="1800" b="0" u="none" strike="noStrike">
               <a:solidFill>
                 <a:srgbClr val="000000"/>
               </a:solidFill>
@@ -47145,7 +47205,7 @@
               <a:buChar char="▪"/>
             </a:pPr>
             <a:r>
-              <a:rPr lang="en-US" sz="1250" b="0" u="none" strike="noStrike">
+              <a:rPr lang="en-US" sz="1800" b="0" u="none" strike="noStrike">
                 <a:solidFill>
                   <a:srgbClr val="3F4A45"/>
                 </a:solidFill>
@@ -47156,7 +47216,7 @@
               </a:rPr>
               <a:t>As the program grows, data and the functions that use it drift further apart</a:t>
             </a:r>
-            <a:endParaRPr lang="en-US" sz="1250" b="0" u="none" strike="noStrike">
+            <a:endParaRPr lang="en-US" sz="1800" b="0" u="none" strike="noStrike">
               <a:solidFill>
                 <a:srgbClr val="000000"/>
               </a:solidFill>
@@ -47176,7 +47236,7 @@
         <p:spPr>
           <a:xfrm>
             <a:off x="6278760" y="1234440"/>
-            <a:ext cx="5363640" cy="5119920"/>
+            <a:ext cx="5363280" cy="5119560"/>
           </a:xfrm>
           <a:prstGeom prst="roundRect">
             <a:avLst>
@@ -47221,7 +47281,7 @@
         <p:spPr>
           <a:xfrm>
             <a:off x="6553080" y="1508760"/>
-            <a:ext cx="456480" cy="456480"/>
+            <a:ext cx="456120" cy="456120"/>
           </a:xfrm>
           <a:prstGeom prst="ellipse">
             <a:avLst/>
@@ -47268,7 +47328,7 @@
         <p:spPr>
           <a:xfrm>
             <a:off x="6653520" y="1609200"/>
-            <a:ext cx="255240" cy="255240"/>
+            <a:ext cx="254880" cy="254880"/>
           </a:xfrm>
           <a:prstGeom prst="rect">
             <a:avLst/>
@@ -47288,7 +47348,7 @@
         <p:spPr>
           <a:xfrm>
             <a:off x="7174800" y="1508760"/>
-            <a:ext cx="4284720" cy="456480"/>
+            <a:ext cx="4284360" cy="456120"/>
           </a:xfrm>
           <a:prstGeom prst="rect">
             <a:avLst/>
@@ -47349,7 +47409,7 @@
         <p:spPr>
           <a:xfrm>
             <a:off x="6571440" y="2194560"/>
-            <a:ext cx="4778280" cy="3931200"/>
+            <a:ext cx="4777920" cy="3930840"/>
           </a:xfrm>
           <a:prstGeom prst="rect">
             <a:avLst/>
@@ -47384,7 +47444,7 @@
               <a:buChar char="▪"/>
             </a:pPr>
             <a:r>
-              <a:rPr lang="en-US" sz="1250" b="0" u="none" strike="noStrike">
+              <a:rPr lang="en-US" sz="1800" b="0" u="none" strike="noStrike">
                 <a:solidFill>
                   <a:srgbClr val="3F4A45"/>
                 </a:solidFill>
@@ -47395,7 +47455,7 @@
               </a:rPr>
               <a:t>A class defines both the data and the behavior together, in one place</a:t>
             </a:r>
-            <a:endParaRPr lang="en-US" sz="1250" b="0" u="none" strike="noStrike">
+            <a:endParaRPr lang="en-US" sz="1800" b="0" u="none" strike="noStrike">
               <a:solidFill>
                 <a:srgbClr val="000000"/>
               </a:solidFill>
@@ -47419,7 +47479,7 @@
               <a:buChar char="▪"/>
             </a:pPr>
             <a:r>
-              <a:rPr lang="en-US" sz="1250" b="0" u="none" strike="noStrike">
+              <a:rPr lang="en-US" sz="1800" b="0" u="none" strike="noStrike">
                 <a:solidFill>
                   <a:srgbClr val="3F4A45"/>
                 </a:solidFill>
@@ -47430,7 +47490,7 @@
               </a:rPr>
               <a:t>rex = Dog("Rex", 100) creates an object that owns its own data</a:t>
             </a:r>
-            <a:endParaRPr lang="en-US" sz="1250" b="0" u="none" strike="noStrike">
+            <a:endParaRPr lang="en-US" sz="1800" b="0" u="none" strike="noStrike">
               <a:solidFill>
                 <a:srgbClr val="000000"/>
               </a:solidFill>
@@ -47454,7 +47514,7 @@
               <a:buChar char="▪"/>
             </a:pPr>
             <a:r>
-              <a:rPr lang="en-US" sz="1250" b="0" u="none" strike="noStrike">
+              <a:rPr lang="en-US" sz="1800" b="0" u="none" strike="noStrike">
                 <a:solidFill>
                   <a:srgbClr val="3F4A45"/>
                 </a:solidFill>
@@ -47465,7 +47525,7 @@
               </a:rPr>
               <a:t>rex.bark() can only ever act on rex’s own data — there’s no dictionary to mix up</a:t>
             </a:r>
-            <a:endParaRPr lang="en-US" sz="1250" b="0" u="none" strike="noStrike">
+            <a:endParaRPr lang="en-US" sz="1800" b="0" u="none" strike="noStrike">
               <a:solidFill>
                 <a:srgbClr val="000000"/>
               </a:solidFill>
@@ -47489,7 +47549,7 @@
               <a:buChar char="▪"/>
             </a:pPr>
             <a:r>
-              <a:rPr lang="en-US" sz="1250" b="0" u="none" strike="noStrike">
+              <a:rPr lang="en-US" sz="1800" b="0" u="none" strike="noStrike">
                 <a:solidFill>
                   <a:srgbClr val="3F4A45"/>
                 </a:solidFill>
@@ -47500,7 +47560,7 @@
               </a:rPr>
               <a:t>Data and behavior stay physically next to each other as the program grows</a:t>
             </a:r>
-            <a:endParaRPr lang="en-US" sz="1250" b="0" u="none" strike="noStrike">
+            <a:endParaRPr lang="en-US" sz="1800" b="0" u="none" strike="noStrike">
               <a:solidFill>
                 <a:srgbClr val="000000"/>
               </a:solidFill>
@@ -47520,7 +47580,7 @@
         <p:spPr>
           <a:xfrm>
             <a:off x="548640" y="6510600"/>
-            <a:ext cx="5485680" cy="273600"/>
+            <a:ext cx="5485320" cy="273240"/>
           </a:xfrm>
           <a:prstGeom prst="rect">
             <a:avLst/>
@@ -47581,7 +47641,7 @@
         <p:spPr>
           <a:xfrm>
             <a:off x="11094480" y="6510600"/>
-            <a:ext cx="547920" cy="273600"/>
+            <a:ext cx="547560" cy="273240"/>
           </a:xfrm>
           <a:prstGeom prst="rect">
             <a:avLst/>
@@ -47679,7 +47739,7 @@
         <p:spPr>
           <a:xfrm>
             <a:off x="-2286000" y="3657600"/>
-            <a:ext cx="6400080" cy="6400080"/>
+            <a:ext cx="6399720" cy="6399720"/>
           </a:xfrm>
           <a:prstGeom prst="ellipse">
             <a:avLst/>
@@ -47722,7 +47782,7 @@
         <p:spPr>
           <a:xfrm>
             <a:off x="8229600" y="-2743200"/>
-            <a:ext cx="6400080" cy="6400080"/>
+            <a:ext cx="6399720" cy="6399720"/>
           </a:xfrm>
           <a:prstGeom prst="ellipse">
             <a:avLst/>
@@ -47765,7 +47825,7 @@
         <p:spPr>
           <a:xfrm>
             <a:off x="5638680" y="868680"/>
-            <a:ext cx="913680" cy="913680"/>
+            <a:ext cx="913320" cy="913320"/>
           </a:xfrm>
           <a:prstGeom prst="ellipse">
             <a:avLst/>
@@ -47812,7 +47872,7 @@
         <p:spPr>
           <a:xfrm>
             <a:off x="5876280" y="1097280"/>
-            <a:ext cx="438120" cy="438120"/>
+            <a:ext cx="437760" cy="437760"/>
           </a:xfrm>
           <a:prstGeom prst="rect">
             <a:avLst/>
@@ -47832,7 +47892,7 @@
         <p:spPr>
           <a:xfrm>
             <a:off x="914400" y="2057400"/>
-            <a:ext cx="10362240" cy="291960"/>
+            <a:ext cx="10361880" cy="291600"/>
           </a:xfrm>
           <a:prstGeom prst="rect">
             <a:avLst/>
@@ -47893,7 +47953,7 @@
         <p:spPr>
           <a:xfrm>
             <a:off x="822960" y="2441520"/>
-            <a:ext cx="10545120" cy="2148120"/>
+            <a:ext cx="10544760" cy="2147760"/>
           </a:xfrm>
           <a:prstGeom prst="rect">
             <a:avLst/>
@@ -47954,7 +48014,7 @@
         <p:spPr>
           <a:xfrm>
             <a:off x="1920240" y="4773240"/>
-            <a:ext cx="8350560" cy="822240"/>
+            <a:ext cx="8350200" cy="821880"/>
           </a:xfrm>
           <a:prstGeom prst="rect">
             <a:avLst/>
@@ -48015,7 +48075,7 @@
         <p:spPr>
           <a:xfrm>
             <a:off x="11094480" y="6492240"/>
-            <a:ext cx="547920" cy="273600"/>
+            <a:ext cx="547560" cy="273240"/>
           </a:xfrm>
           <a:prstGeom prst="rect">
             <a:avLst/>
@@ -48113,7 +48173,7 @@
         <p:spPr>
           <a:xfrm>
             <a:off x="548640" y="457200"/>
-            <a:ext cx="383400" cy="383400"/>
+            <a:ext cx="383040" cy="383040"/>
           </a:xfrm>
           <a:prstGeom prst="roundRect">
             <a:avLst>
@@ -48162,7 +48222,7 @@
         <p:spPr>
           <a:xfrm>
             <a:off x="631080" y="539640"/>
-            <a:ext cx="218880" cy="218880"/>
+            <a:ext cx="218520" cy="218520"/>
           </a:xfrm>
           <a:prstGeom prst="rect">
             <a:avLst/>
@@ -48182,7 +48242,7 @@
         <p:spPr>
           <a:xfrm>
             <a:off x="1097280" y="420480"/>
-            <a:ext cx="10545120" cy="456480"/>
+            <a:ext cx="10544760" cy="456120"/>
           </a:xfrm>
           <a:prstGeom prst="rect">
             <a:avLst/>
@@ -48243,7 +48303,7 @@
         <p:spPr>
           <a:xfrm>
             <a:off x="548640" y="1234440"/>
-            <a:ext cx="3484080" cy="5119920"/>
+            <a:ext cx="3483720" cy="5119560"/>
           </a:xfrm>
           <a:prstGeom prst="roundRect">
             <a:avLst>
@@ -48288,7 +48348,7 @@
         <p:spPr>
           <a:xfrm>
             <a:off x="1902240" y="1600200"/>
-            <a:ext cx="776520" cy="776520"/>
+            <a:ext cx="776160" cy="776160"/>
           </a:xfrm>
           <a:prstGeom prst="ellipse">
             <a:avLst/>
@@ -48335,7 +48395,7 @@
         <p:spPr>
           <a:xfrm>
             <a:off x="2099160" y="1792080"/>
-            <a:ext cx="383400" cy="383400"/>
+            <a:ext cx="383040" cy="383040"/>
           </a:xfrm>
           <a:prstGeom prst="rect">
             <a:avLst/>
@@ -48355,7 +48415,7 @@
         <p:spPr>
           <a:xfrm>
             <a:off x="731520" y="2560320"/>
-            <a:ext cx="3118320" cy="365040"/>
+            <a:ext cx="3117960" cy="364680"/>
           </a:xfrm>
           <a:prstGeom prst="rect">
             <a:avLst/>
@@ -48416,7 +48476,7 @@
         <p:spPr>
           <a:xfrm>
             <a:off x="777240" y="2971800"/>
-            <a:ext cx="3026880" cy="3199680"/>
+            <a:ext cx="3026520" cy="3199320"/>
           </a:xfrm>
           <a:prstGeom prst="rect">
             <a:avLst/>
@@ -48477,7 +48537,7 @@
         <p:spPr>
           <a:xfrm>
             <a:off x="4353480" y="1234440"/>
-            <a:ext cx="3484080" cy="5119920"/>
+            <a:ext cx="3483720" cy="5119560"/>
           </a:xfrm>
           <a:prstGeom prst="roundRect">
             <a:avLst>
@@ -48522,7 +48582,7 @@
         <p:spPr>
           <a:xfrm>
             <a:off x="5707080" y="1600200"/>
-            <a:ext cx="776520" cy="776520"/>
+            <a:ext cx="776160" cy="776160"/>
           </a:xfrm>
           <a:prstGeom prst="ellipse">
             <a:avLst/>
@@ -48569,7 +48629,7 @@
         <p:spPr>
           <a:xfrm>
             <a:off x="5904000" y="1792080"/>
-            <a:ext cx="383400" cy="383400"/>
+            <a:ext cx="383040" cy="383040"/>
           </a:xfrm>
           <a:prstGeom prst="rect">
             <a:avLst/>
@@ -48589,7 +48649,7 @@
         <p:spPr>
           <a:xfrm>
             <a:off x="4536360" y="2560320"/>
-            <a:ext cx="3118320" cy="365040"/>
+            <a:ext cx="3117960" cy="364680"/>
           </a:xfrm>
           <a:prstGeom prst="rect">
             <a:avLst/>
@@ -48650,7 +48710,7 @@
         <p:spPr>
           <a:xfrm>
             <a:off x="4582080" y="2971800"/>
-            <a:ext cx="3026880" cy="3199680"/>
+            <a:ext cx="3026520" cy="3199320"/>
           </a:xfrm>
           <a:prstGeom prst="rect">
             <a:avLst/>
@@ -48711,7 +48771,7 @@
         <p:spPr>
           <a:xfrm>
             <a:off x="8158320" y="1234440"/>
-            <a:ext cx="3484080" cy="5119920"/>
+            <a:ext cx="3483720" cy="5119560"/>
           </a:xfrm>
           <a:prstGeom prst="roundRect">
             <a:avLst>
@@ -48756,7 +48816,7 @@
         <p:spPr>
           <a:xfrm>
             <a:off x="9511920" y="1600200"/>
-            <a:ext cx="776520" cy="776520"/>
+            <a:ext cx="776160" cy="776160"/>
           </a:xfrm>
           <a:prstGeom prst="ellipse">
             <a:avLst/>
@@ -48803,7 +48863,7 @@
         <p:spPr>
           <a:xfrm>
             <a:off x="9708480" y="1792080"/>
-            <a:ext cx="383400" cy="383400"/>
+            <a:ext cx="383040" cy="383040"/>
           </a:xfrm>
           <a:prstGeom prst="rect">
             <a:avLst/>
@@ -48823,7 +48883,7 @@
         <p:spPr>
           <a:xfrm>
             <a:off x="8341200" y="2560320"/>
-            <a:ext cx="3118320" cy="365040"/>
+            <a:ext cx="3117960" cy="364680"/>
           </a:xfrm>
           <a:prstGeom prst="rect">
             <a:avLst/>
@@ -48884,7 +48944,7 @@
         <p:spPr>
           <a:xfrm>
             <a:off x="8386920" y="2971800"/>
-            <a:ext cx="3026880" cy="3199680"/>
+            <a:ext cx="3026520" cy="3199320"/>
           </a:xfrm>
           <a:prstGeom prst="rect">
             <a:avLst/>
@@ -48945,7 +49005,7 @@
         <p:spPr>
           <a:xfrm>
             <a:off x="548640" y="6510600"/>
-            <a:ext cx="5485680" cy="273600"/>
+            <a:ext cx="5485320" cy="273240"/>
           </a:xfrm>
           <a:prstGeom prst="rect">
             <a:avLst/>
@@ -49006,7 +49066,7 @@
         <p:spPr>
           <a:xfrm>
             <a:off x="11094480" y="6510600"/>
-            <a:ext cx="547920" cy="273600"/>
+            <a:ext cx="547560" cy="273240"/>
           </a:xfrm>
           <a:prstGeom prst="rect">
             <a:avLst/>
@@ -49104,7 +49164,7 @@
         <p:spPr>
           <a:xfrm>
             <a:off x="-2286000" y="3657600"/>
-            <a:ext cx="6400080" cy="6400080"/>
+            <a:ext cx="6399720" cy="6399720"/>
           </a:xfrm>
           <a:prstGeom prst="ellipse">
             <a:avLst/>
@@ -49147,7 +49207,7 @@
         <p:spPr>
           <a:xfrm>
             <a:off x="8229600" y="-2743200"/>
-            <a:ext cx="6400080" cy="6400080"/>
+            <a:ext cx="6399720" cy="6399720"/>
           </a:xfrm>
           <a:prstGeom prst="ellipse">
             <a:avLst/>
@@ -49190,7 +49250,7 @@
         <p:spPr>
           <a:xfrm>
             <a:off x="5638680" y="868680"/>
-            <a:ext cx="913680" cy="913680"/>
+            <a:ext cx="913320" cy="913320"/>
           </a:xfrm>
           <a:prstGeom prst="ellipse">
             <a:avLst/>
@@ -49237,7 +49297,7 @@
         <p:spPr>
           <a:xfrm>
             <a:off x="5876280" y="1097280"/>
-            <a:ext cx="438120" cy="438120"/>
+            <a:ext cx="437760" cy="437760"/>
           </a:xfrm>
           <a:prstGeom prst="rect">
             <a:avLst/>
@@ -49257,7 +49317,7 @@
         <p:spPr>
           <a:xfrm>
             <a:off x="914400" y="2057400"/>
-            <a:ext cx="10362240" cy="291960"/>
+            <a:ext cx="10361880" cy="291600"/>
           </a:xfrm>
           <a:prstGeom prst="rect">
             <a:avLst/>
@@ -49318,7 +49378,7 @@
         <p:spPr>
           <a:xfrm>
             <a:off x="1188720" y="2441520"/>
-            <a:ext cx="9813600" cy="1005120"/>
+            <a:ext cx="9813240" cy="1004760"/>
           </a:xfrm>
           <a:prstGeom prst="rect">
             <a:avLst/>
@@ -49379,7 +49439,7 @@
         <p:spPr>
           <a:xfrm>
             <a:off x="1920240" y="3630240"/>
-            <a:ext cx="8350560" cy="822240"/>
+            <a:ext cx="8350200" cy="821880"/>
           </a:xfrm>
           <a:prstGeom prst="rect">
             <a:avLst/>
@@ -49440,7 +49500,7 @@
         <p:spPr>
           <a:xfrm>
             <a:off x="11094480" y="6492240"/>
-            <a:ext cx="547920" cy="273600"/>
+            <a:ext cx="547560" cy="273240"/>
           </a:xfrm>
           <a:prstGeom prst="rect">
             <a:avLst/>
@@ -49538,7 +49598,7 @@
         <p:spPr>
           <a:xfrm>
             <a:off x="548640" y="457200"/>
-            <a:ext cx="383400" cy="383400"/>
+            <a:ext cx="383040" cy="383040"/>
           </a:xfrm>
           <a:prstGeom prst="roundRect">
             <a:avLst>
@@ -49587,7 +49647,7 @@
         <p:spPr>
           <a:xfrm>
             <a:off x="631080" y="539640"/>
-            <a:ext cx="218880" cy="218880"/>
+            <a:ext cx="218520" cy="218520"/>
           </a:xfrm>
           <a:prstGeom prst="rect">
             <a:avLst/>
@@ -49607,7 +49667,7 @@
         <p:spPr>
           <a:xfrm>
             <a:off x="1097280" y="420480"/>
-            <a:ext cx="10545120" cy="456480"/>
+            <a:ext cx="10544760" cy="456120"/>
           </a:xfrm>
           <a:prstGeom prst="rect">
             <a:avLst/>
@@ -49668,7 +49728,7 @@
         <p:spPr>
           <a:xfrm>
             <a:off x="548640" y="1234440"/>
-            <a:ext cx="3245400" cy="5119920"/>
+            <a:ext cx="3245040" cy="5119560"/>
           </a:xfrm>
           <a:prstGeom prst="roundRect">
             <a:avLst>
@@ -49713,7 +49773,7 @@
         <p:spPr>
           <a:xfrm>
             <a:off x="1645920" y="1737360"/>
-            <a:ext cx="1050840" cy="1050840"/>
+            <a:ext cx="1050480" cy="1050480"/>
           </a:xfrm>
           <a:prstGeom prst="ellipse">
             <a:avLst/>
@@ -49760,7 +49820,7 @@
         <p:spPr>
           <a:xfrm>
             <a:off x="1906560" y="2002680"/>
-            <a:ext cx="529560" cy="529560"/>
+            <a:ext cx="529200" cy="529200"/>
           </a:xfrm>
           <a:prstGeom prst="rect">
             <a:avLst/>
@@ -49780,7 +49840,7 @@
         <p:spPr>
           <a:xfrm>
             <a:off x="731520" y="3017520"/>
-            <a:ext cx="2879640" cy="3062520"/>
+            <a:ext cx="2879280" cy="3062160"/>
           </a:xfrm>
           <a:prstGeom prst="rect">
             <a:avLst/>
@@ -49901,7 +49961,7 @@
         <p:spPr>
           <a:xfrm>
             <a:off x="4206240" y="1280160"/>
-            <a:ext cx="7436160" cy="5028480"/>
+            <a:ext cx="7435800" cy="5028120"/>
           </a:xfrm>
           <a:prstGeom prst="rect">
             <a:avLst/>
@@ -49945,43 +50005,7 @@
                 <a:latin typeface="Calibri"/>
                 <a:ea typeface="Calibri"/>
               </a:rPr>
-              <a:t>A class is a blueprint — it </a:t>
-            </a:r>
-            <a:r>
-              <a:rPr lang="en-US" sz="2200" b="0" u="none" strike="noStrike">
-                <a:solidFill>
-                  <a:srgbClr val="3F4A45"/>
-                </a:solidFill>
-                <a:effectLst/>
-                <a:uFillTx/>
-                <a:latin typeface="Calibri"/>
-                <a:ea typeface="Calibri"/>
-              </a:rPr>
-              <a:t>defines what data and </a:t>
-            </a:r>
-            <a:r>
-              <a:rPr lang="en-US" sz="2200" b="0" u="none" strike="noStrike">
-                <a:solidFill>
-                  <a:srgbClr val="3F4A45"/>
-                </a:solidFill>
-                <a:effectLst/>
-                <a:uFillTx/>
-                <a:latin typeface="Calibri"/>
-                <a:ea typeface="Calibri"/>
-              </a:rPr>
-              <a:t>behavior every object </a:t>
-            </a:r>
-            <a:r>
-              <a:rPr lang="en-US" sz="2200" b="0" u="none" strike="noStrike">
-                <a:solidFill>
-                  <a:srgbClr val="3F4A45"/>
-                </a:solidFill>
-                <a:effectLst/>
-                <a:uFillTx/>
-                <a:latin typeface="Calibri"/>
-                <a:ea typeface="Calibri"/>
-              </a:rPr>
-              <a:t>built from it will have</a:t>
+              <a:t>A class is a blueprint — it defines what data and behavior every object built from it will have</a:t>
             </a:r>
             <a:endParaRPr lang="en-US" sz="2200" b="0" u="none" strike="noStrike">
               <a:solidFill>
@@ -50016,55 +50040,7 @@
                 <a:latin typeface="Calibri"/>
                 <a:ea typeface="Calibri"/>
               </a:rPr>
-              <a:t>A blueprint for a house </a:t>
-            </a:r>
-            <a:r>
-              <a:rPr lang="en-US" sz="2200" b="0" u="none" strike="noStrike">
-                <a:solidFill>
-                  <a:srgbClr val="3F4A45"/>
-                </a:solidFill>
-                <a:effectLst/>
-                <a:uFillTx/>
-                <a:latin typeface="Calibri"/>
-                <a:ea typeface="Calibri"/>
-              </a:rPr>
-              <a:t>isn’t a house you can live </a:t>
-            </a:r>
-            <a:r>
-              <a:rPr lang="en-US" sz="2200" b="0" u="none" strike="noStrike">
-                <a:solidFill>
-                  <a:srgbClr val="3F4A45"/>
-                </a:solidFill>
-                <a:effectLst/>
-                <a:uFillTx/>
-                <a:latin typeface="Calibri"/>
-                <a:ea typeface="Calibri"/>
-              </a:rPr>
-              <a:t>in — a class isn’t </a:t>
-            </a:r>
-            <a:r>
-              <a:rPr lang="en-US" sz="2200" b="0" u="none" strike="noStrike">
-                <a:solidFill>
-                  <a:srgbClr val="3F4A45"/>
-                </a:solidFill>
-                <a:effectLst/>
-                <a:uFillTx/>
-                <a:latin typeface="Calibri"/>
-                <a:ea typeface="Calibri"/>
-              </a:rPr>
-              <a:t>something you use </a:t>
-            </a:r>
-            <a:r>
-              <a:rPr lang="en-US" sz="2200" b="0" u="none" strike="noStrike">
-                <a:solidFill>
-                  <a:srgbClr val="3F4A45"/>
-                </a:solidFill>
-                <a:effectLst/>
-                <a:uFillTx/>
-                <a:latin typeface="Calibri"/>
-                <a:ea typeface="Calibri"/>
-              </a:rPr>
-              <a:t>directly either</a:t>
+              <a:t>A blueprint for a house isn’t a house you can live in — a class isn’t something you use directly either</a:t>
             </a:r>
             <a:endParaRPr lang="en-US" sz="2200" b="0" u="none" strike="noStrike">
               <a:solidFill>
@@ -50099,55 +50075,7 @@
                 <a:latin typeface="Calibri"/>
                 <a:ea typeface="Calibri"/>
               </a:rPr>
-              <a:t>An object (also called an </a:t>
-            </a:r>
-            <a:r>
-              <a:rPr lang="en-US" sz="2200" b="0" u="none" strike="noStrike">
-                <a:solidFill>
-                  <a:srgbClr val="3F4A45"/>
-                </a:solidFill>
-                <a:effectLst/>
-                <a:uFillTx/>
-                <a:latin typeface="Calibri"/>
-                <a:ea typeface="Calibri"/>
-              </a:rPr>
-              <a:t>instance) is one actual </a:t>
-            </a:r>
-            <a:r>
-              <a:rPr lang="en-US" sz="2200" b="0" u="none" strike="noStrike">
-                <a:solidFill>
-                  <a:srgbClr val="3F4A45"/>
-                </a:solidFill>
-                <a:effectLst/>
-                <a:uFillTx/>
-                <a:latin typeface="Calibri"/>
-                <a:ea typeface="Calibri"/>
-              </a:rPr>
-              <a:t>thing built from that </a:t>
-            </a:r>
-            <a:r>
-              <a:rPr lang="en-US" sz="2200" b="0" u="none" strike="noStrike">
-                <a:solidFill>
-                  <a:srgbClr val="3F4A45"/>
-                </a:solidFill>
-                <a:effectLst/>
-                <a:uFillTx/>
-                <a:latin typeface="Calibri"/>
-                <a:ea typeface="Calibri"/>
-              </a:rPr>
-              <a:t>blueprint — with its own </a:t>
-            </a:r>
-            <a:r>
-              <a:rPr lang="en-US" sz="2200" b="0" u="none" strike="noStrike">
-                <a:solidFill>
-                  <a:srgbClr val="3F4A45"/>
-                </a:solidFill>
-                <a:effectLst/>
-                <a:uFillTx/>
-                <a:latin typeface="Calibri"/>
-                <a:ea typeface="Calibri"/>
-              </a:rPr>
-              <a:t>real values filled in</a:t>
+              <a:t>An object (also called an instance) is one actual thing built from that blueprint — with its own real values filled in</a:t>
             </a:r>
             <a:endParaRPr lang="en-US" sz="2200" b="0" u="none" strike="noStrike">
               <a:solidFill>
@@ -50182,115 +50110,67 @@
                 <a:latin typeface="Calibri"/>
                 <a:ea typeface="Calibri"/>
               </a:rPr>
-              <a:t>You can build as many </a:t>
-            </a:r>
-            <a:r>
-              <a:rPr lang="en-US" sz="2200" b="0" u="none" strike="noStrike">
-                <a:solidFill>
-                  <a:srgbClr val="3F4A45"/>
+              <a:t>You can build as many objects as you want from one class, and each one is independent of the others</a:t>
+            </a:r>
+            <a:endParaRPr lang="en-US" sz="2200" b="0" u="none" strike="noStrike">
+              <a:solidFill>
+                <a:srgbClr val="000000"/>
+              </a:solidFill>
+              <a:effectLst/>
+              <a:uFillTx/>
+              <a:latin typeface="Arial"/>
+            </a:endParaRPr>
+          </a:p>
+        </p:txBody>
+      </p:sp>
+      <p:sp>
+        <p:nvSpPr>
+          <p:cNvPr id="116" name="Text 6"/>
+          <p:cNvSpPr/>
+          <p:nvPr/>
+        </p:nvSpPr>
+        <p:spPr>
+          <a:xfrm>
+            <a:off x="548640" y="6510600"/>
+            <a:ext cx="5485320" cy="273240"/>
+          </a:xfrm>
+          <a:prstGeom prst="rect">
+            <a:avLst/>
+          </a:prstGeom>
+          <a:noFill/>
+          <a:ln w="0">
+            <a:noFill/>
+          </a:ln>
+        </p:spPr>
+        <p:style>
+          <a:lnRef idx="0"/>
+          <a:fillRef idx="0"/>
+          <a:effectRef idx="0"/>
+          <a:fontRef idx="minor"/>
+        </p:style>
+        <p:txBody>
+          <a:bodyPr lIns="0" tIns="0" rIns="0" bIns="0" anchor="ctr">
+            <a:noAutofit/>
+          </a:bodyPr>
+          <a:p>
+            <a:pPr defTabSz="914400">
+              <a:lnSpc>
+                <a:spcPct val="100000"/>
+              </a:lnSpc>
+              <a:tabLst>
+                <a:tab pos="0" algn="l"/>
+              </a:tabLst>
+            </a:pPr>
+            <a:r>
+              <a:rPr lang="en-US" sz="800" b="0" u="none" strike="noStrike">
+                <a:solidFill>
+                  <a:srgbClr val="7C8A80"/>
                 </a:solidFill>
                 <a:effectLst/>
                 <a:uFillTx/>
                 <a:latin typeface="Calibri"/>
                 <a:ea typeface="Calibri"/>
               </a:rPr>
-              <a:t>objects as you want from </a:t>
-            </a:r>
-            <a:r>
-              <a:rPr lang="en-US" sz="2200" b="0" u="none" strike="noStrike">
-                <a:solidFill>
-                  <a:srgbClr val="3F4A45"/>
-                </a:solidFill>
-                <a:effectLst/>
-                <a:uFillTx/>
-                <a:latin typeface="Calibri"/>
-                <a:ea typeface="Calibri"/>
-              </a:rPr>
-              <a:t>one class, and each one </a:t>
-            </a:r>
-            <a:r>
-              <a:rPr lang="en-US" sz="2200" b="0" u="none" strike="noStrike">
-                <a:solidFill>
-                  <a:srgbClr val="3F4A45"/>
-                </a:solidFill>
-                <a:effectLst/>
-                <a:uFillTx/>
-                <a:latin typeface="Calibri"/>
-                <a:ea typeface="Calibri"/>
-              </a:rPr>
-              <a:t>is independent of the </a:t>
-            </a:r>
-            <a:r>
-              <a:rPr lang="en-US" sz="2200" b="0" u="none" strike="noStrike">
-                <a:solidFill>
-                  <a:srgbClr val="3F4A45"/>
-                </a:solidFill>
-                <a:effectLst/>
-                <a:uFillTx/>
-                <a:latin typeface="Calibri"/>
-                <a:ea typeface="Calibri"/>
-              </a:rPr>
-              <a:t>others</a:t>
-            </a:r>
-            <a:endParaRPr lang="en-US" sz="2200" b="0" u="none" strike="noStrike">
-              <a:solidFill>
-                <a:srgbClr val="000000"/>
-              </a:solidFill>
-              <a:effectLst/>
-              <a:uFillTx/>
-              <a:latin typeface="Arial"/>
-            </a:endParaRPr>
-          </a:p>
-        </p:txBody>
-      </p:sp>
-      <p:sp>
-        <p:nvSpPr>
-          <p:cNvPr id="116" name="Text 6"/>
-          <p:cNvSpPr/>
-          <p:nvPr/>
-        </p:nvSpPr>
-        <p:spPr>
-          <a:xfrm>
-            <a:off x="548640" y="6510600"/>
-            <a:ext cx="5485680" cy="273600"/>
-          </a:xfrm>
-          <a:prstGeom prst="rect">
-            <a:avLst/>
-          </a:prstGeom>
-          <a:noFill/>
-          <a:ln w="0">
-            <a:noFill/>
-          </a:ln>
-        </p:spPr>
-        <p:style>
-          <a:lnRef idx="0"/>
-          <a:fillRef idx="0"/>
-          <a:effectRef idx="0"/>
-          <a:fontRef idx="minor"/>
-        </p:style>
-        <p:txBody>
-          <a:bodyPr lIns="0" tIns="0" rIns="0" bIns="0" anchor="ctr">
-            <a:noAutofit/>
-          </a:bodyPr>
-          <a:p>
-            <a:pPr defTabSz="914400">
-              <a:lnSpc>
-                <a:spcPct val="100000"/>
-              </a:lnSpc>
-              <a:tabLst>
-                <a:tab pos="0" algn="l"/>
-              </a:tabLst>
-            </a:pPr>
-            <a:r>
-              <a:rPr lang="en-US" sz="800" b="0" u="none" strike="noStrike">
-                <a:solidFill>
-                  <a:srgbClr val="7C8A80"/>
-                </a:solidFill>
-                <a:effectLst/>
-                <a:uFillTx/>
-                <a:latin typeface="Calibri"/>
-                <a:ea typeface="Calibri"/>
-              </a:rPr>
               <a:t>Object-Oriented Programming  ·  Session 10</a:t>
             </a:r>
             <a:endParaRPr lang="en-US" sz="800" b="0" u="none" strike="noStrike">
@@ -50313,7 +50193,7 @@
         <p:spPr>
           <a:xfrm>
             <a:off x="11094480" y="6510600"/>
-            <a:ext cx="547920" cy="273600"/>
+            <a:ext cx="547560" cy="273240"/>
           </a:xfrm>
           <a:prstGeom prst="rect">
             <a:avLst/>
@@ -50411,7 +50291,7 @@
         <p:spPr>
           <a:xfrm>
             <a:off x="548640" y="457200"/>
-            <a:ext cx="383400" cy="383400"/>
+            <a:ext cx="383040" cy="383040"/>
           </a:xfrm>
           <a:prstGeom prst="roundRect">
             <a:avLst>
@@ -50460,7 +50340,7 @@
         <p:spPr>
           <a:xfrm>
             <a:off x="631080" y="539640"/>
-            <a:ext cx="218880" cy="218880"/>
+            <a:ext cx="218520" cy="218520"/>
           </a:xfrm>
           <a:prstGeom prst="rect">
             <a:avLst/>
@@ -50480,7 +50360,7 @@
         <p:spPr>
           <a:xfrm>
             <a:off x="1097280" y="420480"/>
-            <a:ext cx="10545120" cy="456480"/>
+            <a:ext cx="10544760" cy="456120"/>
           </a:xfrm>
           <a:prstGeom prst="rect">
             <a:avLst/>
@@ -50541,7 +50421,7 @@
         <p:spPr>
           <a:xfrm>
             <a:off x="548640" y="1234440"/>
-            <a:ext cx="11093760" cy="1197000"/>
+            <a:ext cx="11093400" cy="1196640"/>
           </a:xfrm>
           <a:prstGeom prst="rect">
             <a:avLst/>
@@ -50677,7 +50557,7 @@
         <p:spPr>
           <a:xfrm>
             <a:off x="548640" y="2569320"/>
-            <a:ext cx="11093760" cy="3785040"/>
+            <a:ext cx="11093400" cy="3784680"/>
           </a:xfrm>
           <a:prstGeom prst="roundRect">
             <a:avLst>
@@ -50722,7 +50602,7 @@
         <p:spPr>
           <a:xfrm>
             <a:off x="868680" y="2752200"/>
-            <a:ext cx="10453680" cy="3419280"/>
+            <a:ext cx="10453320" cy="3418920"/>
           </a:xfrm>
           <a:prstGeom prst="rect">
             <a:avLst/>
@@ -50993,7 +50873,7 @@
         <p:spPr>
           <a:xfrm>
             <a:off x="548640" y="6510600"/>
-            <a:ext cx="5485680" cy="273600"/>
+            <a:ext cx="5485320" cy="273240"/>
           </a:xfrm>
           <a:prstGeom prst="rect">
             <a:avLst/>
@@ -51054,7 +50934,7 @@
         <p:spPr>
           <a:xfrm>
             <a:off x="11094480" y="6510600"/>
-            <a:ext cx="547920" cy="273600"/>
+            <a:ext cx="547560" cy="273240"/>
           </a:xfrm>
           <a:prstGeom prst="rect">
             <a:avLst/>

--- a/slides/1_python_slides/9_Object-Oriented Programming - Session 10.pptx
+++ b/slides/1_python_slides/9_Object-Oriented Programming - Session 10.pptx
@@ -421,7 +421,7 @@
             <a:pPr indent="0" algn="r">
               <a:buNone/>
             </a:pPr>
-            <a:fld id="{1D6ECCD2-C6A5-407A-84F2-B12BDB7E15DA}" type="slidenum">
+            <a:fld id="{91BA3E84-E1AB-4262-B7FB-D5431DE61806}" type="slidenum">
               <a:rPr lang="en-US" sz="1400" b="0" u="none" strike="noStrike">
                 <a:solidFill>
                   <a:srgbClr val="000000"/>
@@ -479,7 +479,7 @@
         <p:spPr>
           <a:xfrm>
             <a:off x="685800" y="1143000"/>
-            <a:ext cx="5484960" cy="3084840"/>
+            <a:ext cx="5484240" cy="3084120"/>
           </a:xfrm>
           <a:prstGeom prst="rect">
             <a:avLst/>
@@ -502,7 +502,7 @@
         <p:spPr>
           <a:xfrm>
             <a:off x="685800" y="4400640"/>
-            <a:ext cx="5484960" cy="3598920"/>
+            <a:ext cx="5484240" cy="3598200"/>
           </a:xfrm>
           <a:prstGeom prst="rect">
             <a:avLst/>
@@ -544,7 +544,7 @@
         <p:spPr>
           <a:xfrm>
             <a:off x="3884760" y="8685360"/>
-            <a:ext cx="2970360" cy="457200"/>
+            <a:ext cx="2969640" cy="456480"/>
           </a:xfrm>
           <a:prstGeom prst="rect">
             <a:avLst/>
@@ -588,7 +588,7 @@
                 <a:tab pos="0" algn="l"/>
               </a:tabLst>
             </a:pPr>
-            <a:fld id="{838E42B4-E4FA-4D1C-AA57-41AC3DB8363A}" type="slidenum">
+            <a:fld id="{40283130-516A-4584-9BD0-427B45EC2617}" type="slidenum">
               <a:rPr lang="en-US" sz="1200" b="0" u="none" strike="noStrike">
                 <a:solidFill>
                   <a:schemeClr val="dk1"/>
@@ -646,7 +646,7 @@
         <p:spPr>
           <a:xfrm>
             <a:off x="685800" y="1143000"/>
-            <a:ext cx="5484960" cy="3084840"/>
+            <a:ext cx="5484240" cy="3084120"/>
           </a:xfrm>
           <a:prstGeom prst="rect">
             <a:avLst/>
@@ -669,7 +669,7 @@
         <p:spPr>
           <a:xfrm>
             <a:off x="685800" y="4400640"/>
-            <a:ext cx="5484960" cy="3598920"/>
+            <a:ext cx="5484240" cy="3598200"/>
           </a:xfrm>
           <a:prstGeom prst="rect">
             <a:avLst/>
@@ -711,7 +711,7 @@
         <p:spPr>
           <a:xfrm>
             <a:off x="3884760" y="8685360"/>
-            <a:ext cx="2970360" cy="457200"/>
+            <a:ext cx="2969640" cy="456480"/>
           </a:xfrm>
           <a:prstGeom prst="rect">
             <a:avLst/>
@@ -755,7 +755,7 @@
                 <a:tab pos="0" algn="l"/>
               </a:tabLst>
             </a:pPr>
-            <a:fld id="{B075D971-2FD4-430F-996A-3FCAA0C91646}" type="slidenum">
+            <a:fld id="{EDFDF93B-5B74-4318-8149-E439E8AE0164}" type="slidenum">
               <a:rPr lang="en-US" sz="1200" b="0" u="none" strike="noStrike">
                 <a:solidFill>
                   <a:schemeClr val="dk1"/>
@@ -813,7 +813,7 @@
         <p:spPr>
           <a:xfrm>
             <a:off x="685800" y="1143000"/>
-            <a:ext cx="5484960" cy="3084840"/>
+            <a:ext cx="5484240" cy="3084120"/>
           </a:xfrm>
           <a:prstGeom prst="rect">
             <a:avLst/>
@@ -836,7 +836,7 @@
         <p:spPr>
           <a:xfrm>
             <a:off x="685800" y="4400640"/>
-            <a:ext cx="5484960" cy="3598920"/>
+            <a:ext cx="5484240" cy="3598200"/>
           </a:xfrm>
           <a:prstGeom prst="rect">
             <a:avLst/>
@@ -878,7 +878,7 @@
         <p:spPr>
           <a:xfrm>
             <a:off x="3884760" y="8685360"/>
-            <a:ext cx="2970360" cy="457200"/>
+            <a:ext cx="2969640" cy="456480"/>
           </a:xfrm>
           <a:prstGeom prst="rect">
             <a:avLst/>
@@ -922,7 +922,7 @@
                 <a:tab pos="0" algn="l"/>
               </a:tabLst>
             </a:pPr>
-            <a:fld id="{54767929-4AA1-4FE9-BB29-02229C5F6F21}" type="slidenum">
+            <a:fld id="{0158103A-57A9-42B2-BA8B-DC16CBD08371}" type="slidenum">
               <a:rPr lang="en-US" sz="1200" b="0" u="none" strike="noStrike">
                 <a:solidFill>
                   <a:schemeClr val="dk1"/>
@@ -980,7 +980,7 @@
         <p:spPr>
           <a:xfrm>
             <a:off x="685800" y="1143000"/>
-            <a:ext cx="5484960" cy="3084840"/>
+            <a:ext cx="5484240" cy="3084120"/>
           </a:xfrm>
           <a:prstGeom prst="rect">
             <a:avLst/>
@@ -1003,7 +1003,7 @@
         <p:spPr>
           <a:xfrm>
             <a:off x="685800" y="4400640"/>
-            <a:ext cx="5484960" cy="3598920"/>
+            <a:ext cx="5484240" cy="3598200"/>
           </a:xfrm>
           <a:prstGeom prst="rect">
             <a:avLst/>
@@ -1045,7 +1045,7 @@
         <p:spPr>
           <a:xfrm>
             <a:off x="3884760" y="8685360"/>
-            <a:ext cx="2970360" cy="457200"/>
+            <a:ext cx="2969640" cy="456480"/>
           </a:xfrm>
           <a:prstGeom prst="rect">
             <a:avLst/>
@@ -1089,7 +1089,7 @@
                 <a:tab pos="0" algn="l"/>
               </a:tabLst>
             </a:pPr>
-            <a:fld id="{DB58480A-6B8A-4966-8A73-642FFD657D82}" type="slidenum">
+            <a:fld id="{1F35C292-71C0-4539-9F59-F1D47D572611}" type="slidenum">
               <a:rPr lang="en-US" sz="1200" b="0" u="none" strike="noStrike">
                 <a:solidFill>
                   <a:schemeClr val="dk1"/>
@@ -1147,7 +1147,7 @@
         <p:spPr>
           <a:xfrm>
             <a:off x="685800" y="1143000"/>
-            <a:ext cx="5484960" cy="3084840"/>
+            <a:ext cx="5484240" cy="3084120"/>
           </a:xfrm>
           <a:prstGeom prst="rect">
             <a:avLst/>
@@ -1170,7 +1170,7 @@
         <p:spPr>
           <a:xfrm>
             <a:off x="685800" y="4400640"/>
-            <a:ext cx="5484960" cy="3598920"/>
+            <a:ext cx="5484240" cy="3598200"/>
           </a:xfrm>
           <a:prstGeom prst="rect">
             <a:avLst/>
@@ -1212,7 +1212,7 @@
         <p:spPr>
           <a:xfrm>
             <a:off x="3884760" y="8685360"/>
-            <a:ext cx="2970360" cy="457200"/>
+            <a:ext cx="2969640" cy="456480"/>
           </a:xfrm>
           <a:prstGeom prst="rect">
             <a:avLst/>
@@ -1256,7 +1256,7 @@
                 <a:tab pos="0" algn="l"/>
               </a:tabLst>
             </a:pPr>
-            <a:fld id="{5D26B5EF-C98F-4588-81CD-93DE5D091E81}" type="slidenum">
+            <a:fld id="{4B363F6A-6854-4DCF-80CD-29F33D207530}" type="slidenum">
               <a:rPr lang="en-US" sz="1200" b="0" u="none" strike="noStrike">
                 <a:solidFill>
                   <a:schemeClr val="dk1"/>
@@ -1314,7 +1314,7 @@
         <p:spPr>
           <a:xfrm>
             <a:off x="685800" y="1143000"/>
-            <a:ext cx="5484960" cy="3084840"/>
+            <a:ext cx="5484240" cy="3084120"/>
           </a:xfrm>
           <a:prstGeom prst="rect">
             <a:avLst/>
@@ -1337,7 +1337,7 @@
         <p:spPr>
           <a:xfrm>
             <a:off x="685800" y="4400640"/>
-            <a:ext cx="5484960" cy="3598920"/>
+            <a:ext cx="5484240" cy="3598200"/>
           </a:xfrm>
           <a:prstGeom prst="rect">
             <a:avLst/>
@@ -1379,7 +1379,7 @@
         <p:spPr>
           <a:xfrm>
             <a:off x="3884760" y="8685360"/>
-            <a:ext cx="2970360" cy="457200"/>
+            <a:ext cx="2969640" cy="456480"/>
           </a:xfrm>
           <a:prstGeom prst="rect">
             <a:avLst/>
@@ -1423,7 +1423,7 @@
                 <a:tab pos="0" algn="l"/>
               </a:tabLst>
             </a:pPr>
-            <a:fld id="{E6E714DA-3090-44D8-B729-37B3F7F2AC1C}" type="slidenum">
+            <a:fld id="{AFFFB530-FA60-4719-83C2-004741108486}" type="slidenum">
               <a:rPr lang="en-US" sz="1200" b="0" u="none" strike="noStrike">
                 <a:solidFill>
                   <a:schemeClr val="dk1"/>
@@ -1481,7 +1481,7 @@
         <p:spPr>
           <a:xfrm>
             <a:off x="685800" y="1143000"/>
-            <a:ext cx="5484960" cy="3084840"/>
+            <a:ext cx="5484240" cy="3084120"/>
           </a:xfrm>
           <a:prstGeom prst="rect">
             <a:avLst/>
@@ -1504,7 +1504,7 @@
         <p:spPr>
           <a:xfrm>
             <a:off x="685800" y="4400640"/>
-            <a:ext cx="5484960" cy="3598920"/>
+            <a:ext cx="5484240" cy="3598200"/>
           </a:xfrm>
           <a:prstGeom prst="rect">
             <a:avLst/>
@@ -1546,7 +1546,7 @@
         <p:spPr>
           <a:xfrm>
             <a:off x="3884760" y="8685360"/>
-            <a:ext cx="2970360" cy="457200"/>
+            <a:ext cx="2969640" cy="456480"/>
           </a:xfrm>
           <a:prstGeom prst="rect">
             <a:avLst/>
@@ -1590,7 +1590,7 @@
                 <a:tab pos="0" algn="l"/>
               </a:tabLst>
             </a:pPr>
-            <a:fld id="{56D4C1CA-A5EC-42A3-9B2C-D135D6ACEB35}" type="slidenum">
+            <a:fld id="{50F153BF-C7D6-4D0D-8E25-D4D55E096FAA}" type="slidenum">
               <a:rPr lang="en-US" sz="1200" b="0" u="none" strike="noStrike">
                 <a:solidFill>
                   <a:schemeClr val="dk1"/>
@@ -1648,7 +1648,7 @@
         <p:spPr>
           <a:xfrm>
             <a:off x="685800" y="1143000"/>
-            <a:ext cx="5484960" cy="3084840"/>
+            <a:ext cx="5484240" cy="3084120"/>
           </a:xfrm>
           <a:prstGeom prst="rect">
             <a:avLst/>
@@ -1671,7 +1671,7 @@
         <p:spPr>
           <a:xfrm>
             <a:off x="685800" y="4400640"/>
-            <a:ext cx="5484960" cy="3598920"/>
+            <a:ext cx="5484240" cy="3598200"/>
           </a:xfrm>
           <a:prstGeom prst="rect">
             <a:avLst/>
@@ -1713,7 +1713,7 @@
         <p:spPr>
           <a:xfrm>
             <a:off x="3884760" y="8685360"/>
-            <a:ext cx="2970360" cy="457200"/>
+            <a:ext cx="2969640" cy="456480"/>
           </a:xfrm>
           <a:prstGeom prst="rect">
             <a:avLst/>
@@ -1757,7 +1757,7 @@
                 <a:tab pos="0" algn="l"/>
               </a:tabLst>
             </a:pPr>
-            <a:fld id="{85FAEA4B-4E48-48D4-A522-B53C1EE44C59}" type="slidenum">
+            <a:fld id="{4498F4D5-C5C1-43F0-ABC9-31566D1F7B52}" type="slidenum">
               <a:rPr lang="en-US" sz="1200" b="0" u="none" strike="noStrike">
                 <a:solidFill>
                   <a:schemeClr val="dk1"/>
@@ -1815,7 +1815,7 @@
         <p:spPr>
           <a:xfrm>
             <a:off x="685800" y="1143000"/>
-            <a:ext cx="5484960" cy="3084840"/>
+            <a:ext cx="5484240" cy="3084120"/>
           </a:xfrm>
           <a:prstGeom prst="rect">
             <a:avLst/>
@@ -1838,7 +1838,7 @@
         <p:spPr>
           <a:xfrm>
             <a:off x="685800" y="4400640"/>
-            <a:ext cx="5484960" cy="3598920"/>
+            <a:ext cx="5484240" cy="3598200"/>
           </a:xfrm>
           <a:prstGeom prst="rect">
             <a:avLst/>
@@ -1880,7 +1880,7 @@
         <p:spPr>
           <a:xfrm>
             <a:off x="3884760" y="8685360"/>
-            <a:ext cx="2970360" cy="457200"/>
+            <a:ext cx="2969640" cy="456480"/>
           </a:xfrm>
           <a:prstGeom prst="rect">
             <a:avLst/>
@@ -1924,7 +1924,7 @@
                 <a:tab pos="0" algn="l"/>
               </a:tabLst>
             </a:pPr>
-            <a:fld id="{CB3157A3-63EA-4B4B-8B7F-A745BF2A5982}" type="slidenum">
+            <a:fld id="{59D88B7C-D38D-492D-A6FE-E75F1A0DFFA3}" type="slidenum">
               <a:rPr lang="en-US" sz="1200" b="0" u="none" strike="noStrike">
                 <a:solidFill>
                   <a:schemeClr val="dk1"/>
@@ -1982,7 +1982,7 @@
         <p:spPr>
           <a:xfrm>
             <a:off x="685800" y="1143000"/>
-            <a:ext cx="5484960" cy="3084840"/>
+            <a:ext cx="5484240" cy="3084120"/>
           </a:xfrm>
           <a:prstGeom prst="rect">
             <a:avLst/>
@@ -2005,7 +2005,7 @@
         <p:spPr>
           <a:xfrm>
             <a:off x="685800" y="4400640"/>
-            <a:ext cx="5484960" cy="3598920"/>
+            <a:ext cx="5484240" cy="3598200"/>
           </a:xfrm>
           <a:prstGeom prst="rect">
             <a:avLst/>
@@ -2047,7 +2047,7 @@
         <p:spPr>
           <a:xfrm>
             <a:off x="3884760" y="8685360"/>
-            <a:ext cx="2970360" cy="457200"/>
+            <a:ext cx="2969640" cy="456480"/>
           </a:xfrm>
           <a:prstGeom prst="rect">
             <a:avLst/>
@@ -2091,7 +2091,7 @@
                 <a:tab pos="0" algn="l"/>
               </a:tabLst>
             </a:pPr>
-            <a:fld id="{0292AF0B-A752-4EAD-89C2-31454F1D3D0A}" type="slidenum">
+            <a:fld id="{7ACF9195-777B-48CD-9874-7478A6FC6BE4}" type="slidenum">
               <a:rPr lang="en-US" sz="1200" b="0" u="none" strike="noStrike">
                 <a:solidFill>
                   <a:schemeClr val="dk1"/>
@@ -2149,7 +2149,7 @@
         <p:spPr>
           <a:xfrm>
             <a:off x="685800" y="1143000"/>
-            <a:ext cx="5484960" cy="3084840"/>
+            <a:ext cx="5484240" cy="3084120"/>
           </a:xfrm>
           <a:prstGeom prst="rect">
             <a:avLst/>
@@ -2172,7 +2172,7 @@
         <p:spPr>
           <a:xfrm>
             <a:off x="685800" y="4400640"/>
-            <a:ext cx="5484960" cy="3598920"/>
+            <a:ext cx="5484240" cy="3598200"/>
           </a:xfrm>
           <a:prstGeom prst="rect">
             <a:avLst/>
@@ -2214,7 +2214,7 @@
         <p:spPr>
           <a:xfrm>
             <a:off x="3884760" y="8685360"/>
-            <a:ext cx="2970360" cy="457200"/>
+            <a:ext cx="2969640" cy="456480"/>
           </a:xfrm>
           <a:prstGeom prst="rect">
             <a:avLst/>
@@ -2258,7 +2258,7 @@
                 <a:tab pos="0" algn="l"/>
               </a:tabLst>
             </a:pPr>
-            <a:fld id="{D6C06DC8-4AAB-4A6A-924A-3E95AA325894}" type="slidenum">
+            <a:fld id="{34E036EC-BC03-4306-9370-43CA99E2608B}" type="slidenum">
               <a:rPr lang="en-US" sz="1200" b="0" u="none" strike="noStrike">
                 <a:solidFill>
                   <a:schemeClr val="dk1"/>
@@ -2316,7 +2316,7 @@
         <p:spPr>
           <a:xfrm>
             <a:off x="685800" y="1143000"/>
-            <a:ext cx="5484960" cy="3084840"/>
+            <a:ext cx="5484240" cy="3084120"/>
           </a:xfrm>
           <a:prstGeom prst="rect">
             <a:avLst/>
@@ -2339,7 +2339,7 @@
         <p:spPr>
           <a:xfrm>
             <a:off x="685800" y="4400640"/>
-            <a:ext cx="5484960" cy="3598920"/>
+            <a:ext cx="5484240" cy="3598200"/>
           </a:xfrm>
           <a:prstGeom prst="rect">
             <a:avLst/>
@@ -2381,7 +2381,7 @@
         <p:spPr>
           <a:xfrm>
             <a:off x="3884760" y="8685360"/>
-            <a:ext cx="2970360" cy="457200"/>
+            <a:ext cx="2969640" cy="456480"/>
           </a:xfrm>
           <a:prstGeom prst="rect">
             <a:avLst/>
@@ -2425,7 +2425,7 @@
                 <a:tab pos="0" algn="l"/>
               </a:tabLst>
             </a:pPr>
-            <a:fld id="{A36E4481-5D66-4F90-A9B2-DF10BD13BC55}" type="slidenum">
+            <a:fld id="{2507AB16-17F3-46AA-B7B8-BF70E0018974}" type="slidenum">
               <a:rPr lang="en-US" sz="1200" b="0" u="none" strike="noStrike">
                 <a:solidFill>
                   <a:schemeClr val="dk1"/>
@@ -2483,7 +2483,7 @@
         <p:spPr>
           <a:xfrm>
             <a:off x="685800" y="1143000"/>
-            <a:ext cx="5484960" cy="3084840"/>
+            <a:ext cx="5484240" cy="3084120"/>
           </a:xfrm>
           <a:prstGeom prst="rect">
             <a:avLst/>
@@ -2506,7 +2506,7 @@
         <p:spPr>
           <a:xfrm>
             <a:off x="685800" y="4400640"/>
-            <a:ext cx="5484960" cy="3598920"/>
+            <a:ext cx="5484240" cy="3598200"/>
           </a:xfrm>
           <a:prstGeom prst="rect">
             <a:avLst/>
@@ -2548,7 +2548,7 @@
         <p:spPr>
           <a:xfrm>
             <a:off x="3884760" y="8685360"/>
-            <a:ext cx="2970360" cy="457200"/>
+            <a:ext cx="2969640" cy="456480"/>
           </a:xfrm>
           <a:prstGeom prst="rect">
             <a:avLst/>
@@ -2592,7 +2592,7 @@
                 <a:tab pos="0" algn="l"/>
               </a:tabLst>
             </a:pPr>
-            <a:fld id="{C88F4A8F-4761-46A7-B5A6-BB4B7E671A1D}" type="slidenum">
+            <a:fld id="{A75AD067-0FCF-47D1-985C-6D90C404FDD9}" type="slidenum">
               <a:rPr lang="en-US" sz="1200" b="0" u="none" strike="noStrike">
                 <a:solidFill>
                   <a:schemeClr val="dk1"/>
@@ -2650,7 +2650,7 @@
         <p:spPr>
           <a:xfrm>
             <a:off x="685800" y="1143000"/>
-            <a:ext cx="5484960" cy="3084840"/>
+            <a:ext cx="5484240" cy="3084120"/>
           </a:xfrm>
           <a:prstGeom prst="rect">
             <a:avLst/>
@@ -2673,7 +2673,7 @@
         <p:spPr>
           <a:xfrm>
             <a:off x="685800" y="4400640"/>
-            <a:ext cx="5484960" cy="3598920"/>
+            <a:ext cx="5484240" cy="3598200"/>
           </a:xfrm>
           <a:prstGeom prst="rect">
             <a:avLst/>
@@ -2715,7 +2715,7 @@
         <p:spPr>
           <a:xfrm>
             <a:off x="3884760" y="8685360"/>
-            <a:ext cx="2970360" cy="457200"/>
+            <a:ext cx="2969640" cy="456480"/>
           </a:xfrm>
           <a:prstGeom prst="rect">
             <a:avLst/>
@@ -2759,7 +2759,7 @@
                 <a:tab pos="0" algn="l"/>
               </a:tabLst>
             </a:pPr>
-            <a:fld id="{0DB93BFE-556D-4AD3-83A4-AFE68C83886A}" type="slidenum">
+            <a:fld id="{F9EC97D8-DCFC-45CC-8710-FF3243017F21}" type="slidenum">
               <a:rPr lang="en-US" sz="1200" b="0" u="none" strike="noStrike">
                 <a:solidFill>
                   <a:schemeClr val="dk1"/>
@@ -2817,7 +2817,7 @@
         <p:spPr>
           <a:xfrm>
             <a:off x="685800" y="1143000"/>
-            <a:ext cx="5484960" cy="3084840"/>
+            <a:ext cx="5484240" cy="3084120"/>
           </a:xfrm>
           <a:prstGeom prst="rect">
             <a:avLst/>
@@ -2840,7 +2840,7 @@
         <p:spPr>
           <a:xfrm>
             <a:off x="685800" y="4400640"/>
-            <a:ext cx="5484960" cy="3598920"/>
+            <a:ext cx="5484240" cy="3598200"/>
           </a:xfrm>
           <a:prstGeom prst="rect">
             <a:avLst/>
@@ -2882,7 +2882,7 @@
         <p:spPr>
           <a:xfrm>
             <a:off x="3884760" y="8685360"/>
-            <a:ext cx="2970360" cy="457200"/>
+            <a:ext cx="2969640" cy="456480"/>
           </a:xfrm>
           <a:prstGeom prst="rect">
             <a:avLst/>
@@ -2926,7 +2926,7 @@
                 <a:tab pos="0" algn="l"/>
               </a:tabLst>
             </a:pPr>
-            <a:fld id="{0EA42A84-61E1-4619-879F-CF23CB2EB675}" type="slidenum">
+            <a:fld id="{A67BBFFA-CD58-4A87-8A0F-D96267E3A4BA}" type="slidenum">
               <a:rPr lang="en-US" sz="1200" b="0" u="none" strike="noStrike">
                 <a:solidFill>
                   <a:schemeClr val="dk1"/>
@@ -2984,7 +2984,7 @@
         <p:spPr>
           <a:xfrm>
             <a:off x="685800" y="1143000"/>
-            <a:ext cx="5484960" cy="3084840"/>
+            <a:ext cx="5484240" cy="3084120"/>
           </a:xfrm>
           <a:prstGeom prst="rect">
             <a:avLst/>
@@ -3007,7 +3007,7 @@
         <p:spPr>
           <a:xfrm>
             <a:off x="685800" y="4400640"/>
-            <a:ext cx="5484960" cy="3598920"/>
+            <a:ext cx="5484240" cy="3598200"/>
           </a:xfrm>
           <a:prstGeom prst="rect">
             <a:avLst/>
@@ -3049,7 +3049,7 @@
         <p:spPr>
           <a:xfrm>
             <a:off x="3884760" y="8685360"/>
-            <a:ext cx="2970360" cy="457200"/>
+            <a:ext cx="2969640" cy="456480"/>
           </a:xfrm>
           <a:prstGeom prst="rect">
             <a:avLst/>
@@ -3093,7 +3093,7 @@
                 <a:tab pos="0" algn="l"/>
               </a:tabLst>
             </a:pPr>
-            <a:fld id="{204675B0-A419-43DF-8207-956A60C6D6B1}" type="slidenum">
+            <a:fld id="{C2F3D5B2-C3AB-4842-BFE7-3FCE68DA2068}" type="slidenum">
               <a:rPr lang="en-US" sz="1200" b="0" u="none" strike="noStrike">
                 <a:solidFill>
                   <a:schemeClr val="dk1"/>
@@ -3151,7 +3151,7 @@
         <p:spPr>
           <a:xfrm>
             <a:off x="685800" y="1143000"/>
-            <a:ext cx="5484960" cy="3084840"/>
+            <a:ext cx="5484240" cy="3084120"/>
           </a:xfrm>
           <a:prstGeom prst="rect">
             <a:avLst/>
@@ -3174,7 +3174,7 @@
         <p:spPr>
           <a:xfrm>
             <a:off x="685800" y="4400640"/>
-            <a:ext cx="5484960" cy="3598920"/>
+            <a:ext cx="5484240" cy="3598200"/>
           </a:xfrm>
           <a:prstGeom prst="rect">
             <a:avLst/>
@@ -3216,7 +3216,7 @@
         <p:spPr>
           <a:xfrm>
             <a:off x="3884760" y="8685360"/>
-            <a:ext cx="2970360" cy="457200"/>
+            <a:ext cx="2969640" cy="456480"/>
           </a:xfrm>
           <a:prstGeom prst="rect">
             <a:avLst/>
@@ -3260,7 +3260,7 @@
                 <a:tab pos="0" algn="l"/>
               </a:tabLst>
             </a:pPr>
-            <a:fld id="{09C049BF-41BC-4F1F-A969-3C5CCCDC1693}" type="slidenum">
+            <a:fld id="{9F63E815-E105-43B5-B789-B499C4270572}" type="slidenum">
               <a:rPr lang="en-US" sz="1200" b="0" u="none" strike="noStrike">
                 <a:solidFill>
                   <a:schemeClr val="dk1"/>
@@ -3318,7 +3318,7 @@
         <p:spPr>
           <a:xfrm>
             <a:off x="685800" y="1143000"/>
-            <a:ext cx="5484960" cy="3084840"/>
+            <a:ext cx="5484240" cy="3084120"/>
           </a:xfrm>
           <a:prstGeom prst="rect">
             <a:avLst/>
@@ -3341,7 +3341,7 @@
         <p:spPr>
           <a:xfrm>
             <a:off x="685800" y="4400640"/>
-            <a:ext cx="5484960" cy="3598920"/>
+            <a:ext cx="5484240" cy="3598200"/>
           </a:xfrm>
           <a:prstGeom prst="rect">
             <a:avLst/>
@@ -3383,7 +3383,7 @@
         <p:spPr>
           <a:xfrm>
             <a:off x="3884760" y="8685360"/>
-            <a:ext cx="2970360" cy="457200"/>
+            <a:ext cx="2969640" cy="456480"/>
           </a:xfrm>
           <a:prstGeom prst="rect">
             <a:avLst/>
@@ -3427,7 +3427,7 @@
                 <a:tab pos="0" algn="l"/>
               </a:tabLst>
             </a:pPr>
-            <a:fld id="{6CD32461-91E9-4841-A404-F08794778536}" type="slidenum">
+            <a:fld id="{2F8C6783-14A1-4AC4-8BEC-C5847615FE12}" type="slidenum">
               <a:rPr lang="en-US" sz="1200" b="0" u="none" strike="noStrike">
                 <a:solidFill>
                   <a:schemeClr val="dk1"/>
@@ -3485,7 +3485,7 @@
         <p:spPr>
           <a:xfrm>
             <a:off x="685800" y="1143000"/>
-            <a:ext cx="5484960" cy="3084840"/>
+            <a:ext cx="5484240" cy="3084120"/>
           </a:xfrm>
           <a:prstGeom prst="rect">
             <a:avLst/>
@@ -3508,7 +3508,7 @@
         <p:spPr>
           <a:xfrm>
             <a:off x="685800" y="4400640"/>
-            <a:ext cx="5484960" cy="3598920"/>
+            <a:ext cx="5484240" cy="3598200"/>
           </a:xfrm>
           <a:prstGeom prst="rect">
             <a:avLst/>
@@ -3550,7 +3550,7 @@
         <p:spPr>
           <a:xfrm>
             <a:off x="3884760" y="8685360"/>
-            <a:ext cx="2970360" cy="457200"/>
+            <a:ext cx="2969640" cy="456480"/>
           </a:xfrm>
           <a:prstGeom prst="rect">
             <a:avLst/>
@@ -3594,7 +3594,7 @@
                 <a:tab pos="0" algn="l"/>
               </a:tabLst>
             </a:pPr>
-            <a:fld id="{7DE6FCCE-4C0E-4262-900B-A26346C9CEA4}" type="slidenum">
+            <a:fld id="{7D6DCB72-7241-42F9-9CA5-18EA70342ED2}" type="slidenum">
               <a:rPr lang="en-US" sz="1200" b="0" u="none" strike="noStrike">
                 <a:solidFill>
                   <a:schemeClr val="dk1"/>
@@ -3652,7 +3652,7 @@
         <p:spPr>
           <a:xfrm>
             <a:off x="685800" y="1143000"/>
-            <a:ext cx="5484960" cy="3084840"/>
+            <a:ext cx="5484240" cy="3084120"/>
           </a:xfrm>
           <a:prstGeom prst="rect">
             <a:avLst/>
@@ -3675,7 +3675,7 @@
         <p:spPr>
           <a:xfrm>
             <a:off x="685800" y="4400640"/>
-            <a:ext cx="5484960" cy="3598920"/>
+            <a:ext cx="5484240" cy="3598200"/>
           </a:xfrm>
           <a:prstGeom prst="rect">
             <a:avLst/>
@@ -3717,7 +3717,7 @@
         <p:spPr>
           <a:xfrm>
             <a:off x="3884760" y="8685360"/>
-            <a:ext cx="2970360" cy="457200"/>
+            <a:ext cx="2969640" cy="456480"/>
           </a:xfrm>
           <a:prstGeom prst="rect">
             <a:avLst/>
@@ -3761,7 +3761,7 @@
                 <a:tab pos="0" algn="l"/>
               </a:tabLst>
             </a:pPr>
-            <a:fld id="{532AA2C3-7ED5-4EF2-B8D6-72D0E1F3E1AF}" type="slidenum">
+            <a:fld id="{14EB7C7C-F40F-4823-8A77-F9DA07F57F73}" type="slidenum">
               <a:rPr lang="en-US" sz="1200" b="0" u="none" strike="noStrike">
                 <a:solidFill>
                   <a:schemeClr val="dk1"/>
@@ -3819,7 +3819,7 @@
         <p:spPr>
           <a:xfrm>
             <a:off x="685800" y="1143000"/>
-            <a:ext cx="5484960" cy="3084840"/>
+            <a:ext cx="5484240" cy="3084120"/>
           </a:xfrm>
           <a:prstGeom prst="rect">
             <a:avLst/>
@@ -3842,7 +3842,7 @@
         <p:spPr>
           <a:xfrm>
             <a:off x="685800" y="4400640"/>
-            <a:ext cx="5484960" cy="3598920"/>
+            <a:ext cx="5484240" cy="3598200"/>
           </a:xfrm>
           <a:prstGeom prst="rect">
             <a:avLst/>
@@ -3884,7 +3884,7 @@
         <p:spPr>
           <a:xfrm>
             <a:off x="3884760" y="8685360"/>
-            <a:ext cx="2970360" cy="457200"/>
+            <a:ext cx="2969640" cy="456480"/>
           </a:xfrm>
           <a:prstGeom prst="rect">
             <a:avLst/>
@@ -3928,7 +3928,7 @@
                 <a:tab pos="0" algn="l"/>
               </a:tabLst>
             </a:pPr>
-            <a:fld id="{7A11806C-7524-47AA-B13D-215541F95F0E}" type="slidenum">
+            <a:fld id="{1EEB8051-D8B4-4F77-A837-02405DE414C8}" type="slidenum">
               <a:rPr lang="en-US" sz="1200" b="0" u="none" strike="noStrike">
                 <a:solidFill>
                   <a:schemeClr val="dk1"/>
@@ -3986,7 +3986,7 @@
         <p:spPr>
           <a:xfrm>
             <a:off x="685800" y="1143000"/>
-            <a:ext cx="5484960" cy="3084840"/>
+            <a:ext cx="5484240" cy="3084120"/>
           </a:xfrm>
           <a:prstGeom prst="rect">
             <a:avLst/>
@@ -4009,7 +4009,7 @@
         <p:spPr>
           <a:xfrm>
             <a:off x="685800" y="4400640"/>
-            <a:ext cx="5484960" cy="3598920"/>
+            <a:ext cx="5484240" cy="3598200"/>
           </a:xfrm>
           <a:prstGeom prst="rect">
             <a:avLst/>
@@ -4051,7 +4051,7 @@
         <p:spPr>
           <a:xfrm>
             <a:off x="3884760" y="8685360"/>
-            <a:ext cx="2970360" cy="457200"/>
+            <a:ext cx="2969640" cy="456480"/>
           </a:xfrm>
           <a:prstGeom prst="rect">
             <a:avLst/>
@@ -4095,7 +4095,7 @@
                 <a:tab pos="0" algn="l"/>
               </a:tabLst>
             </a:pPr>
-            <a:fld id="{9B5232A4-2BF7-4D7C-8798-C9B8CC9FCAB5}" type="slidenum">
+            <a:fld id="{94C7E060-B293-4886-B00E-F86966952F12}" type="slidenum">
               <a:rPr lang="en-US" sz="1200" b="0" u="none" strike="noStrike">
                 <a:solidFill>
                   <a:schemeClr val="dk1"/>
@@ -4153,7 +4153,7 @@
         <p:spPr>
           <a:xfrm>
             <a:off x="685800" y="1143000"/>
-            <a:ext cx="5484960" cy="3084840"/>
+            <a:ext cx="5484240" cy="3084120"/>
           </a:xfrm>
           <a:prstGeom prst="rect">
             <a:avLst/>
@@ -4176,7 +4176,7 @@
         <p:spPr>
           <a:xfrm>
             <a:off x="685800" y="4400640"/>
-            <a:ext cx="5484960" cy="3598920"/>
+            <a:ext cx="5484240" cy="3598200"/>
           </a:xfrm>
           <a:prstGeom prst="rect">
             <a:avLst/>
@@ -4218,7 +4218,7 @@
         <p:spPr>
           <a:xfrm>
             <a:off x="3884760" y="8685360"/>
-            <a:ext cx="2970360" cy="457200"/>
+            <a:ext cx="2969640" cy="456480"/>
           </a:xfrm>
           <a:prstGeom prst="rect">
             <a:avLst/>
@@ -4262,7 +4262,7 @@
                 <a:tab pos="0" algn="l"/>
               </a:tabLst>
             </a:pPr>
-            <a:fld id="{0EBD80DA-F901-4E4A-8265-7DA34F33A22A}" type="slidenum">
+            <a:fld id="{F1F6A315-423B-4EFE-B312-21B38E835D0B}" type="slidenum">
               <a:rPr lang="en-US" sz="1200" b="0" u="none" strike="noStrike">
                 <a:solidFill>
                   <a:schemeClr val="dk1"/>
@@ -4320,7 +4320,7 @@
         <p:spPr>
           <a:xfrm>
             <a:off x="685800" y="1143000"/>
-            <a:ext cx="5484960" cy="3084840"/>
+            <a:ext cx="5484240" cy="3084120"/>
           </a:xfrm>
           <a:prstGeom prst="rect">
             <a:avLst/>
@@ -4343,7 +4343,7 @@
         <p:spPr>
           <a:xfrm>
             <a:off x="685800" y="4400640"/>
-            <a:ext cx="5484960" cy="3598920"/>
+            <a:ext cx="5484240" cy="3598200"/>
           </a:xfrm>
           <a:prstGeom prst="rect">
             <a:avLst/>
@@ -4385,7 +4385,7 @@
         <p:spPr>
           <a:xfrm>
             <a:off x="3884760" y="8685360"/>
-            <a:ext cx="2970360" cy="457200"/>
+            <a:ext cx="2969640" cy="456480"/>
           </a:xfrm>
           <a:prstGeom prst="rect">
             <a:avLst/>
@@ -4429,7 +4429,7 @@
                 <a:tab pos="0" algn="l"/>
               </a:tabLst>
             </a:pPr>
-            <a:fld id="{CDFD1942-D870-4FB5-AA40-1390041BE497}" type="slidenum">
+            <a:fld id="{E78114F5-9AFA-4911-A070-AC8E72057CD3}" type="slidenum">
               <a:rPr lang="en-US" sz="1200" b="0" u="none" strike="noStrike">
                 <a:solidFill>
                   <a:schemeClr val="dk1"/>
@@ -4487,7 +4487,7 @@
         <p:spPr>
           <a:xfrm>
             <a:off x="685800" y="1143000"/>
-            <a:ext cx="5484960" cy="3084840"/>
+            <a:ext cx="5484240" cy="3084120"/>
           </a:xfrm>
           <a:prstGeom prst="rect">
             <a:avLst/>
@@ -4510,7 +4510,7 @@
         <p:spPr>
           <a:xfrm>
             <a:off x="685800" y="4400640"/>
-            <a:ext cx="5484960" cy="3598920"/>
+            <a:ext cx="5484240" cy="3598200"/>
           </a:xfrm>
           <a:prstGeom prst="rect">
             <a:avLst/>
@@ -4552,7 +4552,7 @@
         <p:spPr>
           <a:xfrm>
             <a:off x="3884760" y="8685360"/>
-            <a:ext cx="2970360" cy="457200"/>
+            <a:ext cx="2969640" cy="456480"/>
           </a:xfrm>
           <a:prstGeom prst="rect">
             <a:avLst/>
@@ -4596,7 +4596,7 @@
                 <a:tab pos="0" algn="l"/>
               </a:tabLst>
             </a:pPr>
-            <a:fld id="{6D81A88A-F0EC-426B-BC5B-994A89BCB58B}" type="slidenum">
+            <a:fld id="{4C17C5CE-4C3A-477F-9407-025E73158EB8}" type="slidenum">
               <a:rPr lang="en-US" sz="1200" b="0" u="none" strike="noStrike">
                 <a:solidFill>
                   <a:schemeClr val="dk1"/>
@@ -4654,7 +4654,7 @@
         <p:spPr>
           <a:xfrm>
             <a:off x="685800" y="1143000"/>
-            <a:ext cx="5484960" cy="3084840"/>
+            <a:ext cx="5484240" cy="3084120"/>
           </a:xfrm>
           <a:prstGeom prst="rect">
             <a:avLst/>
@@ -4677,7 +4677,7 @@
         <p:spPr>
           <a:xfrm>
             <a:off x="685800" y="4400640"/>
-            <a:ext cx="5484960" cy="3598920"/>
+            <a:ext cx="5484240" cy="3598200"/>
           </a:xfrm>
           <a:prstGeom prst="rect">
             <a:avLst/>
@@ -4719,7 +4719,7 @@
         <p:spPr>
           <a:xfrm>
             <a:off x="3884760" y="8685360"/>
-            <a:ext cx="2970360" cy="457200"/>
+            <a:ext cx="2969640" cy="456480"/>
           </a:xfrm>
           <a:prstGeom prst="rect">
             <a:avLst/>
@@ -4763,7 +4763,7 @@
                 <a:tab pos="0" algn="l"/>
               </a:tabLst>
             </a:pPr>
-            <a:fld id="{EB1999AC-D012-479C-8F04-B95ABD803D33}" type="slidenum">
+            <a:fld id="{21A101FA-C8DE-4A04-AEBC-876828A89B65}" type="slidenum">
               <a:rPr lang="en-US" sz="1200" b="0" u="none" strike="noStrike">
                 <a:solidFill>
                   <a:schemeClr val="dk1"/>
@@ -4821,7 +4821,7 @@
         <p:spPr>
           <a:xfrm>
             <a:off x="685800" y="1143000"/>
-            <a:ext cx="5484960" cy="3084840"/>
+            <a:ext cx="5484240" cy="3084120"/>
           </a:xfrm>
           <a:prstGeom prst="rect">
             <a:avLst/>
@@ -4844,7 +4844,7 @@
         <p:spPr>
           <a:xfrm>
             <a:off x="685800" y="4400640"/>
-            <a:ext cx="5484960" cy="3598920"/>
+            <a:ext cx="5484240" cy="3598200"/>
           </a:xfrm>
           <a:prstGeom prst="rect">
             <a:avLst/>
@@ -4886,7 +4886,7 @@
         <p:spPr>
           <a:xfrm>
             <a:off x="3884760" y="8685360"/>
-            <a:ext cx="2970360" cy="457200"/>
+            <a:ext cx="2969640" cy="456480"/>
           </a:xfrm>
           <a:prstGeom prst="rect">
             <a:avLst/>
@@ -4930,7 +4930,7 @@
                 <a:tab pos="0" algn="l"/>
               </a:tabLst>
             </a:pPr>
-            <a:fld id="{411F6C60-BF26-4792-99A1-BE90B402B235}" type="slidenum">
+            <a:fld id="{DFC8FA80-824B-4D6B-A57F-F77B53FA4CE4}" type="slidenum">
               <a:rPr lang="en-US" sz="1200" b="0" u="none" strike="noStrike">
                 <a:solidFill>
                   <a:schemeClr val="dk1"/>
@@ -4988,7 +4988,7 @@
         <p:spPr>
           <a:xfrm>
             <a:off x="685800" y="1143000"/>
-            <a:ext cx="5484960" cy="3084840"/>
+            <a:ext cx="5484240" cy="3084120"/>
           </a:xfrm>
           <a:prstGeom prst="rect">
             <a:avLst/>
@@ -5011,7 +5011,7 @@
         <p:spPr>
           <a:xfrm>
             <a:off x="685800" y="4400640"/>
-            <a:ext cx="5484960" cy="3598920"/>
+            <a:ext cx="5484240" cy="3598200"/>
           </a:xfrm>
           <a:prstGeom prst="rect">
             <a:avLst/>
@@ -5053,7 +5053,7 @@
         <p:spPr>
           <a:xfrm>
             <a:off x="3884760" y="8685360"/>
-            <a:ext cx="2970360" cy="457200"/>
+            <a:ext cx="2969640" cy="456480"/>
           </a:xfrm>
           <a:prstGeom prst="rect">
             <a:avLst/>
@@ -5097,7 +5097,7 @@
                 <a:tab pos="0" algn="l"/>
               </a:tabLst>
             </a:pPr>
-            <a:fld id="{84DFAA4F-0126-4D83-9C73-1D818F93D521}" type="slidenum">
+            <a:fld id="{C139CCA9-ECA9-4B0A-86FB-9DD49DD2B0B8}" type="slidenum">
               <a:rPr lang="en-US" sz="1200" b="0" u="none" strike="noStrike">
                 <a:solidFill>
                   <a:schemeClr val="dk1"/>
@@ -5155,7 +5155,7 @@
         <p:spPr>
           <a:xfrm>
             <a:off x="685800" y="1143000"/>
-            <a:ext cx="5484960" cy="3084840"/>
+            <a:ext cx="5484240" cy="3084120"/>
           </a:xfrm>
           <a:prstGeom prst="rect">
             <a:avLst/>
@@ -5178,7 +5178,7 @@
         <p:spPr>
           <a:xfrm>
             <a:off x="685800" y="4400640"/>
-            <a:ext cx="5484960" cy="3598920"/>
+            <a:ext cx="5484240" cy="3598200"/>
           </a:xfrm>
           <a:prstGeom prst="rect">
             <a:avLst/>
@@ -5220,7 +5220,7 @@
         <p:spPr>
           <a:xfrm>
             <a:off x="3884760" y="8685360"/>
-            <a:ext cx="2970360" cy="457200"/>
+            <a:ext cx="2969640" cy="456480"/>
           </a:xfrm>
           <a:prstGeom prst="rect">
             <a:avLst/>
@@ -5264,7 +5264,7 @@
                 <a:tab pos="0" algn="l"/>
               </a:tabLst>
             </a:pPr>
-            <a:fld id="{E44D2A4B-FC19-4415-8978-923E73287F32}" type="slidenum">
+            <a:fld id="{0F7B3032-541B-4898-AD52-5AE6D21A9D3D}" type="slidenum">
               <a:rPr lang="en-US" sz="1200" b="0" u="none" strike="noStrike">
                 <a:solidFill>
                   <a:schemeClr val="dk1"/>
@@ -5322,7 +5322,7 @@
         <p:spPr>
           <a:xfrm>
             <a:off x="685800" y="1143000"/>
-            <a:ext cx="5484960" cy="3084840"/>
+            <a:ext cx="5484240" cy="3084120"/>
           </a:xfrm>
           <a:prstGeom prst="rect">
             <a:avLst/>
@@ -5345,7 +5345,7 @@
         <p:spPr>
           <a:xfrm>
             <a:off x="685800" y="4400640"/>
-            <a:ext cx="5484960" cy="3598920"/>
+            <a:ext cx="5484240" cy="3598200"/>
           </a:xfrm>
           <a:prstGeom prst="rect">
             <a:avLst/>
@@ -5387,7 +5387,7 @@
         <p:spPr>
           <a:xfrm>
             <a:off x="3884760" y="8685360"/>
-            <a:ext cx="2970360" cy="457200"/>
+            <a:ext cx="2969640" cy="456480"/>
           </a:xfrm>
           <a:prstGeom prst="rect">
             <a:avLst/>
@@ -5431,7 +5431,7 @@
                 <a:tab pos="0" algn="l"/>
               </a:tabLst>
             </a:pPr>
-            <a:fld id="{89106B04-3B47-4CE1-B486-8FC867BBA3F6}" type="slidenum">
+            <a:fld id="{2CF390CD-C5BF-456F-81B5-95F98C9F8170}" type="slidenum">
               <a:rPr lang="en-US" sz="1200" b="0" u="none" strike="noStrike">
                 <a:solidFill>
                   <a:schemeClr val="dk1"/>
@@ -5489,7 +5489,7 @@
         <p:spPr>
           <a:xfrm>
             <a:off x="685800" y="1143000"/>
-            <a:ext cx="5484960" cy="3084840"/>
+            <a:ext cx="5484240" cy="3084120"/>
           </a:xfrm>
           <a:prstGeom prst="rect">
             <a:avLst/>
@@ -5512,7 +5512,7 @@
         <p:spPr>
           <a:xfrm>
             <a:off x="685800" y="4400640"/>
-            <a:ext cx="5484960" cy="3598920"/>
+            <a:ext cx="5484240" cy="3598200"/>
           </a:xfrm>
           <a:prstGeom prst="rect">
             <a:avLst/>
@@ -5554,7 +5554,7 @@
         <p:spPr>
           <a:xfrm>
             <a:off x="3884760" y="8685360"/>
-            <a:ext cx="2970360" cy="457200"/>
+            <a:ext cx="2969640" cy="456480"/>
           </a:xfrm>
           <a:prstGeom prst="rect">
             <a:avLst/>
@@ -5598,7 +5598,7 @@
                 <a:tab pos="0" algn="l"/>
               </a:tabLst>
             </a:pPr>
-            <a:fld id="{E742595A-28D0-41AC-A212-48DEC5882E92}" type="slidenum">
+            <a:fld id="{B11D91D4-E3C1-4073-84F7-A6A8ED68F57D}" type="slidenum">
               <a:rPr lang="en-US" sz="1200" b="0" u="none" strike="noStrike">
                 <a:solidFill>
                   <a:schemeClr val="dk1"/>
@@ -5656,7 +5656,7 @@
         <p:spPr>
           <a:xfrm>
             <a:off x="685800" y="1143000"/>
-            <a:ext cx="5484960" cy="3084840"/>
+            <a:ext cx="5484240" cy="3084120"/>
           </a:xfrm>
           <a:prstGeom prst="rect">
             <a:avLst/>
@@ -5679,7 +5679,7 @@
         <p:spPr>
           <a:xfrm>
             <a:off x="685800" y="4400640"/>
-            <a:ext cx="5484960" cy="3598920"/>
+            <a:ext cx="5484240" cy="3598200"/>
           </a:xfrm>
           <a:prstGeom prst="rect">
             <a:avLst/>
@@ -5721,7 +5721,7 @@
         <p:spPr>
           <a:xfrm>
             <a:off x="3884760" y="8685360"/>
-            <a:ext cx="2970360" cy="457200"/>
+            <a:ext cx="2969640" cy="456480"/>
           </a:xfrm>
           <a:prstGeom prst="rect">
             <a:avLst/>
@@ -5765,7 +5765,7 @@
                 <a:tab pos="0" algn="l"/>
               </a:tabLst>
             </a:pPr>
-            <a:fld id="{C9FFA3E2-5608-4F54-80F2-B26F7D7F7E78}" type="slidenum">
+            <a:fld id="{A4F0B2AD-FC00-4246-BAD1-F33B241C8F08}" type="slidenum">
               <a:rPr lang="en-US" sz="1200" b="0" u="none" strike="noStrike">
                 <a:solidFill>
                   <a:schemeClr val="dk1"/>
@@ -5823,7 +5823,7 @@
         <p:spPr>
           <a:xfrm>
             <a:off x="685800" y="1143000"/>
-            <a:ext cx="5484960" cy="3084840"/>
+            <a:ext cx="5484240" cy="3084120"/>
           </a:xfrm>
           <a:prstGeom prst="rect">
             <a:avLst/>
@@ -5846,7 +5846,7 @@
         <p:spPr>
           <a:xfrm>
             <a:off x="685800" y="4400640"/>
-            <a:ext cx="5484960" cy="3598920"/>
+            <a:ext cx="5484240" cy="3598200"/>
           </a:xfrm>
           <a:prstGeom prst="rect">
             <a:avLst/>
@@ -5888,7 +5888,7 @@
         <p:spPr>
           <a:xfrm>
             <a:off x="3884760" y="8685360"/>
-            <a:ext cx="2970360" cy="457200"/>
+            <a:ext cx="2969640" cy="456480"/>
           </a:xfrm>
           <a:prstGeom prst="rect">
             <a:avLst/>
@@ -5932,7 +5932,7 @@
                 <a:tab pos="0" algn="l"/>
               </a:tabLst>
             </a:pPr>
-            <a:fld id="{0F40757B-FF28-430D-A4B5-55609D8065A3}" type="slidenum">
+            <a:fld id="{05B593B2-6717-450D-A320-330D74D8A66D}" type="slidenum">
               <a:rPr lang="en-US" sz="1200" b="0" u="none" strike="noStrike">
                 <a:solidFill>
                   <a:schemeClr val="dk1"/>
@@ -5990,7 +5990,7 @@
         <p:spPr>
           <a:xfrm>
             <a:off x="685800" y="1143000"/>
-            <a:ext cx="5484960" cy="3084840"/>
+            <a:ext cx="5484240" cy="3084120"/>
           </a:xfrm>
           <a:prstGeom prst="rect">
             <a:avLst/>
@@ -6013,7 +6013,7 @@
         <p:spPr>
           <a:xfrm>
             <a:off x="685800" y="4400640"/>
-            <a:ext cx="5484960" cy="3598920"/>
+            <a:ext cx="5484240" cy="3598200"/>
           </a:xfrm>
           <a:prstGeom prst="rect">
             <a:avLst/>
@@ -6055,7 +6055,7 @@
         <p:spPr>
           <a:xfrm>
             <a:off x="3884760" y="8685360"/>
-            <a:ext cx="2970360" cy="457200"/>
+            <a:ext cx="2969640" cy="456480"/>
           </a:xfrm>
           <a:prstGeom prst="rect">
             <a:avLst/>
@@ -6099,7 +6099,7 @@
                 <a:tab pos="0" algn="l"/>
               </a:tabLst>
             </a:pPr>
-            <a:fld id="{AE69252B-8307-4F09-A1D7-F7F5CBAAA53D}" type="slidenum">
+            <a:fld id="{0FFA6DD4-7710-428C-BCE1-F6684FC8995D}" type="slidenum">
               <a:rPr lang="en-US" sz="1200" b="0" u="none" strike="noStrike">
                 <a:solidFill>
                   <a:schemeClr val="dk1"/>
@@ -6157,7 +6157,7 @@
         <p:spPr>
           <a:xfrm>
             <a:off x="685800" y="1143000"/>
-            <a:ext cx="5484960" cy="3084840"/>
+            <a:ext cx="5484240" cy="3084120"/>
           </a:xfrm>
           <a:prstGeom prst="rect">
             <a:avLst/>
@@ -6180,7 +6180,7 @@
         <p:spPr>
           <a:xfrm>
             <a:off x="685800" y="4400640"/>
-            <a:ext cx="5484960" cy="3598920"/>
+            <a:ext cx="5484240" cy="3598200"/>
           </a:xfrm>
           <a:prstGeom prst="rect">
             <a:avLst/>
@@ -6222,7 +6222,7 @@
         <p:spPr>
           <a:xfrm>
             <a:off x="3884760" y="8685360"/>
-            <a:ext cx="2970360" cy="457200"/>
+            <a:ext cx="2969640" cy="456480"/>
           </a:xfrm>
           <a:prstGeom prst="rect">
             <a:avLst/>
@@ -6266,7 +6266,7 @@
                 <a:tab pos="0" algn="l"/>
               </a:tabLst>
             </a:pPr>
-            <a:fld id="{0DE82D65-CF3B-437B-B74C-631032A37206}" type="slidenum">
+            <a:fld id="{EC7B9E8E-D92D-4B54-BE62-4F11B2D048FD}" type="slidenum">
               <a:rPr lang="en-US" sz="1200" b="0" u="none" strike="noStrike">
                 <a:solidFill>
                   <a:schemeClr val="dk1"/>
@@ -6324,7 +6324,7 @@
         <p:spPr>
           <a:xfrm>
             <a:off x="685800" y="1143000"/>
-            <a:ext cx="5484960" cy="3084840"/>
+            <a:ext cx="5484240" cy="3084120"/>
           </a:xfrm>
           <a:prstGeom prst="rect">
             <a:avLst/>
@@ -6347,7 +6347,7 @@
         <p:spPr>
           <a:xfrm>
             <a:off x="685800" y="4400640"/>
-            <a:ext cx="5484960" cy="3598920"/>
+            <a:ext cx="5484240" cy="3598200"/>
           </a:xfrm>
           <a:prstGeom prst="rect">
             <a:avLst/>
@@ -6389,7 +6389,7 @@
         <p:spPr>
           <a:xfrm>
             <a:off x="3884760" y="8685360"/>
-            <a:ext cx="2970360" cy="457200"/>
+            <a:ext cx="2969640" cy="456480"/>
           </a:xfrm>
           <a:prstGeom prst="rect">
             <a:avLst/>
@@ -6433,7 +6433,7 @@
                 <a:tab pos="0" algn="l"/>
               </a:tabLst>
             </a:pPr>
-            <a:fld id="{0F708795-5AD2-4B29-B549-3CBB22568C1D}" type="slidenum">
+            <a:fld id="{5E08A3FE-DAB3-4F29-A05A-49AACBEE0D58}" type="slidenum">
               <a:rPr lang="en-US" sz="1200" b="0" u="none" strike="noStrike">
                 <a:solidFill>
                   <a:schemeClr val="dk1"/>
@@ -6491,7 +6491,7 @@
         <p:spPr>
           <a:xfrm>
             <a:off x="685800" y="1143000"/>
-            <a:ext cx="5484960" cy="3084840"/>
+            <a:ext cx="5484240" cy="3084120"/>
           </a:xfrm>
           <a:prstGeom prst="rect">
             <a:avLst/>
@@ -6514,7 +6514,7 @@
         <p:spPr>
           <a:xfrm>
             <a:off x="685800" y="4400640"/>
-            <a:ext cx="5484960" cy="3598920"/>
+            <a:ext cx="5484240" cy="3598200"/>
           </a:xfrm>
           <a:prstGeom prst="rect">
             <a:avLst/>
@@ -6556,7 +6556,7 @@
         <p:spPr>
           <a:xfrm>
             <a:off x="3884760" y="8685360"/>
-            <a:ext cx="2970360" cy="457200"/>
+            <a:ext cx="2969640" cy="456480"/>
           </a:xfrm>
           <a:prstGeom prst="rect">
             <a:avLst/>
@@ -6600,7 +6600,7 @@
                 <a:tab pos="0" algn="l"/>
               </a:tabLst>
             </a:pPr>
-            <a:fld id="{DC766740-6CC6-4AF9-9B90-C6C3EC9685B8}" type="slidenum">
+            <a:fld id="{2F2B3AC4-48CE-490A-AD03-9ABB1920DBE8}" type="slidenum">
               <a:rPr lang="en-US" sz="1200" b="0" u="none" strike="noStrike">
                 <a:solidFill>
                   <a:schemeClr val="dk1"/>
@@ -6658,7 +6658,7 @@
         <p:spPr>
           <a:xfrm>
             <a:off x="685800" y="1143000"/>
-            <a:ext cx="5484960" cy="3084840"/>
+            <a:ext cx="5484240" cy="3084120"/>
           </a:xfrm>
           <a:prstGeom prst="rect">
             <a:avLst/>
@@ -6681,7 +6681,7 @@
         <p:spPr>
           <a:xfrm>
             <a:off x="685800" y="4400640"/>
-            <a:ext cx="5484960" cy="3598920"/>
+            <a:ext cx="5484240" cy="3598200"/>
           </a:xfrm>
           <a:prstGeom prst="rect">
             <a:avLst/>
@@ -6723,7 +6723,7 @@
         <p:spPr>
           <a:xfrm>
             <a:off x="3884760" y="8685360"/>
-            <a:ext cx="2970360" cy="457200"/>
+            <a:ext cx="2969640" cy="456480"/>
           </a:xfrm>
           <a:prstGeom prst="rect">
             <a:avLst/>
@@ -6767,7 +6767,7 @@
                 <a:tab pos="0" algn="l"/>
               </a:tabLst>
             </a:pPr>
-            <a:fld id="{B5076D8B-D48E-4CCC-8407-6B92A9A49ABA}" type="slidenum">
+            <a:fld id="{14CF63EC-CCD5-4075-AF4E-13EE8A7D49E1}" type="slidenum">
               <a:rPr lang="en-US" sz="1200" b="0" u="none" strike="noStrike">
                 <a:solidFill>
                   <a:schemeClr val="dk1"/>
@@ -6825,7 +6825,7 @@
         <p:spPr>
           <a:xfrm>
             <a:off x="685800" y="1143000"/>
-            <a:ext cx="5484960" cy="3084840"/>
+            <a:ext cx="5484240" cy="3084120"/>
           </a:xfrm>
           <a:prstGeom prst="rect">
             <a:avLst/>
@@ -6848,7 +6848,7 @@
         <p:spPr>
           <a:xfrm>
             <a:off x="685800" y="4400640"/>
-            <a:ext cx="5484960" cy="3598920"/>
+            <a:ext cx="5484240" cy="3598200"/>
           </a:xfrm>
           <a:prstGeom prst="rect">
             <a:avLst/>
@@ -6890,7 +6890,7 @@
         <p:spPr>
           <a:xfrm>
             <a:off x="3884760" y="8685360"/>
-            <a:ext cx="2970360" cy="457200"/>
+            <a:ext cx="2969640" cy="456480"/>
           </a:xfrm>
           <a:prstGeom prst="rect">
             <a:avLst/>
@@ -6934,7 +6934,7 @@
                 <a:tab pos="0" algn="l"/>
               </a:tabLst>
             </a:pPr>
-            <a:fld id="{38ECC017-3162-4BA7-BA97-34F49387F49C}" type="slidenum">
+            <a:fld id="{A245CC7F-F7D8-4AAC-B5D8-ABE8A423E464}" type="slidenum">
               <a:rPr lang="en-US" sz="1200" b="0" u="none" strike="noStrike">
                 <a:solidFill>
                   <a:schemeClr val="dk1"/>
@@ -6992,7 +6992,7 @@
         <p:spPr>
           <a:xfrm>
             <a:off x="685800" y="1143000"/>
-            <a:ext cx="5484960" cy="3084840"/>
+            <a:ext cx="5484240" cy="3084120"/>
           </a:xfrm>
           <a:prstGeom prst="rect">
             <a:avLst/>
@@ -7015,7 +7015,7 @@
         <p:spPr>
           <a:xfrm>
             <a:off x="685800" y="4400640"/>
-            <a:ext cx="5484960" cy="3598920"/>
+            <a:ext cx="5484240" cy="3598200"/>
           </a:xfrm>
           <a:prstGeom prst="rect">
             <a:avLst/>
@@ -7057,7 +7057,7 @@
         <p:spPr>
           <a:xfrm>
             <a:off x="3884760" y="8685360"/>
-            <a:ext cx="2970360" cy="457200"/>
+            <a:ext cx="2969640" cy="456480"/>
           </a:xfrm>
           <a:prstGeom prst="rect">
             <a:avLst/>
@@ -7101,7 +7101,7 @@
                 <a:tab pos="0" algn="l"/>
               </a:tabLst>
             </a:pPr>
-            <a:fld id="{4C202CFD-EB11-424F-AE6D-73B99CE8A3F8}" type="slidenum">
+            <a:fld id="{41BC44A4-3973-4E93-A23D-4DA92BB0D6A7}" type="slidenum">
               <a:rPr lang="en-US" sz="1200" b="0" u="none" strike="noStrike">
                 <a:solidFill>
                   <a:schemeClr val="dk1"/>
@@ -7159,7 +7159,7 @@
         <p:spPr>
           <a:xfrm>
             <a:off x="685800" y="1143000"/>
-            <a:ext cx="5484960" cy="3084840"/>
+            <a:ext cx="5484240" cy="3084120"/>
           </a:xfrm>
           <a:prstGeom prst="rect">
             <a:avLst/>
@@ -7182,7 +7182,7 @@
         <p:spPr>
           <a:xfrm>
             <a:off x="685800" y="4400640"/>
-            <a:ext cx="5484960" cy="3598920"/>
+            <a:ext cx="5484240" cy="3598200"/>
           </a:xfrm>
           <a:prstGeom prst="rect">
             <a:avLst/>
@@ -7224,7 +7224,7 @@
         <p:spPr>
           <a:xfrm>
             <a:off x="3884760" y="8685360"/>
-            <a:ext cx="2970360" cy="457200"/>
+            <a:ext cx="2969640" cy="456480"/>
           </a:xfrm>
           <a:prstGeom prst="rect">
             <a:avLst/>
@@ -7268,7 +7268,7 @@
                 <a:tab pos="0" algn="l"/>
               </a:tabLst>
             </a:pPr>
-            <a:fld id="{475C99B0-B2F4-49AF-AA5E-48FA5FA141D8}" type="slidenum">
+            <a:fld id="{C8A21FD3-8D7A-47E3-A572-36CD6BA03C0C}" type="slidenum">
               <a:rPr lang="en-US" sz="1200" b="0" u="none" strike="noStrike">
                 <a:solidFill>
                   <a:schemeClr val="dk1"/>
@@ -7326,7 +7326,7 @@
         <p:spPr>
           <a:xfrm>
             <a:off x="685800" y="1143000"/>
-            <a:ext cx="5484960" cy="3084840"/>
+            <a:ext cx="5484240" cy="3084120"/>
           </a:xfrm>
           <a:prstGeom prst="rect">
             <a:avLst/>
@@ -7349,7 +7349,7 @@
         <p:spPr>
           <a:xfrm>
             <a:off x="685800" y="4400640"/>
-            <a:ext cx="5484960" cy="3598920"/>
+            <a:ext cx="5484240" cy="3598200"/>
           </a:xfrm>
           <a:prstGeom prst="rect">
             <a:avLst/>
@@ -7391,7 +7391,7 @@
         <p:spPr>
           <a:xfrm>
             <a:off x="3884760" y="8685360"/>
-            <a:ext cx="2970360" cy="457200"/>
+            <a:ext cx="2969640" cy="456480"/>
           </a:xfrm>
           <a:prstGeom prst="rect">
             <a:avLst/>
@@ -7435,7 +7435,7 @@
                 <a:tab pos="0" algn="l"/>
               </a:tabLst>
             </a:pPr>
-            <a:fld id="{B2A8CD22-6D44-4266-B6DD-6F8BDD8F4524}" type="slidenum">
+            <a:fld id="{72BFDC2C-72FD-4352-B6DC-77E23C8E43AD}" type="slidenum">
               <a:rPr lang="en-US" sz="1200" b="0" u="none" strike="noStrike">
                 <a:solidFill>
                   <a:schemeClr val="dk1"/>
@@ -7493,7 +7493,7 @@
         <p:spPr>
           <a:xfrm>
             <a:off x="685800" y="1143000"/>
-            <a:ext cx="5484960" cy="3084840"/>
+            <a:ext cx="5484240" cy="3084120"/>
           </a:xfrm>
           <a:prstGeom prst="rect">
             <a:avLst/>
@@ -7516,7 +7516,7 @@
         <p:spPr>
           <a:xfrm>
             <a:off x="685800" y="4400640"/>
-            <a:ext cx="5484960" cy="3598920"/>
+            <a:ext cx="5484240" cy="3598200"/>
           </a:xfrm>
           <a:prstGeom prst="rect">
             <a:avLst/>
@@ -7558,7 +7558,7 @@
         <p:spPr>
           <a:xfrm>
             <a:off x="3884760" y="8685360"/>
-            <a:ext cx="2970360" cy="457200"/>
+            <a:ext cx="2969640" cy="456480"/>
           </a:xfrm>
           <a:prstGeom prst="rect">
             <a:avLst/>
@@ -7602,7 +7602,7 @@
                 <a:tab pos="0" algn="l"/>
               </a:tabLst>
             </a:pPr>
-            <a:fld id="{AD9CEFBD-B06E-4EF3-B846-7E95B8323836}" type="slidenum">
+            <a:fld id="{8CC3B6ED-F11D-465D-BB04-8CD53CDBA663}" type="slidenum">
               <a:rPr lang="en-US" sz="1200" b="0" u="none" strike="noStrike">
                 <a:solidFill>
                   <a:schemeClr val="dk1"/>
@@ -7660,7 +7660,7 @@
         <p:spPr>
           <a:xfrm>
             <a:off x="685800" y="1143000"/>
-            <a:ext cx="5484960" cy="3084840"/>
+            <a:ext cx="5484240" cy="3084120"/>
           </a:xfrm>
           <a:prstGeom prst="rect">
             <a:avLst/>
@@ -7683,7 +7683,7 @@
         <p:spPr>
           <a:xfrm>
             <a:off x="685800" y="4400640"/>
-            <a:ext cx="5484960" cy="3598920"/>
+            <a:ext cx="5484240" cy="3598200"/>
           </a:xfrm>
           <a:prstGeom prst="rect">
             <a:avLst/>
@@ -7725,7 +7725,7 @@
         <p:spPr>
           <a:xfrm>
             <a:off x="3884760" y="8685360"/>
-            <a:ext cx="2970360" cy="457200"/>
+            <a:ext cx="2969640" cy="456480"/>
           </a:xfrm>
           <a:prstGeom prst="rect">
             <a:avLst/>
@@ -7769,7 +7769,7 @@
                 <a:tab pos="0" algn="l"/>
               </a:tabLst>
             </a:pPr>
-            <a:fld id="{A48A9670-4DB6-4FAB-B2D7-01C9F537E0E3}" type="slidenum">
+            <a:fld id="{93BBB352-0F22-48BB-BD01-CD3E9A6587EA}" type="slidenum">
               <a:rPr lang="en-US" sz="1200" b="0" u="none" strike="noStrike">
                 <a:solidFill>
                   <a:schemeClr val="dk1"/>
@@ -7779,7 +7779,7 @@
                 <a:latin typeface="+mn-lt"/>
                 <a:ea typeface="+mn-ea"/>
               </a:rPr>
-              <a:t>1</a:t>
+              <a:t>&lt;number&gt;</a:t>
             </a:fld>
             <a:endParaRPr lang="en-US" sz="1200" b="0" u="none" strike="noStrike">
               <a:solidFill>
@@ -7827,7 +7827,7 @@
         <p:spPr>
           <a:xfrm>
             <a:off x="685800" y="1143000"/>
-            <a:ext cx="5484600" cy="3084120"/>
+            <a:ext cx="5483880" cy="3083400"/>
           </a:xfrm>
           <a:prstGeom prst="rect">
             <a:avLst/>
@@ -7850,7 +7850,7 @@
         <p:spPr>
           <a:xfrm>
             <a:off x="685800" y="4400640"/>
-            <a:ext cx="5484960" cy="3598920"/>
+            <a:ext cx="5484240" cy="3598200"/>
           </a:xfrm>
           <a:prstGeom prst="rect">
             <a:avLst/>
@@ -7892,7 +7892,7 @@
         <p:spPr>
           <a:xfrm>
             <a:off x="3884760" y="8685360"/>
-            <a:ext cx="2970360" cy="457200"/>
+            <a:ext cx="2969640" cy="456480"/>
           </a:xfrm>
           <a:prstGeom prst="rect">
             <a:avLst/>
@@ -7936,7 +7936,7 @@
                 <a:tab pos="0" algn="l"/>
               </a:tabLst>
             </a:pPr>
-            <a:fld id="{D13EFD6D-DF45-43A4-8E33-23A2D4AF32BA}" type="slidenum">
+            <a:fld id="{39316616-C3F1-497B-8B09-FA32B3C25A59}" type="slidenum">
               <a:rPr lang="en-US" sz="1200" b="0" u="none" strike="noStrike">
                 <a:solidFill>
                   <a:schemeClr val="dk1"/>
@@ -7994,7 +7994,7 @@
         <p:spPr>
           <a:xfrm>
             <a:off x="685800" y="1143000"/>
-            <a:ext cx="5484960" cy="3084840"/>
+            <a:ext cx="5484240" cy="3084120"/>
           </a:xfrm>
           <a:prstGeom prst="rect">
             <a:avLst/>
@@ -8017,7 +8017,7 @@
         <p:spPr>
           <a:xfrm>
             <a:off x="685800" y="4400640"/>
-            <a:ext cx="5484960" cy="3598920"/>
+            <a:ext cx="5484240" cy="3598200"/>
           </a:xfrm>
           <a:prstGeom prst="rect">
             <a:avLst/>
@@ -8059,7 +8059,7 @@
         <p:spPr>
           <a:xfrm>
             <a:off x="3884760" y="8685360"/>
-            <a:ext cx="2970360" cy="457200"/>
+            <a:ext cx="2969640" cy="456480"/>
           </a:xfrm>
           <a:prstGeom prst="rect">
             <a:avLst/>
@@ -8103,7 +8103,7 @@
                 <a:tab pos="0" algn="l"/>
               </a:tabLst>
             </a:pPr>
-            <a:fld id="{FCAE7FA6-D63C-472F-919F-E84CFFE00A18}" type="slidenum">
+            <a:fld id="{8F9AA75F-FAD7-4408-A0F6-EEACB6493564}" type="slidenum">
               <a:rPr lang="en-US" sz="1200" b="0" u="none" strike="noStrike">
                 <a:solidFill>
                   <a:schemeClr val="dk1"/>
@@ -8161,7 +8161,7 @@
         <p:spPr>
           <a:xfrm>
             <a:off x="685800" y="1143000"/>
-            <a:ext cx="5484600" cy="3084120"/>
+            <a:ext cx="5483880" cy="3083400"/>
           </a:xfrm>
           <a:prstGeom prst="rect">
             <a:avLst/>
@@ -8184,7 +8184,7 @@
         <p:spPr>
           <a:xfrm>
             <a:off x="685800" y="4400640"/>
-            <a:ext cx="5484960" cy="3598920"/>
+            <a:ext cx="5484240" cy="3598200"/>
           </a:xfrm>
           <a:prstGeom prst="rect">
             <a:avLst/>
@@ -8226,7 +8226,7 @@
         <p:spPr>
           <a:xfrm>
             <a:off x="3884760" y="8685360"/>
-            <a:ext cx="2970360" cy="457200"/>
+            <a:ext cx="2969640" cy="456480"/>
           </a:xfrm>
           <a:prstGeom prst="rect">
             <a:avLst/>
@@ -8270,7 +8270,7 @@
                 <a:tab pos="0" algn="l"/>
               </a:tabLst>
             </a:pPr>
-            <a:fld id="{130AF569-F2DB-4E50-91A9-87FFE780D14B}" type="slidenum">
+            <a:fld id="{F9462F31-0C8D-47C4-864B-067B249D8046}" type="slidenum">
               <a:rPr lang="en-US" sz="1200" b="0" u="none" strike="noStrike">
                 <a:solidFill>
                   <a:schemeClr val="dk1"/>
@@ -8328,7 +8328,7 @@
         <p:spPr>
           <a:xfrm>
             <a:off x="685800" y="1143000"/>
-            <a:ext cx="5484960" cy="3084840"/>
+            <a:ext cx="5484240" cy="3084120"/>
           </a:xfrm>
           <a:prstGeom prst="rect">
             <a:avLst/>
@@ -8351,7 +8351,7 @@
         <p:spPr>
           <a:xfrm>
             <a:off x="685800" y="4400640"/>
-            <a:ext cx="5484960" cy="3598920"/>
+            <a:ext cx="5484240" cy="3598200"/>
           </a:xfrm>
           <a:prstGeom prst="rect">
             <a:avLst/>
@@ -8393,7 +8393,7 @@
         <p:spPr>
           <a:xfrm>
             <a:off x="3884760" y="8685360"/>
-            <a:ext cx="2970360" cy="457200"/>
+            <a:ext cx="2969640" cy="456480"/>
           </a:xfrm>
           <a:prstGeom prst="rect">
             <a:avLst/>
@@ -8437,7 +8437,7 @@
                 <a:tab pos="0" algn="l"/>
               </a:tabLst>
             </a:pPr>
-            <a:fld id="{31676B19-234B-4211-B88D-3230817EAD7C}" type="slidenum">
+            <a:fld id="{31CD6F96-5EF7-4279-8AD9-56276FF5671E}" type="slidenum">
               <a:rPr lang="en-US" sz="1200" b="0" u="none" strike="noStrike">
                 <a:solidFill>
                   <a:schemeClr val="dk1"/>
@@ -8495,7 +8495,7 @@
         <p:spPr>
           <a:xfrm>
             <a:off x="685800" y="1143000"/>
-            <a:ext cx="5484600" cy="3084120"/>
+            <a:ext cx="5483880" cy="3083400"/>
           </a:xfrm>
           <a:prstGeom prst="rect">
             <a:avLst/>
@@ -8518,7 +8518,7 @@
         <p:spPr>
           <a:xfrm>
             <a:off x="685800" y="4400640"/>
-            <a:ext cx="5484960" cy="3598920"/>
+            <a:ext cx="5484240" cy="3598200"/>
           </a:xfrm>
           <a:prstGeom prst="rect">
             <a:avLst/>
@@ -8560,7 +8560,7 @@
         <p:spPr>
           <a:xfrm>
             <a:off x="3884760" y="8685360"/>
-            <a:ext cx="2970360" cy="457200"/>
+            <a:ext cx="2969640" cy="456480"/>
           </a:xfrm>
           <a:prstGeom prst="rect">
             <a:avLst/>
@@ -8604,7 +8604,7 @@
                 <a:tab pos="0" algn="l"/>
               </a:tabLst>
             </a:pPr>
-            <a:fld id="{7C963A2E-BF66-4407-8D0A-4022EB2DB382}" type="slidenum">
+            <a:fld id="{DBD1434C-75E6-4411-ACB4-58BF3D218C8C}" type="slidenum">
               <a:rPr lang="en-US" sz="1200" b="0" u="none" strike="noStrike">
                 <a:solidFill>
                   <a:schemeClr val="dk1"/>
@@ -8662,7 +8662,7 @@
         <p:spPr>
           <a:xfrm>
             <a:off x="685800" y="1143000"/>
-            <a:ext cx="5484960" cy="3084840"/>
+            <a:ext cx="5484240" cy="3084120"/>
           </a:xfrm>
           <a:prstGeom prst="rect">
             <a:avLst/>
@@ -8685,7 +8685,7 @@
         <p:spPr>
           <a:xfrm>
             <a:off x="685800" y="4400640"/>
-            <a:ext cx="5484960" cy="3598920"/>
+            <a:ext cx="5484240" cy="3598200"/>
           </a:xfrm>
           <a:prstGeom prst="rect">
             <a:avLst/>
@@ -8727,7 +8727,7 @@
         <p:spPr>
           <a:xfrm>
             <a:off x="3884760" y="8685360"/>
-            <a:ext cx="2970360" cy="457200"/>
+            <a:ext cx="2969640" cy="456480"/>
           </a:xfrm>
           <a:prstGeom prst="rect">
             <a:avLst/>
@@ -8771,7 +8771,7 @@
                 <a:tab pos="0" algn="l"/>
               </a:tabLst>
             </a:pPr>
-            <a:fld id="{D96D901E-0689-46C4-8FF4-7BEB9D256AC5}" type="slidenum">
+            <a:fld id="{A144A292-D9B1-4A0E-A877-E116B47B80E7}" type="slidenum">
               <a:rPr lang="en-US" sz="1200" b="0" u="none" strike="noStrike">
                 <a:solidFill>
                   <a:schemeClr val="dk1"/>
@@ -9107,7 +9107,7 @@
             </a:lvl7pPr>
           </a:lstStyle>
           <a:p>
-            <a:pPr marL="228600" indent="-228600" algn="l" defTabSz="914400">
+            <a:pPr indent="-324000" algn="l" defTabSz="914400">
               <a:lnSpc>
                 <a:spcPct val="90000"/>
               </a:lnSpc>
@@ -9395,7 +9395,7 @@
         <p:spPr>
           <a:xfrm>
             <a:off x="-2286000" y="3657600"/>
-            <a:ext cx="6399360" cy="6399360"/>
+            <a:ext cx="6398640" cy="6398640"/>
           </a:xfrm>
           <a:prstGeom prst="ellipse">
             <a:avLst/>
@@ -9438,7 +9438,7 @@
         <p:spPr>
           <a:xfrm>
             <a:off x="8229600" y="-2743200"/>
-            <a:ext cx="6399360" cy="6399360"/>
+            <a:ext cx="6398640" cy="6398640"/>
           </a:xfrm>
           <a:prstGeom prst="ellipse">
             <a:avLst/>
@@ -9481,7 +9481,7 @@
         <p:spPr>
           <a:xfrm>
             <a:off x="5501520" y="1417320"/>
-            <a:ext cx="1187280" cy="1187280"/>
+            <a:ext cx="1186560" cy="1186560"/>
           </a:xfrm>
           <a:prstGeom prst="ellipse">
             <a:avLst/>
@@ -9528,7 +9528,7 @@
         <p:spPr>
           <a:xfrm>
             <a:off x="5803200" y="1710000"/>
-            <a:ext cx="583920" cy="583920"/>
+            <a:ext cx="583200" cy="583200"/>
           </a:xfrm>
           <a:prstGeom prst="rect">
             <a:avLst/>
@@ -9548,7 +9548,7 @@
         <p:spPr>
           <a:xfrm>
             <a:off x="914400" y="2880360"/>
-            <a:ext cx="10361520" cy="912960"/>
+            <a:ext cx="10360800" cy="912240"/>
           </a:xfrm>
           <a:prstGeom prst="rect">
             <a:avLst/>
@@ -9609,7 +9609,7 @@
         <p:spPr>
           <a:xfrm>
             <a:off x="1554480" y="3794760"/>
-            <a:ext cx="9081360" cy="638640"/>
+            <a:ext cx="9080640" cy="637920"/>
           </a:xfrm>
           <a:prstGeom prst="rect">
             <a:avLst/>
@@ -9670,7 +9670,7 @@
         <p:spPr>
           <a:xfrm>
             <a:off x="914400" y="4480560"/>
-            <a:ext cx="10361520" cy="364320"/>
+            <a:ext cx="10360800" cy="363600"/>
           </a:xfrm>
           <a:prstGeom prst="rect">
             <a:avLst/>
@@ -9731,7 +9731,7 @@
         <p:spPr>
           <a:xfrm>
             <a:off x="11094480" y="6492240"/>
-            <a:ext cx="547200" cy="272880"/>
+            <a:ext cx="546480" cy="272160"/>
           </a:xfrm>
           <a:prstGeom prst="rect">
             <a:avLst/>
@@ -9833,7 +9833,7 @@
         <p:spPr>
           <a:xfrm>
             <a:off x="548640" y="457200"/>
-            <a:ext cx="382680" cy="382680"/>
+            <a:ext cx="381960" cy="381960"/>
           </a:xfrm>
           <a:prstGeom prst="roundRect">
             <a:avLst>
@@ -9882,7 +9882,7 @@
         <p:spPr>
           <a:xfrm>
             <a:off x="631080" y="539640"/>
-            <a:ext cx="218160" cy="218160"/>
+            <a:ext cx="217440" cy="217440"/>
           </a:xfrm>
           <a:prstGeom prst="rect">
             <a:avLst/>
@@ -9902,7 +9902,7 @@
         <p:spPr>
           <a:xfrm>
             <a:off x="1097280" y="420480"/>
-            <a:ext cx="10544400" cy="455760"/>
+            <a:ext cx="10543680" cy="455040"/>
           </a:xfrm>
           <a:prstGeom prst="rect">
             <a:avLst/>
@@ -9963,7 +9963,7 @@
         <p:spPr>
           <a:xfrm>
             <a:off x="548640" y="1234440"/>
-            <a:ext cx="11093040" cy="1196280"/>
+            <a:ext cx="11092320" cy="1195560"/>
           </a:xfrm>
           <a:prstGeom prst="rect">
             <a:avLst/>
@@ -9986,7 +9986,7 @@
           <a:p>
             <a:pPr marL="228600" indent="-228600" defTabSz="914400">
               <a:lnSpc>
-                <a:spcPct val="115000"/>
+                <a:spcPct val="100000"/>
               </a:lnSpc>
               <a:spcAft>
                 <a:spcPts val="1199"/>
@@ -9998,7 +9998,7 @@
               <a:buChar char="▪"/>
             </a:pPr>
             <a:r>
-              <a:rPr lang="en-US" sz="1300" b="0" u="none" strike="noStrike">
+              <a:rPr lang="en-US" sz="1400" b="0" u="none" strike="noStrike">
                 <a:solidFill>
                   <a:srgbClr val="3F4A45"/>
                 </a:solidFill>
@@ -10009,7 +10009,7 @@
               </a:rPr>
               <a:t>__init__ is a special method that runs automatically every time a new object is created</a:t>
             </a:r>
-            <a:endParaRPr lang="en-US" sz="1300" b="0" u="none" strike="noStrike">
+            <a:endParaRPr lang="en-US" sz="1400" b="0" u="none" strike="noStrike">
               <a:solidFill>
                 <a:srgbClr val="000000"/>
               </a:solidFill>
@@ -10021,7 +10021,7 @@
           <a:p>
             <a:pPr marL="228600" indent="-228600" defTabSz="914400">
               <a:lnSpc>
-                <a:spcPct val="115000"/>
+                <a:spcPct val="100000"/>
               </a:lnSpc>
               <a:spcAft>
                 <a:spcPts val="1199"/>
@@ -10033,7 +10033,7 @@
               <a:buChar char="▪"/>
             </a:pPr>
             <a:r>
-              <a:rPr lang="en-US" sz="1300" b="0" u="none" strike="noStrike">
+              <a:rPr lang="en-US" sz="1400" b="0" u="none" strike="noStrike">
                 <a:solidFill>
                   <a:srgbClr val="3F4A45"/>
                 </a:solidFill>
@@ -10044,7 +10044,7 @@
               </a:rPr>
               <a:t>It’s where you set up the object’s starting data — "construct" its initial state</a:t>
             </a:r>
-            <a:endParaRPr lang="en-US" sz="1300" b="0" u="none" strike="noStrike">
+            <a:endParaRPr lang="en-US" sz="1400" b="0" u="none" strike="noStrike">
               <a:solidFill>
                 <a:srgbClr val="000000"/>
               </a:solidFill>
@@ -10056,10 +10056,13 @@
           <a:p>
             <a:pPr marL="228600" indent="-228600" defTabSz="914400">
               <a:lnSpc>
-                <a:spcPct val="115000"/>
-              </a:lnSpc>
+                <a:spcPct val="100000"/>
+              </a:lnSpc>
+              <a:spcBef>
+                <a:spcPts val="1191"/>
+              </a:spcBef>
               <a:spcAft>
-                <a:spcPts val="1199"/>
+                <a:spcPts val="992"/>
               </a:spcAft>
               <a:buClr>
                 <a:srgbClr val="3F4A45"/>
@@ -10068,7 +10071,7 @@
               <a:buChar char="▪"/>
             </a:pPr>
             <a:r>
-              <a:rPr lang="en-US" sz="1300" b="0" u="none" strike="noStrike">
+              <a:rPr lang="en-US" sz="1400" b="0" u="none" strike="noStrike">
                 <a:solidFill>
                   <a:srgbClr val="3F4A45"/>
                 </a:solidFill>
@@ -10077,9 +10080,9 @@
                 <a:latin typeface="Calibri"/>
                 <a:ea typeface="Calibri"/>
               </a:rPr>
-              <a:t>The double underscores mark it as a dunder method — Python-reserved, called automatically, never called directly</a:t>
-            </a:r>
-            <a:endParaRPr lang="en-US" sz="1300" b="0" u="none" strike="noStrike">
+              <a:t>The double underscores mark it as a dunder method — Python-reserved, called automatically, never called directly. "Dunder" is short for "double underscore"</a:t>
+            </a:r>
+            <a:endParaRPr lang="en-US" sz="1400" b="0" u="none" strike="noStrike">
               <a:solidFill>
                 <a:srgbClr val="000000"/>
               </a:solidFill>
@@ -10098,8 +10101,8 @@
         </p:nvSpPr>
         <p:spPr>
           <a:xfrm>
-            <a:off x="548640" y="2569320"/>
-            <a:ext cx="11093040" cy="3784320"/>
+            <a:off x="548640" y="2785320"/>
+            <a:ext cx="11092320" cy="3783600"/>
           </a:xfrm>
           <a:prstGeom prst="roundRect">
             <a:avLst>
@@ -10144,7 +10147,7 @@
         <p:spPr>
           <a:xfrm>
             <a:off x="868680" y="2752200"/>
-            <a:ext cx="10452960" cy="3418560"/>
+            <a:ext cx="10452240" cy="3417840"/>
           </a:xfrm>
           <a:prstGeom prst="rect">
             <a:avLst/>
@@ -10164,6 +10167,24 @@
           <a:bodyPr lIns="0" tIns="0" rIns="0" bIns="0" anchor="t">
             <a:noAutofit/>
           </a:bodyPr>
+          <a:p>
+            <a:pPr defTabSz="914400">
+              <a:lnSpc>
+                <a:spcPct val="105000"/>
+              </a:lnSpc>
+              <a:tabLst>
+                <a:tab pos="0" algn="l"/>
+              </a:tabLst>
+            </a:pPr>
+            <a:endParaRPr lang="en-US" sz="2100" b="0" u="none" strike="noStrike">
+              <a:solidFill>
+                <a:srgbClr val="000000"/>
+              </a:solidFill>
+              <a:effectLst/>
+              <a:uFillTx/>
+              <a:latin typeface="Arial"/>
+            </a:endParaRPr>
+          </a:p>
           <a:p>
             <a:pPr defTabSz="914400">
               <a:lnSpc>
@@ -10415,7 +10436,7 @@
         <p:spPr>
           <a:xfrm>
             <a:off x="548640" y="6510600"/>
-            <a:ext cx="5484960" cy="272880"/>
+            <a:ext cx="5484240" cy="272160"/>
           </a:xfrm>
           <a:prstGeom prst="rect">
             <a:avLst/>
@@ -10476,7 +10497,7 @@
         <p:spPr>
           <a:xfrm>
             <a:off x="11094480" y="6510600"/>
-            <a:ext cx="547200" cy="272880"/>
+            <a:ext cx="546480" cy="272160"/>
           </a:xfrm>
           <a:prstGeom prst="rect">
             <a:avLst/>
@@ -10578,7 +10599,7 @@
         <p:spPr>
           <a:xfrm>
             <a:off x="548640" y="457200"/>
-            <a:ext cx="382680" cy="382680"/>
+            <a:ext cx="381960" cy="381960"/>
           </a:xfrm>
           <a:prstGeom prst="roundRect">
             <a:avLst>
@@ -10627,7 +10648,7 @@
         <p:spPr>
           <a:xfrm>
             <a:off x="631080" y="539640"/>
-            <a:ext cx="218160" cy="218160"/>
+            <a:ext cx="217440" cy="217440"/>
           </a:xfrm>
           <a:prstGeom prst="rect">
             <a:avLst/>
@@ -10647,7 +10668,7 @@
         <p:spPr>
           <a:xfrm>
             <a:off x="1097280" y="420480"/>
-            <a:ext cx="10544400" cy="455760"/>
+            <a:ext cx="10543680" cy="455040"/>
           </a:xfrm>
           <a:prstGeom prst="rect">
             <a:avLst/>
@@ -10708,7 +10729,7 @@
         <p:spPr>
           <a:xfrm>
             <a:off x="548640" y="1234440"/>
-            <a:ext cx="11093040" cy="1488960"/>
+            <a:ext cx="11092320" cy="1488240"/>
           </a:xfrm>
           <a:prstGeom prst="rect">
             <a:avLst/>
@@ -10879,7 +10900,7 @@
         <p:spPr>
           <a:xfrm>
             <a:off x="548640" y="2862000"/>
-            <a:ext cx="11093040" cy="3491640"/>
+            <a:ext cx="11092320" cy="3490920"/>
           </a:xfrm>
           <a:prstGeom prst="roundRect">
             <a:avLst>
@@ -10924,7 +10945,7 @@
         <p:spPr>
           <a:xfrm>
             <a:off x="868680" y="3044880"/>
-            <a:ext cx="10452960" cy="3125880"/>
+            <a:ext cx="10452240" cy="3125160"/>
           </a:xfrm>
           <a:prstGeom prst="rect">
             <a:avLst/>
@@ -11255,7 +11276,7 @@
         <p:spPr>
           <a:xfrm>
             <a:off x="548640" y="6510600"/>
-            <a:ext cx="5484960" cy="272880"/>
+            <a:ext cx="5484240" cy="272160"/>
           </a:xfrm>
           <a:prstGeom prst="rect">
             <a:avLst/>
@@ -11316,7 +11337,7 @@
         <p:spPr>
           <a:xfrm>
             <a:off x="11094480" y="6510600"/>
-            <a:ext cx="547200" cy="272880"/>
+            <a:ext cx="546480" cy="272160"/>
           </a:xfrm>
           <a:prstGeom prst="rect">
             <a:avLst/>
@@ -11418,7 +11439,7 @@
         <p:spPr>
           <a:xfrm>
             <a:off x="548640" y="457200"/>
-            <a:ext cx="382680" cy="382680"/>
+            <a:ext cx="381960" cy="381960"/>
           </a:xfrm>
           <a:prstGeom prst="roundRect">
             <a:avLst>
@@ -11467,7 +11488,7 @@
         <p:spPr>
           <a:xfrm>
             <a:off x="631080" y="539640"/>
-            <a:ext cx="218160" cy="218160"/>
+            <a:ext cx="217440" cy="217440"/>
           </a:xfrm>
           <a:prstGeom prst="rect">
             <a:avLst/>
@@ -11487,7 +11508,7 @@
         <p:spPr>
           <a:xfrm>
             <a:off x="1097280" y="420480"/>
-            <a:ext cx="10544400" cy="455760"/>
+            <a:ext cx="10543680" cy="455040"/>
           </a:xfrm>
           <a:prstGeom prst="rect">
             <a:avLst/>
@@ -11548,7 +11569,7 @@
         <p:spPr>
           <a:xfrm>
             <a:off x="548640" y="1691640"/>
-            <a:ext cx="2924640" cy="2924640"/>
+            <a:ext cx="2923920" cy="2923920"/>
           </a:xfrm>
           <a:prstGeom prst="roundRect">
             <a:avLst>
@@ -11597,7 +11618,7 @@
         <p:spPr>
           <a:xfrm>
             <a:off x="777240" y="1874520"/>
-            <a:ext cx="2467440" cy="318600"/>
+            <a:ext cx="2466720" cy="317880"/>
           </a:xfrm>
           <a:prstGeom prst="rect">
             <a:avLst/>
@@ -11658,7 +11679,7 @@
         <p:spPr>
           <a:xfrm>
             <a:off x="777240" y="2286000"/>
-            <a:ext cx="2467440" cy="2101680"/>
+            <a:ext cx="2466720" cy="2100960"/>
           </a:xfrm>
           <a:prstGeom prst="rect">
             <a:avLst/>
@@ -11869,7 +11890,7 @@
         <p:spPr>
           <a:xfrm>
             <a:off x="548640" y="4727520"/>
-            <a:ext cx="2924640" cy="272880"/>
+            <a:ext cx="2923920" cy="272160"/>
           </a:xfrm>
           <a:prstGeom prst="rect">
             <a:avLst/>
@@ -11973,7 +11994,7 @@
         <p:spPr>
           <a:xfrm>
             <a:off x="4389120" y="1636920"/>
-            <a:ext cx="7252560" cy="839880"/>
+            <a:ext cx="7251840" cy="839160"/>
           </a:xfrm>
           <a:prstGeom prst="roundRect">
             <a:avLst>
@@ -12018,7 +12039,7 @@
         <p:spPr>
           <a:xfrm>
             <a:off x="4553640" y="1865520"/>
-            <a:ext cx="382680" cy="382680"/>
+            <a:ext cx="381960" cy="381960"/>
           </a:xfrm>
           <a:prstGeom prst="ellipse">
             <a:avLst/>
@@ -12065,7 +12086,7 @@
         <p:spPr>
           <a:xfrm>
             <a:off x="4636080" y="1947600"/>
-            <a:ext cx="218160" cy="218160"/>
+            <a:ext cx="217440" cy="217440"/>
           </a:xfrm>
           <a:prstGeom prst="rect">
             <a:avLst/>
@@ -12085,7 +12106,7 @@
         <p:spPr>
           <a:xfrm>
             <a:off x="5120640" y="1710000"/>
-            <a:ext cx="6338160" cy="291240"/>
+            <a:ext cx="6337440" cy="290520"/>
           </a:xfrm>
           <a:prstGeom prst="rect">
             <a:avLst/>
@@ -12146,7 +12167,7 @@
         <p:spPr>
           <a:xfrm>
             <a:off x="5120640" y="2020680"/>
-            <a:ext cx="6338160" cy="364320"/>
+            <a:ext cx="6337440" cy="363600"/>
           </a:xfrm>
           <a:prstGeom prst="rect">
             <a:avLst/>
@@ -12250,7 +12271,7 @@
         <p:spPr>
           <a:xfrm>
             <a:off x="4389120" y="2734200"/>
-            <a:ext cx="7252560" cy="839880"/>
+            <a:ext cx="7251840" cy="839160"/>
           </a:xfrm>
           <a:prstGeom prst="roundRect">
             <a:avLst>
@@ -12295,7 +12316,7 @@
         <p:spPr>
           <a:xfrm>
             <a:off x="4553640" y="2962800"/>
-            <a:ext cx="382680" cy="382680"/>
+            <a:ext cx="381960" cy="381960"/>
           </a:xfrm>
           <a:prstGeom prst="ellipse">
             <a:avLst/>
@@ -12342,7 +12363,7 @@
         <p:spPr>
           <a:xfrm>
             <a:off x="4636080" y="3044880"/>
-            <a:ext cx="218160" cy="218160"/>
+            <a:ext cx="217440" cy="217440"/>
           </a:xfrm>
           <a:prstGeom prst="rect">
             <a:avLst/>
@@ -12362,7 +12383,7 @@
         <p:spPr>
           <a:xfrm>
             <a:off x="5120640" y="2807280"/>
-            <a:ext cx="6338160" cy="291240"/>
+            <a:ext cx="6337440" cy="290520"/>
           </a:xfrm>
           <a:prstGeom prst="rect">
             <a:avLst/>
@@ -12423,7 +12444,7 @@
         <p:spPr>
           <a:xfrm>
             <a:off x="5120640" y="3117960"/>
-            <a:ext cx="6338160" cy="364320"/>
+            <a:ext cx="6337440" cy="363600"/>
           </a:xfrm>
           <a:prstGeom prst="rect">
             <a:avLst/>
@@ -12527,7 +12548,7 @@
         <p:spPr>
           <a:xfrm>
             <a:off x="4389120" y="3831480"/>
-            <a:ext cx="7252560" cy="839880"/>
+            <a:ext cx="7251840" cy="839160"/>
           </a:xfrm>
           <a:prstGeom prst="roundRect">
             <a:avLst>
@@ -12572,7 +12593,7 @@
         <p:spPr>
           <a:xfrm>
             <a:off x="4553640" y="4060080"/>
-            <a:ext cx="382680" cy="382680"/>
+            <a:ext cx="381960" cy="381960"/>
           </a:xfrm>
           <a:prstGeom prst="ellipse">
             <a:avLst/>
@@ -12619,7 +12640,7 @@
         <p:spPr>
           <a:xfrm>
             <a:off x="4636080" y="4142160"/>
-            <a:ext cx="218160" cy="218160"/>
+            <a:ext cx="217440" cy="217440"/>
           </a:xfrm>
           <a:prstGeom prst="rect">
             <a:avLst/>
@@ -12639,7 +12660,7 @@
         <p:spPr>
           <a:xfrm>
             <a:off x="5120640" y="3904560"/>
-            <a:ext cx="6338160" cy="291240"/>
+            <a:ext cx="6337440" cy="290520"/>
           </a:xfrm>
           <a:prstGeom prst="rect">
             <a:avLst/>
@@ -12700,7 +12721,7 @@
         <p:spPr>
           <a:xfrm>
             <a:off x="5120640" y="4215240"/>
-            <a:ext cx="6338160" cy="364320"/>
+            <a:ext cx="6337440" cy="363600"/>
           </a:xfrm>
           <a:prstGeom prst="rect">
             <a:avLst/>
@@ -12761,7 +12782,7 @@
         <p:spPr>
           <a:xfrm>
             <a:off x="548640" y="5897880"/>
-            <a:ext cx="11093040" cy="364320"/>
+            <a:ext cx="11092320" cy="363600"/>
           </a:xfrm>
           <a:prstGeom prst="rect">
             <a:avLst/>
@@ -12822,7 +12843,7 @@
         <p:spPr>
           <a:xfrm>
             <a:off x="548640" y="6510600"/>
-            <a:ext cx="5484960" cy="272880"/>
+            <a:ext cx="5484240" cy="272160"/>
           </a:xfrm>
           <a:prstGeom prst="rect">
             <a:avLst/>
@@ -12883,7 +12904,7 @@
         <p:spPr>
           <a:xfrm>
             <a:off x="11094480" y="6510600"/>
-            <a:ext cx="547200" cy="272880"/>
+            <a:ext cx="546480" cy="272160"/>
           </a:xfrm>
           <a:prstGeom prst="rect">
             <a:avLst/>
@@ -12985,7 +13006,7 @@
         <p:spPr>
           <a:xfrm>
             <a:off x="548640" y="457200"/>
-            <a:ext cx="382680" cy="382680"/>
+            <a:ext cx="381960" cy="381960"/>
           </a:xfrm>
           <a:prstGeom prst="roundRect">
             <a:avLst>
@@ -13034,7 +13055,7 @@
         <p:spPr>
           <a:xfrm>
             <a:off x="631080" y="539640"/>
-            <a:ext cx="218160" cy="218160"/>
+            <a:ext cx="217440" cy="217440"/>
           </a:xfrm>
           <a:prstGeom prst="rect">
             <a:avLst/>
@@ -13054,7 +13075,7 @@
         <p:spPr>
           <a:xfrm>
             <a:off x="1097280" y="420480"/>
-            <a:ext cx="10544400" cy="455760"/>
+            <a:ext cx="10543680" cy="455040"/>
           </a:xfrm>
           <a:prstGeom prst="rect">
             <a:avLst/>
@@ -13115,7 +13136,7 @@
         <p:spPr>
           <a:xfrm>
             <a:off x="548640" y="1234440"/>
-            <a:ext cx="5362920" cy="5119200"/>
+            <a:ext cx="5362200" cy="5118480"/>
           </a:xfrm>
           <a:prstGeom prst="roundRect">
             <a:avLst>
@@ -13160,7 +13181,7 @@
         <p:spPr>
           <a:xfrm>
             <a:off x="822960" y="1508760"/>
-            <a:ext cx="455760" cy="455760"/>
+            <a:ext cx="455040" cy="455040"/>
           </a:xfrm>
           <a:prstGeom prst="ellipse">
             <a:avLst/>
@@ -13207,7 +13228,7 @@
         <p:spPr>
           <a:xfrm>
             <a:off x="923400" y="1609200"/>
-            <a:ext cx="254520" cy="254520"/>
+            <a:ext cx="253800" cy="253800"/>
           </a:xfrm>
           <a:prstGeom prst="rect">
             <a:avLst/>
@@ -13227,7 +13248,7 @@
         <p:spPr>
           <a:xfrm>
             <a:off x="1444680" y="1508760"/>
-            <a:ext cx="4284000" cy="455760"/>
+            <a:ext cx="4283280" cy="455040"/>
           </a:xfrm>
           <a:prstGeom prst="rect">
             <a:avLst/>
@@ -13288,7 +13309,7 @@
         <p:spPr>
           <a:xfrm>
             <a:off x="841320" y="2194560"/>
-            <a:ext cx="4777560" cy="3930480"/>
+            <a:ext cx="4776840" cy="3929760"/>
           </a:xfrm>
           <a:prstGeom prst="rect">
             <a:avLst/>
@@ -13424,7 +13445,7 @@
         <p:spPr>
           <a:xfrm>
             <a:off x="6278760" y="1234440"/>
-            <a:ext cx="5362920" cy="5119200"/>
+            <a:ext cx="5362200" cy="5118480"/>
           </a:xfrm>
           <a:prstGeom prst="roundRect">
             <a:avLst>
@@ -13469,7 +13490,7 @@
         <p:spPr>
           <a:xfrm>
             <a:off x="6553080" y="1508760"/>
-            <a:ext cx="455760" cy="455760"/>
+            <a:ext cx="455040" cy="455040"/>
           </a:xfrm>
           <a:prstGeom prst="ellipse">
             <a:avLst/>
@@ -13516,7 +13537,7 @@
         <p:spPr>
           <a:xfrm>
             <a:off x="6653520" y="1609200"/>
-            <a:ext cx="254520" cy="254520"/>
+            <a:ext cx="253800" cy="253800"/>
           </a:xfrm>
           <a:prstGeom prst="rect">
             <a:avLst/>
@@ -13536,7 +13557,7 @@
         <p:spPr>
           <a:xfrm>
             <a:off x="7174800" y="1508760"/>
-            <a:ext cx="4284000" cy="455760"/>
+            <a:ext cx="4283280" cy="455040"/>
           </a:xfrm>
           <a:prstGeom prst="rect">
             <a:avLst/>
@@ -13597,7 +13618,7 @@
         <p:spPr>
           <a:xfrm>
             <a:off x="6571440" y="2194560"/>
-            <a:ext cx="4777560" cy="3930480"/>
+            <a:ext cx="4776840" cy="3929760"/>
           </a:xfrm>
           <a:prstGeom prst="rect">
             <a:avLst/>
@@ -13733,7 +13754,7 @@
         <p:spPr>
           <a:xfrm>
             <a:off x="548640" y="6510600"/>
-            <a:ext cx="5484960" cy="272880"/>
+            <a:ext cx="5484240" cy="272160"/>
           </a:xfrm>
           <a:prstGeom prst="rect">
             <a:avLst/>
@@ -13794,7 +13815,7 @@
         <p:spPr>
           <a:xfrm>
             <a:off x="11094480" y="6510600"/>
-            <a:ext cx="547200" cy="272880"/>
+            <a:ext cx="546480" cy="272160"/>
           </a:xfrm>
           <a:prstGeom prst="rect">
             <a:avLst/>
@@ -13896,7 +13917,7 @@
         <p:spPr>
           <a:xfrm>
             <a:off x="548640" y="457200"/>
-            <a:ext cx="382680" cy="382680"/>
+            <a:ext cx="381960" cy="381960"/>
           </a:xfrm>
           <a:prstGeom prst="roundRect">
             <a:avLst>
@@ -13945,7 +13966,7 @@
         <p:spPr>
           <a:xfrm>
             <a:off x="631080" y="539640"/>
-            <a:ext cx="218160" cy="218160"/>
+            <a:ext cx="217440" cy="217440"/>
           </a:xfrm>
           <a:prstGeom prst="rect">
             <a:avLst/>
@@ -13965,7 +13986,7 @@
         <p:spPr>
           <a:xfrm>
             <a:off x="1097280" y="420480"/>
-            <a:ext cx="10544400" cy="455760"/>
+            <a:ext cx="10543680" cy="455040"/>
           </a:xfrm>
           <a:prstGeom prst="rect">
             <a:avLst/>
@@ -14026,7 +14047,7 @@
         <p:spPr>
           <a:xfrm>
             <a:off x="548640" y="1234440"/>
-            <a:ext cx="11093040" cy="5119200"/>
+            <a:ext cx="11092320" cy="5118480"/>
           </a:xfrm>
           <a:prstGeom prst="roundRect">
             <a:avLst>
@@ -14071,7 +14092,7 @@
         <p:spPr>
           <a:xfrm>
             <a:off x="868680" y="1435680"/>
-            <a:ext cx="10452960" cy="364320"/>
+            <a:ext cx="10452240" cy="363600"/>
           </a:xfrm>
           <a:prstGeom prst="rect">
             <a:avLst/>
@@ -14132,7 +14153,7 @@
         <p:spPr>
           <a:xfrm>
             <a:off x="868680" y="2296440"/>
-            <a:ext cx="309600" cy="309600"/>
+            <a:ext cx="308880" cy="308880"/>
           </a:xfrm>
           <a:prstGeom prst="ellipse">
             <a:avLst/>
@@ -14175,7 +14196,7 @@
         <p:spPr>
           <a:xfrm>
             <a:off x="868680" y="2296440"/>
-            <a:ext cx="309600" cy="309600"/>
+            <a:ext cx="308880" cy="308880"/>
           </a:xfrm>
           <a:prstGeom prst="rect">
             <a:avLst/>
@@ -14236,7 +14257,7 @@
         <p:spPr>
           <a:xfrm>
             <a:off x="1408320" y="1920240"/>
-            <a:ext cx="9913320" cy="1061640"/>
+            <a:ext cx="9912600" cy="1060920"/>
           </a:xfrm>
           <a:prstGeom prst="rect">
             <a:avLst/>
@@ -14297,7 +14318,7 @@
         <p:spPr>
           <a:xfrm>
             <a:off x="868680" y="3359160"/>
-            <a:ext cx="309600" cy="309600"/>
+            <a:ext cx="308880" cy="308880"/>
           </a:xfrm>
           <a:prstGeom prst="ellipse">
             <a:avLst/>
@@ -14340,7 +14361,7 @@
         <p:spPr>
           <a:xfrm>
             <a:off x="868680" y="3359160"/>
-            <a:ext cx="309600" cy="309600"/>
+            <a:ext cx="308880" cy="308880"/>
           </a:xfrm>
           <a:prstGeom prst="rect">
             <a:avLst/>
@@ -14401,7 +14422,7 @@
         <p:spPr>
           <a:xfrm>
             <a:off x="1408320" y="2983320"/>
-            <a:ext cx="9913320" cy="1061640"/>
+            <a:ext cx="9912600" cy="1060920"/>
           </a:xfrm>
           <a:prstGeom prst="rect">
             <a:avLst/>
@@ -14462,7 +14483,7 @@
         <p:spPr>
           <a:xfrm>
             <a:off x="868680" y="4422240"/>
-            <a:ext cx="309600" cy="309600"/>
+            <a:ext cx="308880" cy="308880"/>
           </a:xfrm>
           <a:prstGeom prst="ellipse">
             <a:avLst/>
@@ -14505,7 +14526,7 @@
         <p:spPr>
           <a:xfrm>
             <a:off x="868680" y="4422240"/>
-            <a:ext cx="309600" cy="309600"/>
+            <a:ext cx="308880" cy="308880"/>
           </a:xfrm>
           <a:prstGeom prst="rect">
             <a:avLst/>
@@ -14566,7 +14587,7 @@
         <p:spPr>
           <a:xfrm>
             <a:off x="1408320" y="4046400"/>
-            <a:ext cx="9913320" cy="1061640"/>
+            <a:ext cx="9912600" cy="1060920"/>
           </a:xfrm>
           <a:prstGeom prst="rect">
             <a:avLst/>
@@ -14627,7 +14648,7 @@
         <p:spPr>
           <a:xfrm>
             <a:off x="868680" y="5485320"/>
-            <a:ext cx="309600" cy="309600"/>
+            <a:ext cx="308880" cy="308880"/>
           </a:xfrm>
           <a:prstGeom prst="ellipse">
             <a:avLst/>
@@ -14670,7 +14691,7 @@
         <p:spPr>
           <a:xfrm>
             <a:off x="868680" y="5485320"/>
-            <a:ext cx="309600" cy="309600"/>
+            <a:ext cx="308880" cy="308880"/>
           </a:xfrm>
           <a:prstGeom prst="rect">
             <a:avLst/>
@@ -14731,7 +14752,7 @@
         <p:spPr>
           <a:xfrm>
             <a:off x="1408320" y="5109120"/>
-            <a:ext cx="9913320" cy="1061640"/>
+            <a:ext cx="9912600" cy="1060920"/>
           </a:xfrm>
           <a:prstGeom prst="rect">
             <a:avLst/>
@@ -14792,7 +14813,7 @@
         <p:spPr>
           <a:xfrm>
             <a:off x="548640" y="6510600"/>
-            <a:ext cx="5484960" cy="272880"/>
+            <a:ext cx="5484240" cy="272160"/>
           </a:xfrm>
           <a:prstGeom prst="rect">
             <a:avLst/>
@@ -14853,7 +14874,7 @@
         <p:spPr>
           <a:xfrm>
             <a:off x="11094480" y="6510600"/>
-            <a:ext cx="547200" cy="272880"/>
+            <a:ext cx="546480" cy="272160"/>
           </a:xfrm>
           <a:prstGeom prst="rect">
             <a:avLst/>
@@ -14955,7 +14976,7 @@
         <p:spPr>
           <a:xfrm>
             <a:off x="-2286000" y="3657600"/>
-            <a:ext cx="6399360" cy="6399360"/>
+            <a:ext cx="6398640" cy="6398640"/>
           </a:xfrm>
           <a:prstGeom prst="ellipse">
             <a:avLst/>
@@ -14998,7 +15019,7 @@
         <p:spPr>
           <a:xfrm>
             <a:off x="8229600" y="-2743200"/>
-            <a:ext cx="6399360" cy="6399360"/>
+            <a:ext cx="6398640" cy="6398640"/>
           </a:xfrm>
           <a:prstGeom prst="ellipse">
             <a:avLst/>
@@ -15041,7 +15062,7 @@
         <p:spPr>
           <a:xfrm>
             <a:off x="5638680" y="868680"/>
-            <a:ext cx="912960" cy="912960"/>
+            <a:ext cx="912240" cy="912240"/>
           </a:xfrm>
           <a:prstGeom prst="ellipse">
             <a:avLst/>
@@ -15088,7 +15109,7 @@
         <p:spPr>
           <a:xfrm>
             <a:off x="5876280" y="1097280"/>
-            <a:ext cx="437400" cy="437400"/>
+            <a:ext cx="436680" cy="436680"/>
           </a:xfrm>
           <a:prstGeom prst="rect">
             <a:avLst/>
@@ -15108,7 +15129,7 @@
         <p:spPr>
           <a:xfrm>
             <a:off x="914400" y="2057400"/>
-            <a:ext cx="10361520" cy="291240"/>
+            <a:ext cx="10360800" cy="290520"/>
           </a:xfrm>
           <a:prstGeom prst="rect">
             <a:avLst/>
@@ -15169,7 +15190,7 @@
         <p:spPr>
           <a:xfrm>
             <a:off x="1188720" y="2441520"/>
-            <a:ext cx="9812880" cy="1004400"/>
+            <a:ext cx="9812160" cy="1003680"/>
           </a:xfrm>
           <a:prstGeom prst="rect">
             <a:avLst/>
@@ -15230,7 +15251,7 @@
         <p:spPr>
           <a:xfrm>
             <a:off x="1920240" y="3630240"/>
-            <a:ext cx="8349840" cy="821520"/>
+            <a:ext cx="8349120" cy="820800"/>
           </a:xfrm>
           <a:prstGeom prst="rect">
             <a:avLst/>
@@ -15291,7 +15312,7 @@
         <p:spPr>
           <a:xfrm>
             <a:off x="11094480" y="6492240"/>
-            <a:ext cx="547200" cy="272880"/>
+            <a:ext cx="546480" cy="272160"/>
           </a:xfrm>
           <a:prstGeom prst="rect">
             <a:avLst/>
@@ -15393,7 +15414,7 @@
         <p:spPr>
           <a:xfrm>
             <a:off x="548640" y="457200"/>
-            <a:ext cx="382680" cy="382680"/>
+            <a:ext cx="381960" cy="381960"/>
           </a:xfrm>
           <a:prstGeom prst="roundRect">
             <a:avLst>
@@ -15442,7 +15463,7 @@
         <p:spPr>
           <a:xfrm>
             <a:off x="631080" y="539640"/>
-            <a:ext cx="218160" cy="218160"/>
+            <a:ext cx="217440" cy="217440"/>
           </a:xfrm>
           <a:prstGeom prst="rect">
             <a:avLst/>
@@ -15462,7 +15483,7 @@
         <p:spPr>
           <a:xfrm>
             <a:off x="1097280" y="420480"/>
-            <a:ext cx="10544400" cy="455760"/>
+            <a:ext cx="10543680" cy="455040"/>
           </a:xfrm>
           <a:prstGeom prst="rect">
             <a:avLst/>
@@ -15523,7 +15544,7 @@
         <p:spPr>
           <a:xfrm>
             <a:off x="548640" y="1234440"/>
-            <a:ext cx="2532240" cy="5119200"/>
+            <a:ext cx="2531520" cy="5118480"/>
           </a:xfrm>
           <a:prstGeom prst="roundRect">
             <a:avLst>
@@ -15568,7 +15589,7 @@
         <p:spPr>
           <a:xfrm>
             <a:off x="1426680" y="1600200"/>
-            <a:ext cx="775800" cy="775800"/>
+            <a:ext cx="775080" cy="775080"/>
           </a:xfrm>
           <a:prstGeom prst="ellipse">
             <a:avLst/>
@@ -15615,7 +15636,7 @@
         <p:spPr>
           <a:xfrm>
             <a:off x="1623240" y="1792080"/>
-            <a:ext cx="382680" cy="382680"/>
+            <a:ext cx="381960" cy="381960"/>
           </a:xfrm>
           <a:prstGeom prst="rect">
             <a:avLst/>
@@ -15635,7 +15656,7 @@
         <p:spPr>
           <a:xfrm>
             <a:off x="731520" y="2560320"/>
-            <a:ext cx="2166480" cy="364320"/>
+            <a:ext cx="2165760" cy="363600"/>
           </a:xfrm>
           <a:prstGeom prst="rect">
             <a:avLst/>
@@ -15696,7 +15717,7 @@
         <p:spPr>
           <a:xfrm>
             <a:off x="777240" y="2971800"/>
-            <a:ext cx="2075040" cy="3198960"/>
+            <a:ext cx="2074320" cy="3198240"/>
           </a:xfrm>
           <a:prstGeom prst="rect">
             <a:avLst/>
@@ -15757,7 +15778,7 @@
         <p:spPr>
           <a:xfrm>
             <a:off x="3402360" y="1234440"/>
-            <a:ext cx="2532240" cy="5119200"/>
+            <a:ext cx="2531520" cy="5118480"/>
           </a:xfrm>
           <a:prstGeom prst="roundRect">
             <a:avLst>
@@ -15802,7 +15823,7 @@
         <p:spPr>
           <a:xfrm>
             <a:off x="4280400" y="1600200"/>
-            <a:ext cx="775800" cy="775800"/>
+            <a:ext cx="775080" cy="775080"/>
           </a:xfrm>
           <a:prstGeom prst="ellipse">
             <a:avLst/>
@@ -15849,7 +15870,7 @@
         <p:spPr>
           <a:xfrm>
             <a:off x="4476960" y="1792080"/>
-            <a:ext cx="382680" cy="382680"/>
+            <a:ext cx="381960" cy="381960"/>
           </a:xfrm>
           <a:prstGeom prst="rect">
             <a:avLst/>
@@ -15869,7 +15890,7 @@
         <p:spPr>
           <a:xfrm>
             <a:off x="3585240" y="2560320"/>
-            <a:ext cx="2166480" cy="364320"/>
+            <a:ext cx="2165760" cy="363600"/>
           </a:xfrm>
           <a:prstGeom prst="rect">
             <a:avLst/>
@@ -15930,7 +15951,7 @@
         <p:spPr>
           <a:xfrm>
             <a:off x="3630960" y="2971800"/>
-            <a:ext cx="2075040" cy="3198960"/>
+            <a:ext cx="2074320" cy="3198240"/>
           </a:xfrm>
           <a:prstGeom prst="rect">
             <a:avLst/>
@@ -15991,7 +16012,7 @@
         <p:spPr>
           <a:xfrm>
             <a:off x="6255720" y="1234440"/>
-            <a:ext cx="2532240" cy="5119200"/>
+            <a:ext cx="2531520" cy="5118480"/>
           </a:xfrm>
           <a:prstGeom prst="roundRect">
             <a:avLst>
@@ -16036,7 +16057,7 @@
         <p:spPr>
           <a:xfrm>
             <a:off x="7134120" y="1600200"/>
-            <a:ext cx="775800" cy="775800"/>
+            <a:ext cx="775080" cy="775080"/>
           </a:xfrm>
           <a:prstGeom prst="ellipse">
             <a:avLst/>
@@ -16083,7 +16104,7 @@
         <p:spPr>
           <a:xfrm>
             <a:off x="7330680" y="1792080"/>
-            <a:ext cx="382680" cy="382680"/>
+            <a:ext cx="381960" cy="381960"/>
           </a:xfrm>
           <a:prstGeom prst="rect">
             <a:avLst/>
@@ -16103,7 +16124,7 @@
         <p:spPr>
           <a:xfrm>
             <a:off x="6438600" y="2560320"/>
-            <a:ext cx="2166480" cy="364320"/>
+            <a:ext cx="2165760" cy="363600"/>
           </a:xfrm>
           <a:prstGeom prst="rect">
             <a:avLst/>
@@ -16164,7 +16185,7 @@
         <p:spPr>
           <a:xfrm>
             <a:off x="6484320" y="2971800"/>
-            <a:ext cx="2075040" cy="3198960"/>
+            <a:ext cx="2074320" cy="3198240"/>
           </a:xfrm>
           <a:prstGeom prst="rect">
             <a:avLst/>
@@ -16225,7 +16246,7 @@
         <p:spPr>
           <a:xfrm>
             <a:off x="9109440" y="1234440"/>
-            <a:ext cx="2532240" cy="5119200"/>
+            <a:ext cx="2531520" cy="5118480"/>
           </a:xfrm>
           <a:prstGeom prst="roundRect">
             <a:avLst>
@@ -16270,7 +16291,7 @@
         <p:spPr>
           <a:xfrm>
             <a:off x="9987480" y="1600200"/>
-            <a:ext cx="775800" cy="775800"/>
+            <a:ext cx="775080" cy="775080"/>
           </a:xfrm>
           <a:prstGeom prst="ellipse">
             <a:avLst/>
@@ -16317,7 +16338,7 @@
         <p:spPr>
           <a:xfrm>
             <a:off x="10184400" y="1792080"/>
-            <a:ext cx="382680" cy="382680"/>
+            <a:ext cx="381960" cy="381960"/>
           </a:xfrm>
           <a:prstGeom prst="rect">
             <a:avLst/>
@@ -16337,7 +16358,7 @@
         <p:spPr>
           <a:xfrm>
             <a:off x="9292320" y="2560320"/>
-            <a:ext cx="2166480" cy="364320"/>
+            <a:ext cx="2165760" cy="363600"/>
           </a:xfrm>
           <a:prstGeom prst="rect">
             <a:avLst/>
@@ -16398,7 +16419,7 @@
         <p:spPr>
           <a:xfrm>
             <a:off x="9338040" y="2971800"/>
-            <a:ext cx="2075040" cy="3198960"/>
+            <a:ext cx="2074320" cy="3198240"/>
           </a:xfrm>
           <a:prstGeom prst="rect">
             <a:avLst/>
@@ -16459,7 +16480,7 @@
         <p:spPr>
           <a:xfrm>
             <a:off x="548640" y="6510600"/>
-            <a:ext cx="5484960" cy="272880"/>
+            <a:ext cx="5484240" cy="272160"/>
           </a:xfrm>
           <a:prstGeom prst="rect">
             <a:avLst/>
@@ -16520,7 +16541,7 @@
         <p:spPr>
           <a:xfrm>
             <a:off x="11094480" y="6510600"/>
-            <a:ext cx="547200" cy="272880"/>
+            <a:ext cx="546480" cy="272160"/>
           </a:xfrm>
           <a:prstGeom prst="rect">
             <a:avLst/>
@@ -16622,7 +16643,7 @@
         <p:spPr>
           <a:xfrm>
             <a:off x="548640" y="457200"/>
-            <a:ext cx="382680" cy="382680"/>
+            <a:ext cx="381960" cy="381960"/>
           </a:xfrm>
           <a:prstGeom prst="roundRect">
             <a:avLst>
@@ -16671,7 +16692,7 @@
         <p:spPr>
           <a:xfrm>
             <a:off x="631080" y="539640"/>
-            <a:ext cx="218160" cy="218160"/>
+            <a:ext cx="217440" cy="217440"/>
           </a:xfrm>
           <a:prstGeom prst="rect">
             <a:avLst/>
@@ -16691,7 +16712,7 @@
         <p:spPr>
           <a:xfrm>
             <a:off x="1097280" y="420480"/>
-            <a:ext cx="10544400" cy="455760"/>
+            <a:ext cx="10543680" cy="455040"/>
           </a:xfrm>
           <a:prstGeom prst="rect">
             <a:avLst/>
@@ -16752,7 +16773,7 @@
         <p:spPr>
           <a:xfrm>
             <a:off x="548640" y="1234440"/>
-            <a:ext cx="3244680" cy="5119200"/>
+            <a:ext cx="3243960" cy="5118480"/>
           </a:xfrm>
           <a:prstGeom prst="roundRect">
             <a:avLst>
@@ -16797,7 +16818,7 @@
         <p:spPr>
           <a:xfrm>
             <a:off x="1645920" y="1737360"/>
-            <a:ext cx="1050120" cy="1050120"/>
+            <a:ext cx="1049400" cy="1049400"/>
           </a:xfrm>
           <a:prstGeom prst="ellipse">
             <a:avLst/>
@@ -16844,7 +16865,7 @@
         <p:spPr>
           <a:xfrm>
             <a:off x="1906560" y="2002680"/>
-            <a:ext cx="528840" cy="528840"/>
+            <a:ext cx="528120" cy="528120"/>
           </a:xfrm>
           <a:prstGeom prst="rect">
             <a:avLst/>
@@ -16864,7 +16885,7 @@
         <p:spPr>
           <a:xfrm>
             <a:off x="731520" y="3017520"/>
-            <a:ext cx="2878920" cy="3061800"/>
+            <a:ext cx="2878200" cy="3061080"/>
           </a:xfrm>
           <a:prstGeom prst="rect">
             <a:avLst/>
@@ -16985,7 +17006,7 @@
         <p:spPr>
           <a:xfrm>
             <a:off x="4206240" y="1280160"/>
-            <a:ext cx="7435440" cy="5027760"/>
+            <a:ext cx="7434720" cy="5027040"/>
           </a:xfrm>
           <a:prstGeom prst="rect">
             <a:avLst/>
@@ -17020,7 +17041,7 @@
               <a:buChar char="▪"/>
             </a:pPr>
             <a:r>
-              <a:rPr lang="en-US" sz="1400" b="0" u="none" strike="noStrike">
+              <a:rPr lang="en-US" sz="2100" b="0" u="none" strike="noStrike">
                 <a:solidFill>
                   <a:srgbClr val="3F4A45"/>
                 </a:solidFill>
@@ -17031,7 +17052,7 @@
               </a:rPr>
               <a:t>Encapsulation means bundling data with the methods that operate on it, and restricting direct outside access to that data</a:t>
             </a:r>
-            <a:endParaRPr lang="en-US" sz="1400" b="0" u="none" strike="noStrike">
+            <a:endParaRPr lang="en-US" sz="2100" b="0" u="none" strike="noStrike">
               <a:solidFill>
                 <a:srgbClr val="000000"/>
               </a:solidFill>
@@ -17055,7 +17076,7 @@
               <a:buChar char="▪"/>
             </a:pPr>
             <a:r>
-              <a:rPr lang="en-US" sz="1400" b="0" u="none" strike="noStrike">
+              <a:rPr lang="en-US" sz="2100" b="0" u="none" strike="noStrike">
                 <a:solidFill>
                   <a:srgbClr val="3F4A45"/>
                 </a:solidFill>
@@ -17066,7 +17087,7 @@
               </a:rPr>
               <a:t>A bank account shouldn’t let any code just set balance = -500 directly — changes should only happen through controlled methods like withdraw()</a:t>
             </a:r>
-            <a:endParaRPr lang="en-US" sz="1400" b="0" u="none" strike="noStrike">
+            <a:endParaRPr lang="en-US" sz="2100" b="0" u="none" strike="noStrike">
               <a:solidFill>
                 <a:srgbClr val="000000"/>
               </a:solidFill>
@@ -17090,7 +17111,7 @@
               <a:buChar char="▪"/>
             </a:pPr>
             <a:r>
-              <a:rPr lang="en-US" sz="1400" b="0" u="none" strike="noStrike">
+              <a:rPr lang="en-US" sz="2100" b="0" u="none" strike="noStrike">
                 <a:solidFill>
                   <a:srgbClr val="3F4A45"/>
                 </a:solidFill>
@@ -17101,7 +17122,7 @@
               </a:rPr>
               <a:t>This protects an object from being put into an invalid or inconsistent state by code elsewhere in the program</a:t>
             </a:r>
-            <a:endParaRPr lang="en-US" sz="1400" b="0" u="none" strike="noStrike">
+            <a:endParaRPr lang="en-US" sz="2100" b="0" u="none" strike="noStrike">
               <a:solidFill>
                 <a:srgbClr val="000000"/>
               </a:solidFill>
@@ -17125,7 +17146,7 @@
               <a:buChar char="▪"/>
             </a:pPr>
             <a:r>
-              <a:rPr lang="en-US" sz="1400" b="0" u="none" strike="noStrike">
+              <a:rPr lang="en-US" sz="2100" b="0" u="none" strike="noStrike">
                 <a:solidFill>
                   <a:srgbClr val="3F4A45"/>
                 </a:solidFill>
@@ -17136,7 +17157,7 @@
               </a:rPr>
               <a:t>Python doesn’t enforce this with hard restrictions the way some languages do — it relies on naming conventions and trust, which is a deliberate design choice ("we’re all consenting adults here")</a:t>
             </a:r>
-            <a:endParaRPr lang="en-US" sz="1400" b="0" u="none" strike="noStrike">
+            <a:endParaRPr lang="en-US" sz="2100" b="0" u="none" strike="noStrike">
               <a:solidFill>
                 <a:srgbClr val="000000"/>
               </a:solidFill>
@@ -17156,7 +17177,7 @@
         <p:spPr>
           <a:xfrm>
             <a:off x="548640" y="6510600"/>
-            <a:ext cx="5484960" cy="272880"/>
+            <a:ext cx="5484240" cy="272160"/>
           </a:xfrm>
           <a:prstGeom prst="rect">
             <a:avLst/>
@@ -17217,7 +17238,7 @@
         <p:spPr>
           <a:xfrm>
             <a:off x="11094480" y="6510600"/>
-            <a:ext cx="547200" cy="272880"/>
+            <a:ext cx="546480" cy="272160"/>
           </a:xfrm>
           <a:prstGeom prst="rect">
             <a:avLst/>
@@ -17319,7 +17340,7 @@
         <p:spPr>
           <a:xfrm>
             <a:off x="548640" y="457200"/>
-            <a:ext cx="382680" cy="382680"/>
+            <a:ext cx="381960" cy="381960"/>
           </a:xfrm>
           <a:prstGeom prst="roundRect">
             <a:avLst>
@@ -17368,7 +17389,7 @@
         <p:spPr>
           <a:xfrm>
             <a:off x="631080" y="539640"/>
-            <a:ext cx="218160" cy="218160"/>
+            <a:ext cx="217440" cy="217440"/>
           </a:xfrm>
           <a:prstGeom prst="rect">
             <a:avLst/>
@@ -17388,7 +17409,7 @@
         <p:spPr>
           <a:xfrm>
             <a:off x="1097280" y="420480"/>
-            <a:ext cx="10544400" cy="455760"/>
+            <a:ext cx="10543680" cy="455040"/>
           </a:xfrm>
           <a:prstGeom prst="rect">
             <a:avLst/>
@@ -17449,7 +17470,7 @@
         <p:spPr>
           <a:xfrm>
             <a:off x="548640" y="1234440"/>
-            <a:ext cx="11093040" cy="1196280"/>
+            <a:ext cx="11092320" cy="1195560"/>
           </a:xfrm>
           <a:prstGeom prst="rect">
             <a:avLst/>
@@ -17585,7 +17606,7 @@
         <p:spPr>
           <a:xfrm>
             <a:off x="548640" y="2569320"/>
-            <a:ext cx="11093040" cy="3784320"/>
+            <a:ext cx="11092320" cy="3783600"/>
           </a:xfrm>
           <a:prstGeom prst="roundRect">
             <a:avLst>
@@ -17630,7 +17651,7 @@
         <p:spPr>
           <a:xfrm>
             <a:off x="868680" y="2752200"/>
-            <a:ext cx="10452960" cy="3418560"/>
+            <a:ext cx="10452240" cy="3417840"/>
           </a:xfrm>
           <a:prstGeom prst="rect">
             <a:avLst/>
@@ -17961,7 +17982,7 @@
         <p:spPr>
           <a:xfrm>
             <a:off x="548640" y="6510600"/>
-            <a:ext cx="5484960" cy="272880"/>
+            <a:ext cx="5484240" cy="272160"/>
           </a:xfrm>
           <a:prstGeom prst="rect">
             <a:avLst/>
@@ -18022,7 +18043,7 @@
         <p:spPr>
           <a:xfrm>
             <a:off x="11094480" y="6510600"/>
-            <a:ext cx="547200" cy="272880"/>
+            <a:ext cx="546480" cy="272160"/>
           </a:xfrm>
           <a:prstGeom prst="rect">
             <a:avLst/>
@@ -18124,7 +18145,7 @@
         <p:spPr>
           <a:xfrm>
             <a:off x="548640" y="457200"/>
-            <a:ext cx="382680" cy="382680"/>
+            <a:ext cx="381960" cy="381960"/>
           </a:xfrm>
           <a:prstGeom prst="roundRect">
             <a:avLst>
@@ -18173,7 +18194,7 @@
         <p:spPr>
           <a:xfrm>
             <a:off x="631080" y="539640"/>
-            <a:ext cx="218160" cy="218160"/>
+            <a:ext cx="217440" cy="217440"/>
           </a:xfrm>
           <a:prstGeom prst="rect">
             <a:avLst/>
@@ -18193,7 +18214,7 @@
         <p:spPr>
           <a:xfrm>
             <a:off x="1097280" y="420480"/>
-            <a:ext cx="10544400" cy="455760"/>
+            <a:ext cx="10543680" cy="455040"/>
           </a:xfrm>
           <a:prstGeom prst="rect">
             <a:avLst/>
@@ -18254,7 +18275,7 @@
         <p:spPr>
           <a:xfrm>
             <a:off x="548640" y="1234440"/>
-            <a:ext cx="11093040" cy="1196280"/>
+            <a:ext cx="11092320" cy="1195560"/>
           </a:xfrm>
           <a:prstGeom prst="rect">
             <a:avLst/>
@@ -18390,7 +18411,7 @@
         <p:spPr>
           <a:xfrm>
             <a:off x="548640" y="2569320"/>
-            <a:ext cx="11093040" cy="3784320"/>
+            <a:ext cx="11092320" cy="3783600"/>
           </a:xfrm>
           <a:prstGeom prst="roundRect">
             <a:avLst>
@@ -18435,7 +18456,7 @@
         <p:spPr>
           <a:xfrm>
             <a:off x="868680" y="2752200"/>
-            <a:ext cx="10452960" cy="3418560"/>
+            <a:ext cx="10452240" cy="3417840"/>
           </a:xfrm>
           <a:prstGeom prst="rect">
             <a:avLst/>
@@ -18976,7 +18997,7 @@
         <p:spPr>
           <a:xfrm>
             <a:off x="548640" y="6510600"/>
-            <a:ext cx="5484960" cy="272880"/>
+            <a:ext cx="5484240" cy="272160"/>
           </a:xfrm>
           <a:prstGeom prst="rect">
             <a:avLst/>
@@ -19037,7 +19058,7 @@
         <p:spPr>
           <a:xfrm>
             <a:off x="11094480" y="6510600"/>
-            <a:ext cx="547200" cy="272880"/>
+            <a:ext cx="546480" cy="272160"/>
           </a:xfrm>
           <a:prstGeom prst="rect">
             <a:avLst/>
@@ -19139,7 +19160,7 @@
         <p:spPr>
           <a:xfrm>
             <a:off x="548640" y="457200"/>
-            <a:ext cx="382680" cy="382680"/>
+            <a:ext cx="381960" cy="381960"/>
           </a:xfrm>
           <a:prstGeom prst="roundRect">
             <a:avLst>
@@ -19188,7 +19209,7 @@
         <p:spPr>
           <a:xfrm>
             <a:off x="631080" y="539640"/>
-            <a:ext cx="218160" cy="218160"/>
+            <a:ext cx="217440" cy="217440"/>
           </a:xfrm>
           <a:prstGeom prst="rect">
             <a:avLst/>
@@ -19208,7 +19229,7 @@
         <p:spPr>
           <a:xfrm>
             <a:off x="1097280" y="420480"/>
-            <a:ext cx="10544400" cy="455760"/>
+            <a:ext cx="10543680" cy="455040"/>
           </a:xfrm>
           <a:prstGeom prst="rect">
             <a:avLst/>
@@ -19269,7 +19290,7 @@
         <p:spPr>
           <a:xfrm>
             <a:off x="548640" y="1396080"/>
-            <a:ext cx="309600" cy="309600"/>
+            <a:ext cx="308880" cy="308880"/>
           </a:xfrm>
           <a:prstGeom prst="ellipse">
             <a:avLst/>
@@ -19316,7 +19337,7 @@
         <p:spPr>
           <a:xfrm>
             <a:off x="617040" y="1464480"/>
-            <a:ext cx="172800" cy="172800"/>
+            <a:ext cx="172080" cy="172080"/>
           </a:xfrm>
           <a:prstGeom prst="rect">
             <a:avLst/>
@@ -19336,7 +19357,7 @@
         <p:spPr>
           <a:xfrm>
             <a:off x="1060560" y="1234440"/>
-            <a:ext cx="10580760" cy="632880"/>
+            <a:ext cx="10580040" cy="632160"/>
           </a:xfrm>
           <a:prstGeom prst="rect">
             <a:avLst/>
@@ -19397,7 +19418,7 @@
         <p:spPr>
           <a:xfrm>
             <a:off x="548640" y="2030400"/>
-            <a:ext cx="309600" cy="309600"/>
+            <a:ext cx="308880" cy="308880"/>
           </a:xfrm>
           <a:prstGeom prst="ellipse">
             <a:avLst/>
@@ -19444,7 +19465,7 @@
         <p:spPr>
           <a:xfrm>
             <a:off x="617040" y="2098800"/>
-            <a:ext cx="172800" cy="172800"/>
+            <a:ext cx="172080" cy="172080"/>
           </a:xfrm>
           <a:prstGeom prst="rect">
             <a:avLst/>
@@ -19464,7 +19485,7 @@
         <p:spPr>
           <a:xfrm>
             <a:off x="1060560" y="1868760"/>
-            <a:ext cx="10580760" cy="632880"/>
+            <a:ext cx="10580040" cy="632160"/>
           </a:xfrm>
           <a:prstGeom prst="rect">
             <a:avLst/>
@@ -19525,7 +19546,7 @@
         <p:spPr>
           <a:xfrm>
             <a:off x="548640" y="2665080"/>
-            <a:ext cx="309600" cy="309600"/>
+            <a:ext cx="308880" cy="308880"/>
           </a:xfrm>
           <a:prstGeom prst="ellipse">
             <a:avLst/>
@@ -19572,7 +19593,7 @@
         <p:spPr>
           <a:xfrm>
             <a:off x="617040" y="2733480"/>
-            <a:ext cx="172800" cy="172800"/>
+            <a:ext cx="172080" cy="172080"/>
           </a:xfrm>
           <a:prstGeom prst="rect">
             <a:avLst/>
@@ -19592,7 +19613,7 @@
         <p:spPr>
           <a:xfrm>
             <a:off x="1060560" y="2503080"/>
-            <a:ext cx="10580760" cy="632880"/>
+            <a:ext cx="10580040" cy="632160"/>
           </a:xfrm>
           <a:prstGeom prst="rect">
             <a:avLst/>
@@ -19653,7 +19674,7 @@
         <p:spPr>
           <a:xfrm>
             <a:off x="548640" y="3299400"/>
-            <a:ext cx="309600" cy="309600"/>
+            <a:ext cx="308880" cy="308880"/>
           </a:xfrm>
           <a:prstGeom prst="ellipse">
             <a:avLst/>
@@ -19700,7 +19721,7 @@
         <p:spPr>
           <a:xfrm>
             <a:off x="617040" y="3367800"/>
-            <a:ext cx="172800" cy="172800"/>
+            <a:ext cx="172080" cy="172080"/>
           </a:xfrm>
           <a:prstGeom prst="rect">
             <a:avLst/>
@@ -19720,7 +19741,7 @@
         <p:spPr>
           <a:xfrm>
             <a:off x="1060560" y="3137400"/>
-            <a:ext cx="10580760" cy="632880"/>
+            <a:ext cx="10580040" cy="632160"/>
           </a:xfrm>
           <a:prstGeom prst="rect">
             <a:avLst/>
@@ -19781,7 +19802,7 @@
         <p:spPr>
           <a:xfrm>
             <a:off x="548640" y="3933720"/>
-            <a:ext cx="309600" cy="309600"/>
+            <a:ext cx="308880" cy="308880"/>
           </a:xfrm>
           <a:prstGeom prst="ellipse">
             <a:avLst/>
@@ -19828,7 +19849,7 @@
         <p:spPr>
           <a:xfrm>
             <a:off x="617040" y="4002120"/>
-            <a:ext cx="172800" cy="172800"/>
+            <a:ext cx="172080" cy="172080"/>
           </a:xfrm>
           <a:prstGeom prst="rect">
             <a:avLst/>
@@ -19848,7 +19869,7 @@
         <p:spPr>
           <a:xfrm>
             <a:off x="1060560" y="3772080"/>
-            <a:ext cx="10580760" cy="632880"/>
+            <a:ext cx="10580040" cy="632160"/>
           </a:xfrm>
           <a:prstGeom prst="rect">
             <a:avLst/>
@@ -19909,7 +19930,7 @@
         <p:spPr>
           <a:xfrm>
             <a:off x="548640" y="4568040"/>
-            <a:ext cx="309600" cy="309600"/>
+            <a:ext cx="308880" cy="308880"/>
           </a:xfrm>
           <a:prstGeom prst="ellipse">
             <a:avLst/>
@@ -19956,7 +19977,7 @@
         <p:spPr>
           <a:xfrm>
             <a:off x="617040" y="4636440"/>
-            <a:ext cx="172800" cy="172800"/>
+            <a:ext cx="172080" cy="172080"/>
           </a:xfrm>
           <a:prstGeom prst="rect">
             <a:avLst/>
@@ -19976,7 +19997,7 @@
         <p:spPr>
           <a:xfrm>
             <a:off x="1060560" y="4406400"/>
-            <a:ext cx="10580760" cy="632880"/>
+            <a:ext cx="10580040" cy="632160"/>
           </a:xfrm>
           <a:prstGeom prst="rect">
             <a:avLst/>
@@ -20037,7 +20058,7 @@
         <p:spPr>
           <a:xfrm>
             <a:off x="548640" y="5202360"/>
-            <a:ext cx="309600" cy="309600"/>
+            <a:ext cx="308880" cy="308880"/>
           </a:xfrm>
           <a:prstGeom prst="ellipse">
             <a:avLst/>
@@ -20084,7 +20105,7 @@
         <p:spPr>
           <a:xfrm>
             <a:off x="617040" y="5270760"/>
-            <a:ext cx="172800" cy="172800"/>
+            <a:ext cx="172080" cy="172080"/>
           </a:xfrm>
           <a:prstGeom prst="rect">
             <a:avLst/>
@@ -20104,7 +20125,7 @@
         <p:spPr>
           <a:xfrm>
             <a:off x="1060560" y="5040720"/>
-            <a:ext cx="10580760" cy="632880"/>
+            <a:ext cx="10580040" cy="632160"/>
           </a:xfrm>
           <a:prstGeom prst="rect">
             <a:avLst/>
@@ -20165,7 +20186,7 @@
         <p:spPr>
           <a:xfrm>
             <a:off x="548640" y="5836680"/>
-            <a:ext cx="309600" cy="309600"/>
+            <a:ext cx="308880" cy="308880"/>
           </a:xfrm>
           <a:prstGeom prst="ellipse">
             <a:avLst/>
@@ -20212,7 +20233,7 @@
         <p:spPr>
           <a:xfrm>
             <a:off x="617040" y="5905080"/>
-            <a:ext cx="172800" cy="172800"/>
+            <a:ext cx="172080" cy="172080"/>
           </a:xfrm>
           <a:prstGeom prst="rect">
             <a:avLst/>
@@ -20232,7 +20253,7 @@
         <p:spPr>
           <a:xfrm>
             <a:off x="1060560" y="5675040"/>
-            <a:ext cx="10580760" cy="632880"/>
+            <a:ext cx="10580040" cy="632160"/>
           </a:xfrm>
           <a:prstGeom prst="rect">
             <a:avLst/>
@@ -20293,7 +20314,7 @@
         <p:spPr>
           <a:xfrm>
             <a:off x="548640" y="6510600"/>
-            <a:ext cx="5484960" cy="272880"/>
+            <a:ext cx="5484240" cy="272160"/>
           </a:xfrm>
           <a:prstGeom prst="rect">
             <a:avLst/>
@@ -20354,7 +20375,7 @@
         <p:spPr>
           <a:xfrm>
             <a:off x="11094480" y="6510600"/>
-            <a:ext cx="547200" cy="272880"/>
+            <a:ext cx="546480" cy="272160"/>
           </a:xfrm>
           <a:prstGeom prst="rect">
             <a:avLst/>
@@ -20456,7 +20477,7 @@
         <p:spPr>
           <a:xfrm>
             <a:off x="548640" y="457200"/>
-            <a:ext cx="382680" cy="382680"/>
+            <a:ext cx="381960" cy="381960"/>
           </a:xfrm>
           <a:prstGeom prst="roundRect">
             <a:avLst>
@@ -20505,7 +20526,7 @@
         <p:spPr>
           <a:xfrm>
             <a:off x="631080" y="539640"/>
-            <a:ext cx="218160" cy="218160"/>
+            <a:ext cx="217440" cy="217440"/>
           </a:xfrm>
           <a:prstGeom prst="rect">
             <a:avLst/>
@@ -20525,7 +20546,7 @@
         <p:spPr>
           <a:xfrm>
             <a:off x="1097280" y="420480"/>
-            <a:ext cx="10544400" cy="455760"/>
+            <a:ext cx="10543680" cy="455040"/>
           </a:xfrm>
           <a:prstGeom prst="rect">
             <a:avLst/>
@@ -20586,7 +20607,7 @@
         <p:spPr>
           <a:xfrm>
             <a:off x="548640" y="1234440"/>
-            <a:ext cx="11093040" cy="5119200"/>
+            <a:ext cx="11092320" cy="5118480"/>
           </a:xfrm>
           <a:prstGeom prst="roundRect">
             <a:avLst>
@@ -20631,7 +20652,7 @@
         <p:spPr>
           <a:xfrm>
             <a:off x="868680" y="1435680"/>
-            <a:ext cx="10452960" cy="364320"/>
+            <a:ext cx="10452240" cy="363600"/>
           </a:xfrm>
           <a:prstGeom prst="rect">
             <a:avLst/>
@@ -20692,7 +20713,7 @@
         <p:spPr>
           <a:xfrm>
             <a:off x="868680" y="2473560"/>
-            <a:ext cx="309600" cy="309600"/>
+            <a:ext cx="308880" cy="308880"/>
           </a:xfrm>
           <a:prstGeom prst="ellipse">
             <a:avLst/>
@@ -20735,7 +20756,7 @@
         <p:spPr>
           <a:xfrm>
             <a:off x="868680" y="2473560"/>
-            <a:ext cx="309600" cy="309600"/>
+            <a:ext cx="308880" cy="308880"/>
           </a:xfrm>
           <a:prstGeom prst="rect">
             <a:avLst/>
@@ -20796,7 +20817,7 @@
         <p:spPr>
           <a:xfrm>
             <a:off x="1408320" y="1920240"/>
-            <a:ext cx="9913320" cy="1415880"/>
+            <a:ext cx="9912600" cy="1415160"/>
           </a:xfrm>
           <a:prstGeom prst="rect">
             <a:avLst/>
@@ -20857,7 +20878,7 @@
         <p:spPr>
           <a:xfrm>
             <a:off x="868680" y="3890880"/>
-            <a:ext cx="309600" cy="309600"/>
+            <a:ext cx="308880" cy="308880"/>
           </a:xfrm>
           <a:prstGeom prst="ellipse">
             <a:avLst/>
@@ -20900,7 +20921,7 @@
         <p:spPr>
           <a:xfrm>
             <a:off x="868680" y="3890880"/>
-            <a:ext cx="309600" cy="309600"/>
+            <a:ext cx="308880" cy="308880"/>
           </a:xfrm>
           <a:prstGeom prst="rect">
             <a:avLst/>
@@ -20961,7 +20982,7 @@
         <p:spPr>
           <a:xfrm>
             <a:off x="1408320" y="3337560"/>
-            <a:ext cx="9913320" cy="1415880"/>
+            <a:ext cx="9912600" cy="1415160"/>
           </a:xfrm>
           <a:prstGeom prst="rect">
             <a:avLst/>
@@ -21022,7 +21043,7 @@
         <p:spPr>
           <a:xfrm>
             <a:off x="868680" y="5308200"/>
-            <a:ext cx="309600" cy="309600"/>
+            <a:ext cx="308880" cy="308880"/>
           </a:xfrm>
           <a:prstGeom prst="ellipse">
             <a:avLst/>
@@ -21065,7 +21086,7 @@
         <p:spPr>
           <a:xfrm>
             <a:off x="868680" y="5308200"/>
-            <a:ext cx="309600" cy="309600"/>
+            <a:ext cx="308880" cy="308880"/>
           </a:xfrm>
           <a:prstGeom prst="rect">
             <a:avLst/>
@@ -21126,7 +21147,7 @@
         <p:spPr>
           <a:xfrm>
             <a:off x="1408320" y="4754880"/>
-            <a:ext cx="9913320" cy="1415880"/>
+            <a:ext cx="9912600" cy="1415160"/>
           </a:xfrm>
           <a:prstGeom prst="rect">
             <a:avLst/>
@@ -21187,7 +21208,7 @@
         <p:spPr>
           <a:xfrm>
             <a:off x="548640" y="6510600"/>
-            <a:ext cx="5484960" cy="272880"/>
+            <a:ext cx="5484240" cy="272160"/>
           </a:xfrm>
           <a:prstGeom prst="rect">
             <a:avLst/>
@@ -21248,7 +21269,7 @@
         <p:spPr>
           <a:xfrm>
             <a:off x="11094480" y="6510600"/>
-            <a:ext cx="547200" cy="272880"/>
+            <a:ext cx="546480" cy="272160"/>
           </a:xfrm>
           <a:prstGeom prst="rect">
             <a:avLst/>
@@ -21350,7 +21371,7 @@
         <p:spPr>
           <a:xfrm>
             <a:off x="548640" y="457200"/>
-            <a:ext cx="382680" cy="382680"/>
+            <a:ext cx="381960" cy="381960"/>
           </a:xfrm>
           <a:prstGeom prst="roundRect">
             <a:avLst>
@@ -21399,7 +21420,7 @@
         <p:spPr>
           <a:xfrm>
             <a:off x="631080" y="539640"/>
-            <a:ext cx="218160" cy="218160"/>
+            <a:ext cx="217440" cy="217440"/>
           </a:xfrm>
           <a:prstGeom prst="rect">
             <a:avLst/>
@@ -21419,7 +21440,7 @@
         <p:spPr>
           <a:xfrm>
             <a:off x="1097280" y="420480"/>
-            <a:ext cx="10544400" cy="455760"/>
+            <a:ext cx="10543680" cy="455040"/>
           </a:xfrm>
           <a:prstGeom prst="rect">
             <a:avLst/>
@@ -21480,7 +21501,7 @@
         <p:spPr>
           <a:xfrm>
             <a:off x="548640" y="1234440"/>
-            <a:ext cx="3244680" cy="5119200"/>
+            <a:ext cx="3243960" cy="5118480"/>
           </a:xfrm>
           <a:prstGeom prst="roundRect">
             <a:avLst>
@@ -21525,7 +21546,7 @@
         <p:spPr>
           <a:xfrm>
             <a:off x="1645920" y="1737360"/>
-            <a:ext cx="1050120" cy="1050120"/>
+            <a:ext cx="1049400" cy="1049400"/>
           </a:xfrm>
           <a:prstGeom prst="ellipse">
             <a:avLst/>
@@ -21572,7 +21593,7 @@
         <p:spPr>
           <a:xfrm>
             <a:off x="1906560" y="2002680"/>
-            <a:ext cx="528840" cy="528840"/>
+            <a:ext cx="528120" cy="528120"/>
           </a:xfrm>
           <a:prstGeom prst="rect">
             <a:avLst/>
@@ -21592,7 +21613,7 @@
         <p:spPr>
           <a:xfrm>
             <a:off x="731520" y="3017520"/>
-            <a:ext cx="2878920" cy="3061800"/>
+            <a:ext cx="2878200" cy="3061080"/>
           </a:xfrm>
           <a:prstGeom prst="rect">
             <a:avLst/>
@@ -21713,7 +21734,7 @@
         <p:spPr>
           <a:xfrm>
             <a:off x="4206240" y="1280160"/>
-            <a:ext cx="7435440" cy="5027760"/>
+            <a:ext cx="7434720" cy="5027040"/>
           </a:xfrm>
           <a:prstGeom prst="rect">
             <a:avLst/>
@@ -21748,7 +21769,7 @@
               <a:buChar char="▪"/>
             </a:pPr>
             <a:r>
-              <a:rPr lang="en-US" sz="1400" b="0" u="none" strike="noStrike">
+              <a:rPr lang="en-US" sz="2100" b="0" u="none" strike="noStrike">
                 <a:solidFill>
                   <a:srgbClr val="3F4A45"/>
                 </a:solidFill>
@@ -21759,7 +21780,7 @@
               </a:rPr>
               <a:t>Abstraction means hiding complicated internal details behind a simple interface — the user only needs to know what a method does, not how</a:t>
             </a:r>
-            <a:endParaRPr lang="en-US" sz="1400" b="0" u="none" strike="noStrike">
+            <a:endParaRPr lang="en-US" sz="2100" b="0" u="none" strike="noStrike">
               <a:solidFill>
                 <a:srgbClr val="000000"/>
               </a:solidFill>
@@ -21783,7 +21804,7 @@
               <a:buChar char="▪"/>
             </a:pPr>
             <a:r>
-              <a:rPr lang="en-US" sz="1400" b="0" u="none" strike="noStrike">
+              <a:rPr lang="en-US" sz="2100" b="0" u="none" strike="noStrike">
                 <a:solidFill>
                   <a:srgbClr val="3F4A45"/>
                 </a:solidFill>
@@ -21794,7 +21815,7 @@
               </a:rPr>
               <a:t>You call car.start_engine() without knowing anything about fuel injection or ignition timing — the complexity is hidden behind a simple method name</a:t>
             </a:r>
-            <a:endParaRPr lang="en-US" sz="1400" b="0" u="none" strike="noStrike">
+            <a:endParaRPr lang="en-US" sz="2100" b="0" u="none" strike="noStrike">
               <a:solidFill>
                 <a:srgbClr val="000000"/>
               </a:solidFill>
@@ -21818,7 +21839,7 @@
               <a:buChar char="▪"/>
             </a:pPr>
             <a:r>
-              <a:rPr lang="en-US" sz="1400" b="0" u="none" strike="noStrike">
+              <a:rPr lang="en-US" sz="2100" b="0" u="none" strike="noStrike">
                 <a:solidFill>
                   <a:srgbClr val="3F4A45"/>
                 </a:solidFill>
@@ -21829,7 +21850,7 @@
               </a:rPr>
               <a:t>In Python, this often shows up as an abstract base class — a class that defines what methods a subclass must have, without saying how they work</a:t>
             </a:r>
-            <a:endParaRPr lang="en-US" sz="1400" b="0" u="none" strike="noStrike">
+            <a:endParaRPr lang="en-US" sz="2100" b="0" u="none" strike="noStrike">
               <a:solidFill>
                 <a:srgbClr val="000000"/>
               </a:solidFill>
@@ -21853,7 +21874,7 @@
               <a:buChar char="▪"/>
             </a:pPr>
             <a:r>
-              <a:rPr lang="en-US" sz="1400" b="0" u="none" strike="noStrike">
+              <a:rPr lang="en-US" sz="2100" b="0" u="none" strike="noStrike">
                 <a:solidFill>
                   <a:srgbClr val="3F4A45"/>
                 </a:solidFill>
@@ -21864,7 +21885,7 @@
               </a:rPr>
               <a:t>Abstraction and encapsulation work together, but they solve different problems: encapsulation protects data, abstraction simplifies interfaces</a:t>
             </a:r>
-            <a:endParaRPr lang="en-US" sz="1400" b="0" u="none" strike="noStrike">
+            <a:endParaRPr lang="en-US" sz="2100" b="0" u="none" strike="noStrike">
               <a:solidFill>
                 <a:srgbClr val="000000"/>
               </a:solidFill>
@@ -21884,7 +21905,7 @@
         <p:spPr>
           <a:xfrm>
             <a:off x="548640" y="6510600"/>
-            <a:ext cx="5484960" cy="272880"/>
+            <a:ext cx="5484240" cy="272160"/>
           </a:xfrm>
           <a:prstGeom prst="rect">
             <a:avLst/>
@@ -21945,7 +21966,7 @@
         <p:spPr>
           <a:xfrm>
             <a:off x="11094480" y="6510600"/>
-            <a:ext cx="547200" cy="272880"/>
+            <a:ext cx="546480" cy="272160"/>
           </a:xfrm>
           <a:prstGeom prst="rect">
             <a:avLst/>
@@ -22047,7 +22068,7 @@
         <p:spPr>
           <a:xfrm>
             <a:off x="548640" y="457200"/>
-            <a:ext cx="382680" cy="382680"/>
+            <a:ext cx="381960" cy="381960"/>
           </a:xfrm>
           <a:prstGeom prst="roundRect">
             <a:avLst>
@@ -22096,7 +22117,7 @@
         <p:spPr>
           <a:xfrm>
             <a:off x="631080" y="539640"/>
-            <a:ext cx="218160" cy="218160"/>
+            <a:ext cx="217440" cy="217440"/>
           </a:xfrm>
           <a:prstGeom prst="rect">
             <a:avLst/>
@@ -22116,7 +22137,7 @@
         <p:spPr>
           <a:xfrm>
             <a:off x="1097280" y="420480"/>
-            <a:ext cx="10544400" cy="455760"/>
+            <a:ext cx="10543680" cy="455040"/>
           </a:xfrm>
           <a:prstGeom prst="rect">
             <a:avLst/>
@@ -22177,7 +22198,7 @@
         <p:spPr>
           <a:xfrm>
             <a:off x="548640" y="1234440"/>
-            <a:ext cx="11093040" cy="1196280"/>
+            <a:ext cx="11092320" cy="1195560"/>
           </a:xfrm>
           <a:prstGeom prst="rect">
             <a:avLst/>
@@ -22313,7 +22334,7 @@
         <p:spPr>
           <a:xfrm>
             <a:off x="548640" y="2569320"/>
-            <a:ext cx="11093040" cy="3784320"/>
+            <a:ext cx="11092320" cy="3783600"/>
           </a:xfrm>
           <a:prstGeom prst="roundRect">
             <a:avLst>
@@ -22358,7 +22379,7 @@
         <p:spPr>
           <a:xfrm>
             <a:off x="868680" y="2752200"/>
-            <a:ext cx="10452960" cy="3418560"/>
+            <a:ext cx="10452240" cy="3417840"/>
           </a:xfrm>
           <a:prstGeom prst="rect">
             <a:avLst/>
@@ -22869,7 +22890,7 @@
         <p:spPr>
           <a:xfrm>
             <a:off x="548640" y="6510600"/>
-            <a:ext cx="5484960" cy="272880"/>
+            <a:ext cx="5484240" cy="272160"/>
           </a:xfrm>
           <a:prstGeom prst="rect">
             <a:avLst/>
@@ -22930,7 +22951,7 @@
         <p:spPr>
           <a:xfrm>
             <a:off x="11094480" y="6510600"/>
-            <a:ext cx="547200" cy="272880"/>
+            <a:ext cx="546480" cy="272160"/>
           </a:xfrm>
           <a:prstGeom prst="rect">
             <a:avLst/>
@@ -23032,7 +23053,7 @@
         <p:spPr>
           <a:xfrm>
             <a:off x="548640" y="457200"/>
-            <a:ext cx="382680" cy="382680"/>
+            <a:ext cx="381960" cy="381960"/>
           </a:xfrm>
           <a:prstGeom prst="roundRect">
             <a:avLst>
@@ -23081,7 +23102,7 @@
         <p:spPr>
           <a:xfrm>
             <a:off x="631080" y="539640"/>
-            <a:ext cx="218160" cy="218160"/>
+            <a:ext cx="217440" cy="217440"/>
           </a:xfrm>
           <a:prstGeom prst="rect">
             <a:avLst/>
@@ -23101,7 +23122,7 @@
         <p:spPr>
           <a:xfrm>
             <a:off x="1097280" y="420480"/>
-            <a:ext cx="10544400" cy="455760"/>
+            <a:ext cx="10543680" cy="455040"/>
           </a:xfrm>
           <a:prstGeom prst="rect">
             <a:avLst/>
@@ -23162,7 +23183,7 @@
         <p:spPr>
           <a:xfrm>
             <a:off x="548640" y="1234440"/>
-            <a:ext cx="11093040" cy="5119200"/>
+            <a:ext cx="11092320" cy="5118480"/>
           </a:xfrm>
           <a:prstGeom prst="roundRect">
             <a:avLst>
@@ -23207,7 +23228,7 @@
         <p:spPr>
           <a:xfrm>
             <a:off x="868680" y="1435680"/>
-            <a:ext cx="10452960" cy="364320"/>
+            <a:ext cx="10452240" cy="363600"/>
           </a:xfrm>
           <a:prstGeom prst="rect">
             <a:avLst/>
@@ -23268,7 +23289,7 @@
         <p:spPr>
           <a:xfrm>
             <a:off x="868680" y="2473560"/>
-            <a:ext cx="309600" cy="309600"/>
+            <a:ext cx="308880" cy="308880"/>
           </a:xfrm>
           <a:prstGeom prst="ellipse">
             <a:avLst/>
@@ -23311,7 +23332,7 @@
         <p:spPr>
           <a:xfrm>
             <a:off x="868680" y="2473560"/>
-            <a:ext cx="309600" cy="309600"/>
+            <a:ext cx="308880" cy="308880"/>
           </a:xfrm>
           <a:prstGeom prst="rect">
             <a:avLst/>
@@ -23372,7 +23393,7 @@
         <p:spPr>
           <a:xfrm>
             <a:off x="1408320" y="1920240"/>
-            <a:ext cx="9913320" cy="1415880"/>
+            <a:ext cx="9912600" cy="1415160"/>
           </a:xfrm>
           <a:prstGeom prst="rect">
             <a:avLst/>
@@ -23433,7 +23454,7 @@
         <p:spPr>
           <a:xfrm>
             <a:off x="868680" y="3890880"/>
-            <a:ext cx="309600" cy="309600"/>
+            <a:ext cx="308880" cy="308880"/>
           </a:xfrm>
           <a:prstGeom prst="ellipse">
             <a:avLst/>
@@ -23476,7 +23497,7 @@
         <p:spPr>
           <a:xfrm>
             <a:off x="868680" y="3890880"/>
-            <a:ext cx="309600" cy="309600"/>
+            <a:ext cx="308880" cy="308880"/>
           </a:xfrm>
           <a:prstGeom prst="rect">
             <a:avLst/>
@@ -23537,7 +23558,7 @@
         <p:spPr>
           <a:xfrm>
             <a:off x="1408320" y="3337560"/>
-            <a:ext cx="9913320" cy="1415880"/>
+            <a:ext cx="9912600" cy="1415160"/>
           </a:xfrm>
           <a:prstGeom prst="rect">
             <a:avLst/>
@@ -23598,7 +23619,7 @@
         <p:spPr>
           <a:xfrm>
             <a:off x="868680" y="5308200"/>
-            <a:ext cx="309600" cy="309600"/>
+            <a:ext cx="308880" cy="308880"/>
           </a:xfrm>
           <a:prstGeom prst="ellipse">
             <a:avLst/>
@@ -23641,7 +23662,7 @@
         <p:spPr>
           <a:xfrm>
             <a:off x="868680" y="5308200"/>
-            <a:ext cx="309600" cy="309600"/>
+            <a:ext cx="308880" cy="308880"/>
           </a:xfrm>
           <a:prstGeom prst="rect">
             <a:avLst/>
@@ -23702,7 +23723,7 @@
         <p:spPr>
           <a:xfrm>
             <a:off x="1408320" y="4754880"/>
-            <a:ext cx="9913320" cy="1415880"/>
+            <a:ext cx="9912600" cy="1415160"/>
           </a:xfrm>
           <a:prstGeom prst="rect">
             <a:avLst/>
@@ -23763,7 +23784,7 @@
         <p:spPr>
           <a:xfrm>
             <a:off x="548640" y="6510600"/>
-            <a:ext cx="5484960" cy="272880"/>
+            <a:ext cx="5484240" cy="272160"/>
           </a:xfrm>
           <a:prstGeom prst="rect">
             <a:avLst/>
@@ -23824,7 +23845,7 @@
         <p:spPr>
           <a:xfrm>
             <a:off x="11094480" y="6510600"/>
-            <a:ext cx="547200" cy="272880"/>
+            <a:ext cx="546480" cy="272160"/>
           </a:xfrm>
           <a:prstGeom prst="rect">
             <a:avLst/>
@@ -23926,7 +23947,7 @@
         <p:spPr>
           <a:xfrm>
             <a:off x="548640" y="457200"/>
-            <a:ext cx="382680" cy="382680"/>
+            <a:ext cx="381960" cy="381960"/>
           </a:xfrm>
           <a:prstGeom prst="roundRect">
             <a:avLst>
@@ -23975,7 +23996,7 @@
         <p:spPr>
           <a:xfrm>
             <a:off x="631080" y="539640"/>
-            <a:ext cx="218160" cy="218160"/>
+            <a:ext cx="217440" cy="217440"/>
           </a:xfrm>
           <a:prstGeom prst="rect">
             <a:avLst/>
@@ -23995,7 +24016,7 @@
         <p:spPr>
           <a:xfrm>
             <a:off x="1097280" y="420480"/>
-            <a:ext cx="10544400" cy="455760"/>
+            <a:ext cx="10543680" cy="455040"/>
           </a:xfrm>
           <a:prstGeom prst="rect">
             <a:avLst/>
@@ -24056,7 +24077,7 @@
         <p:spPr>
           <a:xfrm>
             <a:off x="548640" y="1234440"/>
-            <a:ext cx="3244680" cy="5119200"/>
+            <a:ext cx="3243960" cy="5118480"/>
           </a:xfrm>
           <a:prstGeom prst="roundRect">
             <a:avLst>
@@ -24101,7 +24122,7 @@
         <p:spPr>
           <a:xfrm>
             <a:off x="1645920" y="1737360"/>
-            <a:ext cx="1050120" cy="1050120"/>
+            <a:ext cx="1049400" cy="1049400"/>
           </a:xfrm>
           <a:prstGeom prst="ellipse">
             <a:avLst/>
@@ -24148,7 +24169,7 @@
         <p:spPr>
           <a:xfrm>
             <a:off x="1906560" y="2002680"/>
-            <a:ext cx="528840" cy="528840"/>
+            <a:ext cx="528120" cy="528120"/>
           </a:xfrm>
           <a:prstGeom prst="rect">
             <a:avLst/>
@@ -24168,7 +24189,7 @@
         <p:spPr>
           <a:xfrm>
             <a:off x="731520" y="3017520"/>
-            <a:ext cx="2878920" cy="3061800"/>
+            <a:ext cx="2878200" cy="3061080"/>
           </a:xfrm>
           <a:prstGeom prst="rect">
             <a:avLst/>
@@ -24289,7 +24310,7 @@
         <p:spPr>
           <a:xfrm>
             <a:off x="4206240" y="1280160"/>
-            <a:ext cx="7435440" cy="5027760"/>
+            <a:ext cx="7434720" cy="5027040"/>
           </a:xfrm>
           <a:prstGeom prst="rect">
             <a:avLst/>
@@ -24324,7 +24345,7 @@
               <a:buChar char="▪"/>
             </a:pPr>
             <a:r>
-              <a:rPr lang="en-US" sz="1400" b="0" u="none" strike="noStrike">
+              <a:rPr lang="en-US" sz="2400" b="0" u="none" strike="noStrike">
                 <a:solidFill>
                   <a:srgbClr val="3F4A45"/>
                 </a:solidFill>
@@ -24335,7 +24356,7 @@
               </a:rPr>
               <a:t>Inheritance lets a new class (the child, or subclass) reuse and extend the data and behavior of an existing class (the parent, or superclass)</a:t>
             </a:r>
-            <a:endParaRPr lang="en-US" sz="1400" b="0" u="none" strike="noStrike">
+            <a:endParaRPr lang="en-US" sz="2400" b="0" u="none" strike="noStrike">
               <a:solidFill>
                 <a:srgbClr val="000000"/>
               </a:solidFill>
@@ -24359,7 +24380,7 @@
               <a:buChar char="▪"/>
             </a:pPr>
             <a:r>
-              <a:rPr lang="en-US" sz="1400" b="0" u="none" strike="noStrike">
+              <a:rPr lang="en-US" sz="2400" b="0" u="none" strike="noStrike">
                 <a:solidFill>
                   <a:srgbClr val="3F4A45"/>
                 </a:solidFill>
@@ -24370,7 +24391,7 @@
               </a:rPr>
               <a:t>A GoldenRetriever is a Dog — it automatically gets everything a Dog has, and can add its own extra behavior on top</a:t>
             </a:r>
-            <a:endParaRPr lang="en-US" sz="1400" b="0" u="none" strike="noStrike">
+            <a:endParaRPr lang="en-US" sz="2400" b="0" u="none" strike="noStrike">
               <a:solidFill>
                 <a:srgbClr val="000000"/>
               </a:solidFill>
@@ -24394,7 +24415,7 @@
               <a:buChar char="▪"/>
             </a:pPr>
             <a:r>
-              <a:rPr lang="en-US" sz="1400" b="0" u="none" strike="noStrike">
+              <a:rPr lang="en-US" sz="2400" b="0" u="none" strike="noStrike">
                 <a:solidFill>
                   <a:srgbClr val="3F4A45"/>
                 </a:solidFill>
@@ -24405,7 +24426,7 @@
               </a:rPr>
               <a:t>This avoids rewriting the same code in every related class — shared behavior lives once, in the parent</a:t>
             </a:r>
-            <a:endParaRPr lang="en-US" sz="1400" b="0" u="none" strike="noStrike">
+            <a:endParaRPr lang="en-US" sz="2400" b="0" u="none" strike="noStrike">
               <a:solidFill>
                 <a:srgbClr val="000000"/>
               </a:solidFill>
@@ -24429,7 +24450,7 @@
               <a:buChar char="▪"/>
             </a:pPr>
             <a:r>
-              <a:rPr lang="en-US" sz="1400" b="0" u="none" strike="noStrike">
+              <a:rPr lang="en-US" sz="2400" b="0" u="none" strike="noStrike">
                 <a:solidFill>
                   <a:srgbClr val="3F4A45"/>
                 </a:solidFill>
@@ -24440,7 +24461,7 @@
               </a:rPr>
               <a:t>It also models real-world "is-a" relationships directly in code: a Car is a Vehicle, a Manager is an Employee</a:t>
             </a:r>
-            <a:endParaRPr lang="en-US" sz="1400" b="0" u="none" strike="noStrike">
+            <a:endParaRPr lang="en-US" sz="2400" b="0" u="none" strike="noStrike">
               <a:solidFill>
                 <a:srgbClr val="000000"/>
               </a:solidFill>
@@ -24460,7 +24481,7 @@
         <p:spPr>
           <a:xfrm>
             <a:off x="548640" y="6510600"/>
-            <a:ext cx="5484960" cy="272880"/>
+            <a:ext cx="5484240" cy="272160"/>
           </a:xfrm>
           <a:prstGeom prst="rect">
             <a:avLst/>
@@ -24521,7 +24542,7 @@
         <p:spPr>
           <a:xfrm>
             <a:off x="11094480" y="6510600"/>
-            <a:ext cx="547200" cy="272880"/>
+            <a:ext cx="546480" cy="272160"/>
           </a:xfrm>
           <a:prstGeom prst="rect">
             <a:avLst/>
@@ -24623,7 +24644,7 @@
         <p:spPr>
           <a:xfrm>
             <a:off x="548640" y="457200"/>
-            <a:ext cx="382680" cy="382680"/>
+            <a:ext cx="381960" cy="381960"/>
           </a:xfrm>
           <a:prstGeom prst="roundRect">
             <a:avLst>
@@ -24672,7 +24693,7 @@
         <p:spPr>
           <a:xfrm>
             <a:off x="631080" y="539640"/>
-            <a:ext cx="218160" cy="218160"/>
+            <a:ext cx="217440" cy="217440"/>
           </a:xfrm>
           <a:prstGeom prst="rect">
             <a:avLst/>
@@ -24692,7 +24713,7 @@
         <p:spPr>
           <a:xfrm>
             <a:off x="1097280" y="420480"/>
-            <a:ext cx="10544400" cy="455760"/>
+            <a:ext cx="10543680" cy="455040"/>
           </a:xfrm>
           <a:prstGeom prst="rect">
             <a:avLst/>
@@ -24753,7 +24774,7 @@
         <p:spPr>
           <a:xfrm>
             <a:off x="548640" y="1234440"/>
-            <a:ext cx="11093040" cy="1196280"/>
+            <a:ext cx="11092320" cy="1195560"/>
           </a:xfrm>
           <a:prstGeom prst="rect">
             <a:avLst/>
@@ -24889,7 +24910,7 @@
         <p:spPr>
           <a:xfrm>
             <a:off x="548640" y="2569320"/>
-            <a:ext cx="11093040" cy="3784320"/>
+            <a:ext cx="11092320" cy="3783600"/>
           </a:xfrm>
           <a:prstGeom prst="roundRect">
             <a:avLst>
@@ -24934,7 +24955,7 @@
         <p:spPr>
           <a:xfrm>
             <a:off x="868680" y="2752200"/>
-            <a:ext cx="10452960" cy="3418560"/>
+            <a:ext cx="10452240" cy="3417840"/>
           </a:xfrm>
           <a:prstGeom prst="rect">
             <a:avLst/>
@@ -25355,7 +25376,7 @@
         <p:spPr>
           <a:xfrm>
             <a:off x="548640" y="6510600"/>
-            <a:ext cx="5484960" cy="272880"/>
+            <a:ext cx="5484240" cy="272160"/>
           </a:xfrm>
           <a:prstGeom prst="rect">
             <a:avLst/>
@@ -25416,7 +25437,7 @@
         <p:spPr>
           <a:xfrm>
             <a:off x="11094480" y="6510600"/>
-            <a:ext cx="547200" cy="272880"/>
+            <a:ext cx="546480" cy="272160"/>
           </a:xfrm>
           <a:prstGeom prst="rect">
             <a:avLst/>
@@ -25518,7 +25539,7 @@
         <p:spPr>
           <a:xfrm>
             <a:off x="548640" y="457200"/>
-            <a:ext cx="382680" cy="382680"/>
+            <a:ext cx="381960" cy="381960"/>
           </a:xfrm>
           <a:prstGeom prst="roundRect">
             <a:avLst>
@@ -25567,7 +25588,7 @@
         <p:spPr>
           <a:xfrm>
             <a:off x="631080" y="539640"/>
-            <a:ext cx="218160" cy="218160"/>
+            <a:ext cx="217440" cy="217440"/>
           </a:xfrm>
           <a:prstGeom prst="rect">
             <a:avLst/>
@@ -25587,7 +25608,7 @@
         <p:spPr>
           <a:xfrm>
             <a:off x="1097280" y="420480"/>
-            <a:ext cx="10544400" cy="455760"/>
+            <a:ext cx="10543680" cy="455040"/>
           </a:xfrm>
           <a:prstGeom prst="rect">
             <a:avLst/>
@@ -25648,7 +25669,7 @@
         <p:spPr>
           <a:xfrm>
             <a:off x="548640" y="1234440"/>
-            <a:ext cx="11093040" cy="1196280"/>
+            <a:ext cx="11092320" cy="1195560"/>
           </a:xfrm>
           <a:prstGeom prst="rect">
             <a:avLst/>
@@ -25784,7 +25805,7 @@
         <p:spPr>
           <a:xfrm>
             <a:off x="548640" y="2569320"/>
-            <a:ext cx="11093040" cy="3784320"/>
+            <a:ext cx="11092320" cy="3783600"/>
           </a:xfrm>
           <a:prstGeom prst="roundRect">
             <a:avLst>
@@ -25829,7 +25850,7 @@
         <p:spPr>
           <a:xfrm>
             <a:off x="868680" y="2752200"/>
-            <a:ext cx="10452960" cy="3418560"/>
+            <a:ext cx="10452240" cy="3417840"/>
           </a:xfrm>
           <a:prstGeom prst="rect">
             <a:avLst/>
@@ -26220,7 +26241,7 @@
         <p:spPr>
           <a:xfrm>
             <a:off x="548640" y="6510600"/>
-            <a:ext cx="5484960" cy="272880"/>
+            <a:ext cx="5484240" cy="272160"/>
           </a:xfrm>
           <a:prstGeom prst="rect">
             <a:avLst/>
@@ -26281,7 +26302,7 @@
         <p:spPr>
           <a:xfrm>
             <a:off x="11094480" y="6510600"/>
-            <a:ext cx="547200" cy="272880"/>
+            <a:ext cx="546480" cy="272160"/>
           </a:xfrm>
           <a:prstGeom prst="rect">
             <a:avLst/>
@@ -26383,7 +26404,7 @@
         <p:spPr>
           <a:xfrm>
             <a:off x="548640" y="457200"/>
-            <a:ext cx="382680" cy="382680"/>
+            <a:ext cx="381960" cy="381960"/>
           </a:xfrm>
           <a:prstGeom prst="roundRect">
             <a:avLst>
@@ -26432,7 +26453,7 @@
         <p:spPr>
           <a:xfrm>
             <a:off x="631080" y="539640"/>
-            <a:ext cx="218160" cy="218160"/>
+            <a:ext cx="217440" cy="217440"/>
           </a:xfrm>
           <a:prstGeom prst="rect">
             <a:avLst/>
@@ -26452,7 +26473,7 @@
         <p:spPr>
           <a:xfrm>
             <a:off x="1097280" y="420480"/>
-            <a:ext cx="10544400" cy="455760"/>
+            <a:ext cx="10543680" cy="455040"/>
           </a:xfrm>
           <a:prstGeom prst="rect">
             <a:avLst/>
@@ -26513,7 +26534,7 @@
         <p:spPr>
           <a:xfrm>
             <a:off x="548640" y="1234440"/>
-            <a:ext cx="11093040" cy="1196280"/>
+            <a:ext cx="11092320" cy="1195560"/>
           </a:xfrm>
           <a:prstGeom prst="rect">
             <a:avLst/>
@@ -26649,7 +26670,7 @@
         <p:spPr>
           <a:xfrm>
             <a:off x="548640" y="2569320"/>
-            <a:ext cx="11093040" cy="3784320"/>
+            <a:ext cx="11092320" cy="3783600"/>
           </a:xfrm>
           <a:prstGeom prst="roundRect">
             <a:avLst>
@@ -26694,7 +26715,7 @@
         <p:spPr>
           <a:xfrm>
             <a:off x="868680" y="2752200"/>
-            <a:ext cx="10452960" cy="3418560"/>
+            <a:ext cx="10452240" cy="3417840"/>
           </a:xfrm>
           <a:prstGeom prst="rect">
             <a:avLst/>
@@ -27025,7 +27046,7 @@
         <p:spPr>
           <a:xfrm>
             <a:off x="548640" y="6510600"/>
-            <a:ext cx="5484960" cy="272880"/>
+            <a:ext cx="5484240" cy="272160"/>
           </a:xfrm>
           <a:prstGeom prst="rect">
             <a:avLst/>
@@ -27086,7 +27107,7 @@
         <p:spPr>
           <a:xfrm>
             <a:off x="11094480" y="6510600"/>
-            <a:ext cx="547200" cy="272880"/>
+            <a:ext cx="546480" cy="272160"/>
           </a:xfrm>
           <a:prstGeom prst="rect">
             <a:avLst/>
@@ -27188,7 +27209,7 @@
         <p:spPr>
           <a:xfrm>
             <a:off x="548640" y="457200"/>
-            <a:ext cx="382680" cy="382680"/>
+            <a:ext cx="381960" cy="381960"/>
           </a:xfrm>
           <a:prstGeom prst="roundRect">
             <a:avLst>
@@ -27237,7 +27258,7 @@
         <p:spPr>
           <a:xfrm>
             <a:off x="631080" y="539640"/>
-            <a:ext cx="218160" cy="218160"/>
+            <a:ext cx="217440" cy="217440"/>
           </a:xfrm>
           <a:prstGeom prst="rect">
             <a:avLst/>
@@ -27257,7 +27278,7 @@
         <p:spPr>
           <a:xfrm>
             <a:off x="1097280" y="420480"/>
-            <a:ext cx="10544400" cy="455760"/>
+            <a:ext cx="10543680" cy="455040"/>
           </a:xfrm>
           <a:prstGeom prst="rect">
             <a:avLst/>
@@ -27490,7 +27511,7 @@
         <p:spPr>
           <a:xfrm>
             <a:off x="5044320" y="1554480"/>
-            <a:ext cx="2101680" cy="684360"/>
+            <a:ext cx="2100960" cy="683640"/>
           </a:xfrm>
           <a:prstGeom prst="roundRect">
             <a:avLst>
@@ -27535,7 +27556,7 @@
         <p:spPr>
           <a:xfrm>
             <a:off x="5044320" y="1627560"/>
-            <a:ext cx="2101680" cy="318600"/>
+            <a:ext cx="2100960" cy="317880"/>
           </a:xfrm>
           <a:prstGeom prst="rect">
             <a:avLst/>
@@ -27596,7 +27617,7 @@
         <p:spPr>
           <a:xfrm>
             <a:off x="5044320" y="1938600"/>
-            <a:ext cx="2101680" cy="254520"/>
+            <a:ext cx="2100960" cy="253800"/>
           </a:xfrm>
           <a:prstGeom prst="rect">
             <a:avLst/>
@@ -27657,7 +27678,7 @@
         <p:spPr>
           <a:xfrm>
             <a:off x="4843080" y="1353240"/>
-            <a:ext cx="309600" cy="309600"/>
+            <a:ext cx="308880" cy="308880"/>
           </a:xfrm>
           <a:prstGeom prst="ellipse">
             <a:avLst/>
@@ -27700,7 +27721,7 @@
         <p:spPr>
           <a:xfrm>
             <a:off x="4843080" y="1353240"/>
-            <a:ext cx="309600" cy="309600"/>
+            <a:ext cx="308880" cy="308880"/>
           </a:xfrm>
           <a:prstGeom prst="rect">
             <a:avLst/>
@@ -27761,7 +27782,7 @@
         <p:spPr>
           <a:xfrm>
             <a:off x="3169800" y="2788920"/>
-            <a:ext cx="2101680" cy="684360"/>
+            <a:ext cx="2100960" cy="683640"/>
           </a:xfrm>
           <a:prstGeom prst="roundRect">
             <a:avLst>
@@ -27806,7 +27827,7 @@
         <p:spPr>
           <a:xfrm>
             <a:off x="3169800" y="2862000"/>
-            <a:ext cx="2101680" cy="318600"/>
+            <a:ext cx="2100960" cy="317880"/>
           </a:xfrm>
           <a:prstGeom prst="rect">
             <a:avLst/>
@@ -27867,7 +27888,7 @@
         <p:spPr>
           <a:xfrm>
             <a:off x="3169800" y="3173040"/>
-            <a:ext cx="2101680" cy="254520"/>
+            <a:ext cx="2100960" cy="253800"/>
           </a:xfrm>
           <a:prstGeom prst="rect">
             <a:avLst/>
@@ -27928,7 +27949,7 @@
         <p:spPr>
           <a:xfrm>
             <a:off x="2968560" y="2587680"/>
-            <a:ext cx="309600" cy="309600"/>
+            <a:ext cx="308880" cy="308880"/>
           </a:xfrm>
           <a:prstGeom prst="ellipse">
             <a:avLst/>
@@ -27971,7 +27992,7 @@
         <p:spPr>
           <a:xfrm>
             <a:off x="2968560" y="2587680"/>
-            <a:ext cx="309600" cy="309600"/>
+            <a:ext cx="308880" cy="308880"/>
           </a:xfrm>
           <a:prstGeom prst="rect">
             <a:avLst/>
@@ -28032,7 +28053,7 @@
         <p:spPr>
           <a:xfrm>
             <a:off x="6918840" y="2788920"/>
-            <a:ext cx="2101680" cy="684360"/>
+            <a:ext cx="2100960" cy="683640"/>
           </a:xfrm>
           <a:prstGeom prst="roundRect">
             <a:avLst>
@@ -28077,7 +28098,7 @@
         <p:spPr>
           <a:xfrm>
             <a:off x="6918840" y="2862000"/>
-            <a:ext cx="2101680" cy="318600"/>
+            <a:ext cx="2100960" cy="317880"/>
           </a:xfrm>
           <a:prstGeom prst="rect">
             <a:avLst/>
@@ -28138,7 +28159,7 @@
         <p:spPr>
           <a:xfrm>
             <a:off x="6918840" y="3173040"/>
-            <a:ext cx="2101680" cy="254520"/>
+            <a:ext cx="2100960" cy="253800"/>
           </a:xfrm>
           <a:prstGeom prst="rect">
             <a:avLst/>
@@ -28199,7 +28220,7 @@
         <p:spPr>
           <a:xfrm>
             <a:off x="6717600" y="2587680"/>
-            <a:ext cx="309600" cy="309600"/>
+            <a:ext cx="308880" cy="308880"/>
           </a:xfrm>
           <a:prstGeom prst="ellipse">
             <a:avLst/>
@@ -28242,7 +28263,7 @@
         <p:spPr>
           <a:xfrm>
             <a:off x="6717600" y="2587680"/>
-            <a:ext cx="309600" cy="309600"/>
+            <a:ext cx="308880" cy="308880"/>
           </a:xfrm>
           <a:prstGeom prst="rect">
             <a:avLst/>
@@ -28303,7 +28324,7 @@
         <p:spPr>
           <a:xfrm>
             <a:off x="5044320" y="4023360"/>
-            <a:ext cx="2101680" cy="684360"/>
+            <a:ext cx="2100960" cy="683640"/>
           </a:xfrm>
           <a:prstGeom prst="roundRect">
             <a:avLst>
@@ -28348,7 +28369,7 @@
         <p:spPr>
           <a:xfrm>
             <a:off x="5044320" y="4096440"/>
-            <a:ext cx="2101680" cy="318600"/>
+            <a:ext cx="2100960" cy="317880"/>
           </a:xfrm>
           <a:prstGeom prst="rect">
             <a:avLst/>
@@ -28409,7 +28430,7 @@
         <p:spPr>
           <a:xfrm>
             <a:off x="5044320" y="4407480"/>
-            <a:ext cx="2101680" cy="254520"/>
+            <a:ext cx="2100960" cy="253800"/>
           </a:xfrm>
           <a:prstGeom prst="rect">
             <a:avLst/>
@@ -28470,7 +28491,7 @@
         <p:spPr>
           <a:xfrm>
             <a:off x="4843080" y="3822120"/>
-            <a:ext cx="309600" cy="309600"/>
+            <a:ext cx="308880" cy="308880"/>
           </a:xfrm>
           <a:prstGeom prst="ellipse">
             <a:avLst/>
@@ -28513,7 +28534,7 @@
         <p:spPr>
           <a:xfrm>
             <a:off x="4843080" y="3822120"/>
-            <a:ext cx="309600" cy="309600"/>
+            <a:ext cx="308880" cy="308880"/>
           </a:xfrm>
           <a:prstGeom prst="rect">
             <a:avLst/>
@@ -28574,7 +28595,7 @@
         <p:spPr>
           <a:xfrm>
             <a:off x="548640" y="1554480"/>
-            <a:ext cx="2650320" cy="3153240"/>
+            <a:ext cx="2649600" cy="3152520"/>
           </a:xfrm>
           <a:prstGeom prst="roundRect">
             <a:avLst>
@@ -28619,7 +28640,7 @@
         <p:spPr>
           <a:xfrm>
             <a:off x="749880" y="1737360"/>
-            <a:ext cx="2247840" cy="318600"/>
+            <a:ext cx="2247120" cy="317880"/>
           </a:xfrm>
           <a:prstGeom prst="rect">
             <a:avLst/>
@@ -28680,7 +28701,7 @@
         <p:spPr>
           <a:xfrm>
             <a:off x="749880" y="2103120"/>
-            <a:ext cx="2247840" cy="1370160"/>
+            <a:ext cx="2247120" cy="1369440"/>
           </a:xfrm>
           <a:prstGeom prst="rect">
             <a:avLst/>
@@ -28831,7 +28852,7 @@
         <p:spPr>
           <a:xfrm>
             <a:off x="749880" y="3566160"/>
-            <a:ext cx="2247840" cy="1004400"/>
+            <a:ext cx="2247120" cy="1003680"/>
           </a:xfrm>
           <a:prstGeom prst="rect">
             <a:avLst/>
@@ -28892,7 +28913,7 @@
         <p:spPr>
           <a:xfrm>
             <a:off x="548640" y="6510600"/>
-            <a:ext cx="5484960" cy="272880"/>
+            <a:ext cx="5484240" cy="272160"/>
           </a:xfrm>
           <a:prstGeom prst="rect">
             <a:avLst/>
@@ -28953,7 +28974,7 @@
         <p:spPr>
           <a:xfrm>
             <a:off x="11094480" y="6510600"/>
-            <a:ext cx="547200" cy="272880"/>
+            <a:ext cx="546480" cy="272160"/>
           </a:xfrm>
           <a:prstGeom prst="rect">
             <a:avLst/>
@@ -29055,7 +29076,7 @@
         <p:spPr>
           <a:xfrm>
             <a:off x="548640" y="457200"/>
-            <a:ext cx="382680" cy="382680"/>
+            <a:ext cx="381960" cy="381960"/>
           </a:xfrm>
           <a:prstGeom prst="roundRect">
             <a:avLst>
@@ -29104,7 +29125,7 @@
         <p:spPr>
           <a:xfrm>
             <a:off x="631080" y="539640"/>
-            <a:ext cx="218160" cy="218160"/>
+            <a:ext cx="217440" cy="217440"/>
           </a:xfrm>
           <a:prstGeom prst="rect">
             <a:avLst/>
@@ -29124,7 +29145,7 @@
         <p:spPr>
           <a:xfrm>
             <a:off x="1097280" y="420480"/>
-            <a:ext cx="10544400" cy="455760"/>
+            <a:ext cx="10543680" cy="455040"/>
           </a:xfrm>
           <a:prstGeom prst="rect">
             <a:avLst/>
@@ -29185,7 +29206,7 @@
         <p:spPr>
           <a:xfrm>
             <a:off x="548640" y="1234440"/>
-            <a:ext cx="11093040" cy="1196280"/>
+            <a:ext cx="11092320" cy="1195560"/>
           </a:xfrm>
           <a:prstGeom prst="rect">
             <a:avLst/>
@@ -29321,7 +29342,7 @@
         <p:spPr>
           <a:xfrm>
             <a:off x="548640" y="2569320"/>
-            <a:ext cx="11093040" cy="3784320"/>
+            <a:ext cx="11092320" cy="3783600"/>
           </a:xfrm>
           <a:prstGeom prst="roundRect">
             <a:avLst>
@@ -29366,7 +29387,7 @@
         <p:spPr>
           <a:xfrm>
             <a:off x="868680" y="2752200"/>
-            <a:ext cx="10452960" cy="3418560"/>
+            <a:ext cx="10452240" cy="3417840"/>
           </a:xfrm>
           <a:prstGeom prst="rect">
             <a:avLst/>
@@ -29787,7 +29808,7 @@
         <p:spPr>
           <a:xfrm>
             <a:off x="548640" y="6510600"/>
-            <a:ext cx="5484960" cy="272880"/>
+            <a:ext cx="5484240" cy="272160"/>
           </a:xfrm>
           <a:prstGeom prst="rect">
             <a:avLst/>
@@ -29848,7 +29869,7 @@
         <p:spPr>
           <a:xfrm>
             <a:off x="11094480" y="6510600"/>
-            <a:ext cx="547200" cy="272880"/>
+            <a:ext cx="546480" cy="272160"/>
           </a:xfrm>
           <a:prstGeom prst="rect">
             <a:avLst/>
@@ -29950,7 +29971,7 @@
         <p:spPr>
           <a:xfrm>
             <a:off x="-2286000" y="3657600"/>
-            <a:ext cx="6399360" cy="6399360"/>
+            <a:ext cx="6398640" cy="6398640"/>
           </a:xfrm>
           <a:prstGeom prst="ellipse">
             <a:avLst/>
@@ -29993,7 +30014,7 @@
         <p:spPr>
           <a:xfrm>
             <a:off x="8229600" y="-2743200"/>
-            <a:ext cx="6399360" cy="6399360"/>
+            <a:ext cx="6398640" cy="6398640"/>
           </a:xfrm>
           <a:prstGeom prst="ellipse">
             <a:avLst/>
@@ -30036,7 +30057,7 @@
         <p:spPr>
           <a:xfrm>
             <a:off x="5638680" y="868680"/>
-            <a:ext cx="912960" cy="912960"/>
+            <a:ext cx="912240" cy="912240"/>
           </a:xfrm>
           <a:prstGeom prst="ellipse">
             <a:avLst/>
@@ -30083,7 +30104,7 @@
         <p:spPr>
           <a:xfrm>
             <a:off x="5876280" y="1097280"/>
-            <a:ext cx="437400" cy="437400"/>
+            <a:ext cx="436680" cy="436680"/>
           </a:xfrm>
           <a:prstGeom prst="rect">
             <a:avLst/>
@@ -30103,7 +30124,7 @@
         <p:spPr>
           <a:xfrm>
             <a:off x="914400" y="2057400"/>
-            <a:ext cx="10361520" cy="291240"/>
+            <a:ext cx="10360800" cy="290520"/>
           </a:xfrm>
           <a:prstGeom prst="rect">
             <a:avLst/>
@@ -30164,7 +30185,7 @@
         <p:spPr>
           <a:xfrm>
             <a:off x="1188720" y="2441520"/>
-            <a:ext cx="9812880" cy="1004400"/>
+            <a:ext cx="9812160" cy="1003680"/>
           </a:xfrm>
           <a:prstGeom prst="rect">
             <a:avLst/>
@@ -30225,7 +30246,7 @@
         <p:spPr>
           <a:xfrm>
             <a:off x="1920240" y="3630240"/>
-            <a:ext cx="8349840" cy="821520"/>
+            <a:ext cx="8349120" cy="820800"/>
           </a:xfrm>
           <a:prstGeom prst="rect">
             <a:avLst/>
@@ -30286,7 +30307,7 @@
         <p:spPr>
           <a:xfrm>
             <a:off x="11094480" y="6492240"/>
-            <a:ext cx="547200" cy="272880"/>
+            <a:ext cx="546480" cy="272160"/>
           </a:xfrm>
           <a:prstGeom prst="rect">
             <a:avLst/>
@@ -30388,7 +30409,7 @@
         <p:spPr>
           <a:xfrm>
             <a:off x="548640" y="457200"/>
-            <a:ext cx="382680" cy="382680"/>
+            <a:ext cx="381960" cy="381960"/>
           </a:xfrm>
           <a:prstGeom prst="roundRect">
             <a:avLst>
@@ -30437,7 +30458,7 @@
         <p:spPr>
           <a:xfrm>
             <a:off x="631080" y="539640"/>
-            <a:ext cx="218160" cy="218160"/>
+            <a:ext cx="217440" cy="217440"/>
           </a:xfrm>
           <a:prstGeom prst="rect">
             <a:avLst/>
@@ -30457,7 +30478,7 @@
         <p:spPr>
           <a:xfrm>
             <a:off x="1097280" y="420480"/>
-            <a:ext cx="10544400" cy="455760"/>
+            <a:ext cx="10543680" cy="455040"/>
           </a:xfrm>
           <a:prstGeom prst="rect">
             <a:avLst/>
@@ -30518,7 +30539,7 @@
         <p:spPr>
           <a:xfrm>
             <a:off x="548640" y="1234440"/>
-            <a:ext cx="11093040" cy="5119200"/>
+            <a:ext cx="11092320" cy="5118480"/>
           </a:xfrm>
           <a:prstGeom prst="roundRect">
             <a:avLst>
@@ -30563,7 +30584,7 @@
         <p:spPr>
           <a:xfrm>
             <a:off x="868680" y="1435680"/>
-            <a:ext cx="10452960" cy="364320"/>
+            <a:ext cx="10452240" cy="363600"/>
           </a:xfrm>
           <a:prstGeom prst="rect">
             <a:avLst/>
@@ -30624,7 +30645,7 @@
         <p:spPr>
           <a:xfrm>
             <a:off x="868680" y="2296440"/>
-            <a:ext cx="309600" cy="309600"/>
+            <a:ext cx="308880" cy="308880"/>
           </a:xfrm>
           <a:prstGeom prst="ellipse">
             <a:avLst/>
@@ -30667,7 +30688,7 @@
         <p:spPr>
           <a:xfrm>
             <a:off x="868680" y="2296440"/>
-            <a:ext cx="309600" cy="309600"/>
+            <a:ext cx="308880" cy="308880"/>
           </a:xfrm>
           <a:prstGeom prst="rect">
             <a:avLst/>
@@ -30728,7 +30749,7 @@
         <p:spPr>
           <a:xfrm>
             <a:off x="1408320" y="1920240"/>
-            <a:ext cx="9913320" cy="1061640"/>
+            <a:ext cx="9912600" cy="1060920"/>
           </a:xfrm>
           <a:prstGeom prst="rect">
             <a:avLst/>
@@ -30789,7 +30810,7 @@
         <p:spPr>
           <a:xfrm>
             <a:off x="868680" y="3359160"/>
-            <a:ext cx="309600" cy="309600"/>
+            <a:ext cx="308880" cy="308880"/>
           </a:xfrm>
           <a:prstGeom prst="ellipse">
             <a:avLst/>
@@ -30832,7 +30853,7 @@
         <p:spPr>
           <a:xfrm>
             <a:off x="868680" y="3359160"/>
-            <a:ext cx="309600" cy="309600"/>
+            <a:ext cx="308880" cy="308880"/>
           </a:xfrm>
           <a:prstGeom prst="rect">
             <a:avLst/>
@@ -30893,7 +30914,7 @@
         <p:spPr>
           <a:xfrm>
             <a:off x="1408320" y="2983320"/>
-            <a:ext cx="9913320" cy="1061640"/>
+            <a:ext cx="9912600" cy="1060920"/>
           </a:xfrm>
           <a:prstGeom prst="rect">
             <a:avLst/>
@@ -30954,7 +30975,7 @@
         <p:spPr>
           <a:xfrm>
             <a:off x="868680" y="4422240"/>
-            <a:ext cx="309600" cy="309600"/>
+            <a:ext cx="308880" cy="308880"/>
           </a:xfrm>
           <a:prstGeom prst="ellipse">
             <a:avLst/>
@@ -30997,7 +31018,7 @@
         <p:spPr>
           <a:xfrm>
             <a:off x="868680" y="4422240"/>
-            <a:ext cx="309600" cy="309600"/>
+            <a:ext cx="308880" cy="308880"/>
           </a:xfrm>
           <a:prstGeom prst="rect">
             <a:avLst/>
@@ -31058,7 +31079,7 @@
         <p:spPr>
           <a:xfrm>
             <a:off x="1408320" y="4046400"/>
-            <a:ext cx="9913320" cy="1061640"/>
+            <a:ext cx="9912600" cy="1060920"/>
           </a:xfrm>
           <a:prstGeom prst="rect">
             <a:avLst/>
@@ -31119,7 +31140,7 @@
         <p:spPr>
           <a:xfrm>
             <a:off x="868680" y="5485320"/>
-            <a:ext cx="309600" cy="309600"/>
+            <a:ext cx="308880" cy="308880"/>
           </a:xfrm>
           <a:prstGeom prst="ellipse">
             <a:avLst/>
@@ -31162,7 +31183,7 @@
         <p:spPr>
           <a:xfrm>
             <a:off x="868680" y="5485320"/>
-            <a:ext cx="309600" cy="309600"/>
+            <a:ext cx="308880" cy="308880"/>
           </a:xfrm>
           <a:prstGeom prst="rect">
             <a:avLst/>
@@ -31223,7 +31244,7 @@
         <p:spPr>
           <a:xfrm>
             <a:off x="1408320" y="5109120"/>
-            <a:ext cx="9913320" cy="1061640"/>
+            <a:ext cx="9912600" cy="1060920"/>
           </a:xfrm>
           <a:prstGeom prst="rect">
             <a:avLst/>
@@ -31284,7 +31305,7 @@
         <p:spPr>
           <a:xfrm>
             <a:off x="548640" y="6510600"/>
-            <a:ext cx="5484960" cy="272880"/>
+            <a:ext cx="5484240" cy="272160"/>
           </a:xfrm>
           <a:prstGeom prst="rect">
             <a:avLst/>
@@ -31345,7 +31366,7 @@
         <p:spPr>
           <a:xfrm>
             <a:off x="11094480" y="6510600"/>
-            <a:ext cx="547200" cy="272880"/>
+            <a:ext cx="546480" cy="272160"/>
           </a:xfrm>
           <a:prstGeom prst="rect">
             <a:avLst/>
@@ -31447,7 +31468,7 @@
         <p:spPr>
           <a:xfrm>
             <a:off x="548640" y="457200"/>
-            <a:ext cx="382680" cy="382680"/>
+            <a:ext cx="381960" cy="381960"/>
           </a:xfrm>
           <a:prstGeom prst="roundRect">
             <a:avLst>
@@ -31496,7 +31517,7 @@
         <p:spPr>
           <a:xfrm>
             <a:off x="631080" y="539640"/>
-            <a:ext cx="218160" cy="218160"/>
+            <a:ext cx="217440" cy="217440"/>
           </a:xfrm>
           <a:prstGeom prst="rect">
             <a:avLst/>
@@ -31516,7 +31537,7 @@
         <p:spPr>
           <a:xfrm>
             <a:off x="1097280" y="420480"/>
-            <a:ext cx="10544400" cy="455760"/>
+            <a:ext cx="10543680" cy="455040"/>
           </a:xfrm>
           <a:prstGeom prst="rect">
             <a:avLst/>
@@ -31577,7 +31598,7 @@
         <p:spPr>
           <a:xfrm>
             <a:off x="548640" y="1234440"/>
-            <a:ext cx="3244680" cy="5119200"/>
+            <a:ext cx="3243960" cy="5118480"/>
           </a:xfrm>
           <a:prstGeom prst="roundRect">
             <a:avLst>
@@ -31622,7 +31643,7 @@
         <p:spPr>
           <a:xfrm>
             <a:off x="1645920" y="1737360"/>
-            <a:ext cx="1050120" cy="1050120"/>
+            <a:ext cx="1049400" cy="1049400"/>
           </a:xfrm>
           <a:prstGeom prst="ellipse">
             <a:avLst/>
@@ -31669,7 +31690,7 @@
         <p:spPr>
           <a:xfrm>
             <a:off x="1906560" y="2002680"/>
-            <a:ext cx="528840" cy="528840"/>
+            <a:ext cx="528120" cy="528120"/>
           </a:xfrm>
           <a:prstGeom prst="rect">
             <a:avLst/>
@@ -31689,7 +31710,7 @@
         <p:spPr>
           <a:xfrm>
             <a:off x="731520" y="3017520"/>
-            <a:ext cx="2878920" cy="3061800"/>
+            <a:ext cx="2878200" cy="3061080"/>
           </a:xfrm>
           <a:prstGeom prst="rect">
             <a:avLst/>
@@ -31810,7 +31831,7 @@
         <p:spPr>
           <a:xfrm>
             <a:off x="4206240" y="1280160"/>
-            <a:ext cx="7435440" cy="5027760"/>
+            <a:ext cx="7434720" cy="5027040"/>
           </a:xfrm>
           <a:prstGeom prst="rect">
             <a:avLst/>
@@ -31845,7 +31866,7 @@
               <a:buChar char="▪"/>
             </a:pPr>
             <a:r>
-              <a:rPr lang="en-US" sz="1400" b="0" u="none" strike="noStrike">
+              <a:rPr lang="en-US" sz="2400" b="0" u="none" strike="noStrike">
                 <a:solidFill>
                   <a:srgbClr val="3F4A45"/>
                 </a:solidFill>
@@ -31856,7 +31877,7 @@
               </a:rPr>
               <a:t>Polymorphism means different classes can respond to the exact same method call, each in its own appropriate way</a:t>
             </a:r>
-            <a:endParaRPr lang="en-US" sz="1400" b="0" u="none" strike="noStrike">
+            <a:endParaRPr lang="en-US" sz="2400" b="0" u="none" strike="noStrike">
               <a:solidFill>
                 <a:srgbClr val="000000"/>
               </a:solidFill>
@@ -31880,7 +31901,7 @@
               <a:buChar char="▪"/>
             </a:pPr>
             <a:r>
-              <a:rPr lang="en-US" sz="1400" b="0" u="none" strike="noStrike">
+              <a:rPr lang="en-US" sz="2400" b="0" u="none" strike="noStrike">
                 <a:solidFill>
                   <a:srgbClr val="3F4A45"/>
                 </a:solidFill>
@@ -31891,7 +31912,7 @@
               </a:rPr>
               <a:t>"Poly" (many) + "morph" (forms) — one interface, many shapes of behavior underneath it</a:t>
             </a:r>
-            <a:endParaRPr lang="en-US" sz="1400" b="0" u="none" strike="noStrike">
+            <a:endParaRPr lang="en-US" sz="2400" b="0" u="none" strike="noStrike">
               <a:solidFill>
                 <a:srgbClr val="000000"/>
               </a:solidFill>
@@ -31915,7 +31936,7 @@
               <a:buChar char="▪"/>
             </a:pPr>
             <a:r>
-              <a:rPr lang="en-US" sz="1400" b="0" u="none" strike="noStrike">
+              <a:rPr lang="en-US" sz="2400" b="0" u="none" strike="noStrike">
                 <a:solidFill>
                   <a:srgbClr val="3F4A45"/>
                 </a:solidFill>
@@ -31926,7 +31947,7 @@
               </a:rPr>
               <a:t>You already saw the mechanism in the last part: method overriding is exactly how polymorphism happens in practice</a:t>
             </a:r>
-            <a:endParaRPr lang="en-US" sz="1400" b="0" u="none" strike="noStrike">
+            <a:endParaRPr lang="en-US" sz="2400" b="0" u="none" strike="noStrike">
               <a:solidFill>
                 <a:srgbClr val="000000"/>
               </a:solidFill>
@@ -31950,7 +31971,7 @@
               <a:buChar char="▪"/>
             </a:pPr>
             <a:r>
-              <a:rPr lang="en-US" sz="1400" b="0" u="none" strike="noStrike">
+              <a:rPr lang="en-US" sz="2400" b="0" u="none" strike="noStrike">
                 <a:solidFill>
                   <a:srgbClr val="3F4A45"/>
                 </a:solidFill>
@@ -31961,7 +31982,7 @@
               </a:rPr>
               <a:t>The payoff is code that works on any object with the right method, without needing to know or check its exact class first</a:t>
             </a:r>
-            <a:endParaRPr lang="en-US" sz="1400" b="0" u="none" strike="noStrike">
+            <a:endParaRPr lang="en-US" sz="2400" b="0" u="none" strike="noStrike">
               <a:solidFill>
                 <a:srgbClr val="000000"/>
               </a:solidFill>
@@ -31981,7 +32002,7 @@
         <p:spPr>
           <a:xfrm>
             <a:off x="548640" y="6510600"/>
-            <a:ext cx="5484960" cy="272880"/>
+            <a:ext cx="5484240" cy="272160"/>
           </a:xfrm>
           <a:prstGeom prst="rect">
             <a:avLst/>
@@ -32042,7 +32063,7 @@
         <p:spPr>
           <a:xfrm>
             <a:off x="11094480" y="6510600"/>
-            <a:ext cx="547200" cy="272880"/>
+            <a:ext cx="546480" cy="272160"/>
           </a:xfrm>
           <a:prstGeom prst="rect">
             <a:avLst/>
@@ -32144,7 +32165,7 @@
         <p:spPr>
           <a:xfrm>
             <a:off x="548640" y="457200"/>
-            <a:ext cx="382680" cy="382680"/>
+            <a:ext cx="381960" cy="381960"/>
           </a:xfrm>
           <a:prstGeom prst="roundRect">
             <a:avLst>
@@ -32193,7 +32214,7 @@
         <p:spPr>
           <a:xfrm>
             <a:off x="631080" y="539640"/>
-            <a:ext cx="218160" cy="218160"/>
+            <a:ext cx="217440" cy="217440"/>
           </a:xfrm>
           <a:prstGeom prst="rect">
             <a:avLst/>
@@ -32213,7 +32234,7 @@
         <p:spPr>
           <a:xfrm>
             <a:off x="1097280" y="420480"/>
-            <a:ext cx="10544400" cy="455760"/>
+            <a:ext cx="10543680" cy="455040"/>
           </a:xfrm>
           <a:prstGeom prst="rect">
             <a:avLst/>
@@ -32274,7 +32295,7 @@
         <p:spPr>
           <a:xfrm>
             <a:off x="548640" y="1234440"/>
-            <a:ext cx="11093040" cy="1196280"/>
+            <a:ext cx="11092320" cy="1195560"/>
           </a:xfrm>
           <a:prstGeom prst="rect">
             <a:avLst/>
@@ -32410,7 +32431,7 @@
         <p:spPr>
           <a:xfrm>
             <a:off x="548640" y="2569320"/>
-            <a:ext cx="11093040" cy="3784320"/>
+            <a:ext cx="11092320" cy="3783600"/>
           </a:xfrm>
           <a:prstGeom prst="roundRect">
             <a:avLst>
@@ -32455,7 +32476,7 @@
         <p:spPr>
           <a:xfrm>
             <a:off x="868680" y="2752200"/>
-            <a:ext cx="10452960" cy="3418560"/>
+            <a:ext cx="10452240" cy="3417840"/>
           </a:xfrm>
           <a:prstGeom prst="rect">
             <a:avLst/>
@@ -32876,7 +32897,7 @@
         <p:spPr>
           <a:xfrm>
             <a:off x="548640" y="6510600"/>
-            <a:ext cx="5484960" cy="272880"/>
+            <a:ext cx="5484240" cy="272160"/>
           </a:xfrm>
           <a:prstGeom prst="rect">
             <a:avLst/>
@@ -32937,7 +32958,7 @@
         <p:spPr>
           <a:xfrm>
             <a:off x="11094480" y="6510600"/>
-            <a:ext cx="547200" cy="272880"/>
+            <a:ext cx="546480" cy="272160"/>
           </a:xfrm>
           <a:prstGeom prst="rect">
             <a:avLst/>
@@ -33039,7 +33060,7 @@
         <p:spPr>
           <a:xfrm>
             <a:off x="548640" y="457200"/>
-            <a:ext cx="382680" cy="382680"/>
+            <a:ext cx="381960" cy="381960"/>
           </a:xfrm>
           <a:prstGeom prst="roundRect">
             <a:avLst>
@@ -33088,7 +33109,7 @@
         <p:spPr>
           <a:xfrm>
             <a:off x="631080" y="539640"/>
-            <a:ext cx="218160" cy="218160"/>
+            <a:ext cx="217440" cy="217440"/>
           </a:xfrm>
           <a:prstGeom prst="rect">
             <a:avLst/>
@@ -33108,7 +33129,7 @@
         <p:spPr>
           <a:xfrm>
             <a:off x="1097280" y="420480"/>
-            <a:ext cx="10544400" cy="455760"/>
+            <a:ext cx="10543680" cy="455040"/>
           </a:xfrm>
           <a:prstGeom prst="rect">
             <a:avLst/>
@@ -33169,7 +33190,7 @@
         <p:spPr>
           <a:xfrm>
             <a:off x="548640" y="1234440"/>
-            <a:ext cx="11093040" cy="1196280"/>
+            <a:ext cx="11092320" cy="1195560"/>
           </a:xfrm>
           <a:prstGeom prst="rect">
             <a:avLst/>
@@ -33305,7 +33326,7 @@
         <p:spPr>
           <a:xfrm>
             <a:off x="548640" y="2569320"/>
-            <a:ext cx="11093040" cy="3784320"/>
+            <a:ext cx="11092320" cy="3783600"/>
           </a:xfrm>
           <a:prstGeom prst="roundRect">
             <a:avLst>
@@ -33350,7 +33371,7 @@
         <p:spPr>
           <a:xfrm>
             <a:off x="868680" y="2752200"/>
-            <a:ext cx="10452960" cy="3418560"/>
+            <a:ext cx="10452240" cy="3417840"/>
           </a:xfrm>
           <a:prstGeom prst="rect">
             <a:avLst/>
@@ -33711,7 +33732,7 @@
         <p:spPr>
           <a:xfrm>
             <a:off x="548640" y="6510600"/>
-            <a:ext cx="5484960" cy="272880"/>
+            <a:ext cx="5484240" cy="272160"/>
           </a:xfrm>
           <a:prstGeom prst="rect">
             <a:avLst/>
@@ -33772,7 +33793,7 @@
         <p:spPr>
           <a:xfrm>
             <a:off x="11094480" y="6510600"/>
-            <a:ext cx="547200" cy="272880"/>
+            <a:ext cx="546480" cy="272160"/>
           </a:xfrm>
           <a:prstGeom prst="rect">
             <a:avLst/>
@@ -33874,7 +33895,7 @@
         <p:spPr>
           <a:xfrm>
             <a:off x="548640" y="457200"/>
-            <a:ext cx="382680" cy="382680"/>
+            <a:ext cx="381960" cy="381960"/>
           </a:xfrm>
           <a:prstGeom prst="roundRect">
             <a:avLst>
@@ -33923,7 +33944,7 @@
         <p:spPr>
           <a:xfrm>
             <a:off x="631080" y="539640"/>
-            <a:ext cx="218160" cy="218160"/>
+            <a:ext cx="217440" cy="217440"/>
           </a:xfrm>
           <a:prstGeom prst="rect">
             <a:avLst/>
@@ -33943,7 +33964,7 @@
         <p:spPr>
           <a:xfrm>
             <a:off x="1097280" y="420480"/>
-            <a:ext cx="10544400" cy="455760"/>
+            <a:ext cx="10543680" cy="455040"/>
           </a:xfrm>
           <a:prstGeom prst="rect">
             <a:avLst/>
@@ -34004,7 +34025,7 @@
         <p:spPr>
           <a:xfrm>
             <a:off x="548640" y="1234440"/>
-            <a:ext cx="11093040" cy="5119200"/>
+            <a:ext cx="11092320" cy="5118480"/>
           </a:xfrm>
           <a:prstGeom prst="roundRect">
             <a:avLst>
@@ -34049,7 +34070,7 @@
         <p:spPr>
           <a:xfrm>
             <a:off x="868680" y="1435680"/>
-            <a:ext cx="10452960" cy="364320"/>
+            <a:ext cx="10452240" cy="363600"/>
           </a:xfrm>
           <a:prstGeom prst="rect">
             <a:avLst/>
@@ -34110,7 +34131,7 @@
         <p:spPr>
           <a:xfrm>
             <a:off x="868680" y="2473560"/>
-            <a:ext cx="309600" cy="309600"/>
+            <a:ext cx="308880" cy="308880"/>
           </a:xfrm>
           <a:prstGeom prst="ellipse">
             <a:avLst/>
@@ -34153,7 +34174,7 @@
         <p:spPr>
           <a:xfrm>
             <a:off x="868680" y="2473560"/>
-            <a:ext cx="309600" cy="309600"/>
+            <a:ext cx="308880" cy="308880"/>
           </a:xfrm>
           <a:prstGeom prst="rect">
             <a:avLst/>
@@ -34214,7 +34235,7 @@
         <p:spPr>
           <a:xfrm>
             <a:off x="1408320" y="1920240"/>
-            <a:ext cx="9913320" cy="1415880"/>
+            <a:ext cx="9912600" cy="1415160"/>
           </a:xfrm>
           <a:prstGeom prst="rect">
             <a:avLst/>
@@ -34275,7 +34296,7 @@
         <p:spPr>
           <a:xfrm>
             <a:off x="868680" y="3890880"/>
-            <a:ext cx="309600" cy="309600"/>
+            <a:ext cx="308880" cy="308880"/>
           </a:xfrm>
           <a:prstGeom prst="ellipse">
             <a:avLst/>
@@ -34318,7 +34339,7 @@
         <p:spPr>
           <a:xfrm>
             <a:off x="868680" y="3890880"/>
-            <a:ext cx="309600" cy="309600"/>
+            <a:ext cx="308880" cy="308880"/>
           </a:xfrm>
           <a:prstGeom prst="rect">
             <a:avLst/>
@@ -34379,7 +34400,7 @@
         <p:spPr>
           <a:xfrm>
             <a:off x="1408320" y="3337560"/>
-            <a:ext cx="9913320" cy="1415880"/>
+            <a:ext cx="9912600" cy="1415160"/>
           </a:xfrm>
           <a:prstGeom prst="rect">
             <a:avLst/>
@@ -34440,7 +34461,7 @@
         <p:spPr>
           <a:xfrm>
             <a:off x="868680" y="5308200"/>
-            <a:ext cx="309600" cy="309600"/>
+            <a:ext cx="308880" cy="308880"/>
           </a:xfrm>
           <a:prstGeom prst="ellipse">
             <a:avLst/>
@@ -34483,7 +34504,7 @@
         <p:spPr>
           <a:xfrm>
             <a:off x="868680" y="5308200"/>
-            <a:ext cx="309600" cy="309600"/>
+            <a:ext cx="308880" cy="308880"/>
           </a:xfrm>
           <a:prstGeom prst="rect">
             <a:avLst/>
@@ -34544,7 +34565,7 @@
         <p:spPr>
           <a:xfrm>
             <a:off x="1408320" y="4754880"/>
-            <a:ext cx="9913320" cy="1415880"/>
+            <a:ext cx="9912600" cy="1415160"/>
           </a:xfrm>
           <a:prstGeom prst="rect">
             <a:avLst/>
@@ -34605,7 +34626,7 @@
         <p:spPr>
           <a:xfrm>
             <a:off x="548640" y="6510600"/>
-            <a:ext cx="5484960" cy="272880"/>
+            <a:ext cx="5484240" cy="272160"/>
           </a:xfrm>
           <a:prstGeom prst="rect">
             <a:avLst/>
@@ -34666,7 +34687,7 @@
         <p:spPr>
           <a:xfrm>
             <a:off x="11094480" y="6510600"/>
-            <a:ext cx="547200" cy="272880"/>
+            <a:ext cx="546480" cy="272160"/>
           </a:xfrm>
           <a:prstGeom prst="rect">
             <a:avLst/>
@@ -34768,7 +34789,7 @@
         <p:spPr>
           <a:xfrm>
             <a:off x="-2286000" y="3657600"/>
-            <a:ext cx="6399360" cy="6399360"/>
+            <a:ext cx="6398640" cy="6398640"/>
           </a:xfrm>
           <a:prstGeom prst="ellipse">
             <a:avLst/>
@@ -34811,7 +34832,7 @@
         <p:spPr>
           <a:xfrm>
             <a:off x="8229600" y="-2743200"/>
-            <a:ext cx="6399360" cy="6399360"/>
+            <a:ext cx="6398640" cy="6398640"/>
           </a:xfrm>
           <a:prstGeom prst="ellipse">
             <a:avLst/>
@@ -34854,7 +34875,7 @@
         <p:spPr>
           <a:xfrm>
             <a:off x="5638680" y="868680"/>
-            <a:ext cx="912960" cy="912960"/>
+            <a:ext cx="912240" cy="912240"/>
           </a:xfrm>
           <a:prstGeom prst="ellipse">
             <a:avLst/>
@@ -34901,7 +34922,7 @@
         <p:spPr>
           <a:xfrm>
             <a:off x="5876280" y="1097280"/>
-            <a:ext cx="437400" cy="437400"/>
+            <a:ext cx="436680" cy="436680"/>
           </a:xfrm>
           <a:prstGeom prst="rect">
             <a:avLst/>
@@ -34921,7 +34942,7 @@
         <p:spPr>
           <a:xfrm>
             <a:off x="914400" y="2057400"/>
-            <a:ext cx="10361520" cy="291240"/>
+            <a:ext cx="10360800" cy="290520"/>
           </a:xfrm>
           <a:prstGeom prst="rect">
             <a:avLst/>
@@ -34982,7 +35003,7 @@
         <p:spPr>
           <a:xfrm>
             <a:off x="1188720" y="2441520"/>
-            <a:ext cx="9812880" cy="1004400"/>
+            <a:ext cx="9812160" cy="1003680"/>
           </a:xfrm>
           <a:prstGeom prst="rect">
             <a:avLst/>
@@ -35043,7 +35064,7 @@
         <p:spPr>
           <a:xfrm>
             <a:off x="1920240" y="3630240"/>
-            <a:ext cx="8349840" cy="821520"/>
+            <a:ext cx="8349120" cy="820800"/>
           </a:xfrm>
           <a:prstGeom prst="rect">
             <a:avLst/>
@@ -35104,7 +35125,7 @@
         <p:spPr>
           <a:xfrm>
             <a:off x="11094480" y="6492240"/>
-            <a:ext cx="547200" cy="272880"/>
+            <a:ext cx="546480" cy="272160"/>
           </a:xfrm>
           <a:prstGeom prst="rect">
             <a:avLst/>
@@ -35206,7 +35227,7 @@
         <p:spPr>
           <a:xfrm>
             <a:off x="548640" y="457200"/>
-            <a:ext cx="382680" cy="382680"/>
+            <a:ext cx="381960" cy="381960"/>
           </a:xfrm>
           <a:prstGeom prst="roundRect">
             <a:avLst>
@@ -35255,7 +35276,7 @@
         <p:spPr>
           <a:xfrm>
             <a:off x="631080" y="539640"/>
-            <a:ext cx="218160" cy="218160"/>
+            <a:ext cx="217440" cy="217440"/>
           </a:xfrm>
           <a:prstGeom prst="rect">
             <a:avLst/>
@@ -35275,7 +35296,7 @@
         <p:spPr>
           <a:xfrm>
             <a:off x="1097280" y="420480"/>
-            <a:ext cx="10544400" cy="455760"/>
+            <a:ext cx="10543680" cy="455040"/>
           </a:xfrm>
           <a:prstGeom prst="rect">
             <a:avLst/>
@@ -35336,7 +35357,7 @@
         <p:spPr>
           <a:xfrm>
             <a:off x="548640" y="1234440"/>
-            <a:ext cx="11093040" cy="1196280"/>
+            <a:ext cx="11092320" cy="1195560"/>
           </a:xfrm>
           <a:prstGeom prst="rect">
             <a:avLst/>
@@ -35472,7 +35493,7 @@
         <p:spPr>
           <a:xfrm>
             <a:off x="548640" y="2569320"/>
-            <a:ext cx="11093040" cy="3784320"/>
+            <a:ext cx="11092320" cy="3783600"/>
           </a:xfrm>
           <a:prstGeom prst="roundRect">
             <a:avLst>
@@ -35517,7 +35538,7 @@
         <p:spPr>
           <a:xfrm>
             <a:off x="868680" y="2752200"/>
-            <a:ext cx="10452960" cy="3418560"/>
+            <a:ext cx="10452240" cy="3417840"/>
           </a:xfrm>
           <a:prstGeom prst="rect">
             <a:avLst/>
@@ -35938,7 +35959,7 @@
         <p:spPr>
           <a:xfrm>
             <a:off x="548640" y="6510600"/>
-            <a:ext cx="5484960" cy="272880"/>
+            <a:ext cx="5484240" cy="272160"/>
           </a:xfrm>
           <a:prstGeom prst="rect">
             <a:avLst/>
@@ -35999,7 +36020,7 @@
         <p:spPr>
           <a:xfrm>
             <a:off x="11094480" y="6510600"/>
-            <a:ext cx="547200" cy="272880"/>
+            <a:ext cx="546480" cy="272160"/>
           </a:xfrm>
           <a:prstGeom prst="rect">
             <a:avLst/>
@@ -36101,7 +36122,7 @@
         <p:spPr>
           <a:xfrm>
             <a:off x="548640" y="457200"/>
-            <a:ext cx="382680" cy="382680"/>
+            <a:ext cx="381960" cy="381960"/>
           </a:xfrm>
           <a:prstGeom prst="roundRect">
             <a:avLst>
@@ -36150,7 +36171,7 @@
         <p:spPr>
           <a:xfrm>
             <a:off x="631080" y="539640"/>
-            <a:ext cx="218160" cy="218160"/>
+            <a:ext cx="217440" cy="217440"/>
           </a:xfrm>
           <a:prstGeom prst="rect">
             <a:avLst/>
@@ -36170,7 +36191,7 @@
         <p:spPr>
           <a:xfrm>
             <a:off x="1097280" y="420480"/>
-            <a:ext cx="10544400" cy="455760"/>
+            <a:ext cx="10543680" cy="455040"/>
           </a:xfrm>
           <a:prstGeom prst="rect">
             <a:avLst/>
@@ -36231,7 +36252,7 @@
         <p:spPr>
           <a:xfrm>
             <a:off x="548640" y="1234440"/>
-            <a:ext cx="11093040" cy="1196280"/>
+            <a:ext cx="11092320" cy="1195560"/>
           </a:xfrm>
           <a:prstGeom prst="rect">
             <a:avLst/>
@@ -36367,7 +36388,7 @@
         <p:spPr>
           <a:xfrm>
             <a:off x="548640" y="2569320"/>
-            <a:ext cx="11093040" cy="3784320"/>
+            <a:ext cx="11092320" cy="3783600"/>
           </a:xfrm>
           <a:prstGeom prst="roundRect">
             <a:avLst>
@@ -36412,7 +36433,7 @@
         <p:spPr>
           <a:xfrm>
             <a:off x="868680" y="2752200"/>
-            <a:ext cx="10452960" cy="3418560"/>
+            <a:ext cx="10452240" cy="3417840"/>
           </a:xfrm>
           <a:prstGeom prst="rect">
             <a:avLst/>
@@ -36893,7 +36914,7 @@
         <p:spPr>
           <a:xfrm>
             <a:off x="548640" y="6510600"/>
-            <a:ext cx="5484960" cy="272880"/>
+            <a:ext cx="5484240" cy="272160"/>
           </a:xfrm>
           <a:prstGeom prst="rect">
             <a:avLst/>
@@ -36954,7 +36975,7 @@
         <p:spPr>
           <a:xfrm>
             <a:off x="11094480" y="6510600"/>
-            <a:ext cx="547200" cy="272880"/>
+            <a:ext cx="546480" cy="272160"/>
           </a:xfrm>
           <a:prstGeom prst="rect">
             <a:avLst/>
@@ -37056,7 +37077,7 @@
         <p:spPr>
           <a:xfrm>
             <a:off x="548640" y="457200"/>
-            <a:ext cx="382680" cy="382680"/>
+            <a:ext cx="381960" cy="381960"/>
           </a:xfrm>
           <a:prstGeom prst="roundRect">
             <a:avLst>
@@ -37105,7 +37126,7 @@
         <p:spPr>
           <a:xfrm>
             <a:off x="631080" y="539640"/>
-            <a:ext cx="218160" cy="218160"/>
+            <a:ext cx="217440" cy="217440"/>
           </a:xfrm>
           <a:prstGeom prst="rect">
             <a:avLst/>
@@ -37125,7 +37146,7 @@
         <p:spPr>
           <a:xfrm>
             <a:off x="1097280" y="420480"/>
-            <a:ext cx="10544400" cy="455760"/>
+            <a:ext cx="10543680" cy="455040"/>
           </a:xfrm>
           <a:prstGeom prst="rect">
             <a:avLst/>
@@ -37186,7 +37207,7 @@
         <p:spPr>
           <a:xfrm>
             <a:off x="548640" y="1234440"/>
-            <a:ext cx="5362920" cy="5119200"/>
+            <a:ext cx="5362200" cy="5118480"/>
           </a:xfrm>
           <a:prstGeom prst="roundRect">
             <a:avLst>
@@ -37231,7 +37252,7 @@
         <p:spPr>
           <a:xfrm>
             <a:off x="822960" y="1508760"/>
-            <a:ext cx="455760" cy="455760"/>
+            <a:ext cx="455040" cy="455040"/>
           </a:xfrm>
           <a:prstGeom prst="ellipse">
             <a:avLst/>
@@ -37278,7 +37299,7 @@
         <p:spPr>
           <a:xfrm>
             <a:off x="923400" y="1609200"/>
-            <a:ext cx="254520" cy="254520"/>
+            <a:ext cx="253800" cy="253800"/>
           </a:xfrm>
           <a:prstGeom prst="rect">
             <a:avLst/>
@@ -37298,7 +37319,7 @@
         <p:spPr>
           <a:xfrm>
             <a:off x="1444680" y="1508760"/>
-            <a:ext cx="4284000" cy="455760"/>
+            <a:ext cx="4283280" cy="455040"/>
           </a:xfrm>
           <a:prstGeom prst="rect">
             <a:avLst/>
@@ -37359,7 +37380,7 @@
         <p:spPr>
           <a:xfrm>
             <a:off x="841320" y="2194560"/>
-            <a:ext cx="4777560" cy="3930480"/>
+            <a:ext cx="4776840" cy="3929760"/>
           </a:xfrm>
           <a:prstGeom prst="rect">
             <a:avLst/>
@@ -37495,7 +37516,7 @@
         <p:spPr>
           <a:xfrm>
             <a:off x="6278760" y="1234440"/>
-            <a:ext cx="5362920" cy="5119200"/>
+            <a:ext cx="5362200" cy="5118480"/>
           </a:xfrm>
           <a:prstGeom prst="roundRect">
             <a:avLst>
@@ -37540,7 +37561,7 @@
         <p:spPr>
           <a:xfrm>
             <a:off x="6553080" y="1508760"/>
-            <a:ext cx="455760" cy="455760"/>
+            <a:ext cx="455040" cy="455040"/>
           </a:xfrm>
           <a:prstGeom prst="ellipse">
             <a:avLst/>
@@ -37587,7 +37608,7 @@
         <p:spPr>
           <a:xfrm>
             <a:off x="6653520" y="1609200"/>
-            <a:ext cx="254520" cy="254520"/>
+            <a:ext cx="253800" cy="253800"/>
           </a:xfrm>
           <a:prstGeom prst="rect">
             <a:avLst/>
@@ -37607,7 +37628,7 @@
         <p:spPr>
           <a:xfrm>
             <a:off x="7174800" y="1508760"/>
-            <a:ext cx="4284000" cy="455760"/>
+            <a:ext cx="4283280" cy="455040"/>
           </a:xfrm>
           <a:prstGeom prst="rect">
             <a:avLst/>
@@ -37668,7 +37689,7 @@
         <p:spPr>
           <a:xfrm>
             <a:off x="6571440" y="2194560"/>
-            <a:ext cx="4777560" cy="3930480"/>
+            <a:ext cx="4776840" cy="3929760"/>
           </a:xfrm>
           <a:prstGeom prst="rect">
             <a:avLst/>
@@ -37804,7 +37825,7 @@
         <p:spPr>
           <a:xfrm>
             <a:off x="548640" y="6510600"/>
-            <a:ext cx="5484960" cy="272880"/>
+            <a:ext cx="5484240" cy="272160"/>
           </a:xfrm>
           <a:prstGeom prst="rect">
             <a:avLst/>
@@ -37865,7 +37886,7 @@
         <p:spPr>
           <a:xfrm>
             <a:off x="11094480" y="6510600"/>
-            <a:ext cx="547200" cy="272880"/>
+            <a:ext cx="546480" cy="272160"/>
           </a:xfrm>
           <a:prstGeom prst="rect">
             <a:avLst/>
@@ -37967,7 +37988,7 @@
         <p:spPr>
           <a:xfrm>
             <a:off x="548640" y="457200"/>
-            <a:ext cx="382680" cy="382680"/>
+            <a:ext cx="381960" cy="381960"/>
           </a:xfrm>
           <a:prstGeom prst="roundRect">
             <a:avLst>
@@ -38016,7 +38037,7 @@
         <p:spPr>
           <a:xfrm>
             <a:off x="631080" y="539640"/>
-            <a:ext cx="218160" cy="218160"/>
+            <a:ext cx="217440" cy="217440"/>
           </a:xfrm>
           <a:prstGeom prst="rect">
             <a:avLst/>
@@ -38036,7 +38057,7 @@
         <p:spPr>
           <a:xfrm>
             <a:off x="1097280" y="420480"/>
-            <a:ext cx="10544400" cy="455760"/>
+            <a:ext cx="10543680" cy="455040"/>
           </a:xfrm>
           <a:prstGeom prst="rect">
             <a:avLst/>
@@ -38097,7 +38118,7 @@
         <p:spPr>
           <a:xfrm>
             <a:off x="548640" y="1234440"/>
-            <a:ext cx="11093040" cy="1196280"/>
+            <a:ext cx="11092320" cy="1195560"/>
           </a:xfrm>
           <a:prstGeom prst="rect">
             <a:avLst/>
@@ -38233,7 +38254,7 @@
         <p:spPr>
           <a:xfrm>
             <a:off x="548640" y="2569320"/>
-            <a:ext cx="11093040" cy="3784320"/>
+            <a:ext cx="11092320" cy="3783600"/>
           </a:xfrm>
           <a:prstGeom prst="roundRect">
             <a:avLst>
@@ -38278,7 +38299,7 @@
         <p:spPr>
           <a:xfrm>
             <a:off x="868680" y="2752200"/>
-            <a:ext cx="10452960" cy="3418560"/>
+            <a:ext cx="10452240" cy="3417840"/>
           </a:xfrm>
           <a:prstGeom prst="rect">
             <a:avLst/>
@@ -38669,7 +38690,7 @@
         <p:spPr>
           <a:xfrm>
             <a:off x="548640" y="6510600"/>
-            <a:ext cx="5484960" cy="272880"/>
+            <a:ext cx="5484240" cy="272160"/>
           </a:xfrm>
           <a:prstGeom prst="rect">
             <a:avLst/>
@@ -38730,7 +38751,7 @@
         <p:spPr>
           <a:xfrm>
             <a:off x="11094480" y="6510600"/>
-            <a:ext cx="547200" cy="272880"/>
+            <a:ext cx="546480" cy="272160"/>
           </a:xfrm>
           <a:prstGeom prst="rect">
             <a:avLst/>
@@ -38832,7 +38853,7 @@
         <p:spPr>
           <a:xfrm>
             <a:off x="548640" y="457200"/>
-            <a:ext cx="382680" cy="382680"/>
+            <a:ext cx="381960" cy="381960"/>
           </a:xfrm>
           <a:prstGeom prst="roundRect">
             <a:avLst>
@@ -38881,7 +38902,7 @@
         <p:spPr>
           <a:xfrm>
             <a:off x="631080" y="539640"/>
-            <a:ext cx="218160" cy="218160"/>
+            <a:ext cx="217440" cy="217440"/>
           </a:xfrm>
           <a:prstGeom prst="rect">
             <a:avLst/>
@@ -38901,7 +38922,7 @@
         <p:spPr>
           <a:xfrm>
             <a:off x="1097280" y="420480"/>
-            <a:ext cx="10544400" cy="455760"/>
+            <a:ext cx="10543680" cy="455040"/>
           </a:xfrm>
           <a:prstGeom prst="rect">
             <a:avLst/>
@@ -38962,7 +38983,7 @@
         <p:spPr>
           <a:xfrm>
             <a:off x="548640" y="1234440"/>
-            <a:ext cx="3244680" cy="5119200"/>
+            <a:ext cx="3243960" cy="5118480"/>
           </a:xfrm>
           <a:prstGeom prst="roundRect">
             <a:avLst>
@@ -39007,7 +39028,7 @@
         <p:spPr>
           <a:xfrm>
             <a:off x="1645920" y="1737360"/>
-            <a:ext cx="1050120" cy="1050120"/>
+            <a:ext cx="1049400" cy="1049400"/>
           </a:xfrm>
           <a:prstGeom prst="ellipse">
             <a:avLst/>
@@ -39054,7 +39075,7 @@
         <p:spPr>
           <a:xfrm>
             <a:off x="1906560" y="2002680"/>
-            <a:ext cx="528840" cy="528840"/>
+            <a:ext cx="528120" cy="528120"/>
           </a:xfrm>
           <a:prstGeom prst="rect">
             <a:avLst/>
@@ -39074,7 +39095,7 @@
         <p:spPr>
           <a:xfrm>
             <a:off x="731520" y="3017520"/>
-            <a:ext cx="2878920" cy="3061800"/>
+            <a:ext cx="2878200" cy="3061080"/>
           </a:xfrm>
           <a:prstGeom prst="rect">
             <a:avLst/>
@@ -39195,7 +39216,7 @@
         <p:spPr>
           <a:xfrm>
             <a:off x="4206240" y="1280160"/>
-            <a:ext cx="7435440" cy="5027760"/>
+            <a:ext cx="7434720" cy="5027040"/>
           </a:xfrm>
           <a:prstGeom prst="rect">
             <a:avLst/>
@@ -39366,7 +39387,7 @@
         <p:spPr>
           <a:xfrm>
             <a:off x="548640" y="6510600"/>
-            <a:ext cx="5484960" cy="272880"/>
+            <a:ext cx="5484240" cy="272160"/>
           </a:xfrm>
           <a:prstGeom prst="rect">
             <a:avLst/>
@@ -39427,7 +39448,7 @@
         <p:spPr>
           <a:xfrm>
             <a:off x="11094480" y="6510600"/>
-            <a:ext cx="547200" cy="272880"/>
+            <a:ext cx="546480" cy="272160"/>
           </a:xfrm>
           <a:prstGeom prst="rect">
             <a:avLst/>
@@ -39529,7 +39550,7 @@
         <p:spPr>
           <a:xfrm>
             <a:off x="548640" y="457200"/>
-            <a:ext cx="382680" cy="382680"/>
+            <a:ext cx="381960" cy="381960"/>
           </a:xfrm>
           <a:prstGeom prst="roundRect">
             <a:avLst>
@@ -39578,7 +39599,7 @@
         <p:spPr>
           <a:xfrm>
             <a:off x="631080" y="539640"/>
-            <a:ext cx="218160" cy="218160"/>
+            <a:ext cx="217440" cy="217440"/>
           </a:xfrm>
           <a:prstGeom prst="rect">
             <a:avLst/>
@@ -39598,7 +39619,7 @@
         <p:spPr>
           <a:xfrm>
             <a:off x="1097280" y="420480"/>
-            <a:ext cx="10544400" cy="455760"/>
+            <a:ext cx="10543680" cy="455040"/>
           </a:xfrm>
           <a:prstGeom prst="rect">
             <a:avLst/>
@@ -39659,7 +39680,7 @@
         <p:spPr>
           <a:xfrm>
             <a:off x="548640" y="1234440"/>
-            <a:ext cx="3244680" cy="5119200"/>
+            <a:ext cx="3243960" cy="5118480"/>
           </a:xfrm>
           <a:prstGeom prst="roundRect">
             <a:avLst>
@@ -39704,7 +39725,7 @@
         <p:spPr>
           <a:xfrm>
             <a:off x="1645920" y="1737360"/>
-            <a:ext cx="1050120" cy="1050120"/>
+            <a:ext cx="1049400" cy="1049400"/>
           </a:xfrm>
           <a:prstGeom prst="ellipse">
             <a:avLst/>
@@ -39751,7 +39772,7 @@
         <p:spPr>
           <a:xfrm>
             <a:off x="1906560" y="2002680"/>
-            <a:ext cx="528840" cy="528840"/>
+            <a:ext cx="528120" cy="528120"/>
           </a:xfrm>
           <a:prstGeom prst="rect">
             <a:avLst/>
@@ -39771,7 +39792,7 @@
         <p:spPr>
           <a:xfrm>
             <a:off x="731520" y="3017520"/>
-            <a:ext cx="2878920" cy="3061800"/>
+            <a:ext cx="2878200" cy="3061080"/>
           </a:xfrm>
           <a:prstGeom prst="rect">
             <a:avLst/>
@@ -39892,7 +39913,7 @@
         <p:spPr>
           <a:xfrm>
             <a:off x="4206240" y="1280160"/>
-            <a:ext cx="7435440" cy="5027760"/>
+            <a:ext cx="7434720" cy="5027040"/>
           </a:xfrm>
           <a:prstGeom prst="rect">
             <a:avLst/>
@@ -40063,7 +40084,7 @@
         <p:spPr>
           <a:xfrm>
             <a:off x="548640" y="6510600"/>
-            <a:ext cx="5484960" cy="272880"/>
+            <a:ext cx="5484240" cy="272160"/>
           </a:xfrm>
           <a:prstGeom prst="rect">
             <a:avLst/>
@@ -40124,7 +40145,7 @@
         <p:spPr>
           <a:xfrm>
             <a:off x="11094480" y="6510600"/>
-            <a:ext cx="547200" cy="272880"/>
+            <a:ext cx="546480" cy="272160"/>
           </a:xfrm>
           <a:prstGeom prst="rect">
             <a:avLst/>
@@ -40226,7 +40247,7 @@
         <p:spPr>
           <a:xfrm>
             <a:off x="548640" y="457200"/>
-            <a:ext cx="382680" cy="382680"/>
+            <a:ext cx="381960" cy="381960"/>
           </a:xfrm>
           <a:prstGeom prst="roundRect">
             <a:avLst>
@@ -40275,7 +40296,7 @@
         <p:spPr>
           <a:xfrm>
             <a:off x="631080" y="539640"/>
-            <a:ext cx="218160" cy="218160"/>
+            <a:ext cx="217440" cy="217440"/>
           </a:xfrm>
           <a:prstGeom prst="rect">
             <a:avLst/>
@@ -40295,7 +40316,7 @@
         <p:spPr>
           <a:xfrm>
             <a:off x="1097280" y="420480"/>
-            <a:ext cx="10544400" cy="455760"/>
+            <a:ext cx="10543680" cy="455040"/>
           </a:xfrm>
           <a:prstGeom prst="rect">
             <a:avLst/>
@@ -40356,7 +40377,7 @@
         <p:spPr>
           <a:xfrm>
             <a:off x="548640" y="1234440"/>
-            <a:ext cx="11093040" cy="1196280"/>
+            <a:ext cx="11092320" cy="1195560"/>
           </a:xfrm>
           <a:prstGeom prst="rect">
             <a:avLst/>
@@ -40492,7 +40513,7 @@
         <p:spPr>
           <a:xfrm>
             <a:off x="548640" y="2569320"/>
-            <a:ext cx="11093040" cy="3784320"/>
+            <a:ext cx="11092320" cy="3783600"/>
           </a:xfrm>
           <a:prstGeom prst="roundRect">
             <a:avLst>
@@ -40537,7 +40558,7 @@
         <p:spPr>
           <a:xfrm>
             <a:off x="868680" y="2752200"/>
-            <a:ext cx="10452960" cy="3418560"/>
+            <a:ext cx="10452240" cy="3417840"/>
           </a:xfrm>
           <a:prstGeom prst="rect">
             <a:avLst/>
@@ -40988,7 +41009,7 @@
         <p:spPr>
           <a:xfrm>
             <a:off x="548640" y="6510600"/>
-            <a:ext cx="5484960" cy="272880"/>
+            <a:ext cx="5484240" cy="272160"/>
           </a:xfrm>
           <a:prstGeom prst="rect">
             <a:avLst/>
@@ -41049,7 +41070,7 @@
         <p:spPr>
           <a:xfrm>
             <a:off x="11094480" y="6510600"/>
-            <a:ext cx="547200" cy="272880"/>
+            <a:ext cx="546480" cy="272160"/>
           </a:xfrm>
           <a:prstGeom prst="rect">
             <a:avLst/>
@@ -41151,7 +41172,7 @@
         <p:spPr>
           <a:xfrm>
             <a:off x="548640" y="457200"/>
-            <a:ext cx="382680" cy="382680"/>
+            <a:ext cx="381960" cy="381960"/>
           </a:xfrm>
           <a:prstGeom prst="roundRect">
             <a:avLst>
@@ -41200,7 +41221,7 @@
         <p:spPr>
           <a:xfrm>
             <a:off x="631080" y="539640"/>
-            <a:ext cx="218160" cy="218160"/>
+            <a:ext cx="217440" cy="217440"/>
           </a:xfrm>
           <a:prstGeom prst="rect">
             <a:avLst/>
@@ -41220,7 +41241,7 @@
         <p:spPr>
           <a:xfrm>
             <a:off x="1097280" y="420480"/>
-            <a:ext cx="10544400" cy="455760"/>
+            <a:ext cx="10543680" cy="455040"/>
           </a:xfrm>
           <a:prstGeom prst="rect">
             <a:avLst/>
@@ -41281,7 +41302,7 @@
         <p:spPr>
           <a:xfrm>
             <a:off x="548640" y="1234440"/>
-            <a:ext cx="11093040" cy="5119200"/>
+            <a:ext cx="11092320" cy="5118480"/>
           </a:xfrm>
           <a:prstGeom prst="roundRect">
             <a:avLst>
@@ -41326,7 +41347,7 @@
         <p:spPr>
           <a:xfrm>
             <a:off x="868680" y="1435680"/>
-            <a:ext cx="10452960" cy="364320"/>
+            <a:ext cx="10452240" cy="363600"/>
           </a:xfrm>
           <a:prstGeom prst="rect">
             <a:avLst/>
@@ -41387,7 +41408,7 @@
         <p:spPr>
           <a:xfrm>
             <a:off x="868680" y="2473560"/>
-            <a:ext cx="309600" cy="309600"/>
+            <a:ext cx="308880" cy="308880"/>
           </a:xfrm>
           <a:prstGeom prst="ellipse">
             <a:avLst/>
@@ -41430,7 +41451,7 @@
         <p:spPr>
           <a:xfrm>
             <a:off x="868680" y="2473560"/>
-            <a:ext cx="309600" cy="309600"/>
+            <a:ext cx="308880" cy="308880"/>
           </a:xfrm>
           <a:prstGeom prst="rect">
             <a:avLst/>
@@ -41491,7 +41512,7 @@
         <p:spPr>
           <a:xfrm>
             <a:off x="1408320" y="1920240"/>
-            <a:ext cx="9913320" cy="1415880"/>
+            <a:ext cx="9912600" cy="1415160"/>
           </a:xfrm>
           <a:prstGeom prst="rect">
             <a:avLst/>
@@ -41552,7 +41573,7 @@
         <p:spPr>
           <a:xfrm>
             <a:off x="868680" y="3890880"/>
-            <a:ext cx="309600" cy="309600"/>
+            <a:ext cx="308880" cy="308880"/>
           </a:xfrm>
           <a:prstGeom prst="ellipse">
             <a:avLst/>
@@ -41595,7 +41616,7 @@
         <p:spPr>
           <a:xfrm>
             <a:off x="868680" y="3890880"/>
-            <a:ext cx="309600" cy="309600"/>
+            <a:ext cx="308880" cy="308880"/>
           </a:xfrm>
           <a:prstGeom prst="rect">
             <a:avLst/>
@@ -41656,7 +41677,7 @@
         <p:spPr>
           <a:xfrm>
             <a:off x="1408320" y="3337560"/>
-            <a:ext cx="9913320" cy="1415880"/>
+            <a:ext cx="9912600" cy="1415160"/>
           </a:xfrm>
           <a:prstGeom prst="rect">
             <a:avLst/>
@@ -41717,7 +41738,7 @@
         <p:spPr>
           <a:xfrm>
             <a:off x="868680" y="5308200"/>
-            <a:ext cx="309600" cy="309600"/>
+            <a:ext cx="308880" cy="308880"/>
           </a:xfrm>
           <a:prstGeom prst="ellipse">
             <a:avLst/>
@@ -41760,7 +41781,7 @@
         <p:spPr>
           <a:xfrm>
             <a:off x="868680" y="5308200"/>
-            <a:ext cx="309600" cy="309600"/>
+            <a:ext cx="308880" cy="308880"/>
           </a:xfrm>
           <a:prstGeom prst="rect">
             <a:avLst/>
@@ -41821,7 +41842,7 @@
         <p:spPr>
           <a:xfrm>
             <a:off x="1408320" y="4754880"/>
-            <a:ext cx="9913320" cy="1415880"/>
+            <a:ext cx="9912600" cy="1415160"/>
           </a:xfrm>
           <a:prstGeom prst="rect">
             <a:avLst/>
@@ -41882,7 +41903,7 @@
         <p:spPr>
           <a:xfrm>
             <a:off x="548640" y="6510600"/>
-            <a:ext cx="5484960" cy="272880"/>
+            <a:ext cx="5484240" cy="272160"/>
           </a:xfrm>
           <a:prstGeom prst="rect">
             <a:avLst/>
@@ -41943,7 +41964,7 @@
         <p:spPr>
           <a:xfrm>
             <a:off x="11094480" y="6510600"/>
-            <a:ext cx="547200" cy="272880"/>
+            <a:ext cx="546480" cy="272160"/>
           </a:xfrm>
           <a:prstGeom prst="rect">
             <a:avLst/>
@@ -42045,7 +42066,7 @@
         <p:spPr>
           <a:xfrm>
             <a:off x="-2286000" y="3657600"/>
-            <a:ext cx="6399360" cy="6399360"/>
+            <a:ext cx="6398640" cy="6398640"/>
           </a:xfrm>
           <a:prstGeom prst="ellipse">
             <a:avLst/>
@@ -42088,7 +42109,7 @@
         <p:spPr>
           <a:xfrm>
             <a:off x="8229600" y="-2743200"/>
-            <a:ext cx="6399360" cy="6399360"/>
+            <a:ext cx="6398640" cy="6398640"/>
           </a:xfrm>
           <a:prstGeom prst="ellipse">
             <a:avLst/>
@@ -42131,7 +42152,7 @@
         <p:spPr>
           <a:xfrm>
             <a:off x="5638680" y="868680"/>
-            <a:ext cx="912960" cy="912960"/>
+            <a:ext cx="912240" cy="912240"/>
           </a:xfrm>
           <a:prstGeom prst="ellipse">
             <a:avLst/>
@@ -42178,7 +42199,7 @@
         <p:spPr>
           <a:xfrm>
             <a:off x="5876280" y="1097280"/>
-            <a:ext cx="437400" cy="437400"/>
+            <a:ext cx="436680" cy="436680"/>
           </a:xfrm>
           <a:prstGeom prst="rect">
             <a:avLst/>
@@ -42198,7 +42219,7 @@
         <p:spPr>
           <a:xfrm>
             <a:off x="914400" y="2057400"/>
-            <a:ext cx="10361520" cy="291240"/>
+            <a:ext cx="10360800" cy="290520"/>
           </a:xfrm>
           <a:prstGeom prst="rect">
             <a:avLst/>
@@ -42259,7 +42280,7 @@
         <p:spPr>
           <a:xfrm>
             <a:off x="1188720" y="2441520"/>
-            <a:ext cx="9812880" cy="1370160"/>
+            <a:ext cx="9812160" cy="1369440"/>
           </a:xfrm>
           <a:prstGeom prst="rect">
             <a:avLst/>
@@ -42320,7 +42341,7 @@
         <p:spPr>
           <a:xfrm>
             <a:off x="1920240" y="3996000"/>
-            <a:ext cx="8349840" cy="821520"/>
+            <a:ext cx="8349120" cy="820800"/>
           </a:xfrm>
           <a:prstGeom prst="rect">
             <a:avLst/>
@@ -42381,7 +42402,7 @@
         <p:spPr>
           <a:xfrm>
             <a:off x="11094480" y="6492240"/>
-            <a:ext cx="547200" cy="272880"/>
+            <a:ext cx="546480" cy="272160"/>
           </a:xfrm>
           <a:prstGeom prst="rect">
             <a:avLst/>
@@ -42483,7 +42504,7 @@
         <p:spPr>
           <a:xfrm>
             <a:off x="548640" y="457200"/>
-            <a:ext cx="382680" cy="382680"/>
+            <a:ext cx="381960" cy="381960"/>
           </a:xfrm>
           <a:prstGeom prst="roundRect">
             <a:avLst>
@@ -42532,7 +42553,7 @@
         <p:spPr>
           <a:xfrm>
             <a:off x="631080" y="539640"/>
-            <a:ext cx="218160" cy="218160"/>
+            <a:ext cx="217440" cy="217440"/>
           </a:xfrm>
           <a:prstGeom prst="rect">
             <a:avLst/>
@@ -42552,7 +42573,7 @@
         <p:spPr>
           <a:xfrm>
             <a:off x="1097280" y="420480"/>
-            <a:ext cx="10544400" cy="455760"/>
+            <a:ext cx="10543680" cy="455040"/>
           </a:xfrm>
           <a:prstGeom prst="rect">
             <a:avLst/>
@@ -42613,7 +42634,7 @@
         <p:spPr>
           <a:xfrm>
             <a:off x="548640" y="1234440"/>
-            <a:ext cx="11093040" cy="318600"/>
+            <a:ext cx="11092320" cy="317880"/>
           </a:xfrm>
           <a:prstGeom prst="rect">
             <a:avLst/>
@@ -42674,7 +42695,7 @@
         <p:spPr>
           <a:xfrm>
             <a:off x="548640" y="1682640"/>
-            <a:ext cx="11093040" cy="1458720"/>
+            <a:ext cx="11092320" cy="1458000"/>
           </a:xfrm>
           <a:prstGeom prst="roundRect">
             <a:avLst>
@@ -42719,7 +42740,7 @@
         <p:spPr>
           <a:xfrm>
             <a:off x="804600" y="2302920"/>
-            <a:ext cx="291240" cy="291240"/>
+            <a:ext cx="290520" cy="290520"/>
           </a:xfrm>
           <a:prstGeom prst="ellipse">
             <a:avLst/>
@@ -42766,7 +42787,7 @@
         <p:spPr>
           <a:xfrm>
             <a:off x="859680" y="2357640"/>
-            <a:ext cx="181440" cy="181440"/>
+            <a:ext cx="180720" cy="180720"/>
           </a:xfrm>
           <a:prstGeom prst="rect">
             <a:avLst/>
@@ -42786,7 +42807,7 @@
         <p:spPr>
           <a:xfrm>
             <a:off x="1325880" y="1719000"/>
-            <a:ext cx="10041480" cy="1348920"/>
+            <a:ext cx="10040760" cy="1348200"/>
           </a:xfrm>
           <a:prstGeom prst="rect">
             <a:avLst/>
@@ -42847,7 +42868,7 @@
         <p:spPr>
           <a:xfrm>
             <a:off x="548640" y="3252240"/>
-            <a:ext cx="11093040" cy="1458720"/>
+            <a:ext cx="11092320" cy="1458000"/>
           </a:xfrm>
           <a:prstGeom prst="roundRect">
             <a:avLst>
@@ -42892,7 +42913,7 @@
         <p:spPr>
           <a:xfrm>
             <a:off x="804600" y="3872520"/>
-            <a:ext cx="291240" cy="291240"/>
+            <a:ext cx="290520" cy="290520"/>
           </a:xfrm>
           <a:prstGeom prst="ellipse">
             <a:avLst/>
@@ -42939,7 +42960,7 @@
         <p:spPr>
           <a:xfrm>
             <a:off x="859680" y="3927240"/>
-            <a:ext cx="181440" cy="181440"/>
+            <a:ext cx="180720" cy="180720"/>
           </a:xfrm>
           <a:prstGeom prst="rect">
             <a:avLst/>
@@ -42959,7 +42980,7 @@
         <p:spPr>
           <a:xfrm>
             <a:off x="1325880" y="3288960"/>
-            <a:ext cx="10041480" cy="1348920"/>
+            <a:ext cx="10040760" cy="1348200"/>
           </a:xfrm>
           <a:prstGeom prst="rect">
             <a:avLst/>
@@ -43020,7 +43041,7 @@
         <p:spPr>
           <a:xfrm>
             <a:off x="548640" y="4821840"/>
-            <a:ext cx="11093040" cy="1458720"/>
+            <a:ext cx="11092320" cy="1458000"/>
           </a:xfrm>
           <a:prstGeom prst="roundRect">
             <a:avLst>
@@ -43065,7 +43086,7 @@
         <p:spPr>
           <a:xfrm>
             <a:off x="804600" y="5442120"/>
-            <a:ext cx="291240" cy="291240"/>
+            <a:ext cx="290520" cy="290520"/>
           </a:xfrm>
           <a:prstGeom prst="ellipse">
             <a:avLst/>
@@ -43112,7 +43133,7 @@
         <p:spPr>
           <a:xfrm>
             <a:off x="859680" y="5497200"/>
-            <a:ext cx="181440" cy="181440"/>
+            <a:ext cx="180720" cy="180720"/>
           </a:xfrm>
           <a:prstGeom prst="rect">
             <a:avLst/>
@@ -43132,7 +43153,7 @@
         <p:spPr>
           <a:xfrm>
             <a:off x="1325880" y="4858560"/>
-            <a:ext cx="10041480" cy="1348920"/>
+            <a:ext cx="10040760" cy="1348200"/>
           </a:xfrm>
           <a:prstGeom prst="rect">
             <a:avLst/>
@@ -43193,7 +43214,7 @@
         <p:spPr>
           <a:xfrm>
             <a:off x="548640" y="6510600"/>
-            <a:ext cx="5484960" cy="272880"/>
+            <a:ext cx="5484240" cy="272160"/>
           </a:xfrm>
           <a:prstGeom prst="rect">
             <a:avLst/>
@@ -43254,7 +43275,7 @@
         <p:spPr>
           <a:xfrm>
             <a:off x="11094480" y="6510600"/>
-            <a:ext cx="547200" cy="272880"/>
+            <a:ext cx="546480" cy="272160"/>
           </a:xfrm>
           <a:prstGeom prst="rect">
             <a:avLst/>
@@ -43356,7 +43377,7 @@
         <p:spPr>
           <a:xfrm>
             <a:off x="548640" y="457200"/>
-            <a:ext cx="382680" cy="382680"/>
+            <a:ext cx="381960" cy="381960"/>
           </a:xfrm>
           <a:prstGeom prst="roundRect">
             <a:avLst>
@@ -43405,7 +43426,7 @@
         <p:spPr>
           <a:xfrm>
             <a:off x="631080" y="539640"/>
-            <a:ext cx="218160" cy="218160"/>
+            <a:ext cx="217440" cy="217440"/>
           </a:xfrm>
           <a:prstGeom prst="rect">
             <a:avLst/>
@@ -43425,7 +43446,7 @@
         <p:spPr>
           <a:xfrm>
             <a:off x="1097280" y="420480"/>
-            <a:ext cx="10544400" cy="455760"/>
+            <a:ext cx="10543680" cy="455040"/>
           </a:xfrm>
           <a:prstGeom prst="rect">
             <a:avLst/>
@@ -43486,7 +43507,7 @@
         <p:spPr>
           <a:xfrm>
             <a:off x="548640" y="1234440"/>
-            <a:ext cx="11093040" cy="318600"/>
+            <a:ext cx="11092320" cy="317880"/>
           </a:xfrm>
           <a:prstGeom prst="rect">
             <a:avLst/>
@@ -43547,7 +43568,7 @@
         <p:spPr>
           <a:xfrm>
             <a:off x="548640" y="1682640"/>
-            <a:ext cx="11093040" cy="1458720"/>
+            <a:ext cx="11092320" cy="1458000"/>
           </a:xfrm>
           <a:prstGeom prst="roundRect">
             <a:avLst>
@@ -43592,7 +43613,7 @@
         <p:spPr>
           <a:xfrm>
             <a:off x="804600" y="2302920"/>
-            <a:ext cx="291240" cy="291240"/>
+            <a:ext cx="290520" cy="290520"/>
           </a:xfrm>
           <a:prstGeom prst="ellipse">
             <a:avLst/>
@@ -43639,7 +43660,7 @@
         <p:spPr>
           <a:xfrm>
             <a:off x="859680" y="2357640"/>
-            <a:ext cx="181440" cy="181440"/>
+            <a:ext cx="180720" cy="180720"/>
           </a:xfrm>
           <a:prstGeom prst="rect">
             <a:avLst/>
@@ -43659,7 +43680,7 @@
         <p:spPr>
           <a:xfrm>
             <a:off x="1325880" y="1719000"/>
-            <a:ext cx="10041480" cy="1348920"/>
+            <a:ext cx="10040760" cy="1348200"/>
           </a:xfrm>
           <a:prstGeom prst="rect">
             <a:avLst/>
@@ -43720,7 +43741,7 @@
         <p:spPr>
           <a:xfrm>
             <a:off x="548640" y="3252240"/>
-            <a:ext cx="11093040" cy="1458720"/>
+            <a:ext cx="11092320" cy="1458000"/>
           </a:xfrm>
           <a:prstGeom prst="roundRect">
             <a:avLst>
@@ -43765,7 +43786,7 @@
         <p:spPr>
           <a:xfrm>
             <a:off x="804600" y="3872520"/>
-            <a:ext cx="291240" cy="291240"/>
+            <a:ext cx="290520" cy="290520"/>
           </a:xfrm>
           <a:prstGeom prst="ellipse">
             <a:avLst/>
@@ -43812,7 +43833,7 @@
         <p:spPr>
           <a:xfrm>
             <a:off x="859680" y="3927240"/>
-            <a:ext cx="181440" cy="181440"/>
+            <a:ext cx="180720" cy="180720"/>
           </a:xfrm>
           <a:prstGeom prst="rect">
             <a:avLst/>
@@ -43832,7 +43853,7 @@
         <p:spPr>
           <a:xfrm>
             <a:off x="1325880" y="3288960"/>
-            <a:ext cx="10041480" cy="1348920"/>
+            <a:ext cx="10040760" cy="1348200"/>
           </a:xfrm>
           <a:prstGeom prst="rect">
             <a:avLst/>
@@ -43893,7 +43914,7 @@
         <p:spPr>
           <a:xfrm>
             <a:off x="548640" y="4821840"/>
-            <a:ext cx="11093040" cy="1458720"/>
+            <a:ext cx="11092320" cy="1458000"/>
           </a:xfrm>
           <a:prstGeom prst="roundRect">
             <a:avLst>
@@ -43938,7 +43959,7 @@
         <p:spPr>
           <a:xfrm>
             <a:off x="804600" y="5442120"/>
-            <a:ext cx="291240" cy="291240"/>
+            <a:ext cx="290520" cy="290520"/>
           </a:xfrm>
           <a:prstGeom prst="ellipse">
             <a:avLst/>
@@ -43985,7 +44006,7 @@
         <p:spPr>
           <a:xfrm>
             <a:off x="859680" y="5497200"/>
-            <a:ext cx="181440" cy="181440"/>
+            <a:ext cx="180720" cy="180720"/>
           </a:xfrm>
           <a:prstGeom prst="rect">
             <a:avLst/>
@@ -44005,7 +44026,7 @@
         <p:spPr>
           <a:xfrm>
             <a:off x="1325880" y="4858560"/>
-            <a:ext cx="10041480" cy="1348920"/>
+            <a:ext cx="10040760" cy="1348200"/>
           </a:xfrm>
           <a:prstGeom prst="rect">
             <a:avLst/>
@@ -44066,7 +44087,7 @@
         <p:spPr>
           <a:xfrm>
             <a:off x="548640" y="6510600"/>
-            <a:ext cx="5484960" cy="272880"/>
+            <a:ext cx="5484240" cy="272160"/>
           </a:xfrm>
           <a:prstGeom prst="rect">
             <a:avLst/>
@@ -44127,7 +44148,7 @@
         <p:spPr>
           <a:xfrm>
             <a:off x="11094480" y="6510600"/>
-            <a:ext cx="547200" cy="272880"/>
+            <a:ext cx="546480" cy="272160"/>
           </a:xfrm>
           <a:prstGeom prst="rect">
             <a:avLst/>
@@ -44229,7 +44250,7 @@
         <p:spPr>
           <a:xfrm>
             <a:off x="548640" y="457200"/>
-            <a:ext cx="382680" cy="382680"/>
+            <a:ext cx="381960" cy="381960"/>
           </a:xfrm>
           <a:prstGeom prst="roundRect">
             <a:avLst>
@@ -44278,7 +44299,7 @@
         <p:spPr>
           <a:xfrm>
             <a:off x="631080" y="539640"/>
-            <a:ext cx="218160" cy="218160"/>
+            <a:ext cx="217440" cy="217440"/>
           </a:xfrm>
           <a:prstGeom prst="rect">
             <a:avLst/>
@@ -44298,7 +44319,7 @@
         <p:spPr>
           <a:xfrm>
             <a:off x="1097280" y="420480"/>
-            <a:ext cx="10544400" cy="455760"/>
+            <a:ext cx="10543680" cy="455040"/>
           </a:xfrm>
           <a:prstGeom prst="rect">
             <a:avLst/>
@@ -44359,7 +44380,7 @@
         <p:spPr>
           <a:xfrm>
             <a:off x="548640" y="1234440"/>
-            <a:ext cx="11093040" cy="318600"/>
+            <a:ext cx="11092320" cy="317880"/>
           </a:xfrm>
           <a:prstGeom prst="rect">
             <a:avLst/>
@@ -44420,7 +44441,7 @@
         <p:spPr>
           <a:xfrm>
             <a:off x="548640" y="1682640"/>
-            <a:ext cx="11093040" cy="1458720"/>
+            <a:ext cx="11092320" cy="1458000"/>
           </a:xfrm>
           <a:prstGeom prst="roundRect">
             <a:avLst>
@@ -44465,7 +44486,7 @@
         <p:spPr>
           <a:xfrm>
             <a:off x="804600" y="2302920"/>
-            <a:ext cx="291240" cy="291240"/>
+            <a:ext cx="290520" cy="290520"/>
           </a:xfrm>
           <a:prstGeom prst="ellipse">
             <a:avLst/>
@@ -44512,7 +44533,7 @@
         <p:spPr>
           <a:xfrm>
             <a:off x="859680" y="2357640"/>
-            <a:ext cx="181440" cy="181440"/>
+            <a:ext cx="180720" cy="180720"/>
           </a:xfrm>
           <a:prstGeom prst="rect">
             <a:avLst/>
@@ -44532,7 +44553,7 @@
         <p:spPr>
           <a:xfrm>
             <a:off x="1325880" y="1719000"/>
-            <a:ext cx="10041480" cy="1348920"/>
+            <a:ext cx="10040760" cy="1348200"/>
           </a:xfrm>
           <a:prstGeom prst="rect">
             <a:avLst/>
@@ -44593,7 +44614,7 @@
         <p:spPr>
           <a:xfrm>
             <a:off x="548640" y="3252240"/>
-            <a:ext cx="11093040" cy="1458720"/>
+            <a:ext cx="11092320" cy="1458000"/>
           </a:xfrm>
           <a:prstGeom prst="roundRect">
             <a:avLst>
@@ -44638,7 +44659,7 @@
         <p:spPr>
           <a:xfrm>
             <a:off x="804600" y="3872520"/>
-            <a:ext cx="291240" cy="291240"/>
+            <a:ext cx="290520" cy="290520"/>
           </a:xfrm>
           <a:prstGeom prst="ellipse">
             <a:avLst/>
@@ -44685,7 +44706,7 @@
         <p:spPr>
           <a:xfrm>
             <a:off x="859680" y="3927240"/>
-            <a:ext cx="181440" cy="181440"/>
+            <a:ext cx="180720" cy="180720"/>
           </a:xfrm>
           <a:prstGeom prst="rect">
             <a:avLst/>
@@ -44705,7 +44726,7 @@
         <p:spPr>
           <a:xfrm>
             <a:off x="1325880" y="3288960"/>
-            <a:ext cx="10041480" cy="1348920"/>
+            <a:ext cx="10040760" cy="1348200"/>
           </a:xfrm>
           <a:prstGeom prst="rect">
             <a:avLst/>
@@ -44766,7 +44787,7 @@
         <p:spPr>
           <a:xfrm>
             <a:off x="548640" y="4821840"/>
-            <a:ext cx="11093040" cy="1458720"/>
+            <a:ext cx="11092320" cy="1458000"/>
           </a:xfrm>
           <a:prstGeom prst="roundRect">
             <a:avLst>
@@ -44811,7 +44832,7 @@
         <p:spPr>
           <a:xfrm>
             <a:off x="804600" y="5442120"/>
-            <a:ext cx="291240" cy="291240"/>
+            <a:ext cx="290520" cy="290520"/>
           </a:xfrm>
           <a:prstGeom prst="ellipse">
             <a:avLst/>
@@ -44858,7 +44879,7 @@
         <p:spPr>
           <a:xfrm>
             <a:off x="859680" y="5497200"/>
-            <a:ext cx="181440" cy="181440"/>
+            <a:ext cx="180720" cy="180720"/>
           </a:xfrm>
           <a:prstGeom prst="rect">
             <a:avLst/>
@@ -44878,7 +44899,7 @@
         <p:spPr>
           <a:xfrm>
             <a:off x="1325880" y="4858560"/>
-            <a:ext cx="10041480" cy="1348920"/>
+            <a:ext cx="10040760" cy="1348200"/>
           </a:xfrm>
           <a:prstGeom prst="rect">
             <a:avLst/>
@@ -44939,7 +44960,7 @@
         <p:spPr>
           <a:xfrm>
             <a:off x="548640" y="6510600"/>
-            <a:ext cx="5484960" cy="272880"/>
+            <a:ext cx="5484240" cy="272160"/>
           </a:xfrm>
           <a:prstGeom prst="rect">
             <a:avLst/>
@@ -45000,7 +45021,7 @@
         <p:spPr>
           <a:xfrm>
             <a:off x="11094480" y="6510600"/>
-            <a:ext cx="547200" cy="272880"/>
+            <a:ext cx="546480" cy="272160"/>
           </a:xfrm>
           <a:prstGeom prst="rect">
             <a:avLst/>
@@ -45102,7 +45123,7 @@
         <p:spPr>
           <a:xfrm>
             <a:off x="-2286000" y="3657600"/>
-            <a:ext cx="6399360" cy="6399360"/>
+            <a:ext cx="6398640" cy="6398640"/>
           </a:xfrm>
           <a:prstGeom prst="ellipse">
             <a:avLst/>
@@ -45145,7 +45166,7 @@
         <p:spPr>
           <a:xfrm>
             <a:off x="8229600" y="-2743200"/>
-            <a:ext cx="6399360" cy="6399360"/>
+            <a:ext cx="6398640" cy="6398640"/>
           </a:xfrm>
           <a:prstGeom prst="ellipse">
             <a:avLst/>
@@ -45188,7 +45209,7 @@
         <p:spPr>
           <a:xfrm>
             <a:off x="5638680" y="868680"/>
-            <a:ext cx="912960" cy="912960"/>
+            <a:ext cx="912240" cy="912240"/>
           </a:xfrm>
           <a:prstGeom prst="ellipse">
             <a:avLst/>
@@ -45235,7 +45256,7 @@
         <p:spPr>
           <a:xfrm>
             <a:off x="5876280" y="1097280"/>
-            <a:ext cx="437400" cy="437400"/>
+            <a:ext cx="436680" cy="436680"/>
           </a:xfrm>
           <a:prstGeom prst="rect">
             <a:avLst/>
@@ -45255,7 +45276,7 @@
         <p:spPr>
           <a:xfrm>
             <a:off x="914400" y="2057400"/>
-            <a:ext cx="10361520" cy="291240"/>
+            <a:ext cx="10360800" cy="290520"/>
           </a:xfrm>
           <a:prstGeom prst="rect">
             <a:avLst/>
@@ -45316,7 +45337,7 @@
         <p:spPr>
           <a:xfrm>
             <a:off x="1188720" y="2441520"/>
-            <a:ext cx="9812880" cy="1004400"/>
+            <a:ext cx="9812160" cy="1003680"/>
           </a:xfrm>
           <a:prstGeom prst="rect">
             <a:avLst/>
@@ -45377,7 +45398,7 @@
         <p:spPr>
           <a:xfrm>
             <a:off x="1920240" y="3630240"/>
-            <a:ext cx="8349840" cy="821520"/>
+            <a:ext cx="8349120" cy="820800"/>
           </a:xfrm>
           <a:prstGeom prst="rect">
             <a:avLst/>
@@ -45438,7 +45459,7 @@
         <p:spPr>
           <a:xfrm>
             <a:off x="11094480" y="6492240"/>
-            <a:ext cx="547200" cy="272880"/>
+            <a:ext cx="546480" cy="272160"/>
           </a:xfrm>
           <a:prstGeom prst="rect">
             <a:avLst/>
@@ -45540,7 +45561,7 @@
         <p:spPr>
           <a:xfrm>
             <a:off x="548640" y="457200"/>
-            <a:ext cx="382680" cy="382680"/>
+            <a:ext cx="381960" cy="381960"/>
           </a:xfrm>
           <a:prstGeom prst="roundRect">
             <a:avLst>
@@ -45589,7 +45610,7 @@
         <p:spPr>
           <a:xfrm>
             <a:off x="631080" y="539640"/>
-            <a:ext cx="218160" cy="218160"/>
+            <a:ext cx="217440" cy="217440"/>
           </a:xfrm>
           <a:prstGeom prst="rect">
             <a:avLst/>
@@ -45609,7 +45630,7 @@
         <p:spPr>
           <a:xfrm>
             <a:off x="1097280" y="420480"/>
-            <a:ext cx="10544400" cy="455760"/>
+            <a:ext cx="10543680" cy="455040"/>
           </a:xfrm>
           <a:prstGeom prst="rect">
             <a:avLst/>
@@ -45670,7 +45691,7 @@
         <p:spPr>
           <a:xfrm>
             <a:off x="548640" y="1234440"/>
-            <a:ext cx="3244680" cy="5119200"/>
+            <a:ext cx="3243960" cy="5118480"/>
           </a:xfrm>
           <a:prstGeom prst="roundRect">
             <a:avLst>
@@ -45715,7 +45736,7 @@
         <p:spPr>
           <a:xfrm>
             <a:off x="1645920" y="1737360"/>
-            <a:ext cx="1050120" cy="1050120"/>
+            <a:ext cx="1049400" cy="1049400"/>
           </a:xfrm>
           <a:prstGeom prst="ellipse">
             <a:avLst/>
@@ -45762,7 +45783,7 @@
         <p:spPr>
           <a:xfrm>
             <a:off x="1906560" y="2002680"/>
-            <a:ext cx="528840" cy="528840"/>
+            <a:ext cx="528120" cy="528120"/>
           </a:xfrm>
           <a:prstGeom prst="rect">
             <a:avLst/>
@@ -45782,7 +45803,7 @@
         <p:spPr>
           <a:xfrm>
             <a:off x="731520" y="3017520"/>
-            <a:ext cx="2878920" cy="3061800"/>
+            <a:ext cx="2878200" cy="3061080"/>
           </a:xfrm>
           <a:prstGeom prst="rect">
             <a:avLst/>
@@ -45903,7 +45924,7 @@
         <p:spPr>
           <a:xfrm>
             <a:off x="4206240" y="1280160"/>
-            <a:ext cx="7435440" cy="5027760"/>
+            <a:ext cx="7434720" cy="5027040"/>
           </a:xfrm>
           <a:prstGeom prst="rect">
             <a:avLst/>
@@ -46074,7 +46095,7 @@
         <p:spPr>
           <a:xfrm>
             <a:off x="548640" y="6510600"/>
-            <a:ext cx="5484960" cy="272880"/>
+            <a:ext cx="5484240" cy="272160"/>
           </a:xfrm>
           <a:prstGeom prst="rect">
             <a:avLst/>
@@ -46135,7 +46156,7 @@
         <p:spPr>
           <a:xfrm>
             <a:off x="11094480" y="6510600"/>
-            <a:ext cx="547200" cy="272880"/>
+            <a:ext cx="546480" cy="272160"/>
           </a:xfrm>
           <a:prstGeom prst="rect">
             <a:avLst/>
@@ -46237,7 +46258,7 @@
         <p:spPr>
           <a:xfrm>
             <a:off x="548640" y="457200"/>
-            <a:ext cx="382680" cy="382680"/>
+            <a:ext cx="381960" cy="381960"/>
           </a:xfrm>
           <a:prstGeom prst="roundRect">
             <a:avLst>
@@ -46286,7 +46307,7 @@
         <p:spPr>
           <a:xfrm>
             <a:off x="631080" y="539640"/>
-            <a:ext cx="218160" cy="218160"/>
+            <a:ext cx="217440" cy="217440"/>
           </a:xfrm>
           <a:prstGeom prst="rect">
             <a:avLst/>
@@ -46306,7 +46327,7 @@
         <p:spPr>
           <a:xfrm>
             <a:off x="1097280" y="420480"/>
-            <a:ext cx="10544400" cy="455760"/>
+            <a:ext cx="10543680" cy="455040"/>
           </a:xfrm>
           <a:prstGeom prst="rect">
             <a:avLst/>
@@ -46367,7 +46388,7 @@
         <p:spPr>
           <a:xfrm>
             <a:off x="548640" y="1234440"/>
-            <a:ext cx="3244680" cy="5119200"/>
+            <a:ext cx="3243960" cy="5118480"/>
           </a:xfrm>
           <a:prstGeom prst="roundRect">
             <a:avLst>
@@ -46412,7 +46433,7 @@
         <p:spPr>
           <a:xfrm>
             <a:off x="1645920" y="1737360"/>
-            <a:ext cx="1050120" cy="1050120"/>
+            <a:ext cx="1049400" cy="1049400"/>
           </a:xfrm>
           <a:prstGeom prst="ellipse">
             <a:avLst/>
@@ -46459,7 +46480,7 @@
         <p:spPr>
           <a:xfrm>
             <a:off x="1906560" y="2002680"/>
-            <a:ext cx="528840" cy="528840"/>
+            <a:ext cx="528120" cy="528120"/>
           </a:xfrm>
           <a:prstGeom prst="rect">
             <a:avLst/>
@@ -46479,7 +46500,7 @@
         <p:spPr>
           <a:xfrm>
             <a:off x="731520" y="3017520"/>
-            <a:ext cx="2878920" cy="3061800"/>
+            <a:ext cx="2878200" cy="3061080"/>
           </a:xfrm>
           <a:prstGeom prst="rect">
             <a:avLst/>
@@ -46600,7 +46621,7 @@
         <p:spPr>
           <a:xfrm>
             <a:off x="4206240" y="1280160"/>
-            <a:ext cx="7435440" cy="5027760"/>
+            <a:ext cx="7434720" cy="5027040"/>
           </a:xfrm>
           <a:prstGeom prst="rect">
             <a:avLst/>
@@ -46771,7 +46792,7 @@
         <p:spPr>
           <a:xfrm>
             <a:off x="548640" y="6510600"/>
-            <a:ext cx="5484960" cy="272880"/>
+            <a:ext cx="5484240" cy="272160"/>
           </a:xfrm>
           <a:prstGeom prst="rect">
             <a:avLst/>
@@ -46832,7 +46853,7 @@
         <p:spPr>
           <a:xfrm>
             <a:off x="11094480" y="6510600"/>
-            <a:ext cx="547200" cy="272880"/>
+            <a:ext cx="546480" cy="272160"/>
           </a:xfrm>
           <a:prstGeom prst="rect">
             <a:avLst/>
@@ -46934,7 +46955,7 @@
         <p:spPr>
           <a:xfrm>
             <a:off x="548640" y="457200"/>
-            <a:ext cx="382680" cy="382680"/>
+            <a:ext cx="381960" cy="381960"/>
           </a:xfrm>
           <a:prstGeom prst="roundRect">
             <a:avLst>
@@ -46983,7 +47004,7 @@
         <p:spPr>
           <a:xfrm>
             <a:off x="631080" y="539640"/>
-            <a:ext cx="218160" cy="218160"/>
+            <a:ext cx="217440" cy="217440"/>
           </a:xfrm>
           <a:prstGeom prst="rect">
             <a:avLst/>
@@ -47003,7 +47024,7 @@
         <p:spPr>
           <a:xfrm>
             <a:off x="1097280" y="420480"/>
-            <a:ext cx="10544400" cy="455760"/>
+            <a:ext cx="10543680" cy="455040"/>
           </a:xfrm>
           <a:prstGeom prst="rect">
             <a:avLst/>
@@ -47064,7 +47085,7 @@
         <p:spPr>
           <a:xfrm>
             <a:off x="548640" y="1234440"/>
-            <a:ext cx="5362920" cy="5119200"/>
+            <a:ext cx="5362200" cy="5118480"/>
           </a:xfrm>
           <a:prstGeom prst="roundRect">
             <a:avLst>
@@ -47109,7 +47130,7 @@
         <p:spPr>
           <a:xfrm>
             <a:off x="822960" y="1508760"/>
-            <a:ext cx="455760" cy="455760"/>
+            <a:ext cx="455040" cy="455040"/>
           </a:xfrm>
           <a:prstGeom prst="ellipse">
             <a:avLst/>
@@ -47156,7 +47177,7 @@
         <p:spPr>
           <a:xfrm>
             <a:off x="923400" y="1609200"/>
-            <a:ext cx="254520" cy="254520"/>
+            <a:ext cx="253800" cy="253800"/>
           </a:xfrm>
           <a:prstGeom prst="rect">
             <a:avLst/>
@@ -47176,7 +47197,7 @@
         <p:spPr>
           <a:xfrm>
             <a:off x="1444680" y="1508760"/>
-            <a:ext cx="4284000" cy="455760"/>
+            <a:ext cx="4283280" cy="455040"/>
           </a:xfrm>
           <a:prstGeom prst="rect">
             <a:avLst/>
@@ -47237,7 +47258,7 @@
         <p:spPr>
           <a:xfrm>
             <a:off x="841320" y="2194560"/>
-            <a:ext cx="4777560" cy="3930480"/>
+            <a:ext cx="4776840" cy="3929760"/>
           </a:xfrm>
           <a:prstGeom prst="rect">
             <a:avLst/>
@@ -47408,7 +47429,7 @@
         <p:spPr>
           <a:xfrm>
             <a:off x="6278760" y="1234440"/>
-            <a:ext cx="5362920" cy="5119200"/>
+            <a:ext cx="5362200" cy="5118480"/>
           </a:xfrm>
           <a:prstGeom prst="roundRect">
             <a:avLst>
@@ -47453,7 +47474,7 @@
         <p:spPr>
           <a:xfrm>
             <a:off x="6553080" y="1508760"/>
-            <a:ext cx="455760" cy="455760"/>
+            <a:ext cx="455040" cy="455040"/>
           </a:xfrm>
           <a:prstGeom prst="ellipse">
             <a:avLst/>
@@ -47500,7 +47521,7 @@
         <p:spPr>
           <a:xfrm>
             <a:off x="6653520" y="1609200"/>
-            <a:ext cx="254520" cy="254520"/>
+            <a:ext cx="253800" cy="253800"/>
           </a:xfrm>
           <a:prstGeom prst="rect">
             <a:avLst/>
@@ -47520,7 +47541,7 @@
         <p:spPr>
           <a:xfrm>
             <a:off x="7174800" y="1508760"/>
-            <a:ext cx="4284000" cy="455760"/>
+            <a:ext cx="4283280" cy="455040"/>
           </a:xfrm>
           <a:prstGeom prst="rect">
             <a:avLst/>
@@ -47581,7 +47602,7 @@
         <p:spPr>
           <a:xfrm>
             <a:off x="6571440" y="2194560"/>
-            <a:ext cx="4777560" cy="3930480"/>
+            <a:ext cx="4776840" cy="3929760"/>
           </a:xfrm>
           <a:prstGeom prst="rect">
             <a:avLst/>
@@ -47752,7 +47773,7 @@
         <p:spPr>
           <a:xfrm>
             <a:off x="548640" y="6510600"/>
-            <a:ext cx="5484960" cy="272880"/>
+            <a:ext cx="5484240" cy="272160"/>
           </a:xfrm>
           <a:prstGeom prst="rect">
             <a:avLst/>
@@ -47813,7 +47834,7 @@
         <p:spPr>
           <a:xfrm>
             <a:off x="11094480" y="6510600"/>
-            <a:ext cx="547200" cy="272880"/>
+            <a:ext cx="546480" cy="272160"/>
           </a:xfrm>
           <a:prstGeom prst="rect">
             <a:avLst/>
@@ -47915,7 +47936,7 @@
         <p:spPr>
           <a:xfrm>
             <a:off x="-2286000" y="3657600"/>
-            <a:ext cx="6399360" cy="6399360"/>
+            <a:ext cx="6398640" cy="6398640"/>
           </a:xfrm>
           <a:prstGeom prst="ellipse">
             <a:avLst/>
@@ -47958,7 +47979,7 @@
         <p:spPr>
           <a:xfrm>
             <a:off x="8229600" y="-2743200"/>
-            <a:ext cx="6399360" cy="6399360"/>
+            <a:ext cx="6398640" cy="6398640"/>
           </a:xfrm>
           <a:prstGeom prst="ellipse">
             <a:avLst/>
@@ -48001,7 +48022,7 @@
         <p:spPr>
           <a:xfrm>
             <a:off x="5638680" y="868680"/>
-            <a:ext cx="912960" cy="912960"/>
+            <a:ext cx="912240" cy="912240"/>
           </a:xfrm>
           <a:prstGeom prst="ellipse">
             <a:avLst/>
@@ -48048,7 +48069,7 @@
         <p:spPr>
           <a:xfrm>
             <a:off x="5876280" y="1097280"/>
-            <a:ext cx="437400" cy="437400"/>
+            <a:ext cx="436680" cy="436680"/>
           </a:xfrm>
           <a:prstGeom prst="rect">
             <a:avLst/>
@@ -48068,7 +48089,7 @@
         <p:spPr>
           <a:xfrm>
             <a:off x="914400" y="2057400"/>
-            <a:ext cx="10361520" cy="291240"/>
+            <a:ext cx="10360800" cy="290520"/>
           </a:xfrm>
           <a:prstGeom prst="rect">
             <a:avLst/>
@@ -48129,7 +48150,7 @@
         <p:spPr>
           <a:xfrm>
             <a:off x="822960" y="2441520"/>
-            <a:ext cx="10544400" cy="2147400"/>
+            <a:ext cx="10543680" cy="2146680"/>
           </a:xfrm>
           <a:prstGeom prst="rect">
             <a:avLst/>
@@ -48190,7 +48211,7 @@
         <p:spPr>
           <a:xfrm>
             <a:off x="1920240" y="4773240"/>
-            <a:ext cx="8349840" cy="821520"/>
+            <a:ext cx="8349120" cy="820800"/>
           </a:xfrm>
           <a:prstGeom prst="rect">
             <a:avLst/>
@@ -48251,7 +48272,7 @@
         <p:spPr>
           <a:xfrm>
             <a:off x="11094480" y="6492240"/>
-            <a:ext cx="547200" cy="272880"/>
+            <a:ext cx="546480" cy="272160"/>
           </a:xfrm>
           <a:prstGeom prst="rect">
             <a:avLst/>
@@ -48353,7 +48374,7 @@
         <p:spPr>
           <a:xfrm>
             <a:off x="548640" y="457200"/>
-            <a:ext cx="382680" cy="382680"/>
+            <a:ext cx="381960" cy="381960"/>
           </a:xfrm>
           <a:prstGeom prst="roundRect">
             <a:avLst>
@@ -48402,7 +48423,7 @@
         <p:spPr>
           <a:xfrm>
             <a:off x="631080" y="539640"/>
-            <a:ext cx="218160" cy="218160"/>
+            <a:ext cx="217440" cy="217440"/>
           </a:xfrm>
           <a:prstGeom prst="rect">
             <a:avLst/>
@@ -48422,7 +48443,7 @@
         <p:spPr>
           <a:xfrm>
             <a:off x="1097280" y="420480"/>
-            <a:ext cx="10544400" cy="455760"/>
+            <a:ext cx="10543680" cy="455040"/>
           </a:xfrm>
           <a:prstGeom prst="rect">
             <a:avLst/>
@@ -48483,7 +48504,7 @@
         <p:spPr>
           <a:xfrm>
             <a:off x="548640" y="1234440"/>
-            <a:ext cx="3483360" cy="5119200"/>
+            <a:ext cx="3482640" cy="5118480"/>
           </a:xfrm>
           <a:prstGeom prst="roundRect">
             <a:avLst>
@@ -48528,7 +48549,7 @@
         <p:spPr>
           <a:xfrm>
             <a:off x="1902240" y="1600200"/>
-            <a:ext cx="775800" cy="775800"/>
+            <a:ext cx="775080" cy="775080"/>
           </a:xfrm>
           <a:prstGeom prst="ellipse">
             <a:avLst/>
@@ -48575,7 +48596,7 @@
         <p:spPr>
           <a:xfrm>
             <a:off x="2099160" y="1792080"/>
-            <a:ext cx="382680" cy="382680"/>
+            <a:ext cx="381960" cy="381960"/>
           </a:xfrm>
           <a:prstGeom prst="rect">
             <a:avLst/>
@@ -48595,7 +48616,7 @@
         <p:spPr>
           <a:xfrm>
             <a:off x="731520" y="2560320"/>
-            <a:ext cx="3117600" cy="364320"/>
+            <a:ext cx="3116880" cy="363600"/>
           </a:xfrm>
           <a:prstGeom prst="rect">
             <a:avLst/>
@@ -48656,7 +48677,7 @@
         <p:spPr>
           <a:xfrm>
             <a:off x="777240" y="2971800"/>
-            <a:ext cx="3026160" cy="3198960"/>
+            <a:ext cx="3025440" cy="3198240"/>
           </a:xfrm>
           <a:prstGeom prst="rect">
             <a:avLst/>
@@ -48717,7 +48738,7 @@
         <p:spPr>
           <a:xfrm>
             <a:off x="4353480" y="1234440"/>
-            <a:ext cx="3483360" cy="5119200"/>
+            <a:ext cx="3482640" cy="5118480"/>
           </a:xfrm>
           <a:prstGeom prst="roundRect">
             <a:avLst>
@@ -48762,7 +48783,7 @@
         <p:spPr>
           <a:xfrm>
             <a:off x="5707080" y="1600200"/>
-            <a:ext cx="775800" cy="775800"/>
+            <a:ext cx="775080" cy="775080"/>
           </a:xfrm>
           <a:prstGeom prst="ellipse">
             <a:avLst/>
@@ -48809,7 +48830,7 @@
         <p:spPr>
           <a:xfrm>
             <a:off x="5904000" y="1792080"/>
-            <a:ext cx="382680" cy="382680"/>
+            <a:ext cx="381960" cy="381960"/>
           </a:xfrm>
           <a:prstGeom prst="rect">
             <a:avLst/>
@@ -48829,7 +48850,7 @@
         <p:spPr>
           <a:xfrm>
             <a:off x="4536360" y="2560320"/>
-            <a:ext cx="3117600" cy="364320"/>
+            <a:ext cx="3116880" cy="363600"/>
           </a:xfrm>
           <a:prstGeom prst="rect">
             <a:avLst/>
@@ -48890,7 +48911,7 @@
         <p:spPr>
           <a:xfrm>
             <a:off x="4582080" y="2971800"/>
-            <a:ext cx="3026160" cy="3198960"/>
+            <a:ext cx="3025440" cy="3198240"/>
           </a:xfrm>
           <a:prstGeom prst="rect">
             <a:avLst/>
@@ -48951,7 +48972,7 @@
         <p:spPr>
           <a:xfrm>
             <a:off x="8158320" y="1234440"/>
-            <a:ext cx="3483360" cy="5119200"/>
+            <a:ext cx="3482640" cy="5118480"/>
           </a:xfrm>
           <a:prstGeom prst="roundRect">
             <a:avLst>
@@ -48996,7 +49017,7 @@
         <p:spPr>
           <a:xfrm>
             <a:off x="9511920" y="1600200"/>
-            <a:ext cx="775800" cy="775800"/>
+            <a:ext cx="775080" cy="775080"/>
           </a:xfrm>
           <a:prstGeom prst="ellipse">
             <a:avLst/>
@@ -49043,7 +49064,7 @@
         <p:spPr>
           <a:xfrm>
             <a:off x="9708480" y="1792080"/>
-            <a:ext cx="382680" cy="382680"/>
+            <a:ext cx="381960" cy="381960"/>
           </a:xfrm>
           <a:prstGeom prst="rect">
             <a:avLst/>
@@ -49063,7 +49084,7 @@
         <p:spPr>
           <a:xfrm>
             <a:off x="8341200" y="2560320"/>
-            <a:ext cx="3117600" cy="364320"/>
+            <a:ext cx="3116880" cy="363600"/>
           </a:xfrm>
           <a:prstGeom prst="rect">
             <a:avLst/>
@@ -49124,7 +49145,7 @@
         <p:spPr>
           <a:xfrm>
             <a:off x="8386920" y="2971800"/>
-            <a:ext cx="3026160" cy="3198960"/>
+            <a:ext cx="3025440" cy="3198240"/>
           </a:xfrm>
           <a:prstGeom prst="rect">
             <a:avLst/>
@@ -49185,7 +49206,7 @@
         <p:spPr>
           <a:xfrm>
             <a:off x="548640" y="6510600"/>
-            <a:ext cx="5484960" cy="272880"/>
+            <a:ext cx="5484240" cy="272160"/>
           </a:xfrm>
           <a:prstGeom prst="rect">
             <a:avLst/>
@@ -49246,7 +49267,7 @@
         <p:spPr>
           <a:xfrm>
             <a:off x="11094480" y="6510600"/>
-            <a:ext cx="547200" cy="272880"/>
+            <a:ext cx="546480" cy="272160"/>
           </a:xfrm>
           <a:prstGeom prst="rect">
             <a:avLst/>
@@ -49348,7 +49369,7 @@
         <p:spPr>
           <a:xfrm>
             <a:off x="-2286000" y="3657600"/>
-            <a:ext cx="6399360" cy="6399360"/>
+            <a:ext cx="6398640" cy="6398640"/>
           </a:xfrm>
           <a:prstGeom prst="ellipse">
             <a:avLst/>
@@ -49391,7 +49412,7 @@
         <p:spPr>
           <a:xfrm>
             <a:off x="8229600" y="-2743200"/>
-            <a:ext cx="6399360" cy="6399360"/>
+            <a:ext cx="6398640" cy="6398640"/>
           </a:xfrm>
           <a:prstGeom prst="ellipse">
             <a:avLst/>
@@ -49434,7 +49455,7 @@
         <p:spPr>
           <a:xfrm>
             <a:off x="5638680" y="868680"/>
-            <a:ext cx="912960" cy="912960"/>
+            <a:ext cx="912240" cy="912240"/>
           </a:xfrm>
           <a:prstGeom prst="ellipse">
             <a:avLst/>
@@ -49481,7 +49502,7 @@
         <p:spPr>
           <a:xfrm>
             <a:off x="5876280" y="1097280"/>
-            <a:ext cx="437400" cy="437400"/>
+            <a:ext cx="436680" cy="436680"/>
           </a:xfrm>
           <a:prstGeom prst="rect">
             <a:avLst/>
@@ -49501,7 +49522,7 @@
         <p:spPr>
           <a:xfrm>
             <a:off x="914400" y="2057400"/>
-            <a:ext cx="10361520" cy="291240"/>
+            <a:ext cx="10360800" cy="290520"/>
           </a:xfrm>
           <a:prstGeom prst="rect">
             <a:avLst/>
@@ -49562,7 +49583,7 @@
         <p:spPr>
           <a:xfrm>
             <a:off x="1188720" y="2441520"/>
-            <a:ext cx="9812880" cy="1004400"/>
+            <a:ext cx="9812160" cy="1003680"/>
           </a:xfrm>
           <a:prstGeom prst="rect">
             <a:avLst/>
@@ -49623,7 +49644,7 @@
         <p:spPr>
           <a:xfrm>
             <a:off x="1920240" y="3630240"/>
-            <a:ext cx="8349840" cy="821520"/>
+            <a:ext cx="8349120" cy="820800"/>
           </a:xfrm>
           <a:prstGeom prst="rect">
             <a:avLst/>
@@ -49684,7 +49705,7 @@
         <p:spPr>
           <a:xfrm>
             <a:off x="11094480" y="6492240"/>
-            <a:ext cx="547200" cy="272880"/>
+            <a:ext cx="546480" cy="272160"/>
           </a:xfrm>
           <a:prstGeom prst="rect">
             <a:avLst/>
@@ -49786,7 +49807,7 @@
         <p:spPr>
           <a:xfrm>
             <a:off x="548640" y="457200"/>
-            <a:ext cx="382680" cy="382680"/>
+            <a:ext cx="381960" cy="381960"/>
           </a:xfrm>
           <a:prstGeom prst="roundRect">
             <a:avLst>
@@ -49835,7 +49856,7 @@
         <p:spPr>
           <a:xfrm>
             <a:off x="631080" y="539640"/>
-            <a:ext cx="218160" cy="218160"/>
+            <a:ext cx="217440" cy="217440"/>
           </a:xfrm>
           <a:prstGeom prst="rect">
             <a:avLst/>
@@ -49855,7 +49876,7 @@
         <p:spPr>
           <a:xfrm>
             <a:off x="1097280" y="420480"/>
-            <a:ext cx="10544400" cy="455760"/>
+            <a:ext cx="10543680" cy="455040"/>
           </a:xfrm>
           <a:prstGeom prst="rect">
             <a:avLst/>
@@ -49916,7 +49937,7 @@
         <p:spPr>
           <a:xfrm>
             <a:off x="548640" y="1234440"/>
-            <a:ext cx="3244680" cy="5119200"/>
+            <a:ext cx="3243960" cy="5118480"/>
           </a:xfrm>
           <a:prstGeom prst="roundRect">
             <a:avLst>
@@ -49961,7 +49982,7 @@
         <p:spPr>
           <a:xfrm>
             <a:off x="1645920" y="1737360"/>
-            <a:ext cx="1050120" cy="1050120"/>
+            <a:ext cx="1049400" cy="1049400"/>
           </a:xfrm>
           <a:prstGeom prst="ellipse">
             <a:avLst/>
@@ -50008,7 +50029,7 @@
         <p:spPr>
           <a:xfrm>
             <a:off x="1906560" y="2002680"/>
-            <a:ext cx="528840" cy="528840"/>
+            <a:ext cx="528120" cy="528120"/>
           </a:xfrm>
           <a:prstGeom prst="rect">
             <a:avLst/>
@@ -50028,7 +50049,7 @@
         <p:spPr>
           <a:xfrm>
             <a:off x="731520" y="3017520"/>
-            <a:ext cx="2878920" cy="3061800"/>
+            <a:ext cx="2878200" cy="3061080"/>
           </a:xfrm>
           <a:prstGeom prst="rect">
             <a:avLst/>
@@ -50149,7 +50170,7 @@
         <p:spPr>
           <a:xfrm>
             <a:off x="4206240" y="1280160"/>
-            <a:ext cx="7435440" cy="5027760"/>
+            <a:ext cx="7434720" cy="5027040"/>
           </a:xfrm>
           <a:prstGeom prst="rect">
             <a:avLst/>
@@ -50320,7 +50341,7 @@
         <p:spPr>
           <a:xfrm>
             <a:off x="548640" y="6510600"/>
-            <a:ext cx="5484960" cy="272880"/>
+            <a:ext cx="5484240" cy="272160"/>
           </a:xfrm>
           <a:prstGeom prst="rect">
             <a:avLst/>
@@ -50381,7 +50402,7 @@
         <p:spPr>
           <a:xfrm>
             <a:off x="11094480" y="6510600"/>
-            <a:ext cx="547200" cy="272880"/>
+            <a:ext cx="546480" cy="272160"/>
           </a:xfrm>
           <a:prstGeom prst="rect">
             <a:avLst/>
@@ -50483,7 +50504,7 @@
         <p:spPr>
           <a:xfrm>
             <a:off x="548640" y="457200"/>
-            <a:ext cx="382680" cy="382680"/>
+            <a:ext cx="381960" cy="381960"/>
           </a:xfrm>
           <a:prstGeom prst="roundRect">
             <a:avLst>
@@ -50532,7 +50553,7 @@
         <p:spPr>
           <a:xfrm>
             <a:off x="631080" y="539640"/>
-            <a:ext cx="218160" cy="218160"/>
+            <a:ext cx="217440" cy="217440"/>
           </a:xfrm>
           <a:prstGeom prst="rect">
             <a:avLst/>
@@ -50552,7 +50573,7 @@
         <p:spPr>
           <a:xfrm>
             <a:off x="1097280" y="420480"/>
-            <a:ext cx="10544400" cy="455760"/>
+            <a:ext cx="10543680" cy="455040"/>
           </a:xfrm>
           <a:prstGeom prst="rect">
             <a:avLst/>
@@ -50613,7 +50634,7 @@
         <p:spPr>
           <a:xfrm>
             <a:off x="548640" y="1234440"/>
-            <a:ext cx="11093040" cy="1196280"/>
+            <a:ext cx="11092320" cy="1195560"/>
           </a:xfrm>
           <a:prstGeom prst="rect">
             <a:avLst/>
@@ -50749,7 +50770,7 @@
         <p:spPr>
           <a:xfrm>
             <a:off x="548640" y="2569320"/>
-            <a:ext cx="11093040" cy="3784320"/>
+            <a:ext cx="11092320" cy="3783600"/>
           </a:xfrm>
           <a:prstGeom prst="roundRect">
             <a:avLst>
@@ -50794,7 +50815,7 @@
         <p:spPr>
           <a:xfrm>
             <a:off x="868680" y="2752200"/>
-            <a:ext cx="10452960" cy="3418560"/>
+            <a:ext cx="10452240" cy="3417840"/>
           </a:xfrm>
           <a:prstGeom prst="rect">
             <a:avLst/>
@@ -51065,7 +51086,7 @@
         <p:spPr>
           <a:xfrm>
             <a:off x="548640" y="6510600"/>
-            <a:ext cx="5484960" cy="272880"/>
+            <a:ext cx="5484240" cy="272160"/>
           </a:xfrm>
           <a:prstGeom prst="rect">
             <a:avLst/>
@@ -51126,7 +51147,7 @@
         <p:spPr>
           <a:xfrm>
             <a:off x="11094480" y="6510600"/>
-            <a:ext cx="547200" cy="272880"/>
+            <a:ext cx="546480" cy="272160"/>
           </a:xfrm>
           <a:prstGeom prst="rect">
             <a:avLst/>
